--- a/Slides/RPackageDevelopment_Slides.pptx
+++ b/Slides/RPackageDevelopment_Slides.pptx
@@ -5,7 +5,7 @@
     <p:sldMasterId id="2147483660" r:id="rId1"/>
   </p:sldMasterIdLst>
   <p:notesMasterIdLst>
-    <p:notesMasterId r:id="rId50"/>
+    <p:notesMasterId r:id="rId52"/>
   </p:notesMasterIdLst>
   <p:sldIdLst>
     <p:sldId id="256" r:id="rId2"/>
@@ -16,46 +16,48 @@
     <p:sldId id="321" r:id="rId7"/>
     <p:sldId id="436" r:id="rId8"/>
     <p:sldId id="323" r:id="rId9"/>
-    <p:sldId id="326" r:id="rId10"/>
-    <p:sldId id="416" r:id="rId11"/>
+    <p:sldId id="450" r:id="rId10"/>
+    <p:sldId id="437" r:id="rId11"/>
     <p:sldId id="406" r:id="rId12"/>
     <p:sldId id="428" r:id="rId13"/>
     <p:sldId id="429" r:id="rId14"/>
     <p:sldId id="407" r:id="rId15"/>
-    <p:sldId id="417" r:id="rId16"/>
-    <p:sldId id="425" r:id="rId17"/>
-    <p:sldId id="430" r:id="rId18"/>
-    <p:sldId id="409" r:id="rId19"/>
-    <p:sldId id="413" r:id="rId20"/>
-    <p:sldId id="418" r:id="rId21"/>
-    <p:sldId id="412" r:id="rId22"/>
-    <p:sldId id="432" r:id="rId23"/>
-    <p:sldId id="426" r:id="rId24"/>
-    <p:sldId id="415" r:id="rId25"/>
-    <p:sldId id="410" r:id="rId26"/>
-    <p:sldId id="424" r:id="rId27"/>
-    <p:sldId id="420" r:id="rId28"/>
-    <p:sldId id="327" r:id="rId29"/>
-    <p:sldId id="322" r:id="rId30"/>
-    <p:sldId id="431" r:id="rId31"/>
-    <p:sldId id="333" r:id="rId32"/>
-    <p:sldId id="355" r:id="rId33"/>
-    <p:sldId id="356" r:id="rId34"/>
-    <p:sldId id="402" r:id="rId35"/>
-    <p:sldId id="403" r:id="rId36"/>
-    <p:sldId id="404" r:id="rId37"/>
-    <p:sldId id="405" r:id="rId38"/>
-    <p:sldId id="324" r:id="rId39"/>
-    <p:sldId id="328" r:id="rId40"/>
-    <p:sldId id="329" r:id="rId41"/>
-    <p:sldId id="330" r:id="rId42"/>
-    <p:sldId id="421" r:id="rId43"/>
-    <p:sldId id="331" r:id="rId44"/>
-    <p:sldId id="422" r:id="rId45"/>
-    <p:sldId id="433" r:id="rId46"/>
-    <p:sldId id="435" r:id="rId47"/>
-    <p:sldId id="411" r:id="rId48"/>
-    <p:sldId id="260" r:id="rId49"/>
+    <p:sldId id="445" r:id="rId16"/>
+    <p:sldId id="446" r:id="rId17"/>
+    <p:sldId id="438" r:id="rId18"/>
+    <p:sldId id="439" r:id="rId19"/>
+    <p:sldId id="409" r:id="rId20"/>
+    <p:sldId id="413" r:id="rId21"/>
+    <p:sldId id="440" r:id="rId22"/>
+    <p:sldId id="412" r:id="rId23"/>
+    <p:sldId id="441" r:id="rId24"/>
+    <p:sldId id="426" r:id="rId25"/>
+    <p:sldId id="415" r:id="rId26"/>
+    <p:sldId id="410" r:id="rId27"/>
+    <p:sldId id="448" r:id="rId28"/>
+    <p:sldId id="424" r:id="rId29"/>
+    <p:sldId id="442" r:id="rId30"/>
+    <p:sldId id="327" r:id="rId31"/>
+    <p:sldId id="322" r:id="rId32"/>
+    <p:sldId id="431" r:id="rId33"/>
+    <p:sldId id="333" r:id="rId34"/>
+    <p:sldId id="355" r:id="rId35"/>
+    <p:sldId id="356" r:id="rId36"/>
+    <p:sldId id="402" r:id="rId37"/>
+    <p:sldId id="403" r:id="rId38"/>
+    <p:sldId id="404" r:id="rId39"/>
+    <p:sldId id="405" r:id="rId40"/>
+    <p:sldId id="324" r:id="rId41"/>
+    <p:sldId id="328" r:id="rId42"/>
+    <p:sldId id="329" r:id="rId43"/>
+    <p:sldId id="330" r:id="rId44"/>
+    <p:sldId id="443" r:id="rId45"/>
+    <p:sldId id="331" r:id="rId46"/>
+    <p:sldId id="444" r:id="rId47"/>
+    <p:sldId id="433" r:id="rId48"/>
+    <p:sldId id="435" r:id="rId49"/>
+    <p:sldId id="411" r:id="rId50"/>
+    <p:sldId id="260" r:id="rId51"/>
   </p:sldIdLst>
   <p:sldSz cx="9144000" cy="6858000" type="screen4x3"/>
   <p:notesSz cx="6858000" cy="9144000"/>
@@ -165,7 +167,7 @@
 <file path=ppt/revisionInfo.xml><?xml version="1.0" encoding="utf-8"?>
 <p1510:revInfo xmlns:a="http://schemas.openxmlformats.org/drawingml/2006/main" xmlns:r="http://schemas.openxmlformats.org/officeDocument/2006/relationships" xmlns:p1510="http://schemas.microsoft.com/office/powerpoint/2015/10/main">
   <p1510:revLst>
-    <p1510:client id="{7B91186F-AFD7-4556-9E93-756AA89B05D5}" v="42" dt="2026-08-11T16:03:37.631"/>
+    <p1510:client id="{7B91186F-AFD7-4556-9E93-756AA89B05D5}" v="59" dt="2026-08-11T20:15:22.039"/>
   </p1510:revLst>
 </p1510:revInfo>
 </file>
@@ -304,37 +306,6 @@
             <pc:docMk/>
             <pc:sldMk cId="2341505858" sldId="324"/>
             <ac:spMk id="3" creationId="{154509B3-1BE7-E9C4-5DF5-A583F50756B6}"/>
-          </ac:spMkLst>
-        </pc:spChg>
-      </pc:sldChg>
-      <pc:sldChg chg="modSp new mod">
-        <pc:chgData name="Adrien Osakwe" userId="7a3e290c-eb83-484b-8e3d-d46ef2333477" providerId="ADAL" clId="{09ABE13D-32B9-4646-8B10-CB7999C84D02}" dt="2026-07-15T15:39:35.217" v="3276" actId="20577"/>
-        <pc:sldMkLst>
-          <pc:docMk/>
-          <pc:sldMk cId="940167082" sldId="326"/>
-        </pc:sldMkLst>
-        <pc:spChg chg="mod">
-          <ac:chgData name="Adrien Osakwe" userId="7a3e290c-eb83-484b-8e3d-d46ef2333477" providerId="ADAL" clId="{09ABE13D-32B9-4646-8B10-CB7999C84D02}" dt="2026-07-14T20:52:23.390" v="567" actId="20577"/>
-          <ac:spMkLst>
-            <pc:docMk/>
-            <pc:sldMk cId="940167082" sldId="326"/>
-            <ac:spMk id="2" creationId="{0C8C347C-C4C4-814B-6322-19F47FE05774}"/>
-          </ac:spMkLst>
-        </pc:spChg>
-        <pc:spChg chg="mod">
-          <ac:chgData name="Adrien Osakwe" userId="7a3e290c-eb83-484b-8e3d-d46ef2333477" providerId="ADAL" clId="{09ABE13D-32B9-4646-8B10-CB7999C84D02}" dt="2026-07-15T15:39:34.573" v="3271" actId="27636"/>
-          <ac:spMkLst>
-            <pc:docMk/>
-            <pc:sldMk cId="940167082" sldId="326"/>
-            <ac:spMk id="3" creationId="{74130F42-8D26-FE92-B842-3D5721CA7F7D}"/>
-          </ac:spMkLst>
-        </pc:spChg>
-        <pc:spChg chg="mod">
-          <ac:chgData name="Adrien Osakwe" userId="7a3e290c-eb83-484b-8e3d-d46ef2333477" providerId="ADAL" clId="{09ABE13D-32B9-4646-8B10-CB7999C84D02}" dt="2026-07-15T15:39:35.217" v="3276" actId="20577"/>
-          <ac:spMkLst>
-            <pc:docMk/>
-            <pc:sldMk cId="940167082" sldId="326"/>
-            <ac:spMk id="4" creationId="{51138A0C-5E7B-B43A-A677-D0F279CA3B78}"/>
           </ac:spMkLst>
         </pc:spChg>
       </pc:sldChg>
@@ -727,7 +698,7 @@
   <pc:docChgLst>
     <pc:chgData name="Adrien Osakwe" userId="7a3e290c-eb83-484b-8e3d-d46ef2333477" providerId="ADAL" clId="{516F4981-D9C8-4339-9685-B0B88EA45B28}"/>
     <pc:docChg chg="undo custSel addSld delSld modSld sldOrd">
-      <pc:chgData name="Adrien Osakwe" userId="7a3e290c-eb83-484b-8e3d-d46ef2333477" providerId="ADAL" clId="{516F4981-D9C8-4339-9685-B0B88EA45B28}" dt="2026-08-11T17:56:11.111" v="5350" actId="207"/>
+      <pc:chgData name="Adrien Osakwe" userId="7a3e290c-eb83-484b-8e3d-d46ef2333477" providerId="ADAL" clId="{516F4981-D9C8-4339-9685-B0B88EA45B28}" dt="2026-08-11T20:19:31.053" v="8251" actId="20577"/>
       <pc:docMkLst>
         <pc:docMk/>
       </pc:docMkLst>
@@ -828,8 +799,8 @@
           </ac:spMkLst>
         </pc:spChg>
       </pc:sldChg>
-      <pc:sldChg chg="modSp mod">
-        <pc:chgData name="Adrien Osakwe" userId="7a3e290c-eb83-484b-8e3d-d46ef2333477" providerId="ADAL" clId="{516F4981-D9C8-4339-9685-B0B88EA45B28}" dt="2026-08-11T03:32:28.460" v="46" actId="20577"/>
+      <pc:sldChg chg="modSp del mod">
+        <pc:chgData name="Adrien Osakwe" userId="7a3e290c-eb83-484b-8e3d-d46ef2333477" providerId="ADAL" clId="{516F4981-D9C8-4339-9685-B0B88EA45B28}" dt="2026-08-11T20:16:25.082" v="7780" actId="47"/>
         <pc:sldMkLst>
           <pc:docMk/>
           <pc:sldMk cId="940167082" sldId="326"/>
@@ -933,6 +904,52 @@
             <pc:docMk/>
             <pc:sldMk cId="393444062" sldId="329"/>
             <ac:picMk id="3074" creationId="{1BF0D96D-2C04-31BD-E443-6DBBF624B2A9}"/>
+          </ac:picMkLst>
+        </pc:picChg>
+      </pc:sldChg>
+      <pc:sldChg chg="addSp modSp mod">
+        <pc:chgData name="Adrien Osakwe" userId="7a3e290c-eb83-484b-8e3d-d46ef2333477" providerId="ADAL" clId="{516F4981-D9C8-4339-9685-B0B88EA45B28}" dt="2026-08-11T19:52:41.642" v="5411" actId="1076"/>
+        <pc:sldMkLst>
+          <pc:docMk/>
+          <pc:sldMk cId="3227588993" sldId="330"/>
+        </pc:sldMkLst>
+        <pc:spChg chg="mod">
+          <ac:chgData name="Adrien Osakwe" userId="7a3e290c-eb83-484b-8e3d-d46ef2333477" providerId="ADAL" clId="{516F4981-D9C8-4339-9685-B0B88EA45B28}" dt="2026-08-11T19:52:07.208" v="5405" actId="14100"/>
+          <ac:spMkLst>
+            <pc:docMk/>
+            <pc:sldMk cId="3227588993" sldId="330"/>
+            <ac:spMk id="3" creationId="{7DCCE7DF-BA51-40A0-87CD-24710734241B}"/>
+          </ac:spMkLst>
+        </pc:spChg>
+        <pc:picChg chg="add mod">
+          <ac:chgData name="Adrien Osakwe" userId="7a3e290c-eb83-484b-8e3d-d46ef2333477" providerId="ADAL" clId="{516F4981-D9C8-4339-9685-B0B88EA45B28}" dt="2026-08-11T19:52:41.642" v="5411" actId="1076"/>
+          <ac:picMkLst>
+            <pc:docMk/>
+            <pc:sldMk cId="3227588993" sldId="330"/>
+            <ac:picMk id="5" creationId="{9AC9EF9F-AA89-2962-AD81-D0325A523787}"/>
+          </ac:picMkLst>
+        </pc:picChg>
+      </pc:sldChg>
+      <pc:sldChg chg="addSp modSp mod">
+        <pc:chgData name="Adrien Osakwe" userId="7a3e290c-eb83-484b-8e3d-d46ef2333477" providerId="ADAL" clId="{516F4981-D9C8-4339-9685-B0B88EA45B28}" dt="2026-08-11T19:51:51.762" v="5403" actId="1076"/>
+        <pc:sldMkLst>
+          <pc:docMk/>
+          <pc:sldMk cId="3482164999" sldId="331"/>
+        </pc:sldMkLst>
+        <pc:spChg chg="mod">
+          <ac:chgData name="Adrien Osakwe" userId="7a3e290c-eb83-484b-8e3d-d46ef2333477" providerId="ADAL" clId="{516F4981-D9C8-4339-9685-B0B88EA45B28}" dt="2026-08-11T19:51:48.432" v="5401" actId="14100"/>
+          <ac:spMkLst>
+            <pc:docMk/>
+            <pc:sldMk cId="3482164999" sldId="331"/>
+            <ac:spMk id="3" creationId="{EDBEC63F-928F-16B3-F9AA-1A86345569A5}"/>
+          </ac:spMkLst>
+        </pc:spChg>
+        <pc:picChg chg="add mod">
+          <ac:chgData name="Adrien Osakwe" userId="7a3e290c-eb83-484b-8e3d-d46ef2333477" providerId="ADAL" clId="{516F4981-D9C8-4339-9685-B0B88EA45B28}" dt="2026-08-11T19:51:51.762" v="5403" actId="1076"/>
+          <ac:picMkLst>
+            <pc:docMk/>
+            <pc:sldMk cId="3482164999" sldId="331"/>
+            <ac:picMk id="5" creationId="{0BFEA93D-1FCC-F32D-990C-05DA86D5E96D}"/>
           </ac:picMkLst>
         </pc:picChg>
       </pc:sldChg>
@@ -1115,13 +1132,13 @@
         </pc:picChg>
       </pc:sldChg>
       <pc:sldChg chg="modSp mod">
-        <pc:chgData name="Adrien Osakwe" userId="7a3e290c-eb83-484b-8e3d-d46ef2333477" providerId="ADAL" clId="{516F4981-D9C8-4339-9685-B0B88EA45B28}" dt="2026-08-11T17:56:11.111" v="5350" actId="207"/>
+        <pc:chgData name="Adrien Osakwe" userId="7a3e290c-eb83-484b-8e3d-d46ef2333477" providerId="ADAL" clId="{516F4981-D9C8-4339-9685-B0B88EA45B28}" dt="2026-08-11T20:05:25.732" v="7053" actId="207"/>
         <pc:sldMkLst>
           <pc:docMk/>
           <pc:sldMk cId="159122328" sldId="407"/>
         </pc:sldMkLst>
         <pc:spChg chg="mod">
-          <ac:chgData name="Adrien Osakwe" userId="7a3e290c-eb83-484b-8e3d-d46ef2333477" providerId="ADAL" clId="{516F4981-D9C8-4339-9685-B0B88EA45B28}" dt="2026-08-11T17:56:11.111" v="5350" actId="207"/>
+          <ac:chgData name="Adrien Osakwe" userId="7a3e290c-eb83-484b-8e3d-d46ef2333477" providerId="ADAL" clId="{516F4981-D9C8-4339-9685-B0B88EA45B28}" dt="2026-08-11T20:05:25.732" v="7053" actId="207"/>
           <ac:spMkLst>
             <pc:docMk/>
             <pc:sldMk cId="159122328" sldId="407"/>
@@ -1361,8 +1378,8 @@
           <pc:sldMk cId="1388726675" sldId="416"/>
         </pc:sldMkLst>
       </pc:sldChg>
-      <pc:sldChg chg="modSp new mod">
-        <pc:chgData name="Adrien Osakwe" userId="7a3e290c-eb83-484b-8e3d-d46ef2333477" providerId="ADAL" clId="{516F4981-D9C8-4339-9685-B0B88EA45B28}" dt="2026-08-11T16:01:55.609" v="4393" actId="1076"/>
+      <pc:sldChg chg="modSp new del mod">
+        <pc:chgData name="Adrien Osakwe" userId="7a3e290c-eb83-484b-8e3d-d46ef2333477" providerId="ADAL" clId="{516F4981-D9C8-4339-9685-B0B88EA45B28}" dt="2026-08-11T19:55:16.910" v="5886" actId="47"/>
         <pc:sldMkLst>
           <pc:docMk/>
           <pc:sldMk cId="4034011448" sldId="416"/>
@@ -1376,8 +1393,8 @@
           </ac:spMkLst>
         </pc:spChg>
       </pc:sldChg>
-      <pc:sldChg chg="modSp add mod">
-        <pc:chgData name="Adrien Osakwe" userId="7a3e290c-eb83-484b-8e3d-d46ef2333477" providerId="ADAL" clId="{516F4981-D9C8-4339-9685-B0B88EA45B28}" dt="2026-08-11T16:01:40.697" v="4353" actId="1076"/>
+      <pc:sldChg chg="modSp add del mod">
+        <pc:chgData name="Adrien Osakwe" userId="7a3e290c-eb83-484b-8e3d-d46ef2333477" providerId="ADAL" clId="{516F4981-D9C8-4339-9685-B0B88EA45B28}" dt="2026-08-11T19:57:59.823" v="6337" actId="47"/>
         <pc:sldMkLst>
           <pc:docMk/>
           <pc:sldMk cId="3381146445" sldId="417"/>
@@ -1391,8 +1408,8 @@
           </ac:spMkLst>
         </pc:spChg>
       </pc:sldChg>
-      <pc:sldChg chg="modSp add mod">
-        <pc:chgData name="Adrien Osakwe" userId="7a3e290c-eb83-484b-8e3d-d46ef2333477" providerId="ADAL" clId="{516F4981-D9C8-4339-9685-B0B88EA45B28}" dt="2026-08-11T16:03:17.576" v="4536" actId="1076"/>
+      <pc:sldChg chg="modSp add del mod">
+        <pc:chgData name="Adrien Osakwe" userId="7a3e290c-eb83-484b-8e3d-d46ef2333477" providerId="ADAL" clId="{516F4981-D9C8-4339-9685-B0B88EA45B28}" dt="2026-08-11T19:59:34.278" v="6529" actId="47"/>
         <pc:sldMkLst>
           <pc:docMk/>
           <pc:sldMk cId="2443216682" sldId="418"/>
@@ -1413,8 +1430,8 @@
           <pc:sldMk cId="2255428838" sldId="419"/>
         </pc:sldMkLst>
       </pc:sldChg>
-      <pc:sldChg chg="modSp add mod">
-        <pc:chgData name="Adrien Osakwe" userId="7a3e290c-eb83-484b-8e3d-d46ef2333477" providerId="ADAL" clId="{516F4981-D9C8-4339-9685-B0B88EA45B28}" dt="2026-08-11T16:05:08.973" v="4706" actId="14100"/>
+      <pc:sldChg chg="modSp add del mod">
+        <pc:chgData name="Adrien Osakwe" userId="7a3e290c-eb83-484b-8e3d-d46ef2333477" providerId="ADAL" clId="{516F4981-D9C8-4339-9685-B0B88EA45B28}" dt="2026-08-11T20:03:33.221" v="7052" actId="47"/>
         <pc:sldMkLst>
           <pc:docMk/>
           <pc:sldMk cId="1724832574" sldId="420"/>
@@ -1428,8 +1445,8 @@
           </ac:spMkLst>
         </pc:spChg>
       </pc:sldChg>
-      <pc:sldChg chg="modSp add mod">
-        <pc:chgData name="Adrien Osakwe" userId="7a3e290c-eb83-484b-8e3d-d46ef2333477" providerId="ADAL" clId="{516F4981-D9C8-4339-9685-B0B88EA45B28}" dt="2026-08-11T16:05:32.827" v="4729" actId="1076"/>
+      <pc:sldChg chg="modSp add del mod">
+        <pc:chgData name="Adrien Osakwe" userId="7a3e290c-eb83-484b-8e3d-d46ef2333477" providerId="ADAL" clId="{516F4981-D9C8-4339-9685-B0B88EA45B28}" dt="2026-08-11T19:53:20.675" v="5543" actId="47"/>
         <pc:sldMkLst>
           <pc:docMk/>
           <pc:sldMk cId="1414395029" sldId="421"/>
@@ -1443,8 +1460,8 @@
           </ac:spMkLst>
         </pc:spChg>
       </pc:sldChg>
-      <pc:sldChg chg="modSp add mod">
-        <pc:chgData name="Adrien Osakwe" userId="7a3e290c-eb83-484b-8e3d-d46ef2333477" providerId="ADAL" clId="{516F4981-D9C8-4339-9685-B0B88EA45B28}" dt="2026-08-11T16:05:52.358" v="4774" actId="1076"/>
+      <pc:sldChg chg="modSp add del mod">
+        <pc:chgData name="Adrien Osakwe" userId="7a3e290c-eb83-484b-8e3d-d46ef2333477" providerId="ADAL" clId="{516F4981-D9C8-4339-9685-B0B88EA45B28}" dt="2026-08-11T19:54:13.596" v="5808" actId="47"/>
         <pc:sldMkLst>
           <pc:docMk/>
           <pc:sldMk cId="509037345" sldId="422"/>
@@ -1504,8 +1521,8 @@
           </ac:picMkLst>
         </pc:picChg>
       </pc:sldChg>
-      <pc:sldChg chg="modSp new mod">
-        <pc:chgData name="Adrien Osakwe" userId="7a3e290c-eb83-484b-8e3d-d46ef2333477" providerId="ADAL" clId="{516F4981-D9C8-4339-9685-B0B88EA45B28}" dt="2026-08-11T16:01:20.294" v="4323" actId="5793"/>
+      <pc:sldChg chg="modSp new del mod">
+        <pc:chgData name="Adrien Osakwe" userId="7a3e290c-eb83-484b-8e3d-d46ef2333477" providerId="ADAL" clId="{516F4981-D9C8-4339-9685-B0B88EA45B28}" dt="2026-08-11T19:58:12.354" v="6340" actId="47"/>
         <pc:sldMkLst>
           <pc:docMk/>
           <pc:sldMk cId="2814879043" sldId="425"/>
@@ -1519,7 +1536,7 @@
           </ac:spMkLst>
         </pc:spChg>
         <pc:spChg chg="mod">
-          <ac:chgData name="Adrien Osakwe" userId="7a3e290c-eb83-484b-8e3d-d46ef2333477" providerId="ADAL" clId="{516F4981-D9C8-4339-9685-B0B88EA45B28}" dt="2026-08-11T16:01:20.294" v="4323" actId="5793"/>
+          <ac:chgData name="Adrien Osakwe" userId="7a3e290c-eb83-484b-8e3d-d46ef2333477" providerId="ADAL" clId="{516F4981-D9C8-4339-9685-B0B88EA45B28}" dt="2026-08-11T19:58:10.823" v="6339" actId="27636"/>
           <ac:spMkLst>
             <pc:docMk/>
             <pc:sldMk cId="2814879043" sldId="425"/>
@@ -1656,8 +1673,8 @@
           </ac:spMkLst>
         </pc:spChg>
       </pc:sldChg>
-      <pc:sldChg chg="modSp add mod">
-        <pc:chgData name="Adrien Osakwe" userId="7a3e290c-eb83-484b-8e3d-d46ef2333477" providerId="ADAL" clId="{516F4981-D9C8-4339-9685-B0B88EA45B28}" dt="2026-08-11T16:02:52.572" v="4466" actId="1076"/>
+      <pc:sldChg chg="modSp add del mod">
+        <pc:chgData name="Adrien Osakwe" userId="7a3e290c-eb83-484b-8e3d-d46ef2333477" providerId="ADAL" clId="{516F4981-D9C8-4339-9685-B0B88EA45B28}" dt="2026-08-11T19:58:18.378" v="6343" actId="47"/>
         <pc:sldMkLst>
           <pc:docMk/>
           <pc:sldMk cId="1861850653" sldId="430"/>
@@ -1710,8 +1727,8 @@
           </ac:picMkLst>
         </pc:picChg>
       </pc:sldChg>
-      <pc:sldChg chg="modSp add mod">
-        <pc:chgData name="Adrien Osakwe" userId="7a3e290c-eb83-484b-8e3d-d46ef2333477" providerId="ADAL" clId="{516F4981-D9C8-4339-9685-B0B88EA45B28}" dt="2026-08-11T16:52:56.431" v="5349" actId="20577"/>
+      <pc:sldChg chg="modSp add del mod">
+        <pc:chgData name="Adrien Osakwe" userId="7a3e290c-eb83-484b-8e3d-d46ef2333477" providerId="ADAL" clId="{516F4981-D9C8-4339-9685-B0B88EA45B28}" dt="2026-08-11T20:02:20.076" v="6792" actId="47"/>
         <pc:sldMkLst>
           <pc:docMk/>
           <pc:sldMk cId="259435353" sldId="432"/>
@@ -1748,7 +1765,7 @@
         </pc:sldMkLst>
       </pc:sldChg>
       <pc:sldChg chg="addSp modSp new mod">
-        <pc:chgData name="Adrien Osakwe" userId="7a3e290c-eb83-484b-8e3d-d46ef2333477" providerId="ADAL" clId="{516F4981-D9C8-4339-9685-B0B88EA45B28}" dt="2026-08-11T16:08:13.140" v="5055" actId="1076"/>
+        <pc:chgData name="Adrien Osakwe" userId="7a3e290c-eb83-484b-8e3d-d46ef2333477" providerId="ADAL" clId="{516F4981-D9C8-4339-9685-B0B88EA45B28}" dt="2026-08-11T19:51:06.236" v="5400" actId="20577"/>
         <pc:sldMkLst>
           <pc:docMk/>
           <pc:sldMk cId="3923017729" sldId="435"/>
@@ -1762,7 +1779,7 @@
           </ac:spMkLst>
         </pc:spChg>
         <pc:spChg chg="mod">
-          <ac:chgData name="Adrien Osakwe" userId="7a3e290c-eb83-484b-8e3d-d46ef2333477" providerId="ADAL" clId="{516F4981-D9C8-4339-9685-B0B88EA45B28}" dt="2026-08-11T16:08:09.147" v="5053" actId="20577"/>
+          <ac:chgData name="Adrien Osakwe" userId="7a3e290c-eb83-484b-8e3d-d46ef2333477" providerId="ADAL" clId="{516F4981-D9C8-4339-9685-B0B88EA45B28}" dt="2026-08-11T19:51:06.236" v="5400" actId="20577"/>
           <ac:spMkLst>
             <pc:docMk/>
             <pc:sldMk cId="3923017729" sldId="435"/>
@@ -1816,6 +1833,280 @@
             <ac:picMk id="5" creationId="{68ACE176-5EB8-4001-AC4C-CF21FB516AE9}"/>
           </ac:picMkLst>
         </pc:picChg>
+      </pc:sldChg>
+      <pc:sldChg chg="addSp modSp new mod">
+        <pc:chgData name="Adrien Osakwe" userId="7a3e290c-eb83-484b-8e3d-d46ef2333477" providerId="ADAL" clId="{516F4981-D9C8-4339-9685-B0B88EA45B28}" dt="2026-08-11T19:55:48.364" v="6009" actId="20577"/>
+        <pc:sldMkLst>
+          <pc:docMk/>
+          <pc:sldMk cId="680839714" sldId="437"/>
+        </pc:sldMkLst>
+        <pc:spChg chg="mod">
+          <ac:chgData name="Adrien Osakwe" userId="7a3e290c-eb83-484b-8e3d-d46ef2333477" providerId="ADAL" clId="{516F4981-D9C8-4339-9685-B0B88EA45B28}" dt="2026-08-11T19:55:48.364" v="6009" actId="20577"/>
+          <ac:spMkLst>
+            <pc:docMk/>
+            <pc:sldMk cId="680839714" sldId="437"/>
+            <ac:spMk id="2" creationId="{9B245876-087E-37FF-2A45-491803B93EF5}"/>
+          </ac:spMkLst>
+        </pc:spChg>
+        <pc:spChg chg="add mod">
+          <ac:chgData name="Adrien Osakwe" userId="7a3e290c-eb83-484b-8e3d-d46ef2333477" providerId="ADAL" clId="{516F4981-D9C8-4339-9685-B0B88EA45B28}" dt="2026-08-11T19:50:25.938" v="5367" actId="255"/>
+          <ac:spMkLst>
+            <pc:docMk/>
+            <pc:sldMk cId="680839714" sldId="437"/>
+            <ac:spMk id="3" creationId="{D0AE3FC0-C652-C431-6A10-987A06B22130}"/>
+          </ac:spMkLst>
+        </pc:spChg>
+      </pc:sldChg>
+      <pc:sldChg chg="modSp add mod">
+        <pc:chgData name="Adrien Osakwe" userId="7a3e290c-eb83-484b-8e3d-d46ef2333477" providerId="ADAL" clId="{516F4981-D9C8-4339-9685-B0B88EA45B28}" dt="2026-08-11T19:57:42.552" v="6336" actId="313"/>
+        <pc:sldMkLst>
+          <pc:docMk/>
+          <pc:sldMk cId="3854057674" sldId="438"/>
+        </pc:sldMkLst>
+        <pc:spChg chg="mod">
+          <ac:chgData name="Adrien Osakwe" userId="7a3e290c-eb83-484b-8e3d-d46ef2333477" providerId="ADAL" clId="{516F4981-D9C8-4339-9685-B0B88EA45B28}" dt="2026-08-11T19:57:42.552" v="6336" actId="313"/>
+          <ac:spMkLst>
+            <pc:docMk/>
+            <pc:sldMk cId="3854057674" sldId="438"/>
+            <ac:spMk id="2" creationId="{2EEDF49E-138B-3D35-3C54-8B3CEA5BAD37}"/>
+          </ac:spMkLst>
+        </pc:spChg>
+      </pc:sldChg>
+      <pc:sldChg chg="modSp add mod">
+        <pc:chgData name="Adrien Osakwe" userId="7a3e290c-eb83-484b-8e3d-d46ef2333477" providerId="ADAL" clId="{516F4981-D9C8-4339-9685-B0B88EA45B28}" dt="2026-08-11T19:58:40.728" v="6391" actId="20577"/>
+        <pc:sldMkLst>
+          <pc:docMk/>
+          <pc:sldMk cId="390538586" sldId="439"/>
+        </pc:sldMkLst>
+        <pc:spChg chg="mod">
+          <ac:chgData name="Adrien Osakwe" userId="7a3e290c-eb83-484b-8e3d-d46ef2333477" providerId="ADAL" clId="{516F4981-D9C8-4339-9685-B0B88EA45B28}" dt="2026-08-11T19:58:40.728" v="6391" actId="20577"/>
+          <ac:spMkLst>
+            <pc:docMk/>
+            <pc:sldMk cId="390538586" sldId="439"/>
+            <ac:spMk id="2" creationId="{7B68F2FA-D711-4EB3-2861-17288F46576A}"/>
+          </ac:spMkLst>
+        </pc:spChg>
+      </pc:sldChg>
+      <pc:sldChg chg="modSp add mod">
+        <pc:chgData name="Adrien Osakwe" userId="7a3e290c-eb83-484b-8e3d-d46ef2333477" providerId="ADAL" clId="{516F4981-D9C8-4339-9685-B0B88EA45B28}" dt="2026-08-11T19:59:30.611" v="6528" actId="20577"/>
+        <pc:sldMkLst>
+          <pc:docMk/>
+          <pc:sldMk cId="608068112" sldId="440"/>
+        </pc:sldMkLst>
+        <pc:spChg chg="mod">
+          <ac:chgData name="Adrien Osakwe" userId="7a3e290c-eb83-484b-8e3d-d46ef2333477" providerId="ADAL" clId="{516F4981-D9C8-4339-9685-B0B88EA45B28}" dt="2026-08-11T19:59:30.611" v="6528" actId="20577"/>
+          <ac:spMkLst>
+            <pc:docMk/>
+            <pc:sldMk cId="608068112" sldId="440"/>
+            <ac:spMk id="2" creationId="{854F0872-B9BE-E918-DFBC-A755DF054287}"/>
+          </ac:spMkLst>
+        </pc:spChg>
+      </pc:sldChg>
+      <pc:sldChg chg="modSp add mod">
+        <pc:chgData name="Adrien Osakwe" userId="7a3e290c-eb83-484b-8e3d-d46ef2333477" providerId="ADAL" clId="{516F4981-D9C8-4339-9685-B0B88EA45B28}" dt="2026-08-11T20:02:13.981" v="6791" actId="20577"/>
+        <pc:sldMkLst>
+          <pc:docMk/>
+          <pc:sldMk cId="720366200" sldId="441"/>
+        </pc:sldMkLst>
+        <pc:spChg chg="mod">
+          <ac:chgData name="Adrien Osakwe" userId="7a3e290c-eb83-484b-8e3d-d46ef2333477" providerId="ADAL" clId="{516F4981-D9C8-4339-9685-B0B88EA45B28}" dt="2026-08-11T20:02:13.981" v="6791" actId="20577"/>
+          <ac:spMkLst>
+            <pc:docMk/>
+            <pc:sldMk cId="720366200" sldId="441"/>
+            <ac:spMk id="2" creationId="{7FB877D4-CF32-3932-6A6E-0D69A92E9391}"/>
+          </ac:spMkLst>
+        </pc:spChg>
+      </pc:sldChg>
+      <pc:sldChg chg="modSp add mod">
+        <pc:chgData name="Adrien Osakwe" userId="7a3e290c-eb83-484b-8e3d-d46ef2333477" providerId="ADAL" clId="{516F4981-D9C8-4339-9685-B0B88EA45B28}" dt="2026-08-11T20:03:30.234" v="7051" actId="20577"/>
+        <pc:sldMkLst>
+          <pc:docMk/>
+          <pc:sldMk cId="2482499284" sldId="442"/>
+        </pc:sldMkLst>
+        <pc:spChg chg="mod">
+          <ac:chgData name="Adrien Osakwe" userId="7a3e290c-eb83-484b-8e3d-d46ef2333477" providerId="ADAL" clId="{516F4981-D9C8-4339-9685-B0B88EA45B28}" dt="2026-08-11T20:03:30.234" v="7051" actId="20577"/>
+          <ac:spMkLst>
+            <pc:docMk/>
+            <pc:sldMk cId="2482499284" sldId="442"/>
+            <ac:spMk id="2" creationId="{B797973D-904F-6A6E-62A5-4D86D52AB87F}"/>
+          </ac:spMkLst>
+        </pc:spChg>
+      </pc:sldChg>
+      <pc:sldChg chg="modSp add mod">
+        <pc:chgData name="Adrien Osakwe" userId="7a3e290c-eb83-484b-8e3d-d46ef2333477" providerId="ADAL" clId="{516F4981-D9C8-4339-9685-B0B88EA45B28}" dt="2026-08-11T19:53:17.484" v="5542" actId="20577"/>
+        <pc:sldMkLst>
+          <pc:docMk/>
+          <pc:sldMk cId="2597417478" sldId="443"/>
+        </pc:sldMkLst>
+        <pc:spChg chg="mod">
+          <ac:chgData name="Adrien Osakwe" userId="7a3e290c-eb83-484b-8e3d-d46ef2333477" providerId="ADAL" clId="{516F4981-D9C8-4339-9685-B0B88EA45B28}" dt="2026-08-11T19:53:17.484" v="5542" actId="20577"/>
+          <ac:spMkLst>
+            <pc:docMk/>
+            <pc:sldMk cId="2597417478" sldId="443"/>
+            <ac:spMk id="2" creationId="{344441F0-85DA-1475-42CA-41CAF68E5E94}"/>
+          </ac:spMkLst>
+        </pc:spChg>
+      </pc:sldChg>
+      <pc:sldChg chg="modSp add mod">
+        <pc:chgData name="Adrien Osakwe" userId="7a3e290c-eb83-484b-8e3d-d46ef2333477" providerId="ADAL" clId="{516F4981-D9C8-4339-9685-B0B88EA45B28}" dt="2026-08-11T19:54:11.315" v="5807" actId="20577"/>
+        <pc:sldMkLst>
+          <pc:docMk/>
+          <pc:sldMk cId="224817830" sldId="444"/>
+        </pc:sldMkLst>
+        <pc:spChg chg="mod">
+          <ac:chgData name="Adrien Osakwe" userId="7a3e290c-eb83-484b-8e3d-d46ef2333477" providerId="ADAL" clId="{516F4981-D9C8-4339-9685-B0B88EA45B28}" dt="2026-08-11T19:54:11.315" v="5807" actId="20577"/>
+          <ac:spMkLst>
+            <pc:docMk/>
+            <pc:sldMk cId="224817830" sldId="444"/>
+            <ac:spMk id="2" creationId="{7CB229C2-EE64-5B41-AFBA-789EB3A7A394}"/>
+          </ac:spMkLst>
+        </pc:spChg>
+      </pc:sldChg>
+      <pc:sldChg chg="modSp add mod">
+        <pc:chgData name="Adrien Osakwe" userId="7a3e290c-eb83-484b-8e3d-d46ef2333477" providerId="ADAL" clId="{516F4981-D9C8-4339-9685-B0B88EA45B28}" dt="2026-08-11T20:12:33.885" v="7711" actId="27636"/>
+        <pc:sldMkLst>
+          <pc:docMk/>
+          <pc:sldMk cId="3954828614" sldId="445"/>
+        </pc:sldMkLst>
+        <pc:spChg chg="mod">
+          <ac:chgData name="Adrien Osakwe" userId="7a3e290c-eb83-484b-8e3d-d46ef2333477" providerId="ADAL" clId="{516F4981-D9C8-4339-9685-B0B88EA45B28}" dt="2026-08-11T20:12:33.885" v="7711" actId="27636"/>
+          <ac:spMkLst>
+            <pc:docMk/>
+            <pc:sldMk cId="3954828614" sldId="445"/>
+            <ac:spMk id="3" creationId="{4E1DCD95-E221-7361-554C-FF801933DD91}"/>
+          </ac:spMkLst>
+        </pc:spChg>
+      </pc:sldChg>
+      <pc:sldChg chg="modSp add mod">
+        <pc:chgData name="Adrien Osakwe" userId="7a3e290c-eb83-484b-8e3d-d46ef2333477" providerId="ADAL" clId="{516F4981-D9C8-4339-9685-B0B88EA45B28}" dt="2026-08-11T20:07:30.130" v="7291" actId="1076"/>
+        <pc:sldMkLst>
+          <pc:docMk/>
+          <pc:sldMk cId="1950493720" sldId="446"/>
+        </pc:sldMkLst>
+        <pc:spChg chg="mod">
+          <ac:chgData name="Adrien Osakwe" userId="7a3e290c-eb83-484b-8e3d-d46ef2333477" providerId="ADAL" clId="{516F4981-D9C8-4339-9685-B0B88EA45B28}" dt="2026-08-11T20:07:25.787" v="7290" actId="14100"/>
+          <ac:spMkLst>
+            <pc:docMk/>
+            <pc:sldMk cId="1950493720" sldId="446"/>
+            <ac:spMk id="3" creationId="{EBCAF0FA-7EB8-03C0-FC87-E5A3DA0B9DE1}"/>
+          </ac:spMkLst>
+        </pc:spChg>
+        <pc:picChg chg="mod">
+          <ac:chgData name="Adrien Osakwe" userId="7a3e290c-eb83-484b-8e3d-d46ef2333477" providerId="ADAL" clId="{516F4981-D9C8-4339-9685-B0B88EA45B28}" dt="2026-08-11T20:07:30.130" v="7291" actId="1076"/>
+          <ac:picMkLst>
+            <pc:docMk/>
+            <pc:sldMk cId="1950493720" sldId="446"/>
+            <ac:picMk id="2050" creationId="{BAFF9FFC-5A14-B382-D910-785CAF058FE6}"/>
+          </ac:picMkLst>
+        </pc:picChg>
+      </pc:sldChg>
+      <pc:sldChg chg="modSp new del mod">
+        <pc:chgData name="Adrien Osakwe" userId="7a3e290c-eb83-484b-8e3d-d46ef2333477" providerId="ADAL" clId="{516F4981-D9C8-4339-9685-B0B88EA45B28}" dt="2026-08-11T20:10:50.166" v="7519" actId="47"/>
+        <pc:sldMkLst>
+          <pc:docMk/>
+          <pc:sldMk cId="3914752990" sldId="447"/>
+        </pc:sldMkLst>
+        <pc:spChg chg="mod">
+          <ac:chgData name="Adrien Osakwe" userId="7a3e290c-eb83-484b-8e3d-d46ef2333477" providerId="ADAL" clId="{516F4981-D9C8-4339-9685-B0B88EA45B28}" dt="2026-08-11T20:10:48.118" v="7518" actId="21"/>
+          <ac:spMkLst>
+            <pc:docMk/>
+            <pc:sldMk cId="3914752990" sldId="447"/>
+            <ac:spMk id="3" creationId="{AD2328D3-67DF-83B5-804E-3E886493FCC8}"/>
+          </ac:spMkLst>
+        </pc:spChg>
+      </pc:sldChg>
+      <pc:sldChg chg="modSp add mod">
+        <pc:chgData name="Adrien Osakwe" userId="7a3e290c-eb83-484b-8e3d-d46ef2333477" providerId="ADAL" clId="{516F4981-D9C8-4339-9685-B0B88EA45B28}" dt="2026-08-11T20:11:58.588" v="7673" actId="20577"/>
+        <pc:sldMkLst>
+          <pc:docMk/>
+          <pc:sldMk cId="875444263" sldId="448"/>
+        </pc:sldMkLst>
+        <pc:spChg chg="mod">
+          <ac:chgData name="Adrien Osakwe" userId="7a3e290c-eb83-484b-8e3d-d46ef2333477" providerId="ADAL" clId="{516F4981-D9C8-4339-9685-B0B88EA45B28}" dt="2026-08-11T20:11:58.588" v="7673" actId="20577"/>
+          <ac:spMkLst>
+            <pc:docMk/>
+            <pc:sldMk cId="875444263" sldId="448"/>
+            <ac:spMk id="3" creationId="{A1CD167F-4475-118A-FCF1-E95134C491F4}"/>
+          </ac:spMkLst>
+        </pc:spChg>
+        <pc:grpChg chg="mod">
+          <ac:chgData name="Adrien Osakwe" userId="7a3e290c-eb83-484b-8e3d-d46ef2333477" providerId="ADAL" clId="{516F4981-D9C8-4339-9685-B0B88EA45B28}" dt="2026-08-11T20:11:38.246" v="7612" actId="1076"/>
+          <ac:grpSpMkLst>
+            <pc:docMk/>
+            <pc:sldMk cId="875444263" sldId="448"/>
+            <ac:grpSpMk id="8" creationId="{7A74E541-75E3-482C-408B-AC3005CD5DBE}"/>
+          </ac:grpSpMkLst>
+        </pc:grpChg>
+      </pc:sldChg>
+      <pc:sldChg chg="addSp modSp add del mod">
+        <pc:chgData name="Adrien Osakwe" userId="7a3e290c-eb83-484b-8e3d-d46ef2333477" providerId="ADAL" clId="{516F4981-D9C8-4339-9685-B0B88EA45B28}" dt="2026-08-11T20:16:22.899" v="7779" actId="47"/>
+        <pc:sldMkLst>
+          <pc:docMk/>
+          <pc:sldMk cId="3038641811" sldId="449"/>
+        </pc:sldMkLst>
+        <pc:spChg chg="mod">
+          <ac:chgData name="Adrien Osakwe" userId="7a3e290c-eb83-484b-8e3d-d46ef2333477" providerId="ADAL" clId="{516F4981-D9C8-4339-9685-B0B88EA45B28}" dt="2026-08-11T20:15:19.943" v="7714" actId="14100"/>
+          <ac:spMkLst>
+            <pc:docMk/>
+            <pc:sldMk cId="3038641811" sldId="449"/>
+            <ac:spMk id="3" creationId="{4D86081A-388F-0A32-810C-A7A5D2816ED5}"/>
+          </ac:spMkLst>
+        </pc:spChg>
+        <pc:spChg chg="mod">
+          <ac:chgData name="Adrien Osakwe" userId="7a3e290c-eb83-484b-8e3d-d46ef2333477" providerId="ADAL" clId="{516F4981-D9C8-4339-9685-B0B88EA45B28}" dt="2026-08-11T20:15:19.943" v="7714" actId="14100"/>
+          <ac:spMkLst>
+            <pc:docMk/>
+            <pc:sldMk cId="3038641811" sldId="449"/>
+            <ac:spMk id="4" creationId="{F4B55E28-0E6D-D360-CB34-664881A3F542}"/>
+          </ac:spMkLst>
+        </pc:spChg>
+        <pc:spChg chg="add mod">
+          <ac:chgData name="Adrien Osakwe" userId="7a3e290c-eb83-484b-8e3d-d46ef2333477" providerId="ADAL" clId="{516F4981-D9C8-4339-9685-B0B88EA45B28}" dt="2026-08-11T20:16:04.344" v="7747" actId="122"/>
+          <ac:spMkLst>
+            <pc:docMk/>
+            <pc:sldMk cId="3038641811" sldId="449"/>
+            <ac:spMk id="5" creationId="{D767EF7F-846D-6AA0-AEB3-5F0493576B07}"/>
+          </ac:spMkLst>
+        </pc:spChg>
+        <pc:spChg chg="add mod">
+          <ac:chgData name="Adrien Osakwe" userId="7a3e290c-eb83-484b-8e3d-d46ef2333477" providerId="ADAL" clId="{516F4981-D9C8-4339-9685-B0B88EA45B28}" dt="2026-08-11T20:15:52.012" v="7727" actId="1076"/>
+          <ac:spMkLst>
+            <pc:docMk/>
+            <pc:sldMk cId="3038641811" sldId="449"/>
+            <ac:spMk id="6" creationId="{DBFA2468-F089-2C73-D50F-8E31C66D5113}"/>
+          </ac:spMkLst>
+        </pc:spChg>
+      </pc:sldChg>
+      <pc:sldChg chg="addSp delSp modSp new mod">
+        <pc:chgData name="Adrien Osakwe" userId="7a3e290c-eb83-484b-8e3d-d46ef2333477" providerId="ADAL" clId="{516F4981-D9C8-4339-9685-B0B88EA45B28}" dt="2026-08-11T20:19:31.053" v="8251" actId="20577"/>
+        <pc:sldMkLst>
+          <pc:docMk/>
+          <pc:sldMk cId="3567545301" sldId="450"/>
+        </pc:sldMkLst>
+        <pc:spChg chg="mod">
+          <ac:chgData name="Adrien Osakwe" userId="7a3e290c-eb83-484b-8e3d-d46ef2333477" providerId="ADAL" clId="{516F4981-D9C8-4339-9685-B0B88EA45B28}" dt="2026-08-11T20:18:48.890" v="8122" actId="20577"/>
+          <ac:spMkLst>
+            <pc:docMk/>
+            <pc:sldMk cId="3567545301" sldId="450"/>
+            <ac:spMk id="2" creationId="{931D2992-2D2C-03B2-20A7-FA3CFD5F72E8}"/>
+          </ac:spMkLst>
+        </pc:spChg>
+        <pc:spChg chg="add del mod">
+          <ac:chgData name="Adrien Osakwe" userId="7a3e290c-eb83-484b-8e3d-d46ef2333477" providerId="ADAL" clId="{516F4981-D9C8-4339-9685-B0B88EA45B28}" dt="2026-08-11T20:19:31.053" v="8251" actId="20577"/>
+          <ac:spMkLst>
+            <pc:docMk/>
+            <pc:sldMk cId="3567545301" sldId="450"/>
+            <ac:spMk id="3" creationId="{F9D67DD5-AD34-86CF-5CE0-F971881A1045}"/>
+          </ac:spMkLst>
+        </pc:spChg>
+        <pc:graphicFrameChg chg="add del mod ord modGraphic">
+          <ac:chgData name="Adrien Osakwe" userId="7a3e290c-eb83-484b-8e3d-d46ef2333477" providerId="ADAL" clId="{516F4981-D9C8-4339-9685-B0B88EA45B28}" dt="2026-08-11T20:16:40.244" v="7791" actId="3680"/>
+          <ac:graphicFrameMkLst>
+            <pc:docMk/>
+            <pc:sldMk cId="3567545301" sldId="450"/>
+            <ac:graphicFrameMk id="4" creationId="{0EF09418-258F-6ECD-82D9-EC7C7EA86AA6}"/>
+          </ac:graphicFrameMkLst>
+        </pc:graphicFrameChg>
       </pc:sldChg>
     </pc:docChg>
   </pc:docChgLst>
@@ -2325,7 +2616,7 @@
           <a:p>
             <a:fld id="{DACBD60B-517C-4242-AE46-E1BD2D086542}" type="slidenum">
               <a:rPr lang="fr-FR" smtClean="0"/>
-              <a:t>37</a:t>
+              <a:t>39</a:t>
             </a:fld>
             <a:endParaRPr lang="fr-FR"/>
           </a:p>
@@ -2409,7 +2700,7 @@
           <a:p>
             <a:fld id="{DACBD60B-517C-4242-AE46-E1BD2D086542}" type="slidenum">
               <a:rPr lang="fr-FR" smtClean="0"/>
-              <a:t>39</a:t>
+              <a:t>41</a:t>
             </a:fld>
             <a:endParaRPr lang="fr-FR"/>
           </a:p>
@@ -2493,7 +2784,7 @@
           <a:p>
             <a:fld id="{DACBD60B-517C-4242-AE46-E1BD2D086542}" type="slidenum">
               <a:rPr lang="fr-FR" smtClean="0"/>
-              <a:t>43</a:t>
+              <a:t>45</a:t>
             </a:fld>
             <a:endParaRPr lang="fr-FR"/>
           </a:p>
@@ -2661,7 +2952,7 @@
           <a:p>
             <a:fld id="{DACBD60B-517C-4242-AE46-E1BD2D086542}" type="slidenum">
               <a:rPr lang="fr-FR" smtClean="0"/>
-              <a:t>18</a:t>
+              <a:t>19</a:t>
             </a:fld>
             <a:endParaRPr lang="fr-FR"/>
           </a:p>
@@ -2745,7 +3036,7 @@
           <a:p>
             <a:fld id="{DACBD60B-517C-4242-AE46-E1BD2D086542}" type="slidenum">
               <a:rPr lang="fr-FR" smtClean="0"/>
-              <a:t>21</a:t>
+              <a:t>22</a:t>
             </a:fld>
             <a:endParaRPr lang="fr-FR"/>
           </a:p>
@@ -2829,7 +3120,7 @@
           <a:p>
             <a:fld id="{DACBD60B-517C-4242-AE46-E1BD2D086542}" type="slidenum">
               <a:rPr lang="fr-FR" smtClean="0"/>
-              <a:t>26</a:t>
+              <a:t>28</a:t>
             </a:fld>
             <a:endParaRPr lang="fr-FR"/>
           </a:p>
@@ -2919,7 +3210,7 @@
           <a:p>
             <a:fld id="{DACBD60B-517C-4242-AE46-E1BD2D086542}" type="slidenum">
               <a:rPr lang="fr-FR" smtClean="0"/>
-              <a:t>31</a:t>
+              <a:t>33</a:t>
             </a:fld>
             <a:endParaRPr lang="fr-FR"/>
           </a:p>
@@ -3033,7 +3324,7 @@
           <a:p>
             <a:fld id="{DACBD60B-517C-4242-AE46-E1BD2D086542}" type="slidenum">
               <a:rPr lang="fr-FR" smtClean="0"/>
-              <a:t>34</a:t>
+              <a:t>36</a:t>
             </a:fld>
             <a:endParaRPr lang="fr-FR"/>
           </a:p>
@@ -3147,7 +3438,7 @@
           <a:p>
             <a:fld id="{DACBD60B-517C-4242-AE46-E1BD2D086542}" type="slidenum">
               <a:rPr lang="fr-FR" smtClean="0"/>
-              <a:t>35</a:t>
+              <a:t>37</a:t>
             </a:fld>
             <a:endParaRPr lang="fr-FR"/>
           </a:p>
@@ -3261,7 +3552,7 @@
           <a:p>
             <a:fld id="{DACBD60B-517C-4242-AE46-E1BD2D086542}" type="slidenum">
               <a:rPr lang="fr-FR" smtClean="0"/>
-              <a:t>36</a:t>
+              <a:t>38</a:t>
             </a:fld>
             <a:endParaRPr lang="fr-FR"/>
           </a:p>
@@ -6121,10 +6412,10 @@
       </p:grpSpPr>
       <p:sp>
         <p:nvSpPr>
-          <p:cNvPr id="2" name="Title 1">
-            <a:extLst>
-              <a:ext uri="{FF2B5EF4-FFF2-40B4-BE49-F238E27FC236}">
-                <a16:creationId xmlns:a16="http://schemas.microsoft.com/office/drawing/2014/main" id="{A49566BD-568F-BE0D-05BE-B8FED9C6F115}"/>
+          <p:cNvPr id="2" name="Text Placeholder 1">
+            <a:extLst>
+              <a:ext uri="{FF2B5EF4-FFF2-40B4-BE49-F238E27FC236}">
+                <a16:creationId xmlns:a16="http://schemas.microsoft.com/office/drawing/2014/main" id="{9B245876-087E-37FF-2A45-491803B93EF5}"/>
               </a:ext>
             </a:extLst>
           </p:cNvPr>
@@ -6132,32 +6423,95 @@
             <a:spLocks noGrp="1"/>
           </p:cNvSpPr>
           <p:nvPr>
-            <p:ph type="title"/>
+            <p:ph type="body" sz="quarter" idx="10"/>
           </p:nvPr>
         </p:nvSpPr>
         <p:spPr>
           <a:xfrm>
-            <a:off x="628650" y="3429000"/>
-            <a:ext cx="7886700" cy="842534"/>
+            <a:off x="242372" y="2940626"/>
+            <a:ext cx="8658743" cy="3437951"/>
           </a:xfrm>
         </p:spPr>
         <p:txBody>
+          <a:bodyPr/>
+          <a:lstStyle/>
+          <a:p>
+            <a:r>
+              <a:rPr lang="en-CA" dirty="0"/>
+              <a:t>Explore the 1_Simple_Scripts folder</a:t>
+            </a:r>
+          </a:p>
+          <a:p>
+            <a:endParaRPr lang="en-CA" dirty="0"/>
+          </a:p>
+          <a:p>
+            <a:r>
+              <a:rPr lang="en-CA" dirty="0"/>
+              <a:t>Try running the code</a:t>
+            </a:r>
+          </a:p>
+          <a:p>
+            <a:endParaRPr lang="en-CA" dirty="0"/>
+          </a:p>
+          <a:p>
+            <a:r>
+              <a:rPr lang="en-CA" dirty="0"/>
+              <a:t>What would happen if you wanted to run this in a different folder?</a:t>
+            </a:r>
+          </a:p>
+        </p:txBody>
+      </p:sp>
+      <p:sp>
+        <p:nvSpPr>
+          <p:cNvPr id="3" name="Title 1">
+            <a:extLst>
+              <a:ext uri="{FF2B5EF4-FFF2-40B4-BE49-F238E27FC236}">
+                <a16:creationId xmlns:a16="http://schemas.microsoft.com/office/drawing/2014/main" id="{D0AE3FC0-C652-C431-6A10-987A06B22130}"/>
+              </a:ext>
+            </a:extLst>
+          </p:cNvPr>
+          <p:cNvSpPr txBox="1">
+            <a:spLocks/>
+          </p:cNvSpPr>
+          <p:nvPr/>
+        </p:nvSpPr>
+        <p:spPr>
+          <a:xfrm>
+            <a:off x="242372" y="1558637"/>
+            <a:ext cx="8658743" cy="1007918"/>
+          </a:xfrm>
+          <a:prstGeom prst="rect">
+            <a:avLst/>
+          </a:prstGeom>
+        </p:spPr>
+        <p:txBody>
           <a:bodyPr>
-            <a:normAutofit fontScale="90000"/>
+            <a:noAutofit/>
           </a:bodyPr>
-          <a:lstStyle/>
+          <a:lstStyle>
+            <a:lvl1pPr algn="l" defTabSz="914175" rtl="0" eaLnBrk="1" latinLnBrk="0" hangingPunct="1">
+              <a:lnSpc>
+                <a:spcPct val="90000"/>
+              </a:lnSpc>
+              <a:spcBef>
+                <a:spcPct val="0"/>
+              </a:spcBef>
+              <a:buNone/>
+              <a:defRPr sz="4403" kern="1200">
+                <a:solidFill>
+                  <a:schemeClr val="tx1"/>
+                </a:solidFill>
+                <a:latin typeface="+mj-lt"/>
+                <a:ea typeface="+mj-ea"/>
+                <a:cs typeface="+mj-cs"/>
+              </a:defRPr>
+            </a:lvl1pPr>
+          </a:lstStyle>
           <a:p>
             <a:pPr algn="ctr"/>
             <a:r>
-              <a:rPr lang="en-CA" dirty="0"/>
+              <a:rPr lang="en-CA" sz="7200" dirty="0"/>
               <a:t>Exercise</a:t>
-            </a:r>
-            <a:br>
-              <a:rPr lang="en-CA" dirty="0"/>
-            </a:br>
-            <a:r>
-              <a:rPr lang="en-CA" dirty="0"/>
-              <a:t>(Explore 1_Simple_Scripts)</a:t>
             </a:r>
           </a:p>
         </p:txBody>
@@ -6165,7 +6519,7 @@
     </p:spTree>
     <p:extLst>
       <p:ext uri="{BB962C8B-B14F-4D97-AF65-F5344CB8AC3E}">
-        <p14:creationId xmlns:p14="http://schemas.microsoft.com/office/powerpoint/2010/main" val="4034011448"/>
+        <p14:creationId xmlns:p14="http://schemas.microsoft.com/office/powerpoint/2010/main" val="680839714"/>
       </p:ext>
     </p:extLst>
   </p:cSld>
@@ -6868,11 +7222,7 @@
           <a:lstStyle/>
           <a:p>
             <a:r>
-              <a:rPr lang="en-US" dirty="0">
-                <a:solidFill>
-                  <a:srgbClr val="FF0000"/>
-                </a:solidFill>
-              </a:rPr>
+              <a:rPr lang="en-US" dirty="0"/>
               <a:t>Package Structure</a:t>
             </a:r>
           </a:p>
@@ -6997,7 +7347,7 @@
         <p:cNvPr id="1" name="">
           <a:extLst>
             <a:ext uri="{FF2B5EF4-FFF2-40B4-BE49-F238E27FC236}">
-              <a16:creationId xmlns:a16="http://schemas.microsoft.com/office/drawing/2014/main" id="{F5265321-226F-FD9B-CADB-2D05E48E8263}"/>
+              <a16:creationId xmlns:a16="http://schemas.microsoft.com/office/drawing/2014/main" id="{D1B4D4E7-EDE7-0256-BCB8-80FEA5C9629E}"/>
             </a:ext>
           </a:extLst>
         </p:cNvPr>
@@ -7017,7 +7367,7 @@
           <p:cNvPr id="2" name="Title 1">
             <a:extLst>
               <a:ext uri="{FF2B5EF4-FFF2-40B4-BE49-F238E27FC236}">
-                <a16:creationId xmlns:a16="http://schemas.microsoft.com/office/drawing/2014/main" id="{B627E931-4B2C-12CE-3BC3-6A5246120671}"/>
+                <a16:creationId xmlns:a16="http://schemas.microsoft.com/office/drawing/2014/main" id="{B9A3661A-8663-99E4-A67C-CB9C8FBE5B04}"/>
               </a:ext>
             </a:extLst>
           </p:cNvPr>
@@ -7028,37 +7378,161 @@
             <p:ph type="title"/>
           </p:nvPr>
         </p:nvSpPr>
+        <p:spPr/>
+        <p:txBody>
+          <a:bodyPr/>
+          <a:lstStyle/>
+          <a:p>
+            <a:r>
+              <a:rPr lang="en-US" dirty="0"/>
+              <a:t>Package Structure</a:t>
+            </a:r>
+          </a:p>
+        </p:txBody>
+      </p:sp>
+      <p:sp>
+        <p:nvSpPr>
+          <p:cNvPr id="3" name="Content Placeholder 2">
+            <a:extLst>
+              <a:ext uri="{FF2B5EF4-FFF2-40B4-BE49-F238E27FC236}">
+                <a16:creationId xmlns:a16="http://schemas.microsoft.com/office/drawing/2014/main" id="{4E1DCD95-E221-7361-554C-FF801933DD91}"/>
+              </a:ext>
+            </a:extLst>
+          </p:cNvPr>
+          <p:cNvSpPr>
+            <a:spLocks noGrp="1"/>
+          </p:cNvSpPr>
+          <p:nvPr>
+            <p:ph sz="half" idx="1"/>
+          </p:nvPr>
+        </p:nvSpPr>
         <p:spPr>
           <a:xfrm>
-            <a:off x="418234" y="3429000"/>
-            <a:ext cx="8307532" cy="842534"/>
+            <a:off x="285747" y="1825627"/>
+            <a:ext cx="4596746" cy="4866118"/>
           </a:xfrm>
         </p:spPr>
         <p:txBody>
           <a:bodyPr>
-            <a:normAutofit fontScale="90000"/>
+            <a:normAutofit fontScale="92500" lnSpcReduction="20000"/>
           </a:bodyPr>
           <a:lstStyle/>
           <a:p>
-            <a:pPr algn="ctr"/>
-            <a:r>
-              <a:rPr lang="en-CA" dirty="0"/>
-              <a:t>Exercise </a:t>
-            </a:r>
-            <a:br>
-              <a:rPr lang="en-CA" dirty="0"/>
-            </a:br>
-            <a:r>
-              <a:rPr lang="en-CA" dirty="0"/>
-              <a:t>(Explore 2_Simple_Package)</a:t>
-            </a:r>
-          </a:p>
-        </p:txBody>
-      </p:sp>
+            <a:r>
+              <a:rPr lang="en-US" dirty="0"/>
+              <a:t>DESCRIPTION</a:t>
+            </a:r>
+          </a:p>
+          <a:p>
+            <a:pPr lvl="1"/>
+            <a:r>
+              <a:rPr lang="en-US" dirty="0"/>
+              <a:t>Package metadata</a:t>
+            </a:r>
+          </a:p>
+          <a:p>
+            <a:pPr lvl="1"/>
+            <a:r>
+              <a:rPr lang="en-US" dirty="0"/>
+              <a:t>Dependencies, authors, version #</a:t>
+            </a:r>
+          </a:p>
+          <a:p>
+            <a:endParaRPr lang="en-US" dirty="0"/>
+          </a:p>
+          <a:p>
+            <a:r>
+              <a:rPr lang="en-US" dirty="0"/>
+              <a:t>NAMESPACE</a:t>
+            </a:r>
+          </a:p>
+          <a:p>
+            <a:pPr lvl="1"/>
+            <a:r>
+              <a:rPr lang="en-US" dirty="0"/>
+              <a:t>Specifies what functions should be visible to users</a:t>
+            </a:r>
+          </a:p>
+          <a:p>
+            <a:pPr lvl="1"/>
+            <a:r>
+              <a:rPr lang="en-US" dirty="0"/>
+              <a:t>What dependency functions can be used with the pkg:: syntax</a:t>
+            </a:r>
+          </a:p>
+          <a:p>
+            <a:endParaRPr lang="en-US" dirty="0"/>
+          </a:p>
+          <a:p>
+            <a:r>
+              <a:rPr lang="en-US" dirty="0"/>
+              <a:t>data/ and data-raw/</a:t>
+            </a:r>
+          </a:p>
+          <a:p>
+            <a:pPr lvl="1"/>
+            <a:r>
+              <a:rPr lang="en-US" dirty="0"/>
+              <a:t>Store package data (strict format requirements)</a:t>
+            </a:r>
+          </a:p>
+          <a:p>
+            <a:pPr lvl="1"/>
+            <a:endParaRPr lang="en-US" dirty="0"/>
+          </a:p>
+        </p:txBody>
+      </p:sp>
+      <p:pic>
+        <p:nvPicPr>
+          <p:cNvPr id="2050" name="Picture 2" descr="Components of an R package | R">
+            <a:extLst>
+              <a:ext uri="{FF2B5EF4-FFF2-40B4-BE49-F238E27FC236}">
+                <a16:creationId xmlns:a16="http://schemas.microsoft.com/office/drawing/2014/main" id="{60D50516-BBEF-FBD0-0440-F6214EF8ABA9}"/>
+              </a:ext>
+            </a:extLst>
+          </p:cNvPr>
+          <p:cNvPicPr>
+            <a:picLocks noChangeAspect="1" noChangeArrowheads="1"/>
+          </p:cNvPicPr>
+          <p:nvPr/>
+        </p:nvPicPr>
+        <p:blipFill rotWithShape="1">
+          <a:blip r:embed="rId2">
+            <a:extLst>
+              <a:ext uri="{28A0092B-C50C-407E-A947-70E740481C1C}">
+                <a14:useLocalDpi xmlns:a14="http://schemas.microsoft.com/office/drawing/2010/main" val="0"/>
+              </a:ext>
+            </a:extLst>
+          </a:blip>
+          <a:srcRect l="8726" r="17253"/>
+          <a:stretch>
+            <a:fillRect/>
+          </a:stretch>
+        </p:blipFill>
+        <p:spPr bwMode="auto">
+          <a:xfrm>
+            <a:off x="4882493" y="1219201"/>
+            <a:ext cx="4178380" cy="5112312"/>
+          </a:xfrm>
+          <a:prstGeom prst="rect">
+            <a:avLst/>
+          </a:prstGeom>
+          <a:noFill/>
+          <a:extLst>
+            <a:ext uri="{909E8E84-426E-40DD-AFC4-6F175D3DCCD1}">
+              <a14:hiddenFill xmlns:a14="http://schemas.microsoft.com/office/drawing/2010/main">
+                <a:solidFill>
+                  <a:srgbClr val="FFFFFF"/>
+                </a:solidFill>
+              </a14:hiddenFill>
+            </a:ext>
+          </a:extLst>
+        </p:spPr>
+      </p:pic>
     </p:spTree>
     <p:extLst>
       <p:ext uri="{BB962C8B-B14F-4D97-AF65-F5344CB8AC3E}">
-        <p14:creationId xmlns:p14="http://schemas.microsoft.com/office/powerpoint/2010/main" val="3381146445"/>
+        <p14:creationId xmlns:p14="http://schemas.microsoft.com/office/powerpoint/2010/main" val="3954828614"/>
       </p:ext>
     </p:extLst>
   </p:cSld>
@@ -7073,7 +7547,13 @@
   <p:cSld>
     <p:spTree>
       <p:nvGrpSpPr>
-        <p:cNvPr id="1" name=""/>
+        <p:cNvPr id="1" name="">
+          <a:extLst>
+            <a:ext uri="{FF2B5EF4-FFF2-40B4-BE49-F238E27FC236}">
+              <a16:creationId xmlns:a16="http://schemas.microsoft.com/office/drawing/2014/main" id="{0A03A9BD-4470-BB22-33E8-D2731E29D7EE}"/>
+            </a:ext>
+          </a:extLst>
+        </p:cNvPr>
         <p:cNvGrpSpPr/>
         <p:nvPr/>
       </p:nvGrpSpPr>
@@ -7090,7 +7570,7 @@
           <p:cNvPr id="2" name="Title 1">
             <a:extLst>
               <a:ext uri="{FF2B5EF4-FFF2-40B4-BE49-F238E27FC236}">
-                <a16:creationId xmlns:a16="http://schemas.microsoft.com/office/drawing/2014/main" id="{E6E06B3D-D697-AE59-116F-D558C5EC8756}"/>
+                <a16:creationId xmlns:a16="http://schemas.microsoft.com/office/drawing/2014/main" id="{AB31E7B6-FDF6-83B4-A093-BF6368453946}"/>
               </a:ext>
             </a:extLst>
           </p:cNvPr>
@@ -7108,9 +7588,8 @@
           <a:p>
             <a:r>
               <a:rPr lang="en-US" dirty="0"/>
-              <a:t>Refactoring Scripts into a Package</a:t>
-            </a:r>
-            <a:endParaRPr lang="en-CA" dirty="0"/>
+              <a:t>Package Structure</a:t>
+            </a:r>
           </a:p>
         </p:txBody>
       </p:sp>
@@ -7119,7 +7598,7 @@
           <p:cNvPr id="3" name="Content Placeholder 2">
             <a:extLst>
               <a:ext uri="{FF2B5EF4-FFF2-40B4-BE49-F238E27FC236}">
-                <a16:creationId xmlns:a16="http://schemas.microsoft.com/office/drawing/2014/main" id="{71618A3D-D3F3-3F32-8304-7A72C05319EB}"/>
+                <a16:creationId xmlns:a16="http://schemas.microsoft.com/office/drawing/2014/main" id="{EBCAF0FA-7EB8-03C0-FC87-E5A3DA0B9DE1}"/>
               </a:ext>
             </a:extLst>
           </p:cNvPr>
@@ -7127,106 +7606,127 @@
             <a:spLocks noGrp="1"/>
           </p:cNvSpPr>
           <p:nvPr>
-            <p:ph idx="1"/>
+            <p:ph sz="half" idx="1"/>
           </p:nvPr>
         </p:nvSpPr>
         <p:spPr>
           <a:xfrm>
-            <a:off x="628650" y="1825627"/>
-            <a:ext cx="8421832" cy="4351335"/>
+            <a:off x="285747" y="1825627"/>
+            <a:ext cx="4733062" cy="4351335"/>
           </a:xfrm>
         </p:spPr>
         <p:txBody>
-          <a:bodyPr>
-            <a:normAutofit lnSpcReduction="10000"/>
-          </a:bodyPr>
+          <a:bodyPr/>
           <a:lstStyle/>
           <a:p>
-            <a:pPr marL="514350" indent="-514350">
-              <a:buFont typeface="+mj-lt"/>
-              <a:buAutoNum type="arabicPeriod"/>
-            </a:pPr>
+            <a:r>
+              <a:rPr lang="en-US" dirty="0" err="1"/>
+              <a:t>inst</a:t>
+            </a:r>
             <a:r>
               <a:rPr lang="en-US" dirty="0"/>
-              <a:t>Create a new R project a select the package template</a:t>
+              <a:t>/</a:t>
             </a:r>
           </a:p>
           <a:p>
             <a:pPr lvl="1"/>
             <a:r>
               <a:rPr lang="en-US" dirty="0"/>
-              <a:t>Include roxygen2 option</a:t>
-            </a:r>
-          </a:p>
-          <a:p>
-            <a:pPr marL="457088" lvl="1" indent="0">
-              <a:buNone/>
-            </a:pPr>
-            <a:endParaRPr lang="en-US" dirty="0"/>
-          </a:p>
-          <a:p>
-            <a:pPr marL="514350" indent="-514350">
-              <a:buFont typeface="+mj-lt"/>
-              <a:buAutoNum type="arabicPeriod"/>
-            </a:pPr>
+              <a:t>Store unstructured assets such as data and templates</a:t>
+            </a:r>
+          </a:p>
+          <a:p>
             <a:r>
               <a:rPr lang="en-US" dirty="0"/>
-              <a:t>Create simple functions under R/</a:t>
+              <a:t>man/</a:t>
             </a:r>
           </a:p>
           <a:p>
             <a:pPr lvl="1"/>
             <a:r>
               <a:rPr lang="en-US" dirty="0"/>
-              <a:t>Either from 1_Simple_Scripts or your own</a:t>
-            </a:r>
-          </a:p>
-          <a:p>
-            <a:pPr marL="457088" lvl="1" indent="0">
-              <a:buNone/>
-            </a:pPr>
-            <a:endParaRPr lang="en-US" dirty="0"/>
-          </a:p>
-          <a:p>
-            <a:pPr marL="514350" indent="-514350">
-              <a:buFont typeface="+mj-lt"/>
-              <a:buAutoNum type="arabicPeriod"/>
-            </a:pPr>
+              <a:t>Store function documentation</a:t>
+            </a:r>
+          </a:p>
+          <a:p>
             <a:r>
               <a:rPr lang="en-US" dirty="0"/>
-              <a:t>Include dependencies</a:t>
+              <a:t>tests/</a:t>
             </a:r>
           </a:p>
           <a:p>
             <a:pPr lvl="1"/>
             <a:r>
               <a:rPr lang="en-US" dirty="0"/>
-              <a:t>List them in the DESCRIPTION file</a:t>
-            </a:r>
-          </a:p>
-          <a:p>
-            <a:pPr marL="457088" lvl="1" indent="0">
-              <a:buNone/>
-            </a:pPr>
-            <a:endParaRPr lang="en-CA" dirty="0"/>
-          </a:p>
-          <a:p>
-            <a:pPr marL="514350" indent="-514350">
-              <a:buFont typeface="+mj-lt"/>
-              <a:buAutoNum type="arabicPeriod"/>
-            </a:pPr>
-            <a:r>
-              <a:rPr lang="en-CA" dirty="0"/>
-              <a:t>Try installing with the build tab (top right)</a:t>
-            </a:r>
-            <a:endParaRPr lang="en-US" dirty="0"/>
-          </a:p>
-        </p:txBody>
-      </p:sp>
+              <a:t>Store package tests</a:t>
+            </a:r>
+          </a:p>
+          <a:p>
+            <a:r>
+              <a:rPr lang="en-US" dirty="0"/>
+              <a:t>vignettes/</a:t>
+            </a:r>
+          </a:p>
+          <a:p>
+            <a:pPr lvl="1"/>
+            <a:r>
+              <a:rPr lang="en-US" dirty="0"/>
+              <a:t>Package tutorials</a:t>
+            </a:r>
+          </a:p>
+        </p:txBody>
+      </p:sp>
+      <p:pic>
+        <p:nvPicPr>
+          <p:cNvPr id="2050" name="Picture 2" descr="Components of an R package | R">
+            <a:extLst>
+              <a:ext uri="{FF2B5EF4-FFF2-40B4-BE49-F238E27FC236}">
+                <a16:creationId xmlns:a16="http://schemas.microsoft.com/office/drawing/2014/main" id="{BAFF9FFC-5A14-B382-D910-785CAF058FE6}"/>
+              </a:ext>
+            </a:extLst>
+          </p:cNvPr>
+          <p:cNvPicPr>
+            <a:picLocks noChangeAspect="1" noChangeArrowheads="1"/>
+          </p:cNvPicPr>
+          <p:nvPr/>
+        </p:nvPicPr>
+        <p:blipFill rotWithShape="1">
+          <a:blip r:embed="rId2">
+            <a:extLst>
+              <a:ext uri="{28A0092B-C50C-407E-A947-70E740481C1C}">
+                <a14:useLocalDpi xmlns:a14="http://schemas.microsoft.com/office/drawing/2010/main" val="0"/>
+              </a:ext>
+            </a:extLst>
+          </a:blip>
+          <a:srcRect l="8726" r="17253"/>
+          <a:stretch>
+            <a:fillRect/>
+          </a:stretch>
+        </p:blipFill>
+        <p:spPr bwMode="auto">
+          <a:xfrm>
+            <a:off x="4965620" y="1219201"/>
+            <a:ext cx="4178380" cy="5112312"/>
+          </a:xfrm>
+          <a:prstGeom prst="rect">
+            <a:avLst/>
+          </a:prstGeom>
+          <a:noFill/>
+          <a:extLst>
+            <a:ext uri="{909E8E84-426E-40DD-AFC4-6F175D3DCCD1}">
+              <a14:hiddenFill xmlns:a14="http://schemas.microsoft.com/office/drawing/2010/main">
+                <a:solidFill>
+                  <a:srgbClr val="FFFFFF"/>
+                </a:solidFill>
+              </a14:hiddenFill>
+            </a:ext>
+          </a:extLst>
+        </p:spPr>
+      </p:pic>
     </p:spTree>
     <p:extLst>
       <p:ext uri="{BB962C8B-B14F-4D97-AF65-F5344CB8AC3E}">
-        <p14:creationId xmlns:p14="http://schemas.microsoft.com/office/powerpoint/2010/main" val="2814879043"/>
+        <p14:creationId xmlns:p14="http://schemas.microsoft.com/office/powerpoint/2010/main" val="1950493720"/>
       </p:ext>
     </p:extLst>
   </p:cSld>
@@ -7244,7 +7744,7 @@
         <p:cNvPr id="1" name="">
           <a:extLst>
             <a:ext uri="{FF2B5EF4-FFF2-40B4-BE49-F238E27FC236}">
-              <a16:creationId xmlns:a16="http://schemas.microsoft.com/office/drawing/2014/main" id="{3DA626B9-315E-25BC-AB0C-BE00AD776B8B}"/>
+              <a16:creationId xmlns:a16="http://schemas.microsoft.com/office/drawing/2014/main" id="{C4DA9004-9984-DCB3-CF53-9DAFD96F6B39}"/>
             </a:ext>
           </a:extLst>
         </p:cNvPr>
@@ -7261,10 +7761,10 @@
       </p:grpSpPr>
       <p:sp>
         <p:nvSpPr>
-          <p:cNvPr id="2" name="Title 1">
-            <a:extLst>
-              <a:ext uri="{FF2B5EF4-FFF2-40B4-BE49-F238E27FC236}">
-                <a16:creationId xmlns:a16="http://schemas.microsoft.com/office/drawing/2014/main" id="{4FBA878A-0055-6E6A-ED8B-DFB2AA8B40A0}"/>
+          <p:cNvPr id="2" name="Text Placeholder 1">
+            <a:extLst>
+              <a:ext uri="{FF2B5EF4-FFF2-40B4-BE49-F238E27FC236}">
+                <a16:creationId xmlns:a16="http://schemas.microsoft.com/office/drawing/2014/main" id="{2EEDF49E-138B-3D35-3C54-8B3CEA5BAD37}"/>
               </a:ext>
             </a:extLst>
           </p:cNvPr>
@@ -7272,49 +7772,131 @@
             <a:spLocks noGrp="1"/>
           </p:cNvSpPr>
           <p:nvPr>
-            <p:ph type="title"/>
+            <p:ph type="body" sz="quarter" idx="10"/>
           </p:nvPr>
         </p:nvSpPr>
         <p:spPr>
           <a:xfrm>
-            <a:off x="-722169" y="3429000"/>
-            <a:ext cx="10588337" cy="842534"/>
+            <a:off x="242372" y="2940626"/>
+            <a:ext cx="8658743" cy="3437951"/>
           </a:xfrm>
         </p:spPr>
         <p:txBody>
           <a:bodyPr>
-            <a:normAutofit fontScale="90000"/>
+            <a:normAutofit/>
           </a:bodyPr>
           <a:lstStyle/>
           <a:p>
+            <a:r>
+              <a:rPr lang="en-CA" dirty="0"/>
+              <a:t>Explore the 2_Simple_Package structure</a:t>
+            </a:r>
+          </a:p>
+          <a:p>
+            <a:endParaRPr lang="en-CA" dirty="0"/>
+          </a:p>
+          <a:p>
+            <a:r>
+              <a:rPr lang="en-CA" dirty="0"/>
+              <a:t>Click the ‘Build’ button at the top right</a:t>
+            </a:r>
+          </a:p>
+          <a:p>
+            <a:pPr lvl="1"/>
+            <a:r>
+              <a:rPr lang="en-CA" dirty="0"/>
+              <a:t>Try running ‘install’</a:t>
+            </a:r>
+          </a:p>
+          <a:p>
+            <a:pPr lvl="1"/>
+            <a:r>
+              <a:rPr lang="en-CA" dirty="0"/>
+              <a:t>Try running ‘check’</a:t>
+            </a:r>
+          </a:p>
+          <a:p>
+            <a:endParaRPr lang="en-CA" dirty="0"/>
+          </a:p>
+          <a:p>
+            <a:r>
+              <a:rPr lang="en-CA" b="1" dirty="0"/>
+              <a:t>Question: </a:t>
+            </a:r>
+            <a:r>
+              <a:rPr lang="en-CA" dirty="0"/>
+              <a:t>where would </a:t>
+            </a:r>
+            <a:r>
+              <a:rPr lang="en-CA" dirty="0" err="1"/>
+              <a:t>Rcpp</a:t>
+            </a:r>
+            <a:r>
+              <a:rPr lang="en-CA" dirty="0"/>
+              <a:t> scripts be stored?</a:t>
+            </a:r>
+          </a:p>
+        </p:txBody>
+      </p:sp>
+      <p:sp>
+        <p:nvSpPr>
+          <p:cNvPr id="3" name="Title 1">
+            <a:extLst>
+              <a:ext uri="{FF2B5EF4-FFF2-40B4-BE49-F238E27FC236}">
+                <a16:creationId xmlns:a16="http://schemas.microsoft.com/office/drawing/2014/main" id="{17C53C61-491E-B6D0-C604-93A668A2E755}"/>
+              </a:ext>
+            </a:extLst>
+          </p:cNvPr>
+          <p:cNvSpPr txBox="1">
+            <a:spLocks/>
+          </p:cNvSpPr>
+          <p:nvPr/>
+        </p:nvSpPr>
+        <p:spPr>
+          <a:xfrm>
+            <a:off x="242372" y="1558637"/>
+            <a:ext cx="8658743" cy="1007918"/>
+          </a:xfrm>
+          <a:prstGeom prst="rect">
+            <a:avLst/>
+          </a:prstGeom>
+        </p:spPr>
+        <p:txBody>
+          <a:bodyPr>
+            <a:noAutofit/>
+          </a:bodyPr>
+          <a:lstStyle>
+            <a:lvl1pPr algn="l" defTabSz="914175" rtl="0" eaLnBrk="1" latinLnBrk="0" hangingPunct="1">
+              <a:lnSpc>
+                <a:spcPct val="90000"/>
+              </a:lnSpc>
+              <a:spcBef>
+                <a:spcPct val="0"/>
+              </a:spcBef>
+              <a:buNone/>
+              <a:defRPr sz="4403" kern="1200">
+                <a:solidFill>
+                  <a:schemeClr val="tx1"/>
+                </a:solidFill>
+                <a:latin typeface="+mj-lt"/>
+                <a:ea typeface="+mj-ea"/>
+                <a:cs typeface="+mj-cs"/>
+              </a:defRPr>
+            </a:lvl1pPr>
+          </a:lstStyle>
+          <a:p>
             <a:pPr algn="ctr"/>
             <a:r>
-              <a:rPr lang="en-CA" dirty="0"/>
+              <a:rPr lang="en-CA" sz="7200" dirty="0"/>
               <a:t>Exercise</a:t>
             </a:r>
-            <a:br>
-              <a:rPr lang="en-CA" dirty="0"/>
-            </a:br>
-            <a:r>
-              <a:rPr lang="en-CA" sz="4900" dirty="0"/>
-              <a:t>(Build a toy package under </a:t>
-            </a:r>
-            <a:r>
-              <a:rPr lang="en-CA" sz="4900" dirty="0" err="1"/>
-              <a:t>Toy_Package</a:t>
-            </a:r>
-            <a:r>
-              <a:rPr lang="en-CA" sz="4900" dirty="0"/>
-              <a:t>)</a:t>
-            </a:r>
-            <a:endParaRPr lang="en-CA" dirty="0"/>
           </a:p>
         </p:txBody>
       </p:sp>
     </p:spTree>
     <p:extLst>
       <p:ext uri="{BB962C8B-B14F-4D97-AF65-F5344CB8AC3E}">
-        <p14:creationId xmlns:p14="http://schemas.microsoft.com/office/powerpoint/2010/main" val="1861850653"/>
+        <p14:creationId xmlns:p14="http://schemas.microsoft.com/office/powerpoint/2010/main" val="3854057674"/>
       </p:ext>
     </p:extLst>
   </p:cSld>
@@ -7325,6 +7907,226 @@
 </file>
 
 <file path=ppt/slides/slide18.xml><?xml version="1.0" encoding="utf-8"?>
+<p:sld xmlns:a="http://schemas.openxmlformats.org/drawingml/2006/main" xmlns:r="http://schemas.openxmlformats.org/officeDocument/2006/relationships" xmlns:p="http://schemas.openxmlformats.org/presentationml/2006/main">
+  <p:cSld>
+    <p:spTree>
+      <p:nvGrpSpPr>
+        <p:cNvPr id="1" name="">
+          <a:extLst>
+            <a:ext uri="{FF2B5EF4-FFF2-40B4-BE49-F238E27FC236}">
+              <a16:creationId xmlns:a16="http://schemas.microsoft.com/office/drawing/2014/main" id="{92C7D0E6-A763-E5FF-7519-70084E2BDECE}"/>
+            </a:ext>
+          </a:extLst>
+        </p:cNvPr>
+        <p:cNvGrpSpPr/>
+        <p:nvPr/>
+      </p:nvGrpSpPr>
+      <p:grpSpPr>
+        <a:xfrm>
+          <a:off x="0" y="0"/>
+          <a:ext cx="0" cy="0"/>
+          <a:chOff x="0" y="0"/>
+          <a:chExt cx="0" cy="0"/>
+        </a:xfrm>
+      </p:grpSpPr>
+      <p:sp>
+        <p:nvSpPr>
+          <p:cNvPr id="2" name="Text Placeholder 1">
+            <a:extLst>
+              <a:ext uri="{FF2B5EF4-FFF2-40B4-BE49-F238E27FC236}">
+                <a16:creationId xmlns:a16="http://schemas.microsoft.com/office/drawing/2014/main" id="{7B68F2FA-D711-4EB3-2861-17288F46576A}"/>
+              </a:ext>
+            </a:extLst>
+          </p:cNvPr>
+          <p:cNvSpPr>
+            <a:spLocks noGrp="1"/>
+          </p:cNvSpPr>
+          <p:nvPr>
+            <p:ph type="body" sz="quarter" idx="10"/>
+          </p:nvPr>
+        </p:nvSpPr>
+        <p:spPr>
+          <a:xfrm>
+            <a:off x="242372" y="2639291"/>
+            <a:ext cx="8658743" cy="4031673"/>
+          </a:xfrm>
+        </p:spPr>
+        <p:txBody>
+          <a:bodyPr>
+            <a:normAutofit fontScale="85000" lnSpcReduction="20000"/>
+          </a:bodyPr>
+          <a:lstStyle/>
+          <a:p>
+            <a:pPr marL="514350" indent="-514350">
+              <a:buFont typeface="+mj-lt"/>
+              <a:buAutoNum type="arabicPeriod"/>
+            </a:pPr>
+            <a:r>
+              <a:rPr lang="en-US" dirty="0"/>
+              <a:t>Create a new R project a select the package template</a:t>
+            </a:r>
+          </a:p>
+          <a:p>
+            <a:pPr lvl="1"/>
+            <a:r>
+              <a:rPr lang="en-US" dirty="0"/>
+              <a:t>Include roxygen2 option</a:t>
+            </a:r>
+          </a:p>
+          <a:p>
+            <a:pPr marL="457088" lvl="1" indent="0">
+              <a:buNone/>
+            </a:pPr>
+            <a:endParaRPr lang="en-US" dirty="0"/>
+          </a:p>
+          <a:p>
+            <a:pPr marL="514350" indent="-514350">
+              <a:buFont typeface="+mj-lt"/>
+              <a:buAutoNum type="arabicPeriod"/>
+            </a:pPr>
+            <a:r>
+              <a:rPr lang="en-US" dirty="0"/>
+              <a:t>Create simple functions under R/</a:t>
+            </a:r>
+          </a:p>
+          <a:p>
+            <a:pPr lvl="1"/>
+            <a:r>
+              <a:rPr lang="en-US" dirty="0"/>
+              <a:t>Either from 1_Simple_Scripts or your own</a:t>
+            </a:r>
+          </a:p>
+          <a:p>
+            <a:pPr marL="457088" lvl="1" indent="0">
+              <a:buNone/>
+            </a:pPr>
+            <a:endParaRPr lang="en-US" dirty="0"/>
+          </a:p>
+          <a:p>
+            <a:pPr marL="514350" indent="-514350">
+              <a:buFont typeface="+mj-lt"/>
+              <a:buAutoNum type="arabicPeriod"/>
+            </a:pPr>
+            <a:r>
+              <a:rPr lang="en-US" dirty="0"/>
+              <a:t>Include dependencies</a:t>
+            </a:r>
+          </a:p>
+          <a:p>
+            <a:pPr lvl="1"/>
+            <a:r>
+              <a:rPr lang="en-US" dirty="0"/>
+              <a:t>List them in the DESCRIPTION file</a:t>
+            </a:r>
+          </a:p>
+          <a:p>
+            <a:pPr marL="457088" lvl="1" indent="0">
+              <a:buNone/>
+            </a:pPr>
+            <a:endParaRPr lang="en-CA" dirty="0"/>
+          </a:p>
+          <a:p>
+            <a:pPr marL="514350" indent="-514350">
+              <a:buFont typeface="+mj-lt"/>
+              <a:buAutoNum type="arabicPeriod"/>
+            </a:pPr>
+            <a:r>
+              <a:rPr lang="en-CA" dirty="0"/>
+              <a:t>Try installing with the build tab (top right)</a:t>
+            </a:r>
+          </a:p>
+          <a:p>
+            <a:pPr marL="514350" indent="-514350">
+              <a:buFont typeface="+mj-lt"/>
+              <a:buAutoNum type="arabicPeriod"/>
+            </a:pPr>
+            <a:endParaRPr lang="en-CA" dirty="0"/>
+          </a:p>
+          <a:p>
+            <a:pPr marL="514350" indent="-514350">
+              <a:buFont typeface="+mj-lt"/>
+              <a:buAutoNum type="arabicPeriod"/>
+            </a:pPr>
+            <a:r>
+              <a:rPr lang="en-CA" dirty="0"/>
+              <a:t>Run the check function in the build tab</a:t>
+            </a:r>
+            <a:endParaRPr lang="en-US" dirty="0"/>
+          </a:p>
+          <a:p>
+            <a:endParaRPr lang="en-CA" dirty="0"/>
+          </a:p>
+        </p:txBody>
+      </p:sp>
+      <p:sp>
+        <p:nvSpPr>
+          <p:cNvPr id="3" name="Title 1">
+            <a:extLst>
+              <a:ext uri="{FF2B5EF4-FFF2-40B4-BE49-F238E27FC236}">
+                <a16:creationId xmlns:a16="http://schemas.microsoft.com/office/drawing/2014/main" id="{3735B5E2-545E-865E-6211-22F2D6D53839}"/>
+              </a:ext>
+            </a:extLst>
+          </p:cNvPr>
+          <p:cNvSpPr txBox="1">
+            <a:spLocks/>
+          </p:cNvSpPr>
+          <p:nvPr/>
+        </p:nvSpPr>
+        <p:spPr>
+          <a:xfrm>
+            <a:off x="242372" y="1558637"/>
+            <a:ext cx="8658743" cy="1007918"/>
+          </a:xfrm>
+          <a:prstGeom prst="rect">
+            <a:avLst/>
+          </a:prstGeom>
+        </p:spPr>
+        <p:txBody>
+          <a:bodyPr>
+            <a:noAutofit/>
+          </a:bodyPr>
+          <a:lstStyle>
+            <a:lvl1pPr algn="l" defTabSz="914175" rtl="0" eaLnBrk="1" latinLnBrk="0" hangingPunct="1">
+              <a:lnSpc>
+                <a:spcPct val="90000"/>
+              </a:lnSpc>
+              <a:spcBef>
+                <a:spcPct val="0"/>
+              </a:spcBef>
+              <a:buNone/>
+              <a:defRPr sz="4403" kern="1200">
+                <a:solidFill>
+                  <a:schemeClr val="tx1"/>
+                </a:solidFill>
+                <a:latin typeface="+mj-lt"/>
+                <a:ea typeface="+mj-ea"/>
+                <a:cs typeface="+mj-cs"/>
+              </a:defRPr>
+            </a:lvl1pPr>
+          </a:lstStyle>
+          <a:p>
+            <a:pPr algn="ctr"/>
+            <a:r>
+              <a:rPr lang="en-CA" sz="7200" dirty="0"/>
+              <a:t>Exercise</a:t>
+            </a:r>
+          </a:p>
+        </p:txBody>
+      </p:sp>
+    </p:spTree>
+    <p:extLst>
+      <p:ext uri="{BB962C8B-B14F-4D97-AF65-F5344CB8AC3E}">
+        <p14:creationId xmlns:p14="http://schemas.microsoft.com/office/powerpoint/2010/main" val="390538586"/>
+      </p:ext>
+    </p:extLst>
+  </p:cSld>
+  <p:clrMapOvr>
+    <a:masterClrMapping/>
+  </p:clrMapOvr>
+</p:sld>
+</file>
+
+<file path=ppt/slides/slide19.xml><?xml version="1.0" encoding="utf-8"?>
 <p:sld xmlns:a="http://schemas.openxmlformats.org/drawingml/2006/main" xmlns:r="http://schemas.openxmlformats.org/officeDocument/2006/relationships" xmlns:p="http://schemas.openxmlformats.org/presentationml/2006/main">
   <p:cSld>
     <p:spTree>
@@ -7537,134 +8339,6 @@
 </p:sld>
 </file>
 
-<file path=ppt/slides/slide19.xml><?xml version="1.0" encoding="utf-8"?>
-<p:sld xmlns:a="http://schemas.openxmlformats.org/drawingml/2006/main" xmlns:r="http://schemas.openxmlformats.org/officeDocument/2006/relationships" xmlns:p="http://schemas.openxmlformats.org/presentationml/2006/main">
-  <p:cSld>
-    <p:spTree>
-      <p:nvGrpSpPr>
-        <p:cNvPr id="1" name=""/>
-        <p:cNvGrpSpPr/>
-        <p:nvPr/>
-      </p:nvGrpSpPr>
-      <p:grpSpPr>
-        <a:xfrm>
-          <a:off x="0" y="0"/>
-          <a:ext cx="0" cy="0"/>
-          <a:chOff x="0" y="0"/>
-          <a:chExt cx="0" cy="0"/>
-        </a:xfrm>
-      </p:grpSpPr>
-      <p:sp>
-        <p:nvSpPr>
-          <p:cNvPr id="2" name="Title 1">
-            <a:extLst>
-              <a:ext uri="{FF2B5EF4-FFF2-40B4-BE49-F238E27FC236}">
-                <a16:creationId xmlns:a16="http://schemas.microsoft.com/office/drawing/2014/main" id="{95DD492F-F80E-B379-EDEF-4B91DA7FE6C1}"/>
-              </a:ext>
-            </a:extLst>
-          </p:cNvPr>
-          <p:cNvSpPr>
-            <a:spLocks noGrp="1"/>
-          </p:cNvSpPr>
-          <p:nvPr>
-            <p:ph type="title"/>
-          </p:nvPr>
-        </p:nvSpPr>
-        <p:spPr/>
-        <p:txBody>
-          <a:bodyPr/>
-          <a:lstStyle/>
-          <a:p>
-            <a:r>
-              <a:rPr lang="en-US" dirty="0"/>
-              <a:t>Unit Tests – Quality over Quantity</a:t>
-            </a:r>
-          </a:p>
-        </p:txBody>
-      </p:sp>
-      <p:sp>
-        <p:nvSpPr>
-          <p:cNvPr id="3" name="Content Placeholder 2">
-            <a:extLst>
-              <a:ext uri="{FF2B5EF4-FFF2-40B4-BE49-F238E27FC236}">
-                <a16:creationId xmlns:a16="http://schemas.microsoft.com/office/drawing/2014/main" id="{46798B0B-5D5D-D6AE-7CE9-0D0F9134C1AA}"/>
-              </a:ext>
-            </a:extLst>
-          </p:cNvPr>
-          <p:cNvSpPr>
-            <a:spLocks noGrp="1"/>
-          </p:cNvSpPr>
-          <p:nvPr>
-            <p:ph sz="half" idx="1"/>
-          </p:nvPr>
-        </p:nvSpPr>
-        <p:spPr>
-          <a:xfrm>
-            <a:off x="176645" y="1825627"/>
-            <a:ext cx="8260773" cy="4351335"/>
-          </a:xfrm>
-        </p:spPr>
-        <p:txBody>
-          <a:bodyPr/>
-          <a:lstStyle/>
-          <a:p>
-            <a:r>
-              <a:rPr lang="en-US" dirty="0"/>
-              <a:t>Have a lot of tests does not guarantee stability</a:t>
-            </a:r>
-          </a:p>
-          <a:p>
-            <a:pPr lvl="1"/>
-            <a:r>
-              <a:rPr lang="en-US" dirty="0"/>
-              <a:t>Some are relatively simple and can become redundant</a:t>
-            </a:r>
-          </a:p>
-          <a:p>
-            <a:endParaRPr lang="en-US" dirty="0"/>
-          </a:p>
-          <a:p>
-            <a:r>
-              <a:rPr lang="en-US" dirty="0"/>
-              <a:t>Tests must:</a:t>
-            </a:r>
-          </a:p>
-          <a:p>
-            <a:pPr lvl="1"/>
-            <a:r>
-              <a:rPr lang="en-US" dirty="0"/>
-              <a:t>Check for edge cases</a:t>
-            </a:r>
-          </a:p>
-          <a:p>
-            <a:pPr lvl="1"/>
-            <a:r>
-              <a:rPr lang="en-US" dirty="0"/>
-              <a:t>Check function assumptions</a:t>
-            </a:r>
-          </a:p>
-          <a:p>
-            <a:pPr lvl="1"/>
-            <a:r>
-              <a:rPr lang="en-US" dirty="0"/>
-              <a:t>Check past bugs</a:t>
-            </a:r>
-          </a:p>
-        </p:txBody>
-      </p:sp>
-    </p:spTree>
-    <p:extLst>
-      <p:ext uri="{BB962C8B-B14F-4D97-AF65-F5344CB8AC3E}">
-        <p14:creationId xmlns:p14="http://schemas.microsoft.com/office/powerpoint/2010/main" val="37029868"/>
-      </p:ext>
-    </p:extLst>
-  </p:cSld>
-  <p:clrMapOvr>
-    <a:masterClrMapping/>
-  </p:clrMapOvr>
-</p:sld>
-</file>
-
 <file path=ppt/slides/slide2.xml><?xml version="1.0" encoding="utf-8"?>
 <p:sld xmlns:a="http://schemas.openxmlformats.org/drawingml/2006/main" xmlns:r="http://schemas.openxmlformats.org/officeDocument/2006/relationships" xmlns:p="http://schemas.openxmlformats.org/presentationml/2006/main">
   <p:cSld>
@@ -7810,10 +8484,138 @@
   <p:cSld>
     <p:spTree>
       <p:nvGrpSpPr>
+        <p:cNvPr id="1" name=""/>
+        <p:cNvGrpSpPr/>
+        <p:nvPr/>
+      </p:nvGrpSpPr>
+      <p:grpSpPr>
+        <a:xfrm>
+          <a:off x="0" y="0"/>
+          <a:ext cx="0" cy="0"/>
+          <a:chOff x="0" y="0"/>
+          <a:chExt cx="0" cy="0"/>
+        </a:xfrm>
+      </p:grpSpPr>
+      <p:sp>
+        <p:nvSpPr>
+          <p:cNvPr id="2" name="Title 1">
+            <a:extLst>
+              <a:ext uri="{FF2B5EF4-FFF2-40B4-BE49-F238E27FC236}">
+                <a16:creationId xmlns:a16="http://schemas.microsoft.com/office/drawing/2014/main" id="{95DD492F-F80E-B379-EDEF-4B91DA7FE6C1}"/>
+              </a:ext>
+            </a:extLst>
+          </p:cNvPr>
+          <p:cNvSpPr>
+            <a:spLocks noGrp="1"/>
+          </p:cNvSpPr>
+          <p:nvPr>
+            <p:ph type="title"/>
+          </p:nvPr>
+        </p:nvSpPr>
+        <p:spPr/>
+        <p:txBody>
+          <a:bodyPr/>
+          <a:lstStyle/>
+          <a:p>
+            <a:r>
+              <a:rPr lang="en-US" dirty="0"/>
+              <a:t>Unit Tests – Quality over Quantity</a:t>
+            </a:r>
+          </a:p>
+        </p:txBody>
+      </p:sp>
+      <p:sp>
+        <p:nvSpPr>
+          <p:cNvPr id="3" name="Content Placeholder 2">
+            <a:extLst>
+              <a:ext uri="{FF2B5EF4-FFF2-40B4-BE49-F238E27FC236}">
+                <a16:creationId xmlns:a16="http://schemas.microsoft.com/office/drawing/2014/main" id="{46798B0B-5D5D-D6AE-7CE9-0D0F9134C1AA}"/>
+              </a:ext>
+            </a:extLst>
+          </p:cNvPr>
+          <p:cNvSpPr>
+            <a:spLocks noGrp="1"/>
+          </p:cNvSpPr>
+          <p:nvPr>
+            <p:ph sz="half" idx="1"/>
+          </p:nvPr>
+        </p:nvSpPr>
+        <p:spPr>
+          <a:xfrm>
+            <a:off x="176645" y="1825627"/>
+            <a:ext cx="8260773" cy="4351335"/>
+          </a:xfrm>
+        </p:spPr>
+        <p:txBody>
+          <a:bodyPr/>
+          <a:lstStyle/>
+          <a:p>
+            <a:r>
+              <a:rPr lang="en-US" dirty="0"/>
+              <a:t>Have a lot of tests does not guarantee stability</a:t>
+            </a:r>
+          </a:p>
+          <a:p>
+            <a:pPr lvl="1"/>
+            <a:r>
+              <a:rPr lang="en-US" dirty="0"/>
+              <a:t>Some are relatively simple and can become redundant</a:t>
+            </a:r>
+          </a:p>
+          <a:p>
+            <a:endParaRPr lang="en-US" dirty="0"/>
+          </a:p>
+          <a:p>
+            <a:r>
+              <a:rPr lang="en-US" dirty="0"/>
+              <a:t>Tests must:</a:t>
+            </a:r>
+          </a:p>
+          <a:p>
+            <a:pPr lvl="1"/>
+            <a:r>
+              <a:rPr lang="en-US" dirty="0"/>
+              <a:t>Check for edge cases</a:t>
+            </a:r>
+          </a:p>
+          <a:p>
+            <a:pPr lvl="1"/>
+            <a:r>
+              <a:rPr lang="en-US" dirty="0"/>
+              <a:t>Check function assumptions</a:t>
+            </a:r>
+          </a:p>
+          <a:p>
+            <a:pPr lvl="1"/>
+            <a:r>
+              <a:rPr lang="en-US" dirty="0"/>
+              <a:t>Check past bugs</a:t>
+            </a:r>
+          </a:p>
+        </p:txBody>
+      </p:sp>
+    </p:spTree>
+    <p:extLst>
+      <p:ext uri="{BB962C8B-B14F-4D97-AF65-F5344CB8AC3E}">
+        <p14:creationId xmlns:p14="http://schemas.microsoft.com/office/powerpoint/2010/main" val="37029868"/>
+      </p:ext>
+    </p:extLst>
+  </p:cSld>
+  <p:clrMapOvr>
+    <a:masterClrMapping/>
+  </p:clrMapOvr>
+</p:sld>
+</file>
+
+<file path=ppt/slides/slide21.xml><?xml version="1.0" encoding="utf-8"?>
+<p:sld xmlns:a="http://schemas.openxmlformats.org/drawingml/2006/main" xmlns:r="http://schemas.openxmlformats.org/officeDocument/2006/relationships" xmlns:p="http://schemas.openxmlformats.org/presentationml/2006/main">
+  <p:cSld>
+    <p:spTree>
+      <p:nvGrpSpPr>
         <p:cNvPr id="1" name="">
           <a:extLst>
             <a:ext uri="{FF2B5EF4-FFF2-40B4-BE49-F238E27FC236}">
-              <a16:creationId xmlns:a16="http://schemas.microsoft.com/office/drawing/2014/main" id="{A3303C9E-14B3-A32F-C6A7-B165DD89BEFC}"/>
+              <a16:creationId xmlns:a16="http://schemas.microsoft.com/office/drawing/2014/main" id="{9C858AB8-BE41-D511-3C94-427AED3B80FD}"/>
             </a:ext>
           </a:extLst>
         </p:cNvPr>
@@ -7830,10 +8632,10 @@
       </p:grpSpPr>
       <p:sp>
         <p:nvSpPr>
-          <p:cNvPr id="2" name="Title 1">
-            <a:extLst>
-              <a:ext uri="{FF2B5EF4-FFF2-40B4-BE49-F238E27FC236}">
-                <a16:creationId xmlns:a16="http://schemas.microsoft.com/office/drawing/2014/main" id="{34D3CBAE-FCA6-56FF-4630-BA76ACB49392}"/>
+          <p:cNvPr id="2" name="Text Placeholder 1">
+            <a:extLst>
+              <a:ext uri="{FF2B5EF4-FFF2-40B4-BE49-F238E27FC236}">
+                <a16:creationId xmlns:a16="http://schemas.microsoft.com/office/drawing/2014/main" id="{854F0872-B9BE-E918-DFBC-A755DF054287}"/>
               </a:ext>
             </a:extLst>
           </p:cNvPr>
@@ -7841,32 +8643,106 @@
             <a:spLocks noGrp="1"/>
           </p:cNvSpPr>
           <p:nvPr>
-            <p:ph type="title"/>
+            <p:ph type="body" sz="quarter" idx="10"/>
           </p:nvPr>
         </p:nvSpPr>
         <p:spPr>
           <a:xfrm>
-            <a:off x="-506557" y="3429000"/>
-            <a:ext cx="10157114" cy="842534"/>
+            <a:off x="242372" y="2940626"/>
+            <a:ext cx="8658743" cy="3437951"/>
           </a:xfrm>
         </p:spPr>
         <p:txBody>
+          <a:bodyPr/>
+          <a:lstStyle/>
+          <a:p>
+            <a:r>
+              <a:rPr lang="en-CA" dirty="0"/>
+              <a:t>In the build tab, click the ‘test’ option to run tests</a:t>
+            </a:r>
+          </a:p>
+          <a:p>
+            <a:endParaRPr lang="en-CA" dirty="0"/>
+          </a:p>
+          <a:p>
+            <a:endParaRPr lang="en-CA" dirty="0"/>
+          </a:p>
+          <a:p>
+            <a:r>
+              <a:rPr lang="en-CA" dirty="0"/>
+              <a:t>Alternatively, run </a:t>
+            </a:r>
+            <a:r>
+              <a:rPr lang="en-CA" dirty="0" err="1"/>
+              <a:t>devtools</a:t>
+            </a:r>
+            <a:r>
+              <a:rPr lang="en-CA" dirty="0"/>
+              <a:t>::test() in the console</a:t>
+            </a:r>
+          </a:p>
+          <a:p>
+            <a:endParaRPr lang="en-CA" dirty="0"/>
+          </a:p>
+          <a:p>
+            <a:pPr marL="0" indent="0">
+              <a:buNone/>
+            </a:pPr>
+            <a:endParaRPr lang="en-CA" dirty="0"/>
+          </a:p>
+        </p:txBody>
+      </p:sp>
+      <p:sp>
+        <p:nvSpPr>
+          <p:cNvPr id="3" name="Title 1">
+            <a:extLst>
+              <a:ext uri="{FF2B5EF4-FFF2-40B4-BE49-F238E27FC236}">
+                <a16:creationId xmlns:a16="http://schemas.microsoft.com/office/drawing/2014/main" id="{838BE015-8B48-7249-7981-39E59A32B7CA}"/>
+              </a:ext>
+            </a:extLst>
+          </p:cNvPr>
+          <p:cNvSpPr txBox="1">
+            <a:spLocks/>
+          </p:cNvSpPr>
+          <p:nvPr/>
+        </p:nvSpPr>
+        <p:spPr>
+          <a:xfrm>
+            <a:off x="242372" y="1558637"/>
+            <a:ext cx="8658743" cy="1007918"/>
+          </a:xfrm>
+          <a:prstGeom prst="rect">
+            <a:avLst/>
+          </a:prstGeom>
+        </p:spPr>
+        <p:txBody>
           <a:bodyPr>
-            <a:normAutofit fontScale="90000"/>
+            <a:noAutofit/>
           </a:bodyPr>
-          <a:lstStyle/>
+          <a:lstStyle>
+            <a:lvl1pPr algn="l" defTabSz="914175" rtl="0" eaLnBrk="1" latinLnBrk="0" hangingPunct="1">
+              <a:lnSpc>
+                <a:spcPct val="90000"/>
+              </a:lnSpc>
+              <a:spcBef>
+                <a:spcPct val="0"/>
+              </a:spcBef>
+              <a:buNone/>
+              <a:defRPr sz="4403" kern="1200">
+                <a:solidFill>
+                  <a:schemeClr val="tx1"/>
+                </a:solidFill>
+                <a:latin typeface="+mj-lt"/>
+                <a:ea typeface="+mj-ea"/>
+                <a:cs typeface="+mj-cs"/>
+              </a:defRPr>
+            </a:lvl1pPr>
+          </a:lstStyle>
           <a:p>
             <a:pPr algn="ctr"/>
             <a:r>
-              <a:rPr lang="en-CA" dirty="0"/>
+              <a:rPr lang="en-CA" sz="7200" dirty="0"/>
               <a:t>Exercise</a:t>
-            </a:r>
-            <a:br>
-              <a:rPr lang="en-CA" dirty="0"/>
-            </a:br>
-            <a:r>
-              <a:rPr lang="en-CA" dirty="0"/>
-              <a:t>(Run tests in 2_Simple_Package)</a:t>
             </a:r>
           </a:p>
         </p:txBody>
@@ -7874,7 +8750,7 @@
     </p:spTree>
     <p:extLst>
       <p:ext uri="{BB962C8B-B14F-4D97-AF65-F5344CB8AC3E}">
-        <p14:creationId xmlns:p14="http://schemas.microsoft.com/office/powerpoint/2010/main" val="2443216682"/>
+        <p14:creationId xmlns:p14="http://schemas.microsoft.com/office/powerpoint/2010/main" val="608068112"/>
       </p:ext>
     </p:extLst>
   </p:cSld>
@@ -7884,7 +8760,7 @@
 </p:sld>
 </file>
 
-<file path=ppt/slides/slide21.xml><?xml version="1.0" encoding="utf-8"?>
+<file path=ppt/slides/slide22.xml><?xml version="1.0" encoding="utf-8"?>
 <p:sld xmlns:a="http://schemas.openxmlformats.org/drawingml/2006/main" xmlns:r="http://schemas.openxmlformats.org/officeDocument/2006/relationships" xmlns:p="http://schemas.openxmlformats.org/presentationml/2006/main">
   <p:cSld>
     <p:spTree>
@@ -8056,7 +8932,7 @@
 </p:sld>
 </file>
 
-<file path=ppt/slides/slide22.xml><?xml version="1.0" encoding="utf-8"?>
+<file path=ppt/slides/slide23.xml><?xml version="1.0" encoding="utf-8"?>
 <p:sld xmlns:a="http://schemas.openxmlformats.org/drawingml/2006/main" xmlns:r="http://schemas.openxmlformats.org/officeDocument/2006/relationships" xmlns:p="http://schemas.openxmlformats.org/presentationml/2006/main">
   <p:cSld>
     <p:spTree>
@@ -8064,7 +8940,7 @@
         <p:cNvPr id="1" name="">
           <a:extLst>
             <a:ext uri="{FF2B5EF4-FFF2-40B4-BE49-F238E27FC236}">
-              <a16:creationId xmlns:a16="http://schemas.microsoft.com/office/drawing/2014/main" id="{2D4EA6CA-9E0A-53C4-2A49-AEE18B6A7CA3}"/>
+              <a16:creationId xmlns:a16="http://schemas.microsoft.com/office/drawing/2014/main" id="{61B82300-1D87-27D4-1F58-37E791D067AB}"/>
             </a:ext>
           </a:extLst>
         </p:cNvPr>
@@ -8081,10 +8957,10 @@
       </p:grpSpPr>
       <p:sp>
         <p:nvSpPr>
-          <p:cNvPr id="2" name="Title 1">
-            <a:extLst>
-              <a:ext uri="{FF2B5EF4-FFF2-40B4-BE49-F238E27FC236}">
-                <a16:creationId xmlns:a16="http://schemas.microsoft.com/office/drawing/2014/main" id="{F0809F7C-8E31-F82F-2BE8-1063529E5A6E}"/>
+          <p:cNvPr id="2" name="Text Placeholder 1">
+            <a:extLst>
+              <a:ext uri="{FF2B5EF4-FFF2-40B4-BE49-F238E27FC236}">
+                <a16:creationId xmlns:a16="http://schemas.microsoft.com/office/drawing/2014/main" id="{7FB877D4-CF32-3932-6A6E-0D69A92E9391}"/>
               </a:ext>
             </a:extLst>
           </p:cNvPr>
@@ -8092,69 +8968,22 @@
             <a:spLocks noGrp="1"/>
           </p:cNvSpPr>
           <p:nvPr>
-            <p:ph type="title"/>
+            <p:ph type="body" sz="quarter" idx="10"/>
           </p:nvPr>
         </p:nvSpPr>
         <p:spPr>
           <a:xfrm>
-            <a:off x="62345" y="5127940"/>
-            <a:ext cx="9019309" cy="842534"/>
+            <a:off x="242372" y="2940626"/>
+            <a:ext cx="8658743" cy="3437951"/>
           </a:xfrm>
         </p:spPr>
         <p:txBody>
-          <a:bodyPr>
-            <a:normAutofit fontScale="90000"/>
-          </a:bodyPr>
+          <a:bodyPr/>
           <a:lstStyle/>
           <a:p>
-            <a:pPr algn="ctr"/>
             <a:r>
               <a:rPr lang="en-CA" dirty="0"/>
-              <a:t>Exercise</a:t>
-            </a:r>
-            <a:br>
-              <a:rPr lang="en-CA" dirty="0"/>
-            </a:br>
-            <a:r>
-              <a:rPr lang="en-CA" dirty="0"/>
-              <a:t>(Run </a:t>
-            </a:r>
-            <a:r>
-              <a:rPr lang="en-US" dirty="0" err="1"/>
-              <a:t>covr</a:t>
-            </a:r>
-            <a:r>
-              <a:rPr lang="en-US" dirty="0"/>
-              <a:t>::</a:t>
-            </a:r>
-            <a:r>
-              <a:rPr lang="en-US" dirty="0" err="1"/>
-              <a:t>package_coverage</a:t>
-            </a:r>
-            <a:r>
-              <a:rPr lang="en-US" dirty="0"/>
-              <a:t>()</a:t>
-            </a:r>
-            <a:r>
-              <a:rPr lang="en-CA" dirty="0"/>
-              <a:t>)</a:t>
-            </a:r>
-            <a:br>
-              <a:rPr lang="en-CA" dirty="0"/>
-            </a:br>
-            <a:br>
-              <a:rPr lang="en-CA" dirty="0"/>
-            </a:br>
-            <a:r>
-              <a:rPr lang="en-CA" dirty="0"/>
-              <a:t>Try and improve the code coverage </a:t>
-            </a:r>
-            <a:br>
-              <a:rPr lang="en-CA" dirty="0"/>
-            </a:br>
-            <a:r>
-              <a:rPr lang="en-CA" dirty="0"/>
-              <a:t>(hint: run </a:t>
+              <a:t>Run </a:t>
             </a:r>
             <a:r>
               <a:rPr lang="en-CA" dirty="0" err="1"/>
@@ -8162,237 +8991,110 @@
             </a:r>
             <a:r>
               <a:rPr lang="en-CA" dirty="0"/>
-              <a:t>::report())</a:t>
-            </a:r>
-          </a:p>
-        </p:txBody>
-      </p:sp>
-    </p:spTree>
-    <p:extLst>
-      <p:ext uri="{BB962C8B-B14F-4D97-AF65-F5344CB8AC3E}">
-        <p14:creationId xmlns:p14="http://schemas.microsoft.com/office/powerpoint/2010/main" val="259435353"/>
-      </p:ext>
-    </p:extLst>
-  </p:cSld>
-  <p:clrMapOvr>
-    <a:masterClrMapping/>
-  </p:clrMapOvr>
-</p:sld>
-</file>
-
-<file path=ppt/slides/slide23.xml><?xml version="1.0" encoding="utf-8"?>
-<p:sld xmlns:a="http://schemas.openxmlformats.org/drawingml/2006/main" xmlns:r="http://schemas.openxmlformats.org/officeDocument/2006/relationships" xmlns:p="http://schemas.openxmlformats.org/presentationml/2006/main">
-  <p:cSld>
-    <p:spTree>
-      <p:nvGrpSpPr>
-        <p:cNvPr id="1" name=""/>
-        <p:cNvGrpSpPr/>
-        <p:nvPr/>
-      </p:nvGrpSpPr>
-      <p:grpSpPr>
-        <a:xfrm>
-          <a:off x="0" y="0"/>
-          <a:ext cx="0" cy="0"/>
-          <a:chOff x="0" y="0"/>
-          <a:chExt cx="0" cy="0"/>
-        </a:xfrm>
-      </p:grpSpPr>
-      <p:sp>
-        <p:nvSpPr>
-          <p:cNvPr id="2" name="Title 1">
-            <a:extLst>
-              <a:ext uri="{FF2B5EF4-FFF2-40B4-BE49-F238E27FC236}">
-                <a16:creationId xmlns:a16="http://schemas.microsoft.com/office/drawing/2014/main" id="{15477ACB-B862-C772-440F-B68C684D46A4}"/>
-              </a:ext>
-            </a:extLst>
-          </p:cNvPr>
-          <p:cNvSpPr>
-            <a:spLocks noGrp="1"/>
+              <a:t>::</a:t>
+            </a:r>
+            <a:r>
+              <a:rPr lang="en-CA" dirty="0" err="1"/>
+              <a:t>package_coverage</a:t>
+            </a:r>
+            <a:r>
+              <a:rPr lang="en-CA" dirty="0"/>
+              <a:t>() in the console</a:t>
+            </a:r>
+          </a:p>
+          <a:p>
+            <a:pPr lvl="1"/>
+            <a:r>
+              <a:rPr lang="en-CA" dirty="0"/>
+              <a:t>How much coverage do the tests have?</a:t>
+            </a:r>
+          </a:p>
+          <a:p>
+            <a:pPr lvl="1"/>
+            <a:endParaRPr lang="en-CA" dirty="0"/>
+          </a:p>
+          <a:p>
+            <a:r>
+              <a:rPr lang="en-CA" dirty="0"/>
+              <a:t>Run </a:t>
+            </a:r>
+            <a:r>
+              <a:rPr lang="en-CA" dirty="0" err="1"/>
+              <a:t>covr</a:t>
+            </a:r>
+            <a:r>
+              <a:rPr lang="en-CA" dirty="0"/>
+              <a:t>::report() to inspect the code coverage</a:t>
+            </a:r>
+          </a:p>
+          <a:p>
+            <a:pPr lvl="1"/>
+            <a:r>
+              <a:rPr lang="en-CA" dirty="0"/>
+              <a:t>Try to make new tests that improve code coverage</a:t>
+            </a:r>
+          </a:p>
+        </p:txBody>
+      </p:sp>
+      <p:sp>
+        <p:nvSpPr>
+          <p:cNvPr id="3" name="Title 1">
+            <a:extLst>
+              <a:ext uri="{FF2B5EF4-FFF2-40B4-BE49-F238E27FC236}">
+                <a16:creationId xmlns:a16="http://schemas.microsoft.com/office/drawing/2014/main" id="{368F37C7-24F4-47A1-0FC1-D6002BE72BA7}"/>
+              </a:ext>
+            </a:extLst>
+          </p:cNvPr>
+          <p:cNvSpPr txBox="1">
+            <a:spLocks/>
           </p:cNvSpPr>
-          <p:nvPr>
-            <p:ph type="title"/>
-          </p:nvPr>
-        </p:nvSpPr>
-        <p:spPr/>
-        <p:txBody>
-          <a:bodyPr/>
-          <a:lstStyle/>
-          <a:p>
-            <a:r>
-              <a:rPr lang="en-CA" dirty="0"/>
-              <a:t>When should I build the package?</a:t>
-            </a:r>
-          </a:p>
-        </p:txBody>
-      </p:sp>
-      <p:sp>
-        <p:nvSpPr>
-          <p:cNvPr id="3" name="Content Placeholder 2">
-            <a:extLst>
-              <a:ext uri="{FF2B5EF4-FFF2-40B4-BE49-F238E27FC236}">
-                <a16:creationId xmlns:a16="http://schemas.microsoft.com/office/drawing/2014/main" id="{4AC4EA5D-CC38-591E-6074-185129DD5CE6}"/>
-              </a:ext>
-            </a:extLst>
-          </p:cNvPr>
-          <p:cNvSpPr>
-            <a:spLocks noGrp="1"/>
-          </p:cNvSpPr>
-          <p:nvPr>
-            <p:ph idx="1"/>
-          </p:nvPr>
+          <p:nvPr/>
         </p:nvSpPr>
         <p:spPr>
           <a:xfrm>
-            <a:off x="389658" y="1697906"/>
-            <a:ext cx="5626678" cy="4803773"/>
-          </a:xfrm>
-        </p:spPr>
-        <p:txBody>
-          <a:bodyPr>
-            <a:normAutofit lnSpcReduction="10000"/>
-          </a:bodyPr>
-          <a:lstStyle/>
-          <a:p>
-            <a:r>
-              <a:rPr lang="en-CA" dirty="0"/>
-              <a:t>Often done after a project is completed</a:t>
-            </a:r>
-          </a:p>
-          <a:p>
-            <a:pPr lvl="1"/>
-            <a:r>
-              <a:rPr lang="en-CA" b="1" dirty="0"/>
-              <a:t>Will require a lot of refactoring</a:t>
-            </a:r>
-          </a:p>
-          <a:p>
-            <a:pPr lvl="1"/>
-            <a:endParaRPr lang="en-CA" dirty="0"/>
-          </a:p>
-          <a:p>
-            <a:r>
-              <a:rPr lang="en-CA" dirty="0"/>
-              <a:t>Suggestion: as soon as your model works</a:t>
-            </a:r>
-          </a:p>
-          <a:p>
-            <a:pPr lvl="1"/>
-            <a:r>
-              <a:rPr lang="en-CA" dirty="0"/>
-              <a:t>Easier to manage documenting functions</a:t>
-            </a:r>
-          </a:p>
-          <a:p>
-            <a:pPr lvl="1"/>
-            <a:r>
-              <a:rPr lang="en-CA" dirty="0"/>
-              <a:t>Easier to accumulate tests</a:t>
-            </a:r>
-          </a:p>
-          <a:p>
-            <a:pPr lvl="1"/>
-            <a:endParaRPr lang="en-CA" dirty="0"/>
-          </a:p>
-          <a:p>
-            <a:r>
-              <a:rPr lang="en-CA" dirty="0"/>
-              <a:t>Switching to a package early on </a:t>
-            </a:r>
-            <a:r>
-              <a:rPr lang="en-CA" b="1" dirty="0"/>
-              <a:t>will save time </a:t>
-            </a:r>
-            <a:r>
-              <a:rPr lang="en-CA" dirty="0"/>
-              <a:t>an </a:t>
-            </a:r>
-            <a:r>
-              <a:rPr lang="en-CA"/>
-              <a:t>avoid </a:t>
-            </a:r>
-            <a:r>
-              <a:rPr lang="en-CA" b="1"/>
-              <a:t>technical debt</a:t>
-            </a:r>
-            <a:endParaRPr lang="en-CA" b="1" dirty="0"/>
-          </a:p>
-          <a:p>
-            <a:endParaRPr lang="en-CA" dirty="0"/>
-          </a:p>
-        </p:txBody>
-      </p:sp>
-      <p:pic>
-        <p:nvPicPr>
-          <p:cNvPr id="4" name="Picture 3" descr="The benefits of testing (beyond working apps)">
-            <a:extLst>
-              <a:ext uri="{FF2B5EF4-FFF2-40B4-BE49-F238E27FC236}">
-                <a16:creationId xmlns:a16="http://schemas.microsoft.com/office/drawing/2014/main" id="{52C16FE1-7186-795C-8F0F-FD99EB18FB6D}"/>
-              </a:ext>
-            </a:extLst>
-          </p:cNvPr>
-          <p:cNvPicPr>
-            <a:picLocks noChangeAspect="1"/>
-          </p:cNvPicPr>
-          <p:nvPr/>
-        </p:nvPicPr>
-        <p:blipFill>
-          <a:blip r:embed="rId2"/>
-          <a:stretch>
-            <a:fillRect/>
-          </a:stretch>
-        </p:blipFill>
-        <p:spPr>
-          <a:xfrm>
-            <a:off x="5818909" y="1987427"/>
-            <a:ext cx="3159205" cy="3172667"/>
+            <a:off x="242372" y="1558637"/>
+            <a:ext cx="8658743" cy="1007918"/>
           </a:xfrm>
           <a:prstGeom prst="rect">
             <a:avLst/>
           </a:prstGeom>
         </p:spPr>
-      </p:pic>
-      <p:sp>
-        <p:nvSpPr>
-          <p:cNvPr id="5" name="TextBox 4">
-            <a:extLst>
-              <a:ext uri="{FF2B5EF4-FFF2-40B4-BE49-F238E27FC236}">
-                <a16:creationId xmlns:a16="http://schemas.microsoft.com/office/drawing/2014/main" id="{3D1F7038-F9F4-5E37-1747-2534A9C638F1}"/>
-              </a:ext>
-            </a:extLst>
-          </p:cNvPr>
-          <p:cNvSpPr txBox="1"/>
-          <p:nvPr/>
-        </p:nvSpPr>
-        <p:spPr>
-          <a:xfrm>
-            <a:off x="7066002" y="5155481"/>
-            <a:ext cx="862446" cy="369460"/>
-          </a:xfrm>
-          <a:prstGeom prst="rect">
-            <a:avLst/>
-          </a:prstGeom>
-          <a:noFill/>
-        </p:spPr>
-        <p:txBody>
-          <a:bodyPr wrap="square" rtlCol="0">
-            <a:spAutoFit/>
+        <p:txBody>
+          <a:bodyPr>
+            <a:noAutofit/>
           </a:bodyPr>
-          <a:lstStyle/>
-          <a:p>
-            <a:r>
-              <a:rPr lang="en-CA" dirty="0">
-                <a:hlinkClick r:id="rId3"/>
-              </a:rPr>
-              <a:t>Source</a:t>
-            </a:r>
-            <a:endParaRPr lang="en-CA" dirty="0"/>
+          <a:lstStyle>
+            <a:lvl1pPr algn="l" defTabSz="914175" rtl="0" eaLnBrk="1" latinLnBrk="0" hangingPunct="1">
+              <a:lnSpc>
+                <a:spcPct val="90000"/>
+              </a:lnSpc>
+              <a:spcBef>
+                <a:spcPct val="0"/>
+              </a:spcBef>
+              <a:buNone/>
+              <a:defRPr sz="4403" kern="1200">
+                <a:solidFill>
+                  <a:schemeClr val="tx1"/>
+                </a:solidFill>
+                <a:latin typeface="+mj-lt"/>
+                <a:ea typeface="+mj-ea"/>
+                <a:cs typeface="+mj-cs"/>
+              </a:defRPr>
+            </a:lvl1pPr>
+          </a:lstStyle>
+          <a:p>
+            <a:pPr algn="ctr"/>
+            <a:r>
+              <a:rPr lang="en-CA" sz="7200" dirty="0"/>
+              <a:t>Exercise</a:t>
+            </a:r>
           </a:p>
         </p:txBody>
       </p:sp>
     </p:spTree>
     <p:extLst>
       <p:ext uri="{BB962C8B-B14F-4D97-AF65-F5344CB8AC3E}">
-        <p14:creationId xmlns:p14="http://schemas.microsoft.com/office/powerpoint/2010/main" val="1563243774"/>
+        <p14:creationId xmlns:p14="http://schemas.microsoft.com/office/powerpoint/2010/main" val="720366200"/>
       </p:ext>
     </p:extLst>
   </p:cSld>
@@ -8424,6 +9126,228 @@
           <p:cNvPr id="2" name="Title 1">
             <a:extLst>
               <a:ext uri="{FF2B5EF4-FFF2-40B4-BE49-F238E27FC236}">
+                <a16:creationId xmlns:a16="http://schemas.microsoft.com/office/drawing/2014/main" id="{15477ACB-B862-C772-440F-B68C684D46A4}"/>
+              </a:ext>
+            </a:extLst>
+          </p:cNvPr>
+          <p:cNvSpPr>
+            <a:spLocks noGrp="1"/>
+          </p:cNvSpPr>
+          <p:nvPr>
+            <p:ph type="title"/>
+          </p:nvPr>
+        </p:nvSpPr>
+        <p:spPr/>
+        <p:txBody>
+          <a:bodyPr/>
+          <a:lstStyle/>
+          <a:p>
+            <a:r>
+              <a:rPr lang="en-CA" dirty="0"/>
+              <a:t>When should I build the package?</a:t>
+            </a:r>
+          </a:p>
+        </p:txBody>
+      </p:sp>
+      <p:sp>
+        <p:nvSpPr>
+          <p:cNvPr id="3" name="Content Placeholder 2">
+            <a:extLst>
+              <a:ext uri="{FF2B5EF4-FFF2-40B4-BE49-F238E27FC236}">
+                <a16:creationId xmlns:a16="http://schemas.microsoft.com/office/drawing/2014/main" id="{4AC4EA5D-CC38-591E-6074-185129DD5CE6}"/>
+              </a:ext>
+            </a:extLst>
+          </p:cNvPr>
+          <p:cNvSpPr>
+            <a:spLocks noGrp="1"/>
+          </p:cNvSpPr>
+          <p:nvPr>
+            <p:ph idx="1"/>
+          </p:nvPr>
+        </p:nvSpPr>
+        <p:spPr>
+          <a:xfrm>
+            <a:off x="389658" y="1697906"/>
+            <a:ext cx="5626678" cy="4803773"/>
+          </a:xfrm>
+        </p:spPr>
+        <p:txBody>
+          <a:bodyPr>
+            <a:normAutofit lnSpcReduction="10000"/>
+          </a:bodyPr>
+          <a:lstStyle/>
+          <a:p>
+            <a:r>
+              <a:rPr lang="en-CA" dirty="0"/>
+              <a:t>Often done after a project is completed</a:t>
+            </a:r>
+          </a:p>
+          <a:p>
+            <a:pPr lvl="1"/>
+            <a:r>
+              <a:rPr lang="en-CA" b="1" dirty="0"/>
+              <a:t>Will require a lot of refactoring</a:t>
+            </a:r>
+          </a:p>
+          <a:p>
+            <a:pPr lvl="1"/>
+            <a:endParaRPr lang="en-CA" dirty="0"/>
+          </a:p>
+          <a:p>
+            <a:r>
+              <a:rPr lang="en-CA" dirty="0"/>
+              <a:t>Suggestion: as soon as your model works</a:t>
+            </a:r>
+          </a:p>
+          <a:p>
+            <a:pPr lvl="1"/>
+            <a:r>
+              <a:rPr lang="en-CA" dirty="0"/>
+              <a:t>Easier to manage documenting functions</a:t>
+            </a:r>
+          </a:p>
+          <a:p>
+            <a:pPr lvl="1"/>
+            <a:r>
+              <a:rPr lang="en-CA" dirty="0"/>
+              <a:t>Easier to accumulate tests</a:t>
+            </a:r>
+          </a:p>
+          <a:p>
+            <a:pPr lvl="1"/>
+            <a:endParaRPr lang="en-CA" dirty="0"/>
+          </a:p>
+          <a:p>
+            <a:r>
+              <a:rPr lang="en-CA" dirty="0"/>
+              <a:t>Switching to a package early on </a:t>
+            </a:r>
+            <a:r>
+              <a:rPr lang="en-CA" b="1" dirty="0"/>
+              <a:t>will save time </a:t>
+            </a:r>
+            <a:r>
+              <a:rPr lang="en-CA" dirty="0"/>
+              <a:t>an </a:t>
+            </a:r>
+            <a:r>
+              <a:rPr lang="en-CA"/>
+              <a:t>avoid </a:t>
+            </a:r>
+            <a:r>
+              <a:rPr lang="en-CA" b="1"/>
+              <a:t>technical debt</a:t>
+            </a:r>
+            <a:endParaRPr lang="en-CA" b="1" dirty="0"/>
+          </a:p>
+          <a:p>
+            <a:endParaRPr lang="en-CA" dirty="0"/>
+          </a:p>
+        </p:txBody>
+      </p:sp>
+      <p:pic>
+        <p:nvPicPr>
+          <p:cNvPr id="4" name="Picture 3" descr="The benefits of testing (beyond working apps)">
+            <a:extLst>
+              <a:ext uri="{FF2B5EF4-FFF2-40B4-BE49-F238E27FC236}">
+                <a16:creationId xmlns:a16="http://schemas.microsoft.com/office/drawing/2014/main" id="{52C16FE1-7186-795C-8F0F-FD99EB18FB6D}"/>
+              </a:ext>
+            </a:extLst>
+          </p:cNvPr>
+          <p:cNvPicPr>
+            <a:picLocks noChangeAspect="1"/>
+          </p:cNvPicPr>
+          <p:nvPr/>
+        </p:nvPicPr>
+        <p:blipFill>
+          <a:blip r:embed="rId2"/>
+          <a:stretch>
+            <a:fillRect/>
+          </a:stretch>
+        </p:blipFill>
+        <p:spPr>
+          <a:xfrm>
+            <a:off x="5818909" y="1987427"/>
+            <a:ext cx="3159205" cy="3172667"/>
+          </a:xfrm>
+          <a:prstGeom prst="rect">
+            <a:avLst/>
+          </a:prstGeom>
+        </p:spPr>
+      </p:pic>
+      <p:sp>
+        <p:nvSpPr>
+          <p:cNvPr id="5" name="TextBox 4">
+            <a:extLst>
+              <a:ext uri="{FF2B5EF4-FFF2-40B4-BE49-F238E27FC236}">
+                <a16:creationId xmlns:a16="http://schemas.microsoft.com/office/drawing/2014/main" id="{3D1F7038-F9F4-5E37-1747-2534A9C638F1}"/>
+              </a:ext>
+            </a:extLst>
+          </p:cNvPr>
+          <p:cNvSpPr txBox="1"/>
+          <p:nvPr/>
+        </p:nvSpPr>
+        <p:spPr>
+          <a:xfrm>
+            <a:off x="7066002" y="5155481"/>
+            <a:ext cx="862446" cy="369460"/>
+          </a:xfrm>
+          <a:prstGeom prst="rect">
+            <a:avLst/>
+          </a:prstGeom>
+          <a:noFill/>
+        </p:spPr>
+        <p:txBody>
+          <a:bodyPr wrap="square" rtlCol="0">
+            <a:spAutoFit/>
+          </a:bodyPr>
+          <a:lstStyle/>
+          <a:p>
+            <a:r>
+              <a:rPr lang="en-CA" dirty="0">
+                <a:hlinkClick r:id="rId3"/>
+              </a:rPr>
+              <a:t>Source</a:t>
+            </a:r>
+            <a:endParaRPr lang="en-CA" dirty="0"/>
+          </a:p>
+        </p:txBody>
+      </p:sp>
+    </p:spTree>
+    <p:extLst>
+      <p:ext uri="{BB962C8B-B14F-4D97-AF65-F5344CB8AC3E}">
+        <p14:creationId xmlns:p14="http://schemas.microsoft.com/office/powerpoint/2010/main" val="1563243774"/>
+      </p:ext>
+    </p:extLst>
+  </p:cSld>
+  <p:clrMapOvr>
+    <a:masterClrMapping/>
+  </p:clrMapOvr>
+</p:sld>
+</file>
+
+<file path=ppt/slides/slide25.xml><?xml version="1.0" encoding="utf-8"?>
+<p:sld xmlns:a="http://schemas.openxmlformats.org/drawingml/2006/main" xmlns:r="http://schemas.openxmlformats.org/officeDocument/2006/relationships" xmlns:p="http://schemas.openxmlformats.org/presentationml/2006/main">
+  <p:cSld>
+    <p:spTree>
+      <p:nvGrpSpPr>
+        <p:cNvPr id="1" name=""/>
+        <p:cNvGrpSpPr/>
+        <p:nvPr/>
+      </p:nvGrpSpPr>
+      <p:grpSpPr>
+        <a:xfrm>
+          <a:off x="0" y="0"/>
+          <a:ext cx="0" cy="0"/>
+          <a:chOff x="0" y="0"/>
+          <a:chExt cx="0" cy="0"/>
+        </a:xfrm>
+      </p:grpSpPr>
+      <p:sp>
+        <p:nvSpPr>
+          <p:cNvPr id="2" name="Title 1">
+            <a:extLst>
+              <a:ext uri="{FF2B5EF4-FFF2-40B4-BE49-F238E27FC236}">
                 <a16:creationId xmlns:a16="http://schemas.microsoft.com/office/drawing/2014/main" id="{260F072D-5283-F238-3C41-44F306305CEC}"/>
               </a:ext>
             </a:extLst>
@@ -8547,7 +9471,7 @@
 </p:sld>
 </file>
 
-<file path=ppt/slides/slide25.xml><?xml version="1.0" encoding="utf-8"?>
+<file path=ppt/slides/slide26.xml><?xml version="1.0" encoding="utf-8"?>
 <p:sld xmlns:a="http://schemas.openxmlformats.org/drawingml/2006/main" xmlns:r="http://schemas.openxmlformats.org/officeDocument/2006/relationships" xmlns:p="http://schemas.openxmlformats.org/presentationml/2006/main">
   <p:cSld>
     <p:spTree>
@@ -8821,7 +9745,261 @@
 </p:sld>
 </file>
 
-<file path=ppt/slides/slide26.xml><?xml version="1.0" encoding="utf-8"?>
+<file path=ppt/slides/slide27.xml><?xml version="1.0" encoding="utf-8"?>
+<p:sld xmlns:a="http://schemas.openxmlformats.org/drawingml/2006/main" xmlns:r="http://schemas.openxmlformats.org/officeDocument/2006/relationships" xmlns:p="http://schemas.openxmlformats.org/presentationml/2006/main">
+  <p:cSld>
+    <p:spTree>
+      <p:nvGrpSpPr>
+        <p:cNvPr id="1" name="">
+          <a:extLst>
+            <a:ext uri="{FF2B5EF4-FFF2-40B4-BE49-F238E27FC236}">
+              <a16:creationId xmlns:a16="http://schemas.microsoft.com/office/drawing/2014/main" id="{8833CF6F-80B3-3D93-1354-F587D6940A6B}"/>
+            </a:ext>
+          </a:extLst>
+        </p:cNvPr>
+        <p:cNvGrpSpPr/>
+        <p:nvPr/>
+      </p:nvGrpSpPr>
+      <p:grpSpPr>
+        <a:xfrm>
+          <a:off x="0" y="0"/>
+          <a:ext cx="0" cy="0"/>
+          <a:chOff x="0" y="0"/>
+          <a:chExt cx="0" cy="0"/>
+        </a:xfrm>
+      </p:grpSpPr>
+      <p:sp>
+        <p:nvSpPr>
+          <p:cNvPr id="2" name="Title 1">
+            <a:extLst>
+              <a:ext uri="{FF2B5EF4-FFF2-40B4-BE49-F238E27FC236}">
+                <a16:creationId xmlns:a16="http://schemas.microsoft.com/office/drawing/2014/main" id="{69066888-ADDE-40A2-7304-8E31447D747D}"/>
+              </a:ext>
+            </a:extLst>
+          </p:cNvPr>
+          <p:cNvSpPr>
+            <a:spLocks noGrp="1"/>
+          </p:cNvSpPr>
+          <p:nvPr>
+            <p:ph type="title"/>
+          </p:nvPr>
+        </p:nvSpPr>
+        <p:spPr/>
+        <p:txBody>
+          <a:bodyPr/>
+          <a:lstStyle/>
+          <a:p>
+            <a:r>
+              <a:rPr lang="en-US" dirty="0"/>
+              <a:t>Function Documentation</a:t>
+            </a:r>
+          </a:p>
+        </p:txBody>
+      </p:sp>
+      <p:sp>
+        <p:nvSpPr>
+          <p:cNvPr id="3" name="Content Placeholder 2">
+            <a:extLst>
+              <a:ext uri="{FF2B5EF4-FFF2-40B4-BE49-F238E27FC236}">
+                <a16:creationId xmlns:a16="http://schemas.microsoft.com/office/drawing/2014/main" id="{A1CD167F-4475-118A-FCF1-E95134C491F4}"/>
+              </a:ext>
+            </a:extLst>
+          </p:cNvPr>
+          <p:cNvSpPr>
+            <a:spLocks noGrp="1"/>
+          </p:cNvSpPr>
+          <p:nvPr>
+            <p:ph sz="half" idx="1"/>
+          </p:nvPr>
+        </p:nvSpPr>
+        <p:spPr>
+          <a:xfrm>
+            <a:off x="140277" y="1690688"/>
+            <a:ext cx="7471063" cy="4077998"/>
+          </a:xfrm>
+        </p:spPr>
+        <p:txBody>
+          <a:bodyPr>
+            <a:normAutofit/>
+          </a:bodyPr>
+          <a:lstStyle/>
+          <a:p>
+            <a:pPr lvl="0"/>
+            <a:r>
+              <a:rPr lang="en-CA" b="1" dirty="0"/>
+              <a:t>@export </a:t>
+            </a:r>
+          </a:p>
+          <a:p>
+            <a:pPr lvl="1"/>
+            <a:r>
+              <a:rPr lang="en-CA" dirty="0"/>
+              <a:t>add a function to NAMESPACE</a:t>
+            </a:r>
+          </a:p>
+          <a:p>
+            <a:pPr lvl="0"/>
+            <a:r>
+              <a:rPr lang="en-CA" b="1" dirty="0"/>
+              <a:t>@importFrom package </a:t>
+            </a:r>
+            <a:r>
+              <a:rPr lang="en-CA" b="1" dirty="0" err="1"/>
+              <a:t>function_name</a:t>
+            </a:r>
+            <a:endParaRPr lang="en-CA" b="1" dirty="0"/>
+          </a:p>
+          <a:p>
+            <a:pPr lvl="1"/>
+            <a:r>
+              <a:rPr lang="en-CA" dirty="0"/>
+              <a:t>Add function from a dependency to NAMESPACE</a:t>
+            </a:r>
+          </a:p>
+          <a:p>
+            <a:pPr lvl="1"/>
+            <a:endParaRPr lang="en-US" b="1" dirty="0"/>
+          </a:p>
+          <a:p>
+            <a:endParaRPr lang="en-US" dirty="0"/>
+          </a:p>
+        </p:txBody>
+      </p:sp>
+      <p:pic>
+        <p:nvPicPr>
+          <p:cNvPr id="4" name="Picture 3" descr="In-Line Documentation for R • roxygen2">
+            <a:extLst>
+              <a:ext uri="{FF2B5EF4-FFF2-40B4-BE49-F238E27FC236}">
+                <a16:creationId xmlns:a16="http://schemas.microsoft.com/office/drawing/2014/main" id="{A6527F77-4B7D-9678-CB0B-5C1898100554}"/>
+              </a:ext>
+            </a:extLst>
+          </p:cNvPr>
+          <p:cNvPicPr>
+            <a:picLocks noChangeAspect="1"/>
+          </p:cNvPicPr>
+          <p:nvPr/>
+        </p:nvPicPr>
+        <p:blipFill>
+          <a:blip r:embed="rId2"/>
+          <a:stretch>
+            <a:fillRect/>
+          </a:stretch>
+        </p:blipFill>
+        <p:spPr>
+          <a:xfrm>
+            <a:off x="6717723" y="104342"/>
+            <a:ext cx="2286000" cy="2638425"/>
+          </a:xfrm>
+          <a:prstGeom prst="rect">
+            <a:avLst/>
+          </a:prstGeom>
+        </p:spPr>
+      </p:pic>
+      <p:grpSp>
+        <p:nvGrpSpPr>
+          <p:cNvPr id="8" name="Group 7">
+            <a:extLst>
+              <a:ext uri="{FF2B5EF4-FFF2-40B4-BE49-F238E27FC236}">
+                <a16:creationId xmlns:a16="http://schemas.microsoft.com/office/drawing/2014/main" id="{7A74E541-75E3-482C-408B-AC3005CD5DBE}"/>
+              </a:ext>
+            </a:extLst>
+          </p:cNvPr>
+          <p:cNvGrpSpPr/>
+          <p:nvPr/>
+        </p:nvGrpSpPr>
+        <p:grpSpPr>
+          <a:xfrm>
+            <a:off x="4032408" y="3429000"/>
+            <a:ext cx="5111592" cy="3020007"/>
+            <a:chOff x="4044435" y="2818818"/>
+            <a:chExt cx="5111592" cy="3020007"/>
+          </a:xfrm>
+        </p:grpSpPr>
+        <p:pic>
+          <p:nvPicPr>
+            <p:cNvPr id="6" name="Picture 5">
+              <a:extLst>
+                <a:ext uri="{FF2B5EF4-FFF2-40B4-BE49-F238E27FC236}">
+                  <a16:creationId xmlns:a16="http://schemas.microsoft.com/office/drawing/2014/main" id="{696D68C3-6046-622D-AB29-D328467C483C}"/>
+                </a:ext>
+              </a:extLst>
+            </p:cNvPr>
+            <p:cNvPicPr>
+              <a:picLocks noChangeAspect="1"/>
+            </p:cNvPicPr>
+            <p:nvPr/>
+          </p:nvPicPr>
+          <p:blipFill>
+            <a:blip r:embed="rId3"/>
+            <a:stretch>
+              <a:fillRect/>
+            </a:stretch>
+          </p:blipFill>
+          <p:spPr>
+            <a:xfrm>
+              <a:off x="4044435" y="3161001"/>
+              <a:ext cx="5111592" cy="2677824"/>
+            </a:xfrm>
+            <a:prstGeom prst="rect">
+              <a:avLst/>
+            </a:prstGeom>
+          </p:spPr>
+        </p:pic>
+        <p:sp>
+          <p:nvSpPr>
+            <p:cNvPr id="7" name="TextBox 6">
+              <a:extLst>
+                <a:ext uri="{FF2B5EF4-FFF2-40B4-BE49-F238E27FC236}">
+                  <a16:creationId xmlns:a16="http://schemas.microsoft.com/office/drawing/2014/main" id="{EB7C5550-8F15-9FF9-FD0E-65ECF4807013}"/>
+                </a:ext>
+              </a:extLst>
+            </p:cNvPr>
+            <p:cNvSpPr txBox="1"/>
+            <p:nvPr/>
+          </p:nvSpPr>
+          <p:spPr>
+            <a:xfrm>
+              <a:off x="4044435" y="2818818"/>
+              <a:ext cx="3169227" cy="369460"/>
+            </a:xfrm>
+            <a:prstGeom prst="rect">
+              <a:avLst/>
+            </a:prstGeom>
+            <a:noFill/>
+          </p:spPr>
+          <p:txBody>
+            <a:bodyPr wrap="square" rtlCol="0">
+              <a:spAutoFit/>
+            </a:bodyPr>
+            <a:lstStyle/>
+            <a:p>
+              <a:r>
+                <a:rPr lang="en-CA" b="1" u="sng" dirty="0"/>
+                <a:t>2_Simple_Package/R/</a:t>
+              </a:r>
+              <a:r>
+                <a:rPr lang="en-CA" b="1" u="sng" dirty="0" err="1"/>
+                <a:t>nmf_fit.R</a:t>
+              </a:r>
+              <a:endParaRPr lang="en-CA" b="1" u="sng" dirty="0"/>
+            </a:p>
+          </p:txBody>
+        </p:sp>
+      </p:grpSp>
+    </p:spTree>
+    <p:extLst>
+      <p:ext uri="{BB962C8B-B14F-4D97-AF65-F5344CB8AC3E}">
+        <p14:creationId xmlns:p14="http://schemas.microsoft.com/office/powerpoint/2010/main" val="875444263"/>
+      </p:ext>
+    </p:extLst>
+  </p:cSld>
+  <p:clrMapOvr>
+    <a:masterClrMapping/>
+  </p:clrMapOvr>
+</p:sld>
+</file>
+
+<file path=ppt/slides/slide28.xml><?xml version="1.0" encoding="utf-8"?>
 <p:sld xmlns:a="http://schemas.openxmlformats.org/drawingml/2006/main" xmlns:r="http://schemas.openxmlformats.org/officeDocument/2006/relationships" xmlns:p="http://schemas.openxmlformats.org/presentationml/2006/main">
   <p:cSld>
     <p:spTree>
@@ -8984,7 +10162,7 @@
 </p:sld>
 </file>
 
-<file path=ppt/slides/slide27.xml><?xml version="1.0" encoding="utf-8"?>
+<file path=ppt/slides/slide29.xml><?xml version="1.0" encoding="utf-8"?>
 <p:sld xmlns:a="http://schemas.openxmlformats.org/drawingml/2006/main" xmlns:r="http://schemas.openxmlformats.org/officeDocument/2006/relationships" xmlns:p="http://schemas.openxmlformats.org/presentationml/2006/main">
   <p:cSld>
     <p:spTree>
@@ -8992,7 +10170,7 @@
         <p:cNvPr id="1" name="">
           <a:extLst>
             <a:ext uri="{FF2B5EF4-FFF2-40B4-BE49-F238E27FC236}">
-              <a16:creationId xmlns:a16="http://schemas.microsoft.com/office/drawing/2014/main" id="{40EBC9C2-CD29-D342-90A5-203B102EF1CB}"/>
+              <a16:creationId xmlns:a16="http://schemas.microsoft.com/office/drawing/2014/main" id="{C9A1DEC2-4B2B-9C74-EC55-D5EB56C2633D}"/>
             </a:ext>
           </a:extLst>
         </p:cNvPr>
@@ -9009,10 +10187,10 @@
       </p:grpSpPr>
       <p:sp>
         <p:nvSpPr>
-          <p:cNvPr id="2" name="Title 1">
-            <a:extLst>
-              <a:ext uri="{FF2B5EF4-FFF2-40B4-BE49-F238E27FC236}">
-                <a16:creationId xmlns:a16="http://schemas.microsoft.com/office/drawing/2014/main" id="{1DC661F8-D6E6-38C4-D1F5-3004261B6511}"/>
+          <p:cNvPr id="2" name="Text Placeholder 1">
+            <a:extLst>
+              <a:ext uri="{FF2B5EF4-FFF2-40B4-BE49-F238E27FC236}">
+                <a16:creationId xmlns:a16="http://schemas.microsoft.com/office/drawing/2014/main" id="{B797973D-904F-6A6E-62A5-4D86D52AB87F}"/>
               </a:ext>
             </a:extLst>
           </p:cNvPr>
@@ -9020,39 +10198,117 @@
             <a:spLocks noGrp="1"/>
           </p:cNvSpPr>
           <p:nvPr>
-            <p:ph type="title"/>
+            <p:ph type="body" sz="quarter" idx="10"/>
           </p:nvPr>
         </p:nvSpPr>
         <p:spPr>
           <a:xfrm>
-            <a:off x="197427" y="3007733"/>
-            <a:ext cx="8946573" cy="2831958"/>
+            <a:off x="242372" y="2940626"/>
+            <a:ext cx="8658743" cy="3437951"/>
           </a:xfrm>
         </p:spPr>
         <p:txBody>
+          <a:bodyPr/>
+          <a:lstStyle/>
+          <a:p>
+            <a:r>
+              <a:rPr lang="en-CA" dirty="0"/>
+              <a:t>Open one of the .R files and try updating the function documentation</a:t>
+            </a:r>
+          </a:p>
+          <a:p>
+            <a:pPr lvl="1"/>
+            <a:r>
+              <a:rPr lang="en-CA" dirty="0"/>
+              <a:t>Run roxygen2::</a:t>
+            </a:r>
+            <a:r>
+              <a:rPr lang="en-CA" dirty="0" err="1"/>
+              <a:t>roxygenize</a:t>
+            </a:r>
+            <a:r>
+              <a:rPr lang="en-CA" dirty="0"/>
+              <a:t>() to update the function manual</a:t>
+            </a:r>
+          </a:p>
+          <a:p>
+            <a:pPr lvl="1"/>
+            <a:endParaRPr lang="en-CA" dirty="0"/>
+          </a:p>
+          <a:p>
+            <a:r>
+              <a:rPr lang="en-CA" dirty="0"/>
+              <a:t>Open the vignette and try tweaking the tutorial</a:t>
+            </a:r>
+          </a:p>
+          <a:p>
+            <a:pPr lvl="1"/>
+            <a:r>
+              <a:rPr lang="en-CA" dirty="0"/>
+              <a:t>Use </a:t>
+            </a:r>
+            <a:r>
+              <a:rPr lang="en-CA" dirty="0" err="1"/>
+              <a:t>knitr</a:t>
+            </a:r>
+            <a:r>
+              <a:rPr lang="en-CA" dirty="0"/>
+              <a:t> to render a new html of the file</a:t>
+            </a:r>
+          </a:p>
+        </p:txBody>
+      </p:sp>
+      <p:sp>
+        <p:nvSpPr>
+          <p:cNvPr id="3" name="Title 1">
+            <a:extLst>
+              <a:ext uri="{FF2B5EF4-FFF2-40B4-BE49-F238E27FC236}">
+                <a16:creationId xmlns:a16="http://schemas.microsoft.com/office/drawing/2014/main" id="{20CA45E4-414E-6F02-91BF-5A28198AF957}"/>
+              </a:ext>
+            </a:extLst>
+          </p:cNvPr>
+          <p:cNvSpPr txBox="1">
+            <a:spLocks/>
+          </p:cNvSpPr>
+          <p:nvPr/>
+        </p:nvSpPr>
+        <p:spPr>
+          <a:xfrm>
+            <a:off x="242372" y="1558637"/>
+            <a:ext cx="8658743" cy="1007918"/>
+          </a:xfrm>
+          <a:prstGeom prst="rect">
+            <a:avLst/>
+          </a:prstGeom>
+        </p:spPr>
+        <p:txBody>
           <a:bodyPr>
-            <a:normAutofit fontScale="90000"/>
+            <a:noAutofit/>
           </a:bodyPr>
-          <a:lstStyle/>
+          <a:lstStyle>
+            <a:lvl1pPr algn="l" defTabSz="914175" rtl="0" eaLnBrk="1" latinLnBrk="0" hangingPunct="1">
+              <a:lnSpc>
+                <a:spcPct val="90000"/>
+              </a:lnSpc>
+              <a:spcBef>
+                <a:spcPct val="0"/>
+              </a:spcBef>
+              <a:buNone/>
+              <a:defRPr sz="4403" kern="1200">
+                <a:solidFill>
+                  <a:schemeClr val="tx1"/>
+                </a:solidFill>
+                <a:latin typeface="+mj-lt"/>
+                <a:ea typeface="+mj-ea"/>
+                <a:cs typeface="+mj-cs"/>
+              </a:defRPr>
+            </a:lvl1pPr>
+          </a:lstStyle>
           <a:p>
             <a:pPr algn="ctr"/>
             <a:r>
-              <a:rPr lang="en-CA" dirty="0"/>
+              <a:rPr lang="en-CA" sz="7200" dirty="0"/>
               <a:t>Exercise</a:t>
-            </a:r>
-            <a:br>
-              <a:rPr lang="en-CA" dirty="0"/>
-            </a:br>
-            <a:r>
-              <a:rPr lang="en-CA" dirty="0"/>
-              <a:t>Modify the function descriptions and vignettes</a:t>
-            </a:r>
-            <a:br>
-              <a:rPr lang="en-CA" dirty="0"/>
-            </a:br>
-            <a:r>
-              <a:rPr lang="en-CA" dirty="0"/>
-              <a:t>Render with roxygen2 and the build command</a:t>
             </a:r>
           </a:p>
         </p:txBody>
@@ -9060,7 +10316,7 @@
     </p:spTree>
     <p:extLst>
       <p:ext uri="{BB962C8B-B14F-4D97-AF65-F5344CB8AC3E}">
-        <p14:creationId xmlns:p14="http://schemas.microsoft.com/office/powerpoint/2010/main" val="1724832574"/>
+        <p14:creationId xmlns:p14="http://schemas.microsoft.com/office/powerpoint/2010/main" val="2482499284"/>
       </p:ext>
     </p:extLst>
   </p:cSld>
@@ -9070,7 +10326,78 @@
 </p:sld>
 </file>
 
-<file path=ppt/slides/slide28.xml><?xml version="1.0" encoding="utf-8"?>
+<file path=ppt/slides/slide3.xml><?xml version="1.0" encoding="utf-8"?>
+<p:sld xmlns:a="http://schemas.openxmlformats.org/drawingml/2006/main" xmlns:r="http://schemas.openxmlformats.org/officeDocument/2006/relationships" xmlns:p="http://schemas.openxmlformats.org/presentationml/2006/main">
+  <p:cSld>
+    <p:spTree>
+      <p:nvGrpSpPr>
+        <p:cNvPr id="1" name=""/>
+        <p:cNvGrpSpPr/>
+        <p:nvPr/>
+      </p:nvGrpSpPr>
+      <p:grpSpPr>
+        <a:xfrm>
+          <a:off x="0" y="0"/>
+          <a:ext cx="0" cy="0"/>
+          <a:chOff x="0" y="0"/>
+          <a:chExt cx="0" cy="0"/>
+        </a:xfrm>
+      </p:grpSpPr>
+      <p:sp>
+        <p:nvSpPr>
+          <p:cNvPr id="2" name="Title 1">
+            <a:extLst>
+              <a:ext uri="{FF2B5EF4-FFF2-40B4-BE49-F238E27FC236}">
+                <a16:creationId xmlns:a16="http://schemas.microsoft.com/office/drawing/2014/main" id="{2B830F0B-3D18-9732-3108-323F8DEEBA14}"/>
+              </a:ext>
+            </a:extLst>
+          </p:cNvPr>
+          <p:cNvSpPr>
+            <a:spLocks noGrp="1"/>
+          </p:cNvSpPr>
+          <p:nvPr>
+            <p:ph type="title"/>
+          </p:nvPr>
+        </p:nvSpPr>
+        <p:spPr>
+          <a:xfrm>
+            <a:off x="628650" y="1186403"/>
+            <a:ext cx="7886700" cy="4485193"/>
+          </a:xfrm>
+        </p:spPr>
+        <p:txBody>
+          <a:bodyPr>
+            <a:normAutofit/>
+          </a:bodyPr>
+          <a:lstStyle/>
+          <a:p>
+            <a:pPr algn="ctr"/>
+            <a:r>
+              <a:rPr lang="en-AU" sz="6600" dirty="0">
+                <a:solidFill>
+                  <a:schemeClr val="accent1"/>
+                </a:solidFill>
+                <a:latin typeface="Montserrat SemiBold" panose="00000700000000000000" pitchFamily="50" charset="0"/>
+              </a:rPr>
+              <a:t>START</a:t>
+            </a:r>
+          </a:p>
+        </p:txBody>
+      </p:sp>
+    </p:spTree>
+    <p:extLst>
+      <p:ext uri="{BB962C8B-B14F-4D97-AF65-F5344CB8AC3E}">
+        <p14:creationId xmlns:p14="http://schemas.microsoft.com/office/powerpoint/2010/main" val="4072911522"/>
+      </p:ext>
+    </p:extLst>
+  </p:cSld>
+  <p:clrMapOvr>
+    <a:masterClrMapping/>
+  </p:clrMapOvr>
+</p:sld>
+</file>
+
+<file path=ppt/slides/slide30.xml><?xml version="1.0" encoding="utf-8"?>
 <p:sld xmlns:a="http://schemas.openxmlformats.org/drawingml/2006/main" xmlns:r="http://schemas.openxmlformats.org/officeDocument/2006/relationships" xmlns:p="http://schemas.openxmlformats.org/presentationml/2006/main">
   <p:cSld>
     <p:spTree>
@@ -9256,7 +10583,7 @@
 </p:sld>
 </file>
 
-<file path=ppt/slides/slide29.xml><?xml version="1.0" encoding="utf-8"?>
+<file path=ppt/slides/slide31.xml><?xml version="1.0" encoding="utf-8"?>
 <p:sld xmlns:a="http://schemas.openxmlformats.org/drawingml/2006/main" xmlns:r="http://schemas.openxmlformats.org/officeDocument/2006/relationships" xmlns:p="http://schemas.openxmlformats.org/presentationml/2006/main">
   <p:cSld>
     <p:spTree>
@@ -9522,78 +10849,7 @@
 </p:sld>
 </file>
 
-<file path=ppt/slides/slide3.xml><?xml version="1.0" encoding="utf-8"?>
-<p:sld xmlns:a="http://schemas.openxmlformats.org/drawingml/2006/main" xmlns:r="http://schemas.openxmlformats.org/officeDocument/2006/relationships" xmlns:p="http://schemas.openxmlformats.org/presentationml/2006/main">
-  <p:cSld>
-    <p:spTree>
-      <p:nvGrpSpPr>
-        <p:cNvPr id="1" name=""/>
-        <p:cNvGrpSpPr/>
-        <p:nvPr/>
-      </p:nvGrpSpPr>
-      <p:grpSpPr>
-        <a:xfrm>
-          <a:off x="0" y="0"/>
-          <a:ext cx="0" cy="0"/>
-          <a:chOff x="0" y="0"/>
-          <a:chExt cx="0" cy="0"/>
-        </a:xfrm>
-      </p:grpSpPr>
-      <p:sp>
-        <p:nvSpPr>
-          <p:cNvPr id="2" name="Title 1">
-            <a:extLst>
-              <a:ext uri="{FF2B5EF4-FFF2-40B4-BE49-F238E27FC236}">
-                <a16:creationId xmlns:a16="http://schemas.microsoft.com/office/drawing/2014/main" id="{2B830F0B-3D18-9732-3108-323F8DEEBA14}"/>
-              </a:ext>
-            </a:extLst>
-          </p:cNvPr>
-          <p:cNvSpPr>
-            <a:spLocks noGrp="1"/>
-          </p:cNvSpPr>
-          <p:nvPr>
-            <p:ph type="title"/>
-          </p:nvPr>
-        </p:nvSpPr>
-        <p:spPr>
-          <a:xfrm>
-            <a:off x="628650" y="1186403"/>
-            <a:ext cx="7886700" cy="4485193"/>
-          </a:xfrm>
-        </p:spPr>
-        <p:txBody>
-          <a:bodyPr>
-            <a:normAutofit/>
-          </a:bodyPr>
-          <a:lstStyle/>
-          <a:p>
-            <a:pPr algn="ctr"/>
-            <a:r>
-              <a:rPr lang="en-AU" sz="6600" dirty="0">
-                <a:solidFill>
-                  <a:schemeClr val="accent1"/>
-                </a:solidFill>
-                <a:latin typeface="Montserrat SemiBold" panose="00000700000000000000" pitchFamily="50" charset="0"/>
-              </a:rPr>
-              <a:t>START</a:t>
-            </a:r>
-          </a:p>
-        </p:txBody>
-      </p:sp>
-    </p:spTree>
-    <p:extLst>
-      <p:ext uri="{BB962C8B-B14F-4D97-AF65-F5344CB8AC3E}">
-        <p14:creationId xmlns:p14="http://schemas.microsoft.com/office/powerpoint/2010/main" val="4072911522"/>
-      </p:ext>
-    </p:extLst>
-  </p:cSld>
-  <p:clrMapOvr>
-    <a:masterClrMapping/>
-  </p:clrMapOvr>
-</p:sld>
-</file>
-
-<file path=ppt/slides/slide30.xml><?xml version="1.0" encoding="utf-8"?>
+<file path=ppt/slides/slide32.xml><?xml version="1.0" encoding="utf-8"?>
 <p:sld xmlns:a="http://schemas.openxmlformats.org/drawingml/2006/main" xmlns:r="http://schemas.openxmlformats.org/officeDocument/2006/relationships" xmlns:p="http://schemas.openxmlformats.org/presentationml/2006/main">
   <p:cSld>
     <p:spTree>
@@ -9779,7 +11035,7 @@
 </p:sld>
 </file>
 
-<file path=ppt/slides/slide31.xml><?xml version="1.0" encoding="utf-8"?>
+<file path=ppt/slides/slide33.xml><?xml version="1.0" encoding="utf-8"?>
 <p:sld xmlns:a="http://schemas.openxmlformats.org/drawingml/2006/main" xmlns:r="http://schemas.openxmlformats.org/officeDocument/2006/relationships" xmlns:p="http://schemas.openxmlformats.org/presentationml/2006/main">
   <p:cSld>
     <p:spTree>
@@ -11172,7 +12428,7 @@
 </p:sld>
 </file>
 
-<file path=ppt/slides/slide32.xml><?xml version="1.0" encoding="utf-8"?>
+<file path=ppt/slides/slide34.xml><?xml version="1.0" encoding="utf-8"?>
 <p:sld xmlns:a="http://schemas.openxmlformats.org/drawingml/2006/main" xmlns:r="http://schemas.openxmlformats.org/officeDocument/2006/relationships" xmlns:p="http://schemas.openxmlformats.org/presentationml/2006/main">
   <p:cSld>
     <p:spTree>
@@ -12280,7 +13536,7 @@
 </p:sld>
 </file>
 
-<file path=ppt/slides/slide33.xml><?xml version="1.0" encoding="utf-8"?>
+<file path=ppt/slides/slide35.xml><?xml version="1.0" encoding="utf-8"?>
 <p:sld xmlns:a="http://schemas.openxmlformats.org/drawingml/2006/main" xmlns:r="http://schemas.openxmlformats.org/officeDocument/2006/relationships" xmlns:p="http://schemas.openxmlformats.org/presentationml/2006/main">
   <p:cSld>
     <p:spTree>
@@ -13369,7 +14625,7 @@
 </p:sld>
 </file>
 
-<file path=ppt/slides/slide34.xml><?xml version="1.0" encoding="utf-8"?>
+<file path=ppt/slides/slide36.xml><?xml version="1.0" encoding="utf-8"?>
 <p:sld xmlns:a="http://schemas.openxmlformats.org/drawingml/2006/main" xmlns:r="http://schemas.openxmlformats.org/officeDocument/2006/relationships" xmlns:p="http://schemas.openxmlformats.org/presentationml/2006/main">
   <p:cSld>
     <p:spTree>
@@ -14408,7 +15664,7 @@
 </p:sld>
 </file>
 
-<file path=ppt/slides/slide35.xml><?xml version="1.0" encoding="utf-8"?>
+<file path=ppt/slides/slide37.xml><?xml version="1.0" encoding="utf-8"?>
 <p:sld xmlns:a="http://schemas.openxmlformats.org/drawingml/2006/main" xmlns:r="http://schemas.openxmlformats.org/officeDocument/2006/relationships" xmlns:p="http://schemas.openxmlformats.org/presentationml/2006/main">
   <p:cSld>
     <p:spTree>
@@ -15509,7 +16765,7 @@
 </p:sld>
 </file>
 
-<file path=ppt/slides/slide36.xml><?xml version="1.0" encoding="utf-8"?>
+<file path=ppt/slides/slide38.xml><?xml version="1.0" encoding="utf-8"?>
 <p:sld xmlns:a="http://schemas.openxmlformats.org/drawingml/2006/main" xmlns:r="http://schemas.openxmlformats.org/officeDocument/2006/relationships" xmlns:p="http://schemas.openxmlformats.org/presentationml/2006/main">
   <p:cSld>
     <p:spTree>
@@ -16323,7 +17579,7 @@
 </p:sld>
 </file>
 
-<file path=ppt/slides/slide37.xml><?xml version="1.0" encoding="utf-8"?>
+<file path=ppt/slides/slide39.xml><?xml version="1.0" encoding="utf-8"?>
 <p:sld xmlns:a="http://schemas.openxmlformats.org/drawingml/2006/main" xmlns:r="http://schemas.openxmlformats.org/officeDocument/2006/relationships" xmlns:p="http://schemas.openxmlformats.org/presentationml/2006/main">
   <p:cSld>
     <p:spTree>
@@ -18170,18 +19426,12 @@
 </p:sld>
 </file>
 
-<file path=ppt/slides/slide38.xml><?xml version="1.0" encoding="utf-8"?>
+<file path=ppt/slides/slide4.xml><?xml version="1.0" encoding="utf-8"?>
 <p:sld xmlns:a="http://schemas.openxmlformats.org/drawingml/2006/main" xmlns:r="http://schemas.openxmlformats.org/officeDocument/2006/relationships" xmlns:p="http://schemas.openxmlformats.org/presentationml/2006/main">
   <p:cSld>
     <p:spTree>
       <p:nvGrpSpPr>
-        <p:cNvPr id="1" name="">
-          <a:extLst>
-            <a:ext uri="{FF2B5EF4-FFF2-40B4-BE49-F238E27FC236}">
-              <a16:creationId xmlns:a16="http://schemas.microsoft.com/office/drawing/2014/main" id="{C8EF3EF7-43A2-78F6-EB59-4DBB2F245A0F}"/>
-            </a:ext>
-          </a:extLst>
-        </p:cNvPr>
+        <p:cNvPr id="1" name=""/>
         <p:cNvGrpSpPr/>
         <p:nvPr/>
       </p:nvGrpSpPr>
@@ -18198,7 +19448,7 @@
           <p:cNvPr id="3" name="Title 1">
             <a:extLst>
               <a:ext uri="{FF2B5EF4-FFF2-40B4-BE49-F238E27FC236}">
-                <a16:creationId xmlns:a16="http://schemas.microsoft.com/office/drawing/2014/main" id="{154509B3-1BE7-E9C4-5DF5-A583F50756B6}"/>
+                <a16:creationId xmlns:a16="http://schemas.microsoft.com/office/drawing/2014/main" id="{1A675FF3-F5C4-4D9D-72F6-339B99ED886F}"/>
               </a:ext>
             </a:extLst>
           </p:cNvPr>
@@ -18211,7 +19461,7 @@
         </p:nvSpPr>
         <p:spPr>
           <a:xfrm>
-            <a:off x="623888" y="1709741"/>
+            <a:off x="623888" y="1564267"/>
             <a:ext cx="7886700" cy="2852738"/>
           </a:xfrm>
         </p:spPr>
@@ -18220,8 +19470,8 @@
           <a:lstStyle/>
           <a:p>
             <a:r>
-              <a:rPr lang="en-US" dirty="0"/>
-              <a:t>3. GitHub Actions</a:t>
+              <a:rPr lang="en-US" b="1" dirty="0"/>
+              <a:t>R Package Development</a:t>
             </a:r>
           </a:p>
         </p:txBody>
@@ -18231,7 +19481,7 @@
           <p:cNvPr id="4" name="Text Placeholder 2">
             <a:extLst>
               <a:ext uri="{FF2B5EF4-FFF2-40B4-BE49-F238E27FC236}">
-                <a16:creationId xmlns:a16="http://schemas.microsoft.com/office/drawing/2014/main" id="{245E83F0-BAE8-F599-E0A3-B0F02F9C6035}"/>
+                <a16:creationId xmlns:a16="http://schemas.microsoft.com/office/drawing/2014/main" id="{5FC2150F-A588-4511-139C-D809D8400571}"/>
               </a:ext>
             </a:extLst>
           </p:cNvPr>
@@ -18421,12 +19671,74 @@
             </a:pPr>
             <a:endParaRPr lang="en-US" dirty="0"/>
           </a:p>
-        </p:txBody>
-      </p:sp>
+          <a:p>
+            <a:pPr marL="0" indent="0">
+              <a:buNone/>
+            </a:pPr>
+            <a:r>
+              <a:rPr lang="en-US" dirty="0"/>
+              <a:t>Instructor: Adrien Osakwe</a:t>
+            </a:r>
+          </a:p>
+          <a:p>
+            <a:pPr marL="0" indent="0">
+              <a:buNone/>
+            </a:pPr>
+            <a:r>
+              <a:rPr lang="en-US" dirty="0"/>
+              <a:t>Facilitators: Zahra </a:t>
+            </a:r>
+            <a:r>
+              <a:rPr lang="en-US" dirty="0" err="1"/>
+              <a:t>Tavakol</a:t>
+            </a:r>
+            <a:r>
+              <a:rPr lang="en-US" dirty="0"/>
+              <a:t> Hamedani  &amp; Megan Tsao</a:t>
+            </a:r>
+          </a:p>
+        </p:txBody>
+      </p:sp>
+      <p:pic>
+        <p:nvPicPr>
+          <p:cNvPr id="2" name="Content Placeholder 4">
+            <a:extLst>
+              <a:ext uri="{FF2B5EF4-FFF2-40B4-BE49-F238E27FC236}">
+                <a16:creationId xmlns:a16="http://schemas.microsoft.com/office/drawing/2014/main" id="{2B557A83-72AC-9342-6D18-444AE41A1DB0}"/>
+              </a:ext>
+            </a:extLst>
+          </p:cNvPr>
+          <p:cNvPicPr>
+            <a:picLocks noChangeAspect="1"/>
+          </p:cNvPicPr>
+          <p:nvPr/>
+        </p:nvPicPr>
+        <p:blipFill>
+          <a:blip r:embed="rId3">
+            <a:extLst>
+              <a:ext uri="{28A0092B-C50C-407E-A947-70E740481C1C}">
+                <a14:useLocalDpi xmlns:a14="http://schemas.microsoft.com/office/drawing/2010/main" val="0"/>
+              </a:ext>
+            </a:extLst>
+          </a:blip>
+          <a:stretch>
+            <a:fillRect/>
+          </a:stretch>
+        </p:blipFill>
+        <p:spPr>
+          <a:xfrm>
+            <a:off x="0" y="6355644"/>
+            <a:ext cx="1414813" cy="364579"/>
+          </a:xfrm>
+          <a:prstGeom prst="rect">
+            <a:avLst/>
+          </a:prstGeom>
+        </p:spPr>
+      </p:pic>
     </p:spTree>
     <p:extLst>
       <p:ext uri="{BB962C8B-B14F-4D97-AF65-F5344CB8AC3E}">
-        <p14:creationId xmlns:p14="http://schemas.microsoft.com/office/powerpoint/2010/main" val="2341505858"/>
+        <p14:creationId xmlns:p14="http://schemas.microsoft.com/office/powerpoint/2010/main" val="3587535936"/>
       </p:ext>
     </p:extLst>
   </p:cSld>
@@ -18436,12 +19748,18 @@
 </p:sld>
 </file>
 
-<file path=ppt/slides/slide39.xml><?xml version="1.0" encoding="utf-8"?>
+<file path=ppt/slides/slide40.xml><?xml version="1.0" encoding="utf-8"?>
 <p:sld xmlns:a="http://schemas.openxmlformats.org/drawingml/2006/main" xmlns:r="http://schemas.openxmlformats.org/officeDocument/2006/relationships" xmlns:p="http://schemas.openxmlformats.org/presentationml/2006/main">
   <p:cSld>
     <p:spTree>
       <p:nvGrpSpPr>
-        <p:cNvPr id="1" name=""/>
+        <p:cNvPr id="1" name="">
+          <a:extLst>
+            <a:ext uri="{FF2B5EF4-FFF2-40B4-BE49-F238E27FC236}">
+              <a16:creationId xmlns:a16="http://schemas.microsoft.com/office/drawing/2014/main" id="{C8EF3EF7-43A2-78F6-EB59-4DBB2F245A0F}"/>
+            </a:ext>
+          </a:extLst>
+        </p:cNvPr>
         <p:cNvGrpSpPr/>
         <p:nvPr/>
       </p:nvGrpSpPr>
@@ -18455,10 +19773,10 @@
       </p:grpSpPr>
       <p:sp>
         <p:nvSpPr>
-          <p:cNvPr id="2" name="Title 1">
-            <a:extLst>
-              <a:ext uri="{FF2B5EF4-FFF2-40B4-BE49-F238E27FC236}">
-                <a16:creationId xmlns:a16="http://schemas.microsoft.com/office/drawing/2014/main" id="{74428F7B-DC2B-85A5-1C1F-AD0171621091}"/>
+          <p:cNvPr id="3" name="Title 1">
+            <a:extLst>
+              <a:ext uri="{FF2B5EF4-FFF2-40B4-BE49-F238E27FC236}">
+                <a16:creationId xmlns:a16="http://schemas.microsoft.com/office/drawing/2014/main" id="{154509B3-1BE7-E9C4-5DF5-A583F50756B6}"/>
               </a:ext>
             </a:extLst>
           </p:cNvPr>
@@ -18469,179 +19787,9 @@
             <p:ph type="title"/>
           </p:nvPr>
         </p:nvSpPr>
-        <p:spPr/>
-        <p:txBody>
-          <a:bodyPr/>
-          <a:lstStyle/>
-          <a:p>
-            <a:r>
-              <a:rPr lang="en-US" dirty="0"/>
-              <a:t>Maintaining a package is tedious</a:t>
-            </a:r>
-          </a:p>
-        </p:txBody>
-      </p:sp>
-      <p:sp>
-        <p:nvSpPr>
-          <p:cNvPr id="3" name="Content Placeholder 2">
-            <a:extLst>
-              <a:ext uri="{FF2B5EF4-FFF2-40B4-BE49-F238E27FC236}">
-                <a16:creationId xmlns:a16="http://schemas.microsoft.com/office/drawing/2014/main" id="{33D959FC-3BD5-F79B-6D54-99514B14242D}"/>
-              </a:ext>
-            </a:extLst>
-          </p:cNvPr>
-          <p:cNvSpPr>
-            <a:spLocks noGrp="1"/>
-          </p:cNvSpPr>
-          <p:nvPr>
-            <p:ph idx="1"/>
-          </p:nvPr>
-        </p:nvSpPr>
         <p:spPr>
           <a:xfrm>
-            <a:off x="628650" y="1288473"/>
-            <a:ext cx="7886700" cy="4888489"/>
-          </a:xfrm>
-        </p:spPr>
-        <p:txBody>
-          <a:bodyPr/>
-          <a:lstStyle/>
-          <a:p>
-            <a:r>
-              <a:rPr lang="en-US" dirty="0"/>
-              <a:t>New features may break existing code</a:t>
-            </a:r>
-          </a:p>
-          <a:p>
-            <a:r>
-              <a:rPr lang="en-US" dirty="0"/>
-              <a:t>Tests might start failing</a:t>
-            </a:r>
-          </a:p>
-          <a:p>
-            <a:r>
-              <a:rPr lang="en-US" dirty="0"/>
-              <a:t>Dependencies may no longer be compatible</a:t>
-            </a:r>
-          </a:p>
-          <a:p>
-            <a:r>
-              <a:rPr lang="en-US" b="1" dirty="0"/>
-              <a:t>Cannot manually inspect this 24/7</a:t>
-            </a:r>
-          </a:p>
-        </p:txBody>
-      </p:sp>
-      <p:pic>
-        <p:nvPicPr>
-          <p:cNvPr id="7" name="Picture 6">
-            <a:extLst>
-              <a:ext uri="{FF2B5EF4-FFF2-40B4-BE49-F238E27FC236}">
-                <a16:creationId xmlns:a16="http://schemas.microsoft.com/office/drawing/2014/main" id="{908967C0-CAC0-F0BE-95BC-3B9A8632E04F}"/>
-              </a:ext>
-            </a:extLst>
-          </p:cNvPr>
-          <p:cNvPicPr>
-            <a:picLocks noChangeAspect="1"/>
-          </p:cNvPicPr>
-          <p:nvPr/>
-        </p:nvPicPr>
-        <p:blipFill>
-          <a:blip r:embed="rId3"/>
-          <a:srcRect r="51547"/>
-          <a:stretch>
-            <a:fillRect/>
-          </a:stretch>
-        </p:blipFill>
-        <p:spPr>
-          <a:xfrm>
-            <a:off x="221186" y="3409823"/>
-            <a:ext cx="3389656" cy="3014139"/>
-          </a:xfrm>
-          <a:prstGeom prst="rect">
-            <a:avLst/>
-          </a:prstGeom>
-        </p:spPr>
-      </p:pic>
-      <p:pic>
-        <p:nvPicPr>
-          <p:cNvPr id="9" name="Picture 8">
-            <a:extLst>
-              <a:ext uri="{FF2B5EF4-FFF2-40B4-BE49-F238E27FC236}">
-                <a16:creationId xmlns:a16="http://schemas.microsoft.com/office/drawing/2014/main" id="{351324C2-C86F-1719-48FD-DD74BBD303ED}"/>
-              </a:ext>
-            </a:extLst>
-          </p:cNvPr>
-          <p:cNvPicPr>
-            <a:picLocks noChangeAspect="1"/>
-          </p:cNvPicPr>
-          <p:nvPr/>
-        </p:nvPicPr>
-        <p:blipFill>
-          <a:blip r:embed="rId4"/>
-          <a:stretch>
-            <a:fillRect/>
-          </a:stretch>
-        </p:blipFill>
-        <p:spPr>
-          <a:xfrm>
-            <a:off x="4083627" y="3409823"/>
-            <a:ext cx="4904509" cy="3014139"/>
-          </a:xfrm>
-          <a:prstGeom prst="rect">
-            <a:avLst/>
-          </a:prstGeom>
-        </p:spPr>
-      </p:pic>
-    </p:spTree>
-    <p:extLst>
-      <p:ext uri="{BB962C8B-B14F-4D97-AF65-F5344CB8AC3E}">
-        <p14:creationId xmlns:p14="http://schemas.microsoft.com/office/powerpoint/2010/main" val="4003429187"/>
-      </p:ext>
-    </p:extLst>
-  </p:cSld>
-  <p:clrMapOvr>
-    <a:masterClrMapping/>
-  </p:clrMapOvr>
-</p:sld>
-</file>
-
-<file path=ppt/slides/slide4.xml><?xml version="1.0" encoding="utf-8"?>
-<p:sld xmlns:a="http://schemas.openxmlformats.org/drawingml/2006/main" xmlns:r="http://schemas.openxmlformats.org/officeDocument/2006/relationships" xmlns:p="http://schemas.openxmlformats.org/presentationml/2006/main">
-  <p:cSld>
-    <p:spTree>
-      <p:nvGrpSpPr>
-        <p:cNvPr id="1" name=""/>
-        <p:cNvGrpSpPr/>
-        <p:nvPr/>
-      </p:nvGrpSpPr>
-      <p:grpSpPr>
-        <a:xfrm>
-          <a:off x="0" y="0"/>
-          <a:ext cx="0" cy="0"/>
-          <a:chOff x="0" y="0"/>
-          <a:chExt cx="0" cy="0"/>
-        </a:xfrm>
-      </p:grpSpPr>
-      <p:sp>
-        <p:nvSpPr>
-          <p:cNvPr id="3" name="Title 1">
-            <a:extLst>
-              <a:ext uri="{FF2B5EF4-FFF2-40B4-BE49-F238E27FC236}">
-                <a16:creationId xmlns:a16="http://schemas.microsoft.com/office/drawing/2014/main" id="{1A675FF3-F5C4-4D9D-72F6-339B99ED886F}"/>
-              </a:ext>
-            </a:extLst>
-          </p:cNvPr>
-          <p:cNvSpPr>
-            <a:spLocks noGrp="1"/>
-          </p:cNvSpPr>
-          <p:nvPr>
-            <p:ph type="title"/>
-          </p:nvPr>
-        </p:nvSpPr>
-        <p:spPr>
-          <a:xfrm>
-            <a:off x="623888" y="1564267"/>
+            <a:off x="623888" y="1709741"/>
             <a:ext cx="7886700" cy="2852738"/>
           </a:xfrm>
         </p:spPr>
@@ -18650,8 +19798,8 @@
           <a:lstStyle/>
           <a:p>
             <a:r>
-              <a:rPr lang="en-US" b="1" dirty="0"/>
-              <a:t>R Package Development</a:t>
+              <a:rPr lang="en-US" dirty="0"/>
+              <a:t>3. GitHub Actions</a:t>
             </a:r>
           </a:p>
         </p:txBody>
@@ -18661,7 +19809,7 @@
           <p:cNvPr id="4" name="Text Placeholder 2">
             <a:extLst>
               <a:ext uri="{FF2B5EF4-FFF2-40B4-BE49-F238E27FC236}">
-                <a16:creationId xmlns:a16="http://schemas.microsoft.com/office/drawing/2014/main" id="{5FC2150F-A588-4511-139C-D809D8400571}"/>
+                <a16:creationId xmlns:a16="http://schemas.microsoft.com/office/drawing/2014/main" id="{245E83F0-BAE8-F599-E0A3-B0F02F9C6035}"/>
               </a:ext>
             </a:extLst>
           </p:cNvPr>
@@ -18851,40 +19999,123 @@
             </a:pPr>
             <a:endParaRPr lang="en-US" dirty="0"/>
           </a:p>
-          <a:p>
-            <a:pPr marL="0" indent="0">
-              <a:buNone/>
-            </a:pPr>
+        </p:txBody>
+      </p:sp>
+    </p:spTree>
+    <p:extLst>
+      <p:ext uri="{BB962C8B-B14F-4D97-AF65-F5344CB8AC3E}">
+        <p14:creationId xmlns:p14="http://schemas.microsoft.com/office/powerpoint/2010/main" val="2341505858"/>
+      </p:ext>
+    </p:extLst>
+  </p:cSld>
+  <p:clrMapOvr>
+    <a:masterClrMapping/>
+  </p:clrMapOvr>
+</p:sld>
+</file>
+
+<file path=ppt/slides/slide41.xml><?xml version="1.0" encoding="utf-8"?>
+<p:sld xmlns:a="http://schemas.openxmlformats.org/drawingml/2006/main" xmlns:r="http://schemas.openxmlformats.org/officeDocument/2006/relationships" xmlns:p="http://schemas.openxmlformats.org/presentationml/2006/main">
+  <p:cSld>
+    <p:spTree>
+      <p:nvGrpSpPr>
+        <p:cNvPr id="1" name=""/>
+        <p:cNvGrpSpPr/>
+        <p:nvPr/>
+      </p:nvGrpSpPr>
+      <p:grpSpPr>
+        <a:xfrm>
+          <a:off x="0" y="0"/>
+          <a:ext cx="0" cy="0"/>
+          <a:chOff x="0" y="0"/>
+          <a:chExt cx="0" cy="0"/>
+        </a:xfrm>
+      </p:grpSpPr>
+      <p:sp>
+        <p:nvSpPr>
+          <p:cNvPr id="2" name="Title 1">
+            <a:extLst>
+              <a:ext uri="{FF2B5EF4-FFF2-40B4-BE49-F238E27FC236}">
+                <a16:creationId xmlns:a16="http://schemas.microsoft.com/office/drawing/2014/main" id="{74428F7B-DC2B-85A5-1C1F-AD0171621091}"/>
+              </a:ext>
+            </a:extLst>
+          </p:cNvPr>
+          <p:cNvSpPr>
+            <a:spLocks noGrp="1"/>
+          </p:cNvSpPr>
+          <p:nvPr>
+            <p:ph type="title"/>
+          </p:nvPr>
+        </p:nvSpPr>
+        <p:spPr/>
+        <p:txBody>
+          <a:bodyPr/>
+          <a:lstStyle/>
+          <a:p>
             <a:r>
               <a:rPr lang="en-US" dirty="0"/>
-              <a:t>Instructor: Adrien Osakwe</a:t>
-            </a:r>
-          </a:p>
-          <a:p>
-            <a:pPr marL="0" indent="0">
-              <a:buNone/>
-            </a:pPr>
+              <a:t>Maintaining a package is tedious</a:t>
+            </a:r>
+          </a:p>
+        </p:txBody>
+      </p:sp>
+      <p:sp>
+        <p:nvSpPr>
+          <p:cNvPr id="3" name="Content Placeholder 2">
+            <a:extLst>
+              <a:ext uri="{FF2B5EF4-FFF2-40B4-BE49-F238E27FC236}">
+                <a16:creationId xmlns:a16="http://schemas.microsoft.com/office/drawing/2014/main" id="{33D959FC-3BD5-F79B-6D54-99514B14242D}"/>
+              </a:ext>
+            </a:extLst>
+          </p:cNvPr>
+          <p:cNvSpPr>
+            <a:spLocks noGrp="1"/>
+          </p:cNvSpPr>
+          <p:nvPr>
+            <p:ph idx="1"/>
+          </p:nvPr>
+        </p:nvSpPr>
+        <p:spPr>
+          <a:xfrm>
+            <a:off x="628650" y="1288473"/>
+            <a:ext cx="7886700" cy="4888489"/>
+          </a:xfrm>
+        </p:spPr>
+        <p:txBody>
+          <a:bodyPr/>
+          <a:lstStyle/>
+          <a:p>
             <a:r>
               <a:rPr lang="en-US" dirty="0"/>
-              <a:t>Facilitators: Zahra </a:t>
-            </a:r>
-            <a:r>
-              <a:rPr lang="en-US" dirty="0" err="1"/>
-              <a:t>Tavakol</a:t>
-            </a:r>
+              <a:t>New features may break existing code</a:t>
+            </a:r>
+          </a:p>
+          <a:p>
             <a:r>
               <a:rPr lang="en-US" dirty="0"/>
-              <a:t> Hamedani  &amp; Megan Tsao</a:t>
+              <a:t>Tests might start failing</a:t>
+            </a:r>
+          </a:p>
+          <a:p>
+            <a:r>
+              <a:rPr lang="en-US" dirty="0"/>
+              <a:t>Dependencies may no longer be compatible</a:t>
+            </a:r>
+          </a:p>
+          <a:p>
+            <a:r>
+              <a:rPr lang="en-US" b="1" dirty="0"/>
+              <a:t>Cannot manually inspect this 24/7</a:t>
             </a:r>
           </a:p>
         </p:txBody>
       </p:sp>
       <p:pic>
         <p:nvPicPr>
-          <p:cNvPr id="2" name="Content Placeholder 4">
-            <a:extLst>
-              <a:ext uri="{FF2B5EF4-FFF2-40B4-BE49-F238E27FC236}">
-                <a16:creationId xmlns:a16="http://schemas.microsoft.com/office/drawing/2014/main" id="{2B557A83-72AC-9342-6D18-444AE41A1DB0}"/>
+          <p:cNvPr id="7" name="Picture 6">
+            <a:extLst>
+              <a:ext uri="{FF2B5EF4-FFF2-40B4-BE49-F238E27FC236}">
+                <a16:creationId xmlns:a16="http://schemas.microsoft.com/office/drawing/2014/main" id="{908967C0-CAC0-F0BE-95BC-3B9A8632E04F}"/>
               </a:ext>
             </a:extLst>
           </p:cNvPr>
@@ -18894,21 +20125,46 @@
           <p:nvPr/>
         </p:nvPicPr>
         <p:blipFill>
-          <a:blip r:embed="rId3">
-            <a:extLst>
-              <a:ext uri="{28A0092B-C50C-407E-A947-70E740481C1C}">
-                <a14:useLocalDpi xmlns:a14="http://schemas.microsoft.com/office/drawing/2010/main" val="0"/>
-              </a:ext>
-            </a:extLst>
-          </a:blip>
+          <a:blip r:embed="rId3"/>
+          <a:srcRect r="51547"/>
           <a:stretch>
             <a:fillRect/>
           </a:stretch>
         </p:blipFill>
         <p:spPr>
           <a:xfrm>
-            <a:off x="0" y="6355644"/>
-            <a:ext cx="1414813" cy="364579"/>
+            <a:off x="221186" y="3409823"/>
+            <a:ext cx="3389656" cy="3014139"/>
+          </a:xfrm>
+          <a:prstGeom prst="rect">
+            <a:avLst/>
+          </a:prstGeom>
+        </p:spPr>
+      </p:pic>
+      <p:pic>
+        <p:nvPicPr>
+          <p:cNvPr id="9" name="Picture 8">
+            <a:extLst>
+              <a:ext uri="{FF2B5EF4-FFF2-40B4-BE49-F238E27FC236}">
+                <a16:creationId xmlns:a16="http://schemas.microsoft.com/office/drawing/2014/main" id="{351324C2-C86F-1719-48FD-DD74BBD303ED}"/>
+              </a:ext>
+            </a:extLst>
+          </p:cNvPr>
+          <p:cNvPicPr>
+            <a:picLocks noChangeAspect="1"/>
+          </p:cNvPicPr>
+          <p:nvPr/>
+        </p:nvPicPr>
+        <p:blipFill>
+          <a:blip r:embed="rId4"/>
+          <a:stretch>
+            <a:fillRect/>
+          </a:stretch>
+        </p:blipFill>
+        <p:spPr>
+          <a:xfrm>
+            <a:off x="4083627" y="3409823"/>
+            <a:ext cx="4904509" cy="3014139"/>
           </a:xfrm>
           <a:prstGeom prst="rect">
             <a:avLst/>
@@ -18918,7 +20174,7 @@
     </p:spTree>
     <p:extLst>
       <p:ext uri="{BB962C8B-B14F-4D97-AF65-F5344CB8AC3E}">
-        <p14:creationId xmlns:p14="http://schemas.microsoft.com/office/powerpoint/2010/main" val="3587535936"/>
+        <p14:creationId xmlns:p14="http://schemas.microsoft.com/office/powerpoint/2010/main" val="4003429187"/>
       </p:ext>
     </p:extLst>
   </p:cSld>
@@ -18928,7 +20184,7 @@
 </p:sld>
 </file>
 
-<file path=ppt/slides/slide40.xml><?xml version="1.0" encoding="utf-8"?>
+<file path=ppt/slides/slide42.xml><?xml version="1.0" encoding="utf-8"?>
 <p:sld xmlns:a="http://schemas.openxmlformats.org/drawingml/2006/main" xmlns:r="http://schemas.openxmlformats.org/officeDocument/2006/relationships" xmlns:p="http://schemas.openxmlformats.org/presentationml/2006/main">
   <p:cSld>
     <p:spTree>
@@ -19129,204 +20385,6 @@
 </p:sld>
 </file>
 
-<file path=ppt/slides/slide41.xml><?xml version="1.0" encoding="utf-8"?>
-<p:sld xmlns:a="http://schemas.openxmlformats.org/drawingml/2006/main" xmlns:r="http://schemas.openxmlformats.org/officeDocument/2006/relationships" xmlns:p="http://schemas.openxmlformats.org/presentationml/2006/main">
-  <p:cSld>
-    <p:spTree>
-      <p:nvGrpSpPr>
-        <p:cNvPr id="1" name=""/>
-        <p:cNvGrpSpPr/>
-        <p:nvPr/>
-      </p:nvGrpSpPr>
-      <p:grpSpPr>
-        <a:xfrm>
-          <a:off x="0" y="0"/>
-          <a:ext cx="0" cy="0"/>
-          <a:chOff x="0" y="0"/>
-          <a:chExt cx="0" cy="0"/>
-        </a:xfrm>
-      </p:grpSpPr>
-      <p:sp>
-        <p:nvSpPr>
-          <p:cNvPr id="2" name="Title 1">
-            <a:extLst>
-              <a:ext uri="{FF2B5EF4-FFF2-40B4-BE49-F238E27FC236}">
-                <a16:creationId xmlns:a16="http://schemas.microsoft.com/office/drawing/2014/main" id="{A456644B-FBEC-5421-3990-6EAEC51D647D}"/>
-              </a:ext>
-            </a:extLst>
-          </p:cNvPr>
-          <p:cNvSpPr>
-            <a:spLocks noGrp="1"/>
-          </p:cNvSpPr>
-          <p:nvPr>
-            <p:ph type="title"/>
-          </p:nvPr>
-        </p:nvSpPr>
-        <p:spPr/>
-        <p:txBody>
-          <a:bodyPr/>
-          <a:lstStyle/>
-          <a:p>
-            <a:r>
-              <a:rPr lang="en-US" dirty="0"/>
-              <a:t>Simple Workflow – Issue Bot</a:t>
-            </a:r>
-          </a:p>
-        </p:txBody>
-      </p:sp>
-      <p:sp>
-        <p:nvSpPr>
-          <p:cNvPr id="3" name="Content Placeholder 2">
-            <a:extLst>
-              <a:ext uri="{FF2B5EF4-FFF2-40B4-BE49-F238E27FC236}">
-                <a16:creationId xmlns:a16="http://schemas.microsoft.com/office/drawing/2014/main" id="{7DCCE7DF-BA51-40A0-87CD-24710734241B}"/>
-              </a:ext>
-            </a:extLst>
-          </p:cNvPr>
-          <p:cNvSpPr>
-            <a:spLocks noGrp="1"/>
-          </p:cNvSpPr>
-          <p:nvPr>
-            <p:ph idx="1"/>
-          </p:nvPr>
-        </p:nvSpPr>
-        <p:spPr/>
-        <p:txBody>
-          <a:bodyPr/>
-          <a:lstStyle/>
-          <a:p>
-            <a:r>
-              <a:rPr lang="en-US" dirty="0"/>
-              <a:t>If your package is very popular, you may want to streamline issue submissions</a:t>
-            </a:r>
-          </a:p>
-          <a:p>
-            <a:pPr lvl="1"/>
-            <a:r>
-              <a:rPr lang="en-US" dirty="0"/>
-              <a:t>Specific format</a:t>
-            </a:r>
-          </a:p>
-          <a:p>
-            <a:pPr lvl="1"/>
-            <a:r>
-              <a:rPr lang="en-US" dirty="0"/>
-              <a:t>Specific attachments</a:t>
-            </a:r>
-          </a:p>
-          <a:p>
-            <a:pPr lvl="1"/>
-            <a:r>
-              <a:rPr lang="en-US" dirty="0"/>
-              <a:t>Specific terminology</a:t>
-            </a:r>
-          </a:p>
-          <a:p>
-            <a:pPr marL="457088" lvl="1" indent="0">
-              <a:buNone/>
-            </a:pPr>
-            <a:endParaRPr lang="en-US" dirty="0"/>
-          </a:p>
-          <a:p>
-            <a:r>
-              <a:rPr lang="en-US" dirty="0"/>
-              <a:t>Bots can handle and filter issues for you</a:t>
-            </a:r>
-          </a:p>
-        </p:txBody>
-      </p:sp>
-    </p:spTree>
-    <p:extLst>
-      <p:ext uri="{BB962C8B-B14F-4D97-AF65-F5344CB8AC3E}">
-        <p14:creationId xmlns:p14="http://schemas.microsoft.com/office/powerpoint/2010/main" val="3227588993"/>
-      </p:ext>
-    </p:extLst>
-  </p:cSld>
-  <p:clrMapOvr>
-    <a:masterClrMapping/>
-  </p:clrMapOvr>
-</p:sld>
-</file>
-
-<file path=ppt/slides/slide42.xml><?xml version="1.0" encoding="utf-8"?>
-<p:sld xmlns:a="http://schemas.openxmlformats.org/drawingml/2006/main" xmlns:r="http://schemas.openxmlformats.org/officeDocument/2006/relationships" xmlns:p="http://schemas.openxmlformats.org/presentationml/2006/main">
-  <p:cSld>
-    <p:spTree>
-      <p:nvGrpSpPr>
-        <p:cNvPr id="1" name="">
-          <a:extLst>
-            <a:ext uri="{FF2B5EF4-FFF2-40B4-BE49-F238E27FC236}">
-              <a16:creationId xmlns:a16="http://schemas.microsoft.com/office/drawing/2014/main" id="{C453E9BB-4ABA-6C44-6A5F-CE29A966E75F}"/>
-            </a:ext>
-          </a:extLst>
-        </p:cNvPr>
-        <p:cNvGrpSpPr/>
-        <p:nvPr/>
-      </p:nvGrpSpPr>
-      <p:grpSpPr>
-        <a:xfrm>
-          <a:off x="0" y="0"/>
-          <a:ext cx="0" cy="0"/>
-          <a:chOff x="0" y="0"/>
-          <a:chExt cx="0" cy="0"/>
-        </a:xfrm>
-      </p:grpSpPr>
-      <p:sp>
-        <p:nvSpPr>
-          <p:cNvPr id="2" name="Title 1">
-            <a:extLst>
-              <a:ext uri="{FF2B5EF4-FFF2-40B4-BE49-F238E27FC236}">
-                <a16:creationId xmlns:a16="http://schemas.microsoft.com/office/drawing/2014/main" id="{D78E5005-F04A-59B4-AAE1-2B9524068593}"/>
-              </a:ext>
-            </a:extLst>
-          </p:cNvPr>
-          <p:cNvSpPr>
-            <a:spLocks noGrp="1"/>
-          </p:cNvSpPr>
-          <p:nvPr>
-            <p:ph type="title"/>
-          </p:nvPr>
-        </p:nvSpPr>
-        <p:spPr>
-          <a:xfrm>
-            <a:off x="628650" y="3429000"/>
-            <a:ext cx="7886700" cy="842534"/>
-          </a:xfrm>
-        </p:spPr>
-        <p:txBody>
-          <a:bodyPr>
-            <a:normAutofit fontScale="90000"/>
-          </a:bodyPr>
-          <a:lstStyle/>
-          <a:p>
-            <a:pPr algn="ctr"/>
-            <a:r>
-              <a:rPr lang="en-CA" dirty="0"/>
-              <a:t>Exercise</a:t>
-            </a:r>
-            <a:br>
-              <a:rPr lang="en-CA" dirty="0"/>
-            </a:br>
-            <a:r>
-              <a:rPr lang="en-CA" dirty="0"/>
-              <a:t>Try out the issue bot</a:t>
-            </a:r>
-          </a:p>
-        </p:txBody>
-      </p:sp>
-    </p:spTree>
-    <p:extLst>
-      <p:ext uri="{BB962C8B-B14F-4D97-AF65-F5344CB8AC3E}">
-        <p14:creationId xmlns:p14="http://schemas.microsoft.com/office/powerpoint/2010/main" val="1414395029"/>
-      </p:ext>
-    </p:extLst>
-  </p:cSld>
-  <p:clrMapOvr>
-    <a:masterClrMapping/>
-  </p:clrMapOvr>
-</p:sld>
-</file>
-
 <file path=ppt/slides/slide43.xml><?xml version="1.0" encoding="utf-8"?>
 <p:sld xmlns:a="http://schemas.openxmlformats.org/drawingml/2006/main" xmlns:r="http://schemas.openxmlformats.org/officeDocument/2006/relationships" xmlns:p="http://schemas.openxmlformats.org/presentationml/2006/main">
   <p:cSld>
@@ -19349,7 +20407,7 @@
           <p:cNvPr id="2" name="Title 1">
             <a:extLst>
               <a:ext uri="{FF2B5EF4-FFF2-40B4-BE49-F238E27FC236}">
-                <a16:creationId xmlns:a16="http://schemas.microsoft.com/office/drawing/2014/main" id="{46FC251F-B5ED-1074-7347-BBF8BE63786F}"/>
+                <a16:creationId xmlns:a16="http://schemas.microsoft.com/office/drawing/2014/main" id="{A456644B-FBEC-5421-3990-6EAEC51D647D}"/>
               </a:ext>
             </a:extLst>
           </p:cNvPr>
@@ -19367,7 +20425,7 @@
           <a:p>
             <a:r>
               <a:rPr lang="en-US" dirty="0"/>
-              <a:t>Test &amp; Installation Workflow</a:t>
+              <a:t>Simple Workflow – Issue Bot</a:t>
             </a:r>
           </a:p>
         </p:txBody>
@@ -19377,7 +20435,7 @@
           <p:cNvPr id="3" name="Content Placeholder 2">
             <a:extLst>
               <a:ext uri="{FF2B5EF4-FFF2-40B4-BE49-F238E27FC236}">
-                <a16:creationId xmlns:a16="http://schemas.microsoft.com/office/drawing/2014/main" id="{EDBEC63F-928F-16B3-F9AA-1A86345569A5}"/>
+                <a16:creationId xmlns:a16="http://schemas.microsoft.com/office/drawing/2014/main" id="{7DCCE7DF-BA51-40A0-87CD-24710734241B}"/>
               </a:ext>
             </a:extLst>
           </p:cNvPr>
@@ -19388,62 +20446,90 @@
             <p:ph idx="1"/>
           </p:nvPr>
         </p:nvSpPr>
-        <p:spPr/>
-        <p:txBody>
-          <a:bodyPr>
-            <a:normAutofit/>
-          </a:bodyPr>
+        <p:spPr>
+          <a:xfrm>
+            <a:off x="628651" y="1825627"/>
+            <a:ext cx="6187786" cy="4351335"/>
+          </a:xfrm>
+        </p:spPr>
+        <p:txBody>
+          <a:bodyPr/>
           <a:lstStyle/>
           <a:p>
             <a:r>
               <a:rPr lang="en-US" dirty="0"/>
-              <a:t>Simple setup to check installation and tests</a:t>
+              <a:t>If your package is very popular, you may want to streamline issue submissions</a:t>
             </a:r>
           </a:p>
           <a:p>
             <a:pPr lvl="1"/>
             <a:r>
               <a:rPr lang="en-US" dirty="0"/>
-              <a:t>Check for specific OS flavors and versions</a:t>
+              <a:t>Specific format</a:t>
             </a:r>
           </a:p>
           <a:p>
             <a:pPr lvl="1"/>
             <a:r>
               <a:rPr lang="en-US" dirty="0"/>
-              <a:t>Check specific R versions</a:t>
+              <a:t>Specific attachments</a:t>
             </a:r>
           </a:p>
           <a:p>
             <a:pPr lvl="1"/>
             <a:r>
               <a:rPr lang="en-US" dirty="0"/>
-              <a:t>Check code coverage</a:t>
-            </a:r>
-          </a:p>
-          <a:p>
-            <a:pPr lvl="1"/>
+              <a:t>Specific terminology</a:t>
+            </a:r>
+          </a:p>
+          <a:p>
+            <a:pPr marL="457088" lvl="1" indent="0">
+              <a:buNone/>
+            </a:pPr>
             <a:endParaRPr lang="en-US" dirty="0"/>
           </a:p>
           <a:p>
             <a:r>
               <a:rPr lang="en-US" dirty="0"/>
-              <a:t>Useful for pull requests/external contributors</a:t>
-            </a:r>
-          </a:p>
-          <a:p>
-            <a:pPr lvl="1"/>
-            <a:r>
-              <a:rPr lang="en-US" dirty="0"/>
-              <a:t>Streamlines review process</a:t>
-            </a:r>
-          </a:p>
-        </p:txBody>
-      </p:sp>
+              <a:t>Bots can handle and filter issues for you</a:t>
+            </a:r>
+          </a:p>
+        </p:txBody>
+      </p:sp>
+      <p:pic>
+        <p:nvPicPr>
+          <p:cNvPr id="5" name="Picture 4">
+            <a:extLst>
+              <a:ext uri="{FF2B5EF4-FFF2-40B4-BE49-F238E27FC236}">
+                <a16:creationId xmlns:a16="http://schemas.microsoft.com/office/drawing/2014/main" id="{9AC9EF9F-AA89-2962-AD81-D0325A523787}"/>
+              </a:ext>
+            </a:extLst>
+          </p:cNvPr>
+          <p:cNvPicPr>
+            <a:picLocks noChangeAspect="1"/>
+          </p:cNvPicPr>
+          <p:nvPr/>
+        </p:nvPicPr>
+        <p:blipFill>
+          <a:blip r:embed="rId2"/>
+          <a:stretch>
+            <a:fillRect/>
+          </a:stretch>
+        </p:blipFill>
+        <p:spPr>
+          <a:xfrm>
+            <a:off x="3217187" y="4739739"/>
+            <a:ext cx="2709625" cy="1953879"/>
+          </a:xfrm>
+          <a:prstGeom prst="rect">
+            <a:avLst/>
+          </a:prstGeom>
+        </p:spPr>
+      </p:pic>
     </p:spTree>
     <p:extLst>
       <p:ext uri="{BB962C8B-B14F-4D97-AF65-F5344CB8AC3E}">
-        <p14:creationId xmlns:p14="http://schemas.microsoft.com/office/powerpoint/2010/main" val="3482164999"/>
+        <p14:creationId xmlns:p14="http://schemas.microsoft.com/office/powerpoint/2010/main" val="3227588993"/>
       </p:ext>
     </p:extLst>
   </p:cSld>
@@ -19461,7 +20547,7 @@
         <p:cNvPr id="1" name="">
           <a:extLst>
             <a:ext uri="{FF2B5EF4-FFF2-40B4-BE49-F238E27FC236}">
-              <a16:creationId xmlns:a16="http://schemas.microsoft.com/office/drawing/2014/main" id="{2447E26F-C0C1-87DE-DADD-BA5D2661D4C7}"/>
+              <a16:creationId xmlns:a16="http://schemas.microsoft.com/office/drawing/2014/main" id="{85285139-C4E9-0DE1-C748-5EEB77EF82A5}"/>
             </a:ext>
           </a:extLst>
         </p:cNvPr>
@@ -19478,10 +20564,10 @@
       </p:grpSpPr>
       <p:sp>
         <p:nvSpPr>
-          <p:cNvPr id="2" name="Title 1">
-            <a:extLst>
-              <a:ext uri="{FF2B5EF4-FFF2-40B4-BE49-F238E27FC236}">
-                <a16:creationId xmlns:a16="http://schemas.microsoft.com/office/drawing/2014/main" id="{3B0854C0-59B7-A945-9FA0-E6D642120E02}"/>
+          <p:cNvPr id="2" name="Text Placeholder 1">
+            <a:extLst>
+              <a:ext uri="{FF2B5EF4-FFF2-40B4-BE49-F238E27FC236}">
+                <a16:creationId xmlns:a16="http://schemas.microsoft.com/office/drawing/2014/main" id="{344441F0-85DA-1475-42CA-41CAF68E5E94}"/>
               </a:ext>
             </a:extLst>
           </p:cNvPr>
@@ -19489,32 +20575,94 @@
             <a:spLocks noGrp="1"/>
           </p:cNvSpPr>
           <p:nvPr>
-            <p:ph type="title"/>
+            <p:ph type="body" sz="quarter" idx="10"/>
           </p:nvPr>
         </p:nvSpPr>
         <p:spPr>
           <a:xfrm>
-            <a:off x="628650" y="3824725"/>
-            <a:ext cx="7886700" cy="842534"/>
+            <a:off x="242372" y="2940626"/>
+            <a:ext cx="8658743" cy="3437951"/>
           </a:xfrm>
         </p:spPr>
         <p:txBody>
+          <a:bodyPr/>
+          <a:lstStyle/>
+          <a:p>
+            <a:r>
+              <a:rPr lang="en-CA" dirty="0"/>
+              <a:t>Try using the issue bot on the posted GitHub repository</a:t>
+            </a:r>
+          </a:p>
+          <a:p>
+            <a:endParaRPr lang="en-CA" dirty="0"/>
+          </a:p>
+          <a:p>
+            <a:r>
+              <a:rPr lang="en-CA" dirty="0"/>
+              <a:t>Compare using an issue that includes ‘</a:t>
+            </a:r>
+            <a:r>
+              <a:rPr lang="en-CA" dirty="0" err="1"/>
+              <a:t>bionmf</a:t>
+            </a:r>
+            <a:r>
+              <a:rPr lang="en-CA" dirty="0"/>
+              <a:t>’ in the title vs. not</a:t>
+            </a:r>
+          </a:p>
+        </p:txBody>
+      </p:sp>
+      <p:sp>
+        <p:nvSpPr>
+          <p:cNvPr id="3" name="Title 1">
+            <a:extLst>
+              <a:ext uri="{FF2B5EF4-FFF2-40B4-BE49-F238E27FC236}">
+                <a16:creationId xmlns:a16="http://schemas.microsoft.com/office/drawing/2014/main" id="{D5AE20D6-D893-16D0-2A9B-6589C83E9ECE}"/>
+              </a:ext>
+            </a:extLst>
+          </p:cNvPr>
+          <p:cNvSpPr txBox="1">
+            <a:spLocks/>
+          </p:cNvSpPr>
+          <p:nvPr/>
+        </p:nvSpPr>
+        <p:spPr>
+          <a:xfrm>
+            <a:off x="242372" y="1558637"/>
+            <a:ext cx="8658743" cy="1007918"/>
+          </a:xfrm>
+          <a:prstGeom prst="rect">
+            <a:avLst/>
+          </a:prstGeom>
+        </p:spPr>
+        <p:txBody>
           <a:bodyPr>
-            <a:normAutofit fontScale="90000"/>
+            <a:noAutofit/>
           </a:bodyPr>
-          <a:lstStyle/>
+          <a:lstStyle>
+            <a:lvl1pPr algn="l" defTabSz="914175" rtl="0" eaLnBrk="1" latinLnBrk="0" hangingPunct="1">
+              <a:lnSpc>
+                <a:spcPct val="90000"/>
+              </a:lnSpc>
+              <a:spcBef>
+                <a:spcPct val="0"/>
+              </a:spcBef>
+              <a:buNone/>
+              <a:defRPr sz="4403" kern="1200">
+                <a:solidFill>
+                  <a:schemeClr val="tx1"/>
+                </a:solidFill>
+                <a:latin typeface="+mj-lt"/>
+                <a:ea typeface="+mj-ea"/>
+                <a:cs typeface="+mj-cs"/>
+              </a:defRPr>
+            </a:lvl1pPr>
+          </a:lstStyle>
           <a:p>
             <a:pPr algn="ctr"/>
             <a:r>
-              <a:rPr lang="en-CA" b="1" dirty="0"/>
+              <a:rPr lang="en-CA" sz="7200" dirty="0"/>
               <a:t>Exercise</a:t>
-            </a:r>
-            <a:br>
-              <a:rPr lang="en-CA" b="1" dirty="0"/>
-            </a:br>
-            <a:r>
-              <a:rPr lang="en-CA" dirty="0"/>
-              <a:t>Try out the test/install bot</a:t>
             </a:r>
           </a:p>
         </p:txBody>
@@ -19522,7 +20670,7 @@
     </p:spTree>
     <p:extLst>
       <p:ext uri="{BB962C8B-B14F-4D97-AF65-F5344CB8AC3E}">
-        <p14:creationId xmlns:p14="http://schemas.microsoft.com/office/powerpoint/2010/main" val="509037345"/>
+        <p14:creationId xmlns:p14="http://schemas.microsoft.com/office/powerpoint/2010/main" val="2597417478"/>
       </p:ext>
     </p:extLst>
   </p:cSld>
@@ -19554,7 +20702,7 @@
           <p:cNvPr id="2" name="Title 1">
             <a:extLst>
               <a:ext uri="{FF2B5EF4-FFF2-40B4-BE49-F238E27FC236}">
-                <a16:creationId xmlns:a16="http://schemas.microsoft.com/office/drawing/2014/main" id="{53D5D50F-4F28-B4DF-B643-598DE496FEDD}"/>
+                <a16:creationId xmlns:a16="http://schemas.microsoft.com/office/drawing/2014/main" id="{46FC251F-B5ED-1074-7347-BBF8BE63786F}"/>
               </a:ext>
             </a:extLst>
           </p:cNvPr>
@@ -19571,16 +20719,119 @@
           <a:lstStyle/>
           <a:p>
             <a:r>
-              <a:rPr lang="en-CA" dirty="0"/>
-              <a:t>Other tools</a:t>
-            </a:r>
-          </a:p>
-        </p:txBody>
-      </p:sp>
+              <a:rPr lang="en-US" dirty="0"/>
+              <a:t>Test &amp; Installation Workflow</a:t>
+            </a:r>
+          </a:p>
+        </p:txBody>
+      </p:sp>
+      <p:sp>
+        <p:nvSpPr>
+          <p:cNvPr id="3" name="Content Placeholder 2">
+            <a:extLst>
+              <a:ext uri="{FF2B5EF4-FFF2-40B4-BE49-F238E27FC236}">
+                <a16:creationId xmlns:a16="http://schemas.microsoft.com/office/drawing/2014/main" id="{EDBEC63F-928F-16B3-F9AA-1A86345569A5}"/>
+              </a:ext>
+            </a:extLst>
+          </p:cNvPr>
+          <p:cNvSpPr>
+            <a:spLocks noGrp="1"/>
+          </p:cNvSpPr>
+          <p:nvPr>
+            <p:ph idx="1"/>
+          </p:nvPr>
+        </p:nvSpPr>
+        <p:spPr>
+          <a:xfrm>
+            <a:off x="628650" y="1825627"/>
+            <a:ext cx="6083877" cy="4351335"/>
+          </a:xfrm>
+        </p:spPr>
+        <p:txBody>
+          <a:bodyPr>
+            <a:normAutofit/>
+          </a:bodyPr>
+          <a:lstStyle/>
+          <a:p>
+            <a:r>
+              <a:rPr lang="en-US" dirty="0"/>
+              <a:t>Simple setup to check installation and tests</a:t>
+            </a:r>
+          </a:p>
+          <a:p>
+            <a:pPr lvl="1"/>
+            <a:r>
+              <a:rPr lang="en-US" dirty="0"/>
+              <a:t>Check for specific OS flavors and versions</a:t>
+            </a:r>
+          </a:p>
+          <a:p>
+            <a:pPr lvl="1"/>
+            <a:r>
+              <a:rPr lang="en-US" dirty="0"/>
+              <a:t>Check specific R versions</a:t>
+            </a:r>
+          </a:p>
+          <a:p>
+            <a:pPr lvl="1"/>
+            <a:r>
+              <a:rPr lang="en-US" dirty="0"/>
+              <a:t>Check code coverage</a:t>
+            </a:r>
+          </a:p>
+          <a:p>
+            <a:pPr lvl="1"/>
+            <a:endParaRPr lang="en-US" dirty="0"/>
+          </a:p>
+          <a:p>
+            <a:r>
+              <a:rPr lang="en-US" dirty="0"/>
+              <a:t>Useful for pull requests/external contributors</a:t>
+            </a:r>
+          </a:p>
+          <a:p>
+            <a:pPr lvl="1"/>
+            <a:r>
+              <a:rPr lang="en-US" dirty="0"/>
+              <a:t>Streamlines review process</a:t>
+            </a:r>
+          </a:p>
+        </p:txBody>
+      </p:sp>
+      <p:pic>
+        <p:nvPicPr>
+          <p:cNvPr id="5" name="Picture 4">
+            <a:extLst>
+              <a:ext uri="{FF2B5EF4-FFF2-40B4-BE49-F238E27FC236}">
+                <a16:creationId xmlns:a16="http://schemas.microsoft.com/office/drawing/2014/main" id="{0BFEA93D-1FCC-F32D-990C-05DA86D5E96D}"/>
+              </a:ext>
+            </a:extLst>
+          </p:cNvPr>
+          <p:cNvPicPr>
+            <a:picLocks noChangeAspect="1"/>
+          </p:cNvPicPr>
+          <p:nvPr/>
+        </p:nvPicPr>
+        <p:blipFill>
+          <a:blip r:embed="rId3"/>
+          <a:stretch>
+            <a:fillRect/>
+          </a:stretch>
+        </p:blipFill>
+        <p:spPr>
+          <a:xfrm>
+            <a:off x="6712527" y="2094385"/>
+            <a:ext cx="2238687" cy="3562847"/>
+          </a:xfrm>
+          <a:prstGeom prst="rect">
+            <a:avLst/>
+          </a:prstGeom>
+        </p:spPr>
+      </p:pic>
     </p:spTree>
     <p:extLst>
       <p:ext uri="{BB962C8B-B14F-4D97-AF65-F5344CB8AC3E}">
-        <p14:creationId xmlns:p14="http://schemas.microsoft.com/office/powerpoint/2010/main" val="4059803902"/>
+        <p14:creationId xmlns:p14="http://schemas.microsoft.com/office/powerpoint/2010/main" val="3482164999"/>
       </p:ext>
     </p:extLst>
   </p:cSld>
@@ -19591,6 +20842,156 @@
 </file>
 
 <file path=ppt/slides/slide46.xml><?xml version="1.0" encoding="utf-8"?>
+<p:sld xmlns:a="http://schemas.openxmlformats.org/drawingml/2006/main" xmlns:r="http://schemas.openxmlformats.org/officeDocument/2006/relationships" xmlns:p="http://schemas.openxmlformats.org/presentationml/2006/main">
+  <p:cSld>
+    <p:spTree>
+      <p:nvGrpSpPr>
+        <p:cNvPr id="1" name="">
+          <a:extLst>
+            <a:ext uri="{FF2B5EF4-FFF2-40B4-BE49-F238E27FC236}">
+              <a16:creationId xmlns:a16="http://schemas.microsoft.com/office/drawing/2014/main" id="{369C2616-CA2B-7ED5-2EF6-4198239F1918}"/>
+            </a:ext>
+          </a:extLst>
+        </p:cNvPr>
+        <p:cNvGrpSpPr/>
+        <p:nvPr/>
+      </p:nvGrpSpPr>
+      <p:grpSpPr>
+        <a:xfrm>
+          <a:off x="0" y="0"/>
+          <a:ext cx="0" cy="0"/>
+          <a:chOff x="0" y="0"/>
+          <a:chExt cx="0" cy="0"/>
+        </a:xfrm>
+      </p:grpSpPr>
+      <p:sp>
+        <p:nvSpPr>
+          <p:cNvPr id="2" name="Text Placeholder 1">
+            <a:extLst>
+              <a:ext uri="{FF2B5EF4-FFF2-40B4-BE49-F238E27FC236}">
+                <a16:creationId xmlns:a16="http://schemas.microsoft.com/office/drawing/2014/main" id="{7CB229C2-EE64-5B41-AFBA-789EB3A7A394}"/>
+              </a:ext>
+            </a:extLst>
+          </p:cNvPr>
+          <p:cNvSpPr>
+            <a:spLocks noGrp="1"/>
+          </p:cNvSpPr>
+          <p:nvPr>
+            <p:ph type="body" sz="quarter" idx="10"/>
+          </p:nvPr>
+        </p:nvSpPr>
+        <p:spPr>
+          <a:xfrm>
+            <a:off x="242372" y="2940626"/>
+            <a:ext cx="8658743" cy="3437951"/>
+          </a:xfrm>
+        </p:spPr>
+        <p:txBody>
+          <a:bodyPr/>
+          <a:lstStyle/>
+          <a:p>
+            <a:r>
+              <a:rPr lang="en-CA" dirty="0"/>
+              <a:t>In your own fork of the </a:t>
+            </a:r>
+            <a:r>
+              <a:rPr lang="en-CA" dirty="0" err="1"/>
+              <a:t>github</a:t>
+            </a:r>
+            <a:r>
+              <a:rPr lang="en-CA" dirty="0"/>
+              <a:t> repository, make a change to files in the 3_Actions_Package folder</a:t>
+            </a:r>
+          </a:p>
+          <a:p>
+            <a:endParaRPr lang="en-CA" dirty="0"/>
+          </a:p>
+          <a:p>
+            <a:r>
+              <a:rPr lang="en-CA" dirty="0"/>
+              <a:t>Commit the change and check the actions workflow</a:t>
+            </a:r>
+          </a:p>
+          <a:p>
+            <a:endParaRPr lang="en-CA" dirty="0"/>
+          </a:p>
+          <a:p>
+            <a:r>
+              <a:rPr lang="en-CA" dirty="0"/>
+              <a:t>Check what happens if you make a pull request</a:t>
+            </a:r>
+          </a:p>
+        </p:txBody>
+      </p:sp>
+      <p:sp>
+        <p:nvSpPr>
+          <p:cNvPr id="3" name="Title 1">
+            <a:extLst>
+              <a:ext uri="{FF2B5EF4-FFF2-40B4-BE49-F238E27FC236}">
+                <a16:creationId xmlns:a16="http://schemas.microsoft.com/office/drawing/2014/main" id="{C9D87BA2-1F85-148A-EE79-ECFC3BFECC3E}"/>
+              </a:ext>
+            </a:extLst>
+          </p:cNvPr>
+          <p:cNvSpPr txBox="1">
+            <a:spLocks/>
+          </p:cNvSpPr>
+          <p:nvPr/>
+        </p:nvSpPr>
+        <p:spPr>
+          <a:xfrm>
+            <a:off x="242372" y="1558637"/>
+            <a:ext cx="8658743" cy="1007918"/>
+          </a:xfrm>
+          <a:prstGeom prst="rect">
+            <a:avLst/>
+          </a:prstGeom>
+        </p:spPr>
+        <p:txBody>
+          <a:bodyPr>
+            <a:noAutofit/>
+          </a:bodyPr>
+          <a:lstStyle>
+            <a:lvl1pPr algn="l" defTabSz="914175" rtl="0" eaLnBrk="1" latinLnBrk="0" hangingPunct="1">
+              <a:lnSpc>
+                <a:spcPct val="90000"/>
+              </a:lnSpc>
+              <a:spcBef>
+                <a:spcPct val="0"/>
+              </a:spcBef>
+              <a:buNone/>
+              <a:defRPr sz="4403" kern="1200">
+                <a:solidFill>
+                  <a:schemeClr val="tx1"/>
+                </a:solidFill>
+                <a:latin typeface="+mj-lt"/>
+                <a:ea typeface="+mj-ea"/>
+                <a:cs typeface="+mj-cs"/>
+              </a:defRPr>
+            </a:lvl1pPr>
+          </a:lstStyle>
+          <a:p>
+            <a:pPr algn="ctr"/>
+            <a:r>
+              <a:rPr lang="en-CA" sz="7200" dirty="0"/>
+              <a:t>Exercise</a:t>
+            </a:r>
+          </a:p>
+        </p:txBody>
+      </p:sp>
+    </p:spTree>
+    <p:extLst>
+      <p:ext uri="{BB962C8B-B14F-4D97-AF65-F5344CB8AC3E}">
+        <p14:creationId xmlns:p14="http://schemas.microsoft.com/office/powerpoint/2010/main" val="224817830"/>
+      </p:ext>
+    </p:extLst>
+  </p:cSld>
+  <p:clrMapOvr>
+    <a:masterClrMapping/>
+  </p:clrMapOvr>
+</p:sld>
+</file>
+
+<file path=ppt/slides/slide47.xml><?xml version="1.0" encoding="utf-8"?>
 <p:sld xmlns:a="http://schemas.openxmlformats.org/drawingml/2006/main" xmlns:r="http://schemas.openxmlformats.org/officeDocument/2006/relationships" xmlns:p="http://schemas.openxmlformats.org/presentationml/2006/main">
   <p:cSld>
     <p:spTree>
@@ -19612,7 +21013,7 @@
           <p:cNvPr id="2" name="Title 1">
             <a:extLst>
               <a:ext uri="{FF2B5EF4-FFF2-40B4-BE49-F238E27FC236}">
-                <a16:creationId xmlns:a16="http://schemas.microsoft.com/office/drawing/2014/main" id="{FB76A8E0-07E8-34BB-D592-43F6D18131F4}"/>
+                <a16:creationId xmlns:a16="http://schemas.microsoft.com/office/drawing/2014/main" id="{53D5D50F-4F28-B4DF-B643-598DE496FEDD}"/>
               </a:ext>
             </a:extLst>
           </p:cNvPr>
@@ -19630,6 +21031,64 @@
           <a:p>
             <a:r>
               <a:rPr lang="en-CA" dirty="0"/>
+              <a:t>Other tools</a:t>
+            </a:r>
+          </a:p>
+        </p:txBody>
+      </p:sp>
+    </p:spTree>
+    <p:extLst>
+      <p:ext uri="{BB962C8B-B14F-4D97-AF65-F5344CB8AC3E}">
+        <p14:creationId xmlns:p14="http://schemas.microsoft.com/office/powerpoint/2010/main" val="4059803902"/>
+      </p:ext>
+    </p:extLst>
+  </p:cSld>
+  <p:clrMapOvr>
+    <a:masterClrMapping/>
+  </p:clrMapOvr>
+</p:sld>
+</file>
+
+<file path=ppt/slides/slide48.xml><?xml version="1.0" encoding="utf-8"?>
+<p:sld xmlns:a="http://schemas.openxmlformats.org/drawingml/2006/main" xmlns:r="http://schemas.openxmlformats.org/officeDocument/2006/relationships" xmlns:p="http://schemas.openxmlformats.org/presentationml/2006/main">
+  <p:cSld>
+    <p:spTree>
+      <p:nvGrpSpPr>
+        <p:cNvPr id="1" name=""/>
+        <p:cNvGrpSpPr/>
+        <p:nvPr/>
+      </p:nvGrpSpPr>
+      <p:grpSpPr>
+        <a:xfrm>
+          <a:off x="0" y="0"/>
+          <a:ext cx="0" cy="0"/>
+          <a:chOff x="0" y="0"/>
+          <a:chExt cx="0" cy="0"/>
+        </a:xfrm>
+      </p:grpSpPr>
+      <p:sp>
+        <p:nvSpPr>
+          <p:cNvPr id="2" name="Title 1">
+            <a:extLst>
+              <a:ext uri="{FF2B5EF4-FFF2-40B4-BE49-F238E27FC236}">
+                <a16:creationId xmlns:a16="http://schemas.microsoft.com/office/drawing/2014/main" id="{FB76A8E0-07E8-34BB-D592-43F6D18131F4}"/>
+              </a:ext>
+            </a:extLst>
+          </p:cNvPr>
+          <p:cNvSpPr>
+            <a:spLocks noGrp="1"/>
+          </p:cNvSpPr>
+          <p:nvPr>
+            <p:ph type="title"/>
+          </p:nvPr>
+        </p:nvSpPr>
+        <p:spPr/>
+        <p:txBody>
+          <a:bodyPr/>
+          <a:lstStyle/>
+          <a:p>
+            <a:r>
+              <a:rPr lang="en-CA" dirty="0"/>
               <a:t>Building a package website</a:t>
             </a:r>
           </a:p>
@@ -19681,6 +21140,27 @@
             <a:r>
               <a:rPr lang="en-CA" dirty="0"/>
               <a:t>Can be hosted for free via GitHub!</a:t>
+            </a:r>
+          </a:p>
+          <a:p>
+            <a:endParaRPr lang="en-CA" dirty="0"/>
+          </a:p>
+          <a:p>
+            <a:r>
+              <a:rPr lang="en-CA" dirty="0" err="1"/>
+              <a:t>pkgdown</a:t>
+            </a:r>
+            <a:r>
+              <a:rPr lang="en-CA" dirty="0"/>
+              <a:t>::</a:t>
+            </a:r>
+            <a:r>
+              <a:rPr lang="en-CA" dirty="0" err="1"/>
+              <a:t>build_site</a:t>
+            </a:r>
+            <a:r>
+              <a:rPr lang="en-CA" dirty="0"/>
+              <a:t>()</a:t>
             </a:r>
           </a:p>
         </p:txBody>
@@ -19728,7 +21208,7 @@
 </p:sld>
 </file>
 
-<file path=ppt/slides/slide47.xml><?xml version="1.0" encoding="utf-8"?>
+<file path=ppt/slides/slide49.xml><?xml version="1.0" encoding="utf-8"?>
 <p:sld xmlns:a="http://schemas.openxmlformats.org/drawingml/2006/main" xmlns:r="http://schemas.openxmlformats.org/officeDocument/2006/relationships" xmlns:p="http://schemas.openxmlformats.org/presentationml/2006/main">
   <p:cSld>
     <p:spTree>
@@ -19952,91 +21432,6 @@
     <p:extLst>
       <p:ext uri="{BB962C8B-B14F-4D97-AF65-F5344CB8AC3E}">
         <p14:creationId xmlns:p14="http://schemas.microsoft.com/office/powerpoint/2010/main" val="2803926213"/>
-      </p:ext>
-    </p:extLst>
-  </p:cSld>
-  <p:clrMapOvr>
-    <a:masterClrMapping/>
-  </p:clrMapOvr>
-</p:sld>
-</file>
-
-<file path=ppt/slides/slide48.xml><?xml version="1.0" encoding="utf-8"?>
-<p:sld xmlns:a="http://schemas.openxmlformats.org/drawingml/2006/main" xmlns:r="http://schemas.openxmlformats.org/officeDocument/2006/relationships" xmlns:p="http://schemas.openxmlformats.org/presentationml/2006/main">
-  <p:cSld>
-    <p:spTree>
-      <p:nvGrpSpPr>
-        <p:cNvPr id="1" name=""/>
-        <p:cNvGrpSpPr/>
-        <p:nvPr/>
-      </p:nvGrpSpPr>
-      <p:grpSpPr>
-        <a:xfrm>
-          <a:off x="0" y="0"/>
-          <a:ext cx="0" cy="0"/>
-          <a:chOff x="0" y="0"/>
-          <a:chExt cx="0" cy="0"/>
-        </a:xfrm>
-      </p:grpSpPr>
-      <p:sp>
-        <p:nvSpPr>
-          <p:cNvPr id="2" name="Title 1">
-            <a:extLst>
-              <a:ext uri="{FF2B5EF4-FFF2-40B4-BE49-F238E27FC236}">
-                <a16:creationId xmlns:a16="http://schemas.microsoft.com/office/drawing/2014/main" id="{2B830F0B-3D18-9732-3108-323F8DEEBA14}"/>
-              </a:ext>
-            </a:extLst>
-          </p:cNvPr>
-          <p:cNvSpPr>
-            <a:spLocks noGrp="1"/>
-          </p:cNvSpPr>
-          <p:nvPr>
-            <p:ph type="title"/>
-          </p:nvPr>
-        </p:nvSpPr>
-        <p:spPr>
-          <a:xfrm>
-            <a:off x="628650" y="1131094"/>
-            <a:ext cx="7886700" cy="4485193"/>
-          </a:xfrm>
-        </p:spPr>
-        <p:txBody>
-          <a:bodyPr>
-            <a:normAutofit/>
-          </a:bodyPr>
-          <a:lstStyle/>
-          <a:p>
-            <a:pPr algn="ctr"/>
-            <a:r>
-              <a:rPr lang="en-AU" sz="6600" dirty="0">
-                <a:solidFill>
-                  <a:schemeClr val="accent1"/>
-                </a:solidFill>
-                <a:latin typeface="Montserrat SemiBold" panose="00000700000000000000" pitchFamily="50" charset="0"/>
-              </a:rPr>
-              <a:t>STOP</a:t>
-            </a:r>
-            <a:br>
-              <a:rPr lang="en-AU" sz="6600" dirty="0">
-                <a:solidFill>
-                  <a:srgbClr val="FF0000"/>
-                </a:solidFill>
-                <a:latin typeface="Montserrat SemiBold" panose="00000700000000000000" pitchFamily="50" charset="0"/>
-              </a:rPr>
-            </a:br>
-            <a:endParaRPr lang="en-AU" sz="6600" dirty="0">
-              <a:solidFill>
-                <a:srgbClr val="FF0000"/>
-              </a:solidFill>
-              <a:latin typeface="Montserrat SemiBold" panose="00000700000000000000" pitchFamily="50" charset="0"/>
-            </a:endParaRPr>
-          </a:p>
-        </p:txBody>
-      </p:sp>
-    </p:spTree>
-    <p:extLst>
-      <p:ext uri="{BB962C8B-B14F-4D97-AF65-F5344CB8AC3E}">
-        <p14:creationId xmlns:p14="http://schemas.microsoft.com/office/powerpoint/2010/main" val="3735510520"/>
       </p:ext>
     </p:extLst>
   </p:cSld>
@@ -20278,6 +21673,91 @@
     <p:extLst>
       <p:ext uri="{BB962C8B-B14F-4D97-AF65-F5344CB8AC3E}">
         <p14:creationId xmlns:p14="http://schemas.microsoft.com/office/powerpoint/2010/main" val="2692547567"/>
+      </p:ext>
+    </p:extLst>
+  </p:cSld>
+  <p:clrMapOvr>
+    <a:masterClrMapping/>
+  </p:clrMapOvr>
+</p:sld>
+</file>
+
+<file path=ppt/slides/slide50.xml><?xml version="1.0" encoding="utf-8"?>
+<p:sld xmlns:a="http://schemas.openxmlformats.org/drawingml/2006/main" xmlns:r="http://schemas.openxmlformats.org/officeDocument/2006/relationships" xmlns:p="http://schemas.openxmlformats.org/presentationml/2006/main">
+  <p:cSld>
+    <p:spTree>
+      <p:nvGrpSpPr>
+        <p:cNvPr id="1" name=""/>
+        <p:cNvGrpSpPr/>
+        <p:nvPr/>
+      </p:nvGrpSpPr>
+      <p:grpSpPr>
+        <a:xfrm>
+          <a:off x="0" y="0"/>
+          <a:ext cx="0" cy="0"/>
+          <a:chOff x="0" y="0"/>
+          <a:chExt cx="0" cy="0"/>
+        </a:xfrm>
+      </p:grpSpPr>
+      <p:sp>
+        <p:nvSpPr>
+          <p:cNvPr id="2" name="Title 1">
+            <a:extLst>
+              <a:ext uri="{FF2B5EF4-FFF2-40B4-BE49-F238E27FC236}">
+                <a16:creationId xmlns:a16="http://schemas.microsoft.com/office/drawing/2014/main" id="{2B830F0B-3D18-9732-3108-323F8DEEBA14}"/>
+              </a:ext>
+            </a:extLst>
+          </p:cNvPr>
+          <p:cNvSpPr>
+            <a:spLocks noGrp="1"/>
+          </p:cNvSpPr>
+          <p:nvPr>
+            <p:ph type="title"/>
+          </p:nvPr>
+        </p:nvSpPr>
+        <p:spPr>
+          <a:xfrm>
+            <a:off x="628650" y="1131094"/>
+            <a:ext cx="7886700" cy="4485193"/>
+          </a:xfrm>
+        </p:spPr>
+        <p:txBody>
+          <a:bodyPr>
+            <a:normAutofit/>
+          </a:bodyPr>
+          <a:lstStyle/>
+          <a:p>
+            <a:pPr algn="ctr"/>
+            <a:r>
+              <a:rPr lang="en-AU" sz="6600" dirty="0">
+                <a:solidFill>
+                  <a:schemeClr val="accent1"/>
+                </a:solidFill>
+                <a:latin typeface="Montserrat SemiBold" panose="00000700000000000000" pitchFamily="50" charset="0"/>
+              </a:rPr>
+              <a:t>STOP</a:t>
+            </a:r>
+            <a:br>
+              <a:rPr lang="en-AU" sz="6600" dirty="0">
+                <a:solidFill>
+                  <a:srgbClr val="FF0000"/>
+                </a:solidFill>
+                <a:latin typeface="Montserrat SemiBold" panose="00000700000000000000" pitchFamily="50" charset="0"/>
+              </a:rPr>
+            </a:br>
+            <a:endParaRPr lang="en-AU" sz="6600" dirty="0">
+              <a:solidFill>
+                <a:srgbClr val="FF0000"/>
+              </a:solidFill>
+              <a:latin typeface="Montserrat SemiBold" panose="00000700000000000000" pitchFamily="50" charset="0"/>
+            </a:endParaRPr>
+          </a:p>
+        </p:txBody>
+      </p:sp>
+    </p:spTree>
+    <p:extLst>
+      <p:ext uri="{BB962C8B-B14F-4D97-AF65-F5344CB8AC3E}">
+        <p14:creationId xmlns:p14="http://schemas.microsoft.com/office/powerpoint/2010/main" val="3735510520"/>
       </p:ext>
     </p:extLst>
   </p:cSld>
@@ -20924,7 +22404,7 @@
           <p:cNvPr id="2" name="Title 1">
             <a:extLst>
               <a:ext uri="{FF2B5EF4-FFF2-40B4-BE49-F238E27FC236}">
-                <a16:creationId xmlns:a16="http://schemas.microsoft.com/office/drawing/2014/main" id="{0C8C347C-C4C4-814B-6322-19F47FE05774}"/>
+                <a16:creationId xmlns:a16="http://schemas.microsoft.com/office/drawing/2014/main" id="{931D2992-2D2C-03B2-20A7-FA3CFD5F72E8}"/>
               </a:ext>
             </a:extLst>
           </p:cNvPr>
@@ -20941,8 +22421,8 @@
           <a:lstStyle/>
           <a:p>
             <a:r>
-              <a:rPr lang="en-US" dirty="0"/>
-              <a:t>Why build a package?</a:t>
+              <a:rPr lang="en-CA" dirty="0"/>
+              <a:t>Why bother with packages?</a:t>
             </a:r>
           </a:p>
         </p:txBody>
@@ -20952,7 +22432,7 @@
           <p:cNvPr id="3" name="Content Placeholder 2">
             <a:extLst>
               <a:ext uri="{FF2B5EF4-FFF2-40B4-BE49-F238E27FC236}">
-                <a16:creationId xmlns:a16="http://schemas.microsoft.com/office/drawing/2014/main" id="{74130F42-8D26-FE92-B842-3D5721CA7F7D}"/>
+                <a16:creationId xmlns:a16="http://schemas.microsoft.com/office/drawing/2014/main" id="{F9D67DD5-AD34-86CF-5CE0-F971881A1045}"/>
               </a:ext>
             </a:extLst>
           </p:cNvPr>
@@ -20960,107 +22440,89 @@
             <a:spLocks noGrp="1"/>
           </p:cNvSpPr>
           <p:nvPr>
-            <p:ph sz="half" idx="1"/>
+            <p:ph idx="1"/>
           </p:nvPr>
         </p:nvSpPr>
         <p:spPr/>
         <p:txBody>
           <a:bodyPr>
-            <a:normAutofit/>
+            <a:normAutofit lnSpcReduction="10000"/>
           </a:bodyPr>
           <a:lstStyle/>
           <a:p>
             <a:r>
-              <a:rPr lang="en-US" dirty="0"/>
-              <a:t>“My scripts already work”</a:t>
-            </a:r>
-          </a:p>
-          <a:p>
-            <a:pPr marL="0" indent="0">
-              <a:buNone/>
-            </a:pPr>
-            <a:endParaRPr lang="en-US" dirty="0"/>
-          </a:p>
-          <a:p>
-            <a:r>
-              <a:rPr lang="en-US" dirty="0"/>
-              <a:t>“It’s tedious to do”</a:t>
-            </a:r>
-          </a:p>
-          <a:p>
-            <a:pPr marL="0" indent="0">
-              <a:buNone/>
-            </a:pPr>
-            <a:endParaRPr lang="en-US" dirty="0"/>
-          </a:p>
-          <a:p>
-            <a:r>
-              <a:rPr lang="en-US" dirty="0"/>
-              <a:t>“It’s not required to get published”</a:t>
-            </a:r>
-          </a:p>
-        </p:txBody>
-      </p:sp>
-      <p:sp>
-        <p:nvSpPr>
-          <p:cNvPr id="4" name="Content Placeholder 3">
-            <a:extLst>
-              <a:ext uri="{FF2B5EF4-FFF2-40B4-BE49-F238E27FC236}">
-                <a16:creationId xmlns:a16="http://schemas.microsoft.com/office/drawing/2014/main" id="{51138A0C-5E7B-B43A-A677-D0F279CA3B78}"/>
-              </a:ext>
-            </a:extLst>
-          </p:cNvPr>
-          <p:cNvSpPr>
-            <a:spLocks noGrp="1"/>
-          </p:cNvSpPr>
-          <p:nvPr>
-            <p:ph sz="half" idx="2"/>
-          </p:nvPr>
-        </p:nvSpPr>
-        <p:spPr>
-          <a:xfrm>
-            <a:off x="4629150" y="1825627"/>
-            <a:ext cx="3886200" cy="3816637"/>
-          </a:xfrm>
-        </p:spPr>
-        <p:txBody>
-          <a:bodyPr>
-            <a:normAutofit/>
-          </a:bodyPr>
-          <a:lstStyle/>
-          <a:p>
-            <a:r>
-              <a:rPr lang="en-US" dirty="0"/>
-              <a:t>Need to track file paths (tedious)</a:t>
-            </a:r>
-          </a:p>
-          <a:p>
-            <a:endParaRPr lang="en-US" dirty="0"/>
-          </a:p>
-          <a:p>
-            <a:r>
-              <a:rPr lang="en-US" dirty="0"/>
-              <a:t>Harder to manage dependencies</a:t>
-            </a:r>
-          </a:p>
-          <a:p>
-            <a:endParaRPr lang="en-US" dirty="0"/>
-          </a:p>
-          <a:p>
-            <a:r>
-              <a:rPr lang="en-US" dirty="0"/>
-              <a:t>Harder for users</a:t>
-            </a:r>
-          </a:p>
-          <a:p>
-            <a:endParaRPr lang="en-US" dirty="0"/>
+              <a:rPr lang="en-CA" dirty="0"/>
+              <a:t>“Works on my machine”</a:t>
+            </a:r>
+          </a:p>
+          <a:p>
+            <a:pPr lvl="1"/>
+            <a:r>
+              <a:rPr lang="en-CA" dirty="0"/>
+              <a:t>What about other users?</a:t>
+            </a:r>
+          </a:p>
+          <a:p>
+            <a:pPr lvl="1"/>
+            <a:endParaRPr lang="en-CA" dirty="0"/>
+          </a:p>
+          <a:p>
+            <a:r>
+              <a:rPr lang="en-CA" dirty="0"/>
+              <a:t>“Using different scripts with source() is enough”</a:t>
+            </a:r>
+          </a:p>
+          <a:p>
+            <a:pPr lvl="1"/>
+            <a:r>
+              <a:rPr lang="en-CA" dirty="0"/>
+              <a:t>How do you handle file paths in different projects?</a:t>
+            </a:r>
+          </a:p>
+          <a:p>
+            <a:pPr lvl="1"/>
+            <a:endParaRPr lang="en-CA" dirty="0"/>
+          </a:p>
+          <a:p>
+            <a:r>
+              <a:rPr lang="en-CA" dirty="0"/>
+              <a:t>“I already have all the packages installed”</a:t>
+            </a:r>
+          </a:p>
+          <a:p>
+            <a:pPr lvl="1"/>
+            <a:r>
+              <a:rPr lang="en-CA" dirty="0"/>
+              <a:t>Can you ensure reproducibility?</a:t>
+            </a:r>
+          </a:p>
+          <a:p>
+            <a:pPr lvl="1"/>
+            <a:endParaRPr lang="en-CA" dirty="0"/>
+          </a:p>
+          <a:p>
+            <a:r>
+              <a:rPr lang="en-CA" dirty="0"/>
+              <a:t>“I still have features to add”</a:t>
+            </a:r>
+          </a:p>
+          <a:p>
+            <a:pPr lvl="1"/>
+            <a:r>
+              <a:rPr lang="en-CA" dirty="0"/>
+              <a:t>What if the code breaks? Will you know if it does?</a:t>
+            </a:r>
+          </a:p>
+          <a:p>
+            <a:pPr lvl="1"/>
+            <a:endParaRPr lang="en-CA" dirty="0"/>
           </a:p>
         </p:txBody>
       </p:sp>
     </p:spTree>
     <p:extLst>
       <p:ext uri="{BB962C8B-B14F-4D97-AF65-F5344CB8AC3E}">
-        <p14:creationId xmlns:p14="http://schemas.microsoft.com/office/powerpoint/2010/main" val="940167082"/>
+        <p14:creationId xmlns:p14="http://schemas.microsoft.com/office/powerpoint/2010/main" val="3567545301"/>
       </p:ext>
     </p:extLst>
   </p:cSld>

--- a/Slides/RPackageDevelopment_Slides.pptx
+++ b/Slides/RPackageDevelopment_Slides.pptx
@@ -16,11 +16,11 @@
     <p:sldId id="321" r:id="rId7"/>
     <p:sldId id="436" r:id="rId8"/>
     <p:sldId id="323" r:id="rId9"/>
-    <p:sldId id="450" r:id="rId10"/>
-    <p:sldId id="437" r:id="rId11"/>
-    <p:sldId id="406" r:id="rId12"/>
-    <p:sldId id="428" r:id="rId13"/>
-    <p:sldId id="429" r:id="rId14"/>
+    <p:sldId id="428" r:id="rId10"/>
+    <p:sldId id="429" r:id="rId11"/>
+    <p:sldId id="450" r:id="rId12"/>
+    <p:sldId id="437" r:id="rId13"/>
+    <p:sldId id="406" r:id="rId14"/>
     <p:sldId id="407" r:id="rId15"/>
     <p:sldId id="445" r:id="rId16"/>
     <p:sldId id="446" r:id="rId17"/>
@@ -167,7 +167,7 @@
 <file path=ppt/revisionInfo.xml><?xml version="1.0" encoding="utf-8"?>
 <p1510:revInfo xmlns:a="http://schemas.openxmlformats.org/drawingml/2006/main" xmlns:r="http://schemas.openxmlformats.org/officeDocument/2006/relationships" xmlns:p1510="http://schemas.microsoft.com/office/powerpoint/2015/10/main">
   <p1510:revLst>
-    <p1510:client id="{7B91186F-AFD7-4556-9E93-756AA89B05D5}" v="59" dt="2026-08-11T20:15:22.039"/>
+    <p1510:client id="{7B91186F-AFD7-4556-9E93-756AA89B05D5}" v="65" dt="2026-08-14T14:52:08.480"/>
   </p1510:revLst>
 </p1510:revInfo>
 </file>
@@ -181,13 +181,6 @@
       <pc:docMkLst>
         <pc:docMk/>
       </pc:docMkLst>
-      <pc:sldChg chg="add del ord">
-        <pc:chgData name="Adrien Osakwe" userId="7a3e290c-eb83-484b-8e3d-d46ef2333477" providerId="ADAL" clId="{09ABE13D-32B9-4646-8B10-CB7999C84D02}" dt="2026-07-14T20:18:16.032" v="63" actId="20578"/>
-        <pc:sldMkLst>
-          <pc:docMk/>
-          <pc:sldMk cId="3959237559" sldId="256"/>
-        </pc:sldMkLst>
-      </pc:sldChg>
       <pc:sldChg chg="modSp add mod ord">
         <pc:chgData name="Adrien Osakwe" userId="7a3e290c-eb83-484b-8e3d-d46ef2333477" providerId="ADAL" clId="{09ABE13D-32B9-4646-8B10-CB7999C84D02}" dt="2026-07-15T15:43:00.354" v="3307" actId="20577"/>
         <pc:sldMkLst>
@@ -202,13 +195,6 @@
             <ac:spMk id="2" creationId="{10C0557F-5508-20BC-7CF6-DF79F9930C8B}"/>
           </ac:spMkLst>
         </pc:spChg>
-      </pc:sldChg>
-      <pc:sldChg chg="add">
-        <pc:chgData name="Adrien Osakwe" userId="7a3e290c-eb83-484b-8e3d-d46ef2333477" providerId="ADAL" clId="{09ABE13D-32B9-4646-8B10-CB7999C84D02}" dt="2026-07-14T20:12:53.878" v="2"/>
-        <pc:sldMkLst>
-          <pc:docMk/>
-          <pc:sldMk cId="3735510520" sldId="260"/>
-        </pc:sldMkLst>
       </pc:sldChg>
       <pc:sldChg chg="modSp add mod ord">
         <pc:chgData name="Adrien Osakwe" userId="7a3e290c-eb83-484b-8e3d-d46ef2333477" providerId="ADAL" clId="{09ABE13D-32B9-4646-8B10-CB7999C84D02}" dt="2026-07-15T18:05:22.921" v="3312" actId="20577"/>
@@ -231,22 +217,6 @@
           <pc:docMk/>
           <pc:sldMk cId="3587535936" sldId="320"/>
         </pc:sldMkLst>
-        <pc:spChg chg="add mod">
-          <ac:chgData name="Adrien Osakwe" userId="7a3e290c-eb83-484b-8e3d-d46ef2333477" providerId="ADAL" clId="{09ABE13D-32B9-4646-8B10-CB7999C84D02}" dt="2026-07-14T20:19:01.144" v="100" actId="20577"/>
-          <ac:spMkLst>
-            <pc:docMk/>
-            <pc:sldMk cId="3587535936" sldId="320"/>
-            <ac:spMk id="3" creationId="{1A675FF3-F5C4-4D9D-72F6-339B99ED886F}"/>
-          </ac:spMkLst>
-        </pc:spChg>
-        <pc:spChg chg="add mod">
-          <ac:chgData name="Adrien Osakwe" userId="7a3e290c-eb83-484b-8e3d-d46ef2333477" providerId="ADAL" clId="{09ABE13D-32B9-4646-8B10-CB7999C84D02}" dt="2026-07-14T20:19:19.369" v="143" actId="20577"/>
-          <ac:spMkLst>
-            <pc:docMk/>
-            <pc:sldMk cId="3587535936" sldId="320"/>
-            <ac:spMk id="4" creationId="{5FC2150F-A588-4511-139C-D809D8400571}"/>
-          </ac:spMkLst>
-        </pc:spChg>
         <pc:picChg chg="add mod">
           <ac:chgData name="Adrien Osakwe" userId="7a3e290c-eb83-484b-8e3d-d46ef2333477" providerId="ADAL" clId="{09ABE13D-32B9-4646-8B10-CB7999C84D02}" dt="2026-07-15T15:46:41.284" v="3310" actId="14100"/>
           <ac:picMkLst>
@@ -257,72 +227,11 @@
         </pc:picChg>
       </pc:sldChg>
       <pc:sldChg chg="modSp new mod">
-        <pc:chgData name="Adrien Osakwe" userId="7a3e290c-eb83-484b-8e3d-d46ef2333477" providerId="ADAL" clId="{09ABE13D-32B9-4646-8B10-CB7999C84D02}" dt="2026-07-14T20:50:35.437" v="479" actId="20577"/>
-        <pc:sldMkLst>
-          <pc:docMk/>
-          <pc:sldMk cId="3602721871" sldId="321"/>
-        </pc:sldMkLst>
-        <pc:spChg chg="mod">
-          <ac:chgData name="Adrien Osakwe" userId="7a3e290c-eb83-484b-8e3d-d46ef2333477" providerId="ADAL" clId="{09ABE13D-32B9-4646-8B10-CB7999C84D02}" dt="2026-07-14T20:40:44.079" v="161" actId="20577"/>
-          <ac:spMkLst>
-            <pc:docMk/>
-            <pc:sldMk cId="3602721871" sldId="321"/>
-            <ac:spMk id="2" creationId="{617AD453-1B50-891F-EA57-93BE367EC635}"/>
-          </ac:spMkLst>
-        </pc:spChg>
-        <pc:spChg chg="mod">
-          <ac:chgData name="Adrien Osakwe" userId="7a3e290c-eb83-484b-8e3d-d46ef2333477" providerId="ADAL" clId="{09ABE13D-32B9-4646-8B10-CB7999C84D02}" dt="2026-07-14T20:50:35.437" v="479" actId="20577"/>
-          <ac:spMkLst>
-            <pc:docMk/>
-            <pc:sldMk cId="3602721871" sldId="321"/>
-            <ac:spMk id="3" creationId="{8296774D-2E53-E4B2-B8EA-360BC110FD38}"/>
-          </ac:spMkLst>
-        </pc:spChg>
-      </pc:sldChg>
-      <pc:sldChg chg="modSp add mod">
-        <pc:chgData name="Adrien Osakwe" userId="7a3e290c-eb83-484b-8e3d-d46ef2333477" providerId="ADAL" clId="{09ABE13D-32B9-4646-8B10-CB7999C84D02}" dt="2026-07-14T20:51:35.274" v="517" actId="20577"/>
-        <pc:sldMkLst>
-          <pc:docMk/>
-          <pc:sldMk cId="223915468" sldId="323"/>
-        </pc:sldMkLst>
-        <pc:spChg chg="mod">
-          <ac:chgData name="Adrien Osakwe" userId="7a3e290c-eb83-484b-8e3d-d46ef2333477" providerId="ADAL" clId="{09ABE13D-32B9-4646-8B10-CB7999C84D02}" dt="2026-07-14T20:51:35.274" v="517" actId="20577"/>
-          <ac:spMkLst>
-            <pc:docMk/>
-            <pc:sldMk cId="223915468" sldId="323"/>
-            <ac:spMk id="3" creationId="{6CF8068E-9C93-CB78-065E-0CAF6A6BF497}"/>
-          </ac:spMkLst>
-        </pc:spChg>
-      </pc:sldChg>
-      <pc:sldChg chg="modSp add mod">
-        <pc:chgData name="Adrien Osakwe" userId="7a3e290c-eb83-484b-8e3d-d46ef2333477" providerId="ADAL" clId="{09ABE13D-32B9-4646-8B10-CB7999C84D02}" dt="2026-07-14T20:52:29.099" v="575" actId="20577"/>
-        <pc:sldMkLst>
-          <pc:docMk/>
-          <pc:sldMk cId="2341505858" sldId="324"/>
-        </pc:sldMkLst>
-        <pc:spChg chg="mod">
-          <ac:chgData name="Adrien Osakwe" userId="7a3e290c-eb83-484b-8e3d-d46ef2333477" providerId="ADAL" clId="{09ABE13D-32B9-4646-8B10-CB7999C84D02}" dt="2026-07-14T20:52:29.099" v="575" actId="20577"/>
-          <ac:spMkLst>
-            <pc:docMk/>
-            <pc:sldMk cId="2341505858" sldId="324"/>
-            <ac:spMk id="3" creationId="{154509B3-1BE7-E9C4-5DF5-A583F50756B6}"/>
-          </ac:spMkLst>
-        </pc:spChg>
-      </pc:sldChg>
-      <pc:sldChg chg="modSp new mod">
         <pc:chgData name="Adrien Osakwe" userId="7a3e290c-eb83-484b-8e3d-d46ef2333477" providerId="ADAL" clId="{09ABE13D-32B9-4646-8B10-CB7999C84D02}" dt="2026-07-15T14:51:10.692" v="1997" actId="20577"/>
         <pc:sldMkLst>
           <pc:docMk/>
           <pc:sldMk cId="775350422" sldId="327"/>
         </pc:sldMkLst>
-        <pc:spChg chg="mod">
-          <ac:chgData name="Adrien Osakwe" userId="7a3e290c-eb83-484b-8e3d-d46ef2333477" providerId="ADAL" clId="{09ABE13D-32B9-4646-8B10-CB7999C84D02}" dt="2026-07-14T20:52:58.860" v="643" actId="20577"/>
-          <ac:spMkLst>
-            <pc:docMk/>
-            <pc:sldMk cId="775350422" sldId="327"/>
-            <ac:spMk id="2" creationId="{FE915632-C511-A9E9-D340-BEC667515236}"/>
-          </ac:spMkLst>
-        </pc:spChg>
         <pc:spChg chg="mod">
           <ac:chgData name="Adrien Osakwe" userId="7a3e290c-eb83-484b-8e3d-d46ef2333477" providerId="ADAL" clId="{09ABE13D-32B9-4646-8B10-CB7999C84D02}" dt="2026-07-15T14:51:10.692" v="1997" actId="20577"/>
           <ac:spMkLst>
@@ -332,43 +241,12 @@
           </ac:spMkLst>
         </pc:spChg>
       </pc:sldChg>
-      <pc:sldChg chg="modSp new mod">
-        <pc:chgData name="Adrien Osakwe" userId="7a3e290c-eb83-484b-8e3d-d46ef2333477" providerId="ADAL" clId="{09ABE13D-32B9-4646-8B10-CB7999C84D02}" dt="2026-07-14T20:54:58.987" v="879" actId="113"/>
-        <pc:sldMkLst>
-          <pc:docMk/>
-          <pc:sldMk cId="4003429187" sldId="328"/>
-        </pc:sldMkLst>
-        <pc:spChg chg="mod">
-          <ac:chgData name="Adrien Osakwe" userId="7a3e290c-eb83-484b-8e3d-d46ef2333477" providerId="ADAL" clId="{09ABE13D-32B9-4646-8B10-CB7999C84D02}" dt="2026-07-14T20:54:00.987" v="686" actId="20577"/>
-          <ac:spMkLst>
-            <pc:docMk/>
-            <pc:sldMk cId="4003429187" sldId="328"/>
-            <ac:spMk id="2" creationId="{74428F7B-DC2B-85A5-1C1F-AD0171621091}"/>
-          </ac:spMkLst>
-        </pc:spChg>
-        <pc:spChg chg="mod">
-          <ac:chgData name="Adrien Osakwe" userId="7a3e290c-eb83-484b-8e3d-d46ef2333477" providerId="ADAL" clId="{09ABE13D-32B9-4646-8B10-CB7999C84D02}" dt="2026-07-14T20:54:58.987" v="879" actId="113"/>
-          <ac:spMkLst>
-            <pc:docMk/>
-            <pc:sldMk cId="4003429187" sldId="328"/>
-            <ac:spMk id="3" creationId="{33D959FC-3BD5-F79B-6D54-99514B14242D}"/>
-          </ac:spMkLst>
-        </pc:spChg>
-      </pc:sldChg>
       <pc:sldChg chg="addSp modSp new mod">
         <pc:chgData name="Adrien Osakwe" userId="7a3e290c-eb83-484b-8e3d-d46ef2333477" providerId="ADAL" clId="{09ABE13D-32B9-4646-8B10-CB7999C84D02}" dt="2026-07-15T15:30:10.952" v="2730" actId="1037"/>
         <pc:sldMkLst>
           <pc:docMk/>
           <pc:sldMk cId="393444062" sldId="329"/>
         </pc:sldMkLst>
-        <pc:spChg chg="mod">
-          <ac:chgData name="Adrien Osakwe" userId="7a3e290c-eb83-484b-8e3d-d46ef2333477" providerId="ADAL" clId="{09ABE13D-32B9-4646-8B10-CB7999C84D02}" dt="2026-07-14T20:55:08.859" v="898" actId="20577"/>
-          <ac:spMkLst>
-            <pc:docMk/>
-            <pc:sldMk cId="393444062" sldId="329"/>
-            <ac:spMk id="2" creationId="{1CA3896D-A639-AB21-2F26-A2665F471F27}"/>
-          </ac:spMkLst>
-        </pc:spChg>
         <pc:spChg chg="mod">
           <ac:chgData name="Adrien Osakwe" userId="7a3e290c-eb83-484b-8e3d-d46ef2333477" providerId="ADAL" clId="{09ABE13D-32B9-4646-8B10-CB7999C84D02}" dt="2026-07-15T15:29:43.647" v="2719" actId="14100"/>
           <ac:spMkLst>
@@ -393,14 +271,6 @@
           <pc:sldMk cId="3227588993" sldId="330"/>
         </pc:sldMkLst>
         <pc:spChg chg="mod">
-          <ac:chgData name="Adrien Osakwe" userId="7a3e290c-eb83-484b-8e3d-d46ef2333477" providerId="ADAL" clId="{09ABE13D-32B9-4646-8B10-CB7999C84D02}" dt="2026-07-14T20:56:31.241" v="1212" actId="20577"/>
-          <ac:spMkLst>
-            <pc:docMk/>
-            <pc:sldMk cId="3227588993" sldId="330"/>
-            <ac:spMk id="2" creationId="{A456644B-FBEC-5421-3990-6EAEC51D647D}"/>
-          </ac:spMkLst>
-        </pc:spChg>
-        <pc:spChg chg="mod">
           <ac:chgData name="Adrien Osakwe" userId="7a3e290c-eb83-484b-8e3d-d46ef2333477" providerId="ADAL" clId="{09ABE13D-32B9-4646-8B10-CB7999C84D02}" dt="2026-07-15T15:34:33.295" v="3154" actId="5793"/>
           <ac:spMkLst>
             <pc:docMk/>
@@ -415,14 +285,6 @@
           <pc:docMk/>
           <pc:sldMk cId="3482164999" sldId="331"/>
         </pc:sldMkLst>
-        <pc:spChg chg="mod">
-          <ac:chgData name="Adrien Osakwe" userId="7a3e290c-eb83-484b-8e3d-d46ef2333477" providerId="ADAL" clId="{09ABE13D-32B9-4646-8B10-CB7999C84D02}" dt="2026-07-14T20:57:28.457" v="1464" actId="20577"/>
-          <ac:spMkLst>
-            <pc:docMk/>
-            <pc:sldMk cId="3482164999" sldId="331"/>
-            <ac:spMk id="2" creationId="{46FC251F-B5ED-1074-7347-BBF8BE63786F}"/>
-          </ac:spMkLst>
-        </pc:spChg>
         <pc:spChg chg="mod">
           <ac:chgData name="Adrien Osakwe" userId="7a3e290c-eb83-484b-8e3d-d46ef2333477" providerId="ADAL" clId="{09ABE13D-32B9-4646-8B10-CB7999C84D02}" dt="2026-07-15T15:31:46.805" v="3059" actId="20577"/>
           <ac:spMkLst>
@@ -617,98 +479,15 @@
           </ac:spMkLst>
         </pc:spChg>
       </pc:sldChg>
-      <pc:sldMasterChg chg="modSldLayout">
-        <pc:chgData name="Adrien Osakwe" userId="7a3e290c-eb83-484b-8e3d-d46ef2333477" providerId="ADAL" clId="{09ABE13D-32B9-4646-8B10-CB7999C84D02}" dt="2026-07-14T20:16:30.281" v="29" actId="478"/>
-        <pc:sldMasterMkLst>
-          <pc:docMk/>
-          <pc:sldMasterMk cId="1449374226" sldId="2147483660"/>
-        </pc:sldMasterMkLst>
-        <pc:sldLayoutChg chg="addSp delSp modSp mod">
-          <pc:chgData name="Adrien Osakwe" userId="7a3e290c-eb83-484b-8e3d-d46ef2333477" providerId="ADAL" clId="{09ABE13D-32B9-4646-8B10-CB7999C84D02}" dt="2026-07-14T20:16:30.281" v="29" actId="478"/>
-          <pc:sldLayoutMkLst>
-            <pc:docMk/>
-            <pc:sldMasterMk cId="1449374226" sldId="2147483660"/>
-            <pc:sldLayoutMk cId="3264083727" sldId="2147483661"/>
-          </pc:sldLayoutMkLst>
-          <pc:picChg chg="add mod">
-            <ac:chgData name="Adrien Osakwe" userId="7a3e290c-eb83-484b-8e3d-d46ef2333477" providerId="ADAL" clId="{09ABE13D-32B9-4646-8B10-CB7999C84D02}" dt="2026-07-14T20:15:50.424" v="24" actId="14100"/>
-            <ac:picMkLst>
-              <pc:docMk/>
-              <pc:sldMasterMk cId="1449374226" sldId="2147483660"/>
-              <pc:sldLayoutMk cId="3264083727" sldId="2147483661"/>
-              <ac:picMk id="4" creationId="{901F0B20-408F-2B4A-284C-54914990B943}"/>
-            </ac:picMkLst>
-          </pc:picChg>
-        </pc:sldLayoutChg>
-        <pc:sldLayoutChg chg="addSp modSp">
-          <pc:chgData name="Adrien Osakwe" userId="7a3e290c-eb83-484b-8e3d-d46ef2333477" providerId="ADAL" clId="{09ABE13D-32B9-4646-8B10-CB7999C84D02}" dt="2026-07-14T20:16:10.265" v="28" actId="1035"/>
-          <pc:sldLayoutMkLst>
-            <pc:docMk/>
-            <pc:sldMasterMk cId="1449374226" sldId="2147483660"/>
-            <pc:sldLayoutMk cId="322694191" sldId="2147483670"/>
-          </pc:sldLayoutMkLst>
-          <pc:picChg chg="add mod">
-            <ac:chgData name="Adrien Osakwe" userId="7a3e290c-eb83-484b-8e3d-d46ef2333477" providerId="ADAL" clId="{09ABE13D-32B9-4646-8B10-CB7999C84D02}" dt="2026-07-14T20:16:10.265" v="28" actId="1035"/>
-            <ac:picMkLst>
-              <pc:docMk/>
-              <pc:sldMasterMk cId="1449374226" sldId="2147483660"/>
-              <pc:sldLayoutMk cId="322694191" sldId="2147483670"/>
-              <ac:picMk id="2" creationId="{B4E0375E-06DE-CC3D-FC14-4D91EE6470F8}"/>
-            </ac:picMkLst>
-          </pc:picChg>
-          <pc:picChg chg="add mod">
-            <ac:chgData name="Adrien Osakwe" userId="7a3e290c-eb83-484b-8e3d-d46ef2333477" providerId="ADAL" clId="{09ABE13D-32B9-4646-8B10-CB7999C84D02}" dt="2026-07-14T20:16:10.265" v="28" actId="1035"/>
-            <ac:picMkLst>
-              <pc:docMk/>
-              <pc:sldMasterMk cId="1449374226" sldId="2147483660"/>
-              <pc:sldLayoutMk cId="322694191" sldId="2147483670"/>
-              <ac:picMk id="4" creationId="{48BA55F6-1EA5-F4BD-45AD-D7A800249734}"/>
-            </ac:picMkLst>
-          </pc:picChg>
-        </pc:sldLayoutChg>
-        <pc:sldLayoutChg chg="addSp delSp modSp mod">
-          <pc:chgData name="Adrien Osakwe" userId="7a3e290c-eb83-484b-8e3d-d46ef2333477" providerId="ADAL" clId="{09ABE13D-32B9-4646-8B10-CB7999C84D02}" dt="2026-07-14T20:15:29.417" v="19"/>
-          <pc:sldLayoutMkLst>
-            <pc:docMk/>
-            <pc:sldMasterMk cId="1449374226" sldId="2147483660"/>
-            <pc:sldLayoutMk cId="3350706779" sldId="2147483671"/>
-          </pc:sldLayoutMkLst>
-          <pc:picChg chg="add mod">
-            <ac:chgData name="Adrien Osakwe" userId="7a3e290c-eb83-484b-8e3d-d46ef2333477" providerId="ADAL" clId="{09ABE13D-32B9-4646-8B10-CB7999C84D02}" dt="2026-07-14T20:15:10.625" v="11" actId="1076"/>
-            <ac:picMkLst>
-              <pc:docMk/>
-              <pc:sldMasterMk cId="1449374226" sldId="2147483660"/>
-              <pc:sldLayoutMk cId="3350706779" sldId="2147483671"/>
-              <ac:picMk id="2" creationId="{F293AA35-39CA-D5AA-46B4-E32A7A3C2702}"/>
-            </ac:picMkLst>
-          </pc:picChg>
-          <pc:picChg chg="add mod">
-            <ac:chgData name="Adrien Osakwe" userId="7a3e290c-eb83-484b-8e3d-d46ef2333477" providerId="ADAL" clId="{09ABE13D-32B9-4646-8B10-CB7999C84D02}" dt="2026-07-14T20:15:24.202" v="15" actId="1076"/>
-            <ac:picMkLst>
-              <pc:docMk/>
-              <pc:sldMasterMk cId="1449374226" sldId="2147483660"/>
-              <pc:sldLayoutMk cId="3350706779" sldId="2147483671"/>
-              <ac:picMk id="4" creationId="{656DFE86-6EEA-995D-0B99-F99D01139386}"/>
-            </ac:picMkLst>
-          </pc:picChg>
-        </pc:sldLayoutChg>
-      </pc:sldMasterChg>
     </pc:docChg>
   </pc:docChgLst>
   <pc:docChgLst>
     <pc:chgData name="Adrien Osakwe" userId="7a3e290c-eb83-484b-8e3d-d46ef2333477" providerId="ADAL" clId="{516F4981-D9C8-4339-9685-B0B88EA45B28}"/>
     <pc:docChg chg="undo custSel addSld delSld modSld sldOrd">
-      <pc:chgData name="Adrien Osakwe" userId="7a3e290c-eb83-484b-8e3d-d46ef2333477" providerId="ADAL" clId="{516F4981-D9C8-4339-9685-B0B88EA45B28}" dt="2026-08-11T20:19:31.053" v="8251" actId="20577"/>
+      <pc:chgData name="Adrien Osakwe" userId="7a3e290c-eb83-484b-8e3d-d46ef2333477" providerId="ADAL" clId="{516F4981-D9C8-4339-9685-B0B88EA45B28}" dt="2026-08-14T15:07:57.734" v="8505" actId="313"/>
       <pc:docMkLst>
         <pc:docMk/>
       </pc:docMkLst>
-      <pc:sldChg chg="del">
-        <pc:chgData name="Adrien Osakwe" userId="7a3e290c-eb83-484b-8e3d-d46ef2333477" providerId="ADAL" clId="{516F4981-D9C8-4339-9685-B0B88EA45B28}" dt="2026-08-11T03:41:40.272" v="719" actId="47"/>
-        <pc:sldMkLst>
-          <pc:docMk/>
-          <pc:sldMk cId="3133242724" sldId="262"/>
-        </pc:sldMkLst>
-      </pc:sldChg>
       <pc:sldChg chg="addSp delSp modSp mod">
         <pc:chgData name="Adrien Osakwe" userId="7a3e290c-eb83-484b-8e3d-d46ef2333477" providerId="ADAL" clId="{516F4981-D9C8-4339-9685-B0B88EA45B28}" dt="2026-08-11T03:41:06.934" v="695" actId="6549"/>
         <pc:sldMkLst>
@@ -731,23 +510,15 @@
             <ac:spMk id="4" creationId="{5FC2150F-A588-4511-139C-D809D8400571}"/>
           </ac:spMkLst>
         </pc:spChg>
-        <pc:spChg chg="add del mod">
-          <ac:chgData name="Adrien Osakwe" userId="7a3e290c-eb83-484b-8e3d-d46ef2333477" providerId="ADAL" clId="{516F4981-D9C8-4339-9685-B0B88EA45B28}" dt="2026-08-11T03:31:11.615" v="2"/>
-          <ac:spMkLst>
-            <pc:docMk/>
-            <pc:sldMk cId="3587535936" sldId="320"/>
-            <ac:spMk id="5" creationId="{FF0E537B-23E9-775D-FB04-2EF0B8C1B4CF}"/>
-          </ac:spMkLst>
-        </pc:spChg>
       </pc:sldChg>
       <pc:sldChg chg="modSp mod">
-        <pc:chgData name="Adrien Osakwe" userId="7a3e290c-eb83-484b-8e3d-d46ef2333477" providerId="ADAL" clId="{516F4981-D9C8-4339-9685-B0B88EA45B28}" dt="2026-08-11T15:56:18.720" v="3770" actId="27636"/>
+        <pc:chgData name="Adrien Osakwe" userId="7a3e290c-eb83-484b-8e3d-d46ef2333477" providerId="ADAL" clId="{516F4981-D9C8-4339-9685-B0B88EA45B28}" dt="2026-08-14T13:52:45.622" v="8260" actId="27636"/>
         <pc:sldMkLst>
           <pc:docMk/>
           <pc:sldMk cId="3602721871" sldId="321"/>
         </pc:sldMkLst>
         <pc:spChg chg="mod">
-          <ac:chgData name="Adrien Osakwe" userId="7a3e290c-eb83-484b-8e3d-d46ef2333477" providerId="ADAL" clId="{516F4981-D9C8-4339-9685-B0B88EA45B28}" dt="2026-08-11T15:56:18.720" v="3770" actId="27636"/>
+          <ac:chgData name="Adrien Osakwe" userId="7a3e290c-eb83-484b-8e3d-d46ef2333477" providerId="ADAL" clId="{516F4981-D9C8-4339-9685-B0B88EA45B28}" dt="2026-08-14T13:52:45.622" v="8260" actId="27636"/>
           <ac:spMkLst>
             <pc:docMk/>
             <pc:sldMk cId="3602721871" sldId="321"/>
@@ -756,13 +527,13 @@
         </pc:spChg>
       </pc:sldChg>
       <pc:sldChg chg="modSp add mod">
-        <pc:chgData name="Adrien Osakwe" userId="7a3e290c-eb83-484b-8e3d-d46ef2333477" providerId="ADAL" clId="{516F4981-D9C8-4339-9685-B0B88EA45B28}" dt="2026-08-11T15:56:36.461" v="3774" actId="20577"/>
+        <pc:chgData name="Adrien Osakwe" userId="7a3e290c-eb83-484b-8e3d-d46ef2333477" providerId="ADAL" clId="{516F4981-D9C8-4339-9685-B0B88EA45B28}" dt="2026-08-14T14:52:25.006" v="8503" actId="20577"/>
         <pc:sldMkLst>
           <pc:docMk/>
           <pc:sldMk cId="72533941" sldId="322"/>
         </pc:sldMkLst>
         <pc:spChg chg="mod">
-          <ac:chgData name="Adrien Osakwe" userId="7a3e290c-eb83-484b-8e3d-d46ef2333477" providerId="ADAL" clId="{516F4981-D9C8-4339-9685-B0B88EA45B28}" dt="2026-08-11T15:56:36.461" v="3774" actId="20577"/>
+          <ac:chgData name="Adrien Osakwe" userId="7a3e290c-eb83-484b-8e3d-d46ef2333477" providerId="ADAL" clId="{516F4981-D9C8-4339-9685-B0B88EA45B28}" dt="2026-08-14T14:52:25.006" v="8503" actId="20577"/>
           <ac:spMkLst>
             <pc:docMk/>
             <pc:sldMk cId="72533941" sldId="322"/>
@@ -770,28 +541,14 @@
           </ac:spMkLst>
         </pc:spChg>
       </pc:sldChg>
-      <pc:sldChg chg="add del">
-        <pc:chgData name="Adrien Osakwe" userId="7a3e290c-eb83-484b-8e3d-d46ef2333477" providerId="ADAL" clId="{516F4981-D9C8-4339-9685-B0B88EA45B28}" dt="2026-08-11T15:56:30.309" v="3771" actId="2696"/>
-        <pc:sldMkLst>
-          <pc:docMk/>
-          <pc:sldMk cId="3545620837" sldId="322"/>
-        </pc:sldMkLst>
-      </pc:sldChg>
-      <pc:sldChg chg="del">
-        <pc:chgData name="Adrien Osakwe" userId="7a3e290c-eb83-484b-8e3d-d46ef2333477" providerId="ADAL" clId="{516F4981-D9C8-4339-9685-B0B88EA45B28}" dt="2026-08-11T15:44:18.947" v="3521" actId="2696"/>
-        <pc:sldMkLst>
-          <pc:docMk/>
-          <pc:sldMk cId="4028967058" sldId="322"/>
-        </pc:sldMkLst>
-      </pc:sldChg>
       <pc:sldChg chg="modSp mod">
-        <pc:chgData name="Adrien Osakwe" userId="7a3e290c-eb83-484b-8e3d-d46ef2333477" providerId="ADAL" clId="{516F4981-D9C8-4339-9685-B0B88EA45B28}" dt="2026-08-11T15:56:40.688" v="3776" actId="20577"/>
+        <pc:chgData name="Adrien Osakwe" userId="7a3e290c-eb83-484b-8e3d-d46ef2333477" providerId="ADAL" clId="{516F4981-D9C8-4339-9685-B0B88EA45B28}" dt="2026-08-14T14:52:29.856" v="8504" actId="20577"/>
         <pc:sldMkLst>
           <pc:docMk/>
           <pc:sldMk cId="2341505858" sldId="324"/>
         </pc:sldMkLst>
         <pc:spChg chg="mod">
-          <ac:chgData name="Adrien Osakwe" userId="7a3e290c-eb83-484b-8e3d-d46ef2333477" providerId="ADAL" clId="{516F4981-D9C8-4339-9685-B0B88EA45B28}" dt="2026-08-11T15:56:40.688" v="3776" actId="20577"/>
+          <ac:chgData name="Adrien Osakwe" userId="7a3e290c-eb83-484b-8e3d-d46ef2333477" providerId="ADAL" clId="{516F4981-D9C8-4339-9685-B0B88EA45B28}" dt="2026-08-14T14:52:29.856" v="8504" actId="20577"/>
           <ac:spMkLst>
             <pc:docMk/>
             <pc:sldMk cId="2341505858" sldId="324"/>
@@ -799,37 +556,14 @@
           </ac:spMkLst>
         </pc:spChg>
       </pc:sldChg>
-      <pc:sldChg chg="modSp del mod">
-        <pc:chgData name="Adrien Osakwe" userId="7a3e290c-eb83-484b-8e3d-d46ef2333477" providerId="ADAL" clId="{516F4981-D9C8-4339-9685-B0B88EA45B28}" dt="2026-08-11T20:16:25.082" v="7780" actId="47"/>
-        <pc:sldMkLst>
-          <pc:docMk/>
-          <pc:sldMk cId="940167082" sldId="326"/>
-        </pc:sldMkLst>
-        <pc:spChg chg="mod">
-          <ac:chgData name="Adrien Osakwe" userId="7a3e290c-eb83-484b-8e3d-d46ef2333477" providerId="ADAL" clId="{516F4981-D9C8-4339-9685-B0B88EA45B28}" dt="2026-08-11T03:32:10.734" v="37" actId="20577"/>
-          <ac:spMkLst>
-            <pc:docMk/>
-            <pc:sldMk cId="940167082" sldId="326"/>
-            <ac:spMk id="3" creationId="{74130F42-8D26-FE92-B842-3D5721CA7F7D}"/>
-          </ac:spMkLst>
-        </pc:spChg>
-        <pc:spChg chg="mod">
-          <ac:chgData name="Adrien Osakwe" userId="7a3e290c-eb83-484b-8e3d-d46ef2333477" providerId="ADAL" clId="{516F4981-D9C8-4339-9685-B0B88EA45B28}" dt="2026-08-11T03:32:28.460" v="46" actId="20577"/>
-          <ac:spMkLst>
-            <pc:docMk/>
-            <pc:sldMk cId="940167082" sldId="326"/>
-            <ac:spMk id="4" creationId="{51138A0C-5E7B-B43A-A677-D0F279CA3B78}"/>
-          </ac:spMkLst>
-        </pc:spChg>
-      </pc:sldChg>
       <pc:sldChg chg="addSp modSp mod">
-        <pc:chgData name="Adrien Osakwe" userId="7a3e290c-eb83-484b-8e3d-d46ef2333477" providerId="ADAL" clId="{516F4981-D9C8-4339-9685-B0B88EA45B28}" dt="2026-08-11T03:57:28.642" v="1679" actId="1076"/>
+        <pc:chgData name="Adrien Osakwe" userId="7a3e290c-eb83-484b-8e3d-d46ef2333477" providerId="ADAL" clId="{516F4981-D9C8-4339-9685-B0B88EA45B28}" dt="2026-08-14T14:51:54.445" v="8501" actId="1076"/>
         <pc:sldMkLst>
           <pc:docMk/>
           <pc:sldMk cId="775350422" sldId="327"/>
         </pc:sldMkLst>
         <pc:spChg chg="mod">
-          <ac:chgData name="Adrien Osakwe" userId="7a3e290c-eb83-484b-8e3d-d46ef2333477" providerId="ADAL" clId="{516F4981-D9C8-4339-9685-B0B88EA45B28}" dt="2026-08-11T03:57:24.649" v="1677" actId="27636"/>
+          <ac:chgData name="Adrien Osakwe" userId="7a3e290c-eb83-484b-8e3d-d46ef2333477" providerId="ADAL" clId="{516F4981-D9C8-4339-9685-B0B88EA45B28}" dt="2026-08-14T14:51:50.672" v="8500" actId="20577"/>
           <ac:spMkLst>
             <pc:docMk/>
             <pc:sldMk cId="775350422" sldId="327"/>
@@ -837,7 +571,7 @@
           </ac:spMkLst>
         </pc:spChg>
         <pc:picChg chg="add mod">
-          <ac:chgData name="Adrien Osakwe" userId="7a3e290c-eb83-484b-8e3d-d46ef2333477" providerId="ADAL" clId="{516F4981-D9C8-4339-9685-B0B88EA45B28}" dt="2026-08-11T03:57:28.642" v="1679" actId="1076"/>
+          <ac:chgData name="Adrien Osakwe" userId="7a3e290c-eb83-484b-8e3d-d46ef2333477" providerId="ADAL" clId="{516F4981-D9C8-4339-9685-B0B88EA45B28}" dt="2026-08-14T14:51:54.445" v="8501" actId="1076"/>
           <ac:picMkLst>
             <pc:docMk/>
             <pc:sldMk cId="775350422" sldId="327"/>
@@ -859,14 +593,6 @@
             <ac:spMk id="3" creationId="{33D959FC-3BD5-F79B-6D54-99514B14242D}"/>
           </ac:spMkLst>
         </pc:spChg>
-        <pc:picChg chg="add del mod">
-          <ac:chgData name="Adrien Osakwe" userId="7a3e290c-eb83-484b-8e3d-d46ef2333477" providerId="ADAL" clId="{516F4981-D9C8-4339-9685-B0B88EA45B28}" dt="2026-08-11T15:46:13.504" v="3526" actId="478"/>
-          <ac:picMkLst>
-            <pc:docMk/>
-            <pc:sldMk cId="4003429187" sldId="328"/>
-            <ac:picMk id="5" creationId="{5CBD1747-2E4F-2EE3-CB18-9C562FDAC872}"/>
-          </ac:picMkLst>
-        </pc:picChg>
         <pc:picChg chg="add mod modCrop">
           <ac:chgData name="Adrien Osakwe" userId="7a3e290c-eb83-484b-8e3d-d46ef2333477" providerId="ADAL" clId="{516F4981-D9C8-4339-9685-B0B88EA45B28}" dt="2026-08-11T15:47:15.727" v="3548" actId="14100"/>
           <ac:picMkLst>
@@ -953,39 +679,11 @@
           </ac:picMkLst>
         </pc:picChg>
       </pc:sldChg>
-      <pc:sldChg chg="del">
-        <pc:chgData name="Adrien Osakwe" userId="7a3e290c-eb83-484b-8e3d-d46ef2333477" providerId="ADAL" clId="{516F4981-D9C8-4339-9685-B0B88EA45B28}" dt="2026-08-11T15:44:18.947" v="3521" actId="2696"/>
-        <pc:sldMkLst>
-          <pc:docMk/>
-          <pc:sldMk cId="620605204" sldId="333"/>
-        </pc:sldMkLst>
-      </pc:sldChg>
-      <pc:sldChg chg="add del">
-        <pc:chgData name="Adrien Osakwe" userId="7a3e290c-eb83-484b-8e3d-d46ef2333477" providerId="ADAL" clId="{516F4981-D9C8-4339-9685-B0B88EA45B28}" dt="2026-08-11T15:56:30.309" v="3771" actId="2696"/>
-        <pc:sldMkLst>
-          <pc:docMk/>
-          <pc:sldMk cId="2559881902" sldId="333"/>
-        </pc:sldMkLst>
-      </pc:sldChg>
       <pc:sldChg chg="add">
         <pc:chgData name="Adrien Osakwe" userId="7a3e290c-eb83-484b-8e3d-d46ef2333477" providerId="ADAL" clId="{516F4981-D9C8-4339-9685-B0B88EA45B28}" dt="2026-08-11T15:56:33.735" v="3772"/>
         <pc:sldMkLst>
           <pc:docMk/>
           <pc:sldMk cId="3906011366" sldId="333"/>
-        </pc:sldMkLst>
-      </pc:sldChg>
-      <pc:sldChg chg="del">
-        <pc:chgData name="Adrien Osakwe" userId="7a3e290c-eb83-484b-8e3d-d46ef2333477" providerId="ADAL" clId="{516F4981-D9C8-4339-9685-B0B88EA45B28}" dt="2026-08-11T15:44:18.947" v="3521" actId="2696"/>
-        <pc:sldMkLst>
-          <pc:docMk/>
-          <pc:sldMk cId="533136476" sldId="355"/>
-        </pc:sldMkLst>
-      </pc:sldChg>
-      <pc:sldChg chg="add del">
-        <pc:chgData name="Adrien Osakwe" userId="7a3e290c-eb83-484b-8e3d-d46ef2333477" providerId="ADAL" clId="{516F4981-D9C8-4339-9685-B0B88EA45B28}" dt="2026-08-11T15:56:30.309" v="3771" actId="2696"/>
-        <pc:sldMkLst>
-          <pc:docMk/>
-          <pc:sldMk cId="1048594591" sldId="355"/>
         </pc:sldMkLst>
       </pc:sldChg>
       <pc:sldChg chg="add">
@@ -995,39 +693,11 @@
           <pc:sldMk cId="3898672664" sldId="355"/>
         </pc:sldMkLst>
       </pc:sldChg>
-      <pc:sldChg chg="del">
-        <pc:chgData name="Adrien Osakwe" userId="7a3e290c-eb83-484b-8e3d-d46ef2333477" providerId="ADAL" clId="{516F4981-D9C8-4339-9685-B0B88EA45B28}" dt="2026-08-11T15:44:18.947" v="3521" actId="2696"/>
-        <pc:sldMkLst>
-          <pc:docMk/>
-          <pc:sldMk cId="83320364" sldId="356"/>
-        </pc:sldMkLst>
-      </pc:sldChg>
       <pc:sldChg chg="add">
         <pc:chgData name="Adrien Osakwe" userId="7a3e290c-eb83-484b-8e3d-d46ef2333477" providerId="ADAL" clId="{516F4981-D9C8-4339-9685-B0B88EA45B28}" dt="2026-08-11T15:56:33.735" v="3772"/>
         <pc:sldMkLst>
           <pc:docMk/>
           <pc:sldMk cId="824051499" sldId="356"/>
-        </pc:sldMkLst>
-      </pc:sldChg>
-      <pc:sldChg chg="add del">
-        <pc:chgData name="Adrien Osakwe" userId="7a3e290c-eb83-484b-8e3d-d46ef2333477" providerId="ADAL" clId="{516F4981-D9C8-4339-9685-B0B88EA45B28}" dt="2026-08-11T15:56:30.309" v="3771" actId="2696"/>
-        <pc:sldMkLst>
-          <pc:docMk/>
-          <pc:sldMk cId="2551635768" sldId="356"/>
-        </pc:sldMkLst>
-      </pc:sldChg>
-      <pc:sldChg chg="del">
-        <pc:chgData name="Adrien Osakwe" userId="7a3e290c-eb83-484b-8e3d-d46ef2333477" providerId="ADAL" clId="{516F4981-D9C8-4339-9685-B0B88EA45B28}" dt="2026-08-11T15:44:18.947" v="3521" actId="2696"/>
-        <pc:sldMkLst>
-          <pc:docMk/>
-          <pc:sldMk cId="541003190" sldId="402"/>
-        </pc:sldMkLst>
-      </pc:sldChg>
-      <pc:sldChg chg="add del">
-        <pc:chgData name="Adrien Osakwe" userId="7a3e290c-eb83-484b-8e3d-d46ef2333477" providerId="ADAL" clId="{516F4981-D9C8-4339-9685-B0B88EA45B28}" dt="2026-08-11T15:56:30.309" v="3771" actId="2696"/>
-        <pc:sldMkLst>
-          <pc:docMk/>
-          <pc:sldMk cId="1029211281" sldId="402"/>
         </pc:sldMkLst>
       </pc:sldChg>
       <pc:sldChg chg="add">
@@ -1037,20 +707,6 @@
           <pc:sldMk cId="4141671523" sldId="402"/>
         </pc:sldMkLst>
       </pc:sldChg>
-      <pc:sldChg chg="del">
-        <pc:chgData name="Adrien Osakwe" userId="7a3e290c-eb83-484b-8e3d-d46ef2333477" providerId="ADAL" clId="{516F4981-D9C8-4339-9685-B0B88EA45B28}" dt="2026-08-11T15:44:18.947" v="3521" actId="2696"/>
-        <pc:sldMkLst>
-          <pc:docMk/>
-          <pc:sldMk cId="1247047046" sldId="403"/>
-        </pc:sldMkLst>
-      </pc:sldChg>
-      <pc:sldChg chg="add del">
-        <pc:chgData name="Adrien Osakwe" userId="7a3e290c-eb83-484b-8e3d-d46ef2333477" providerId="ADAL" clId="{516F4981-D9C8-4339-9685-B0B88EA45B28}" dt="2026-08-11T15:56:30.309" v="3771" actId="2696"/>
-        <pc:sldMkLst>
-          <pc:docMk/>
-          <pc:sldMk cId="2647634623" sldId="403"/>
-        </pc:sldMkLst>
-      </pc:sldChg>
       <pc:sldChg chg="add">
         <pc:chgData name="Adrien Osakwe" userId="7a3e290c-eb83-484b-8e3d-d46ef2333477" providerId="ADAL" clId="{516F4981-D9C8-4339-9685-B0B88EA45B28}" dt="2026-08-11T15:56:33.735" v="3772"/>
         <pc:sldMkLst>
@@ -1058,39 +714,11 @@
           <pc:sldMk cId="3428118430" sldId="403"/>
         </pc:sldMkLst>
       </pc:sldChg>
-      <pc:sldChg chg="add del">
-        <pc:chgData name="Adrien Osakwe" userId="7a3e290c-eb83-484b-8e3d-d46ef2333477" providerId="ADAL" clId="{516F4981-D9C8-4339-9685-B0B88EA45B28}" dt="2026-08-11T15:56:30.309" v="3771" actId="2696"/>
-        <pc:sldMkLst>
-          <pc:docMk/>
-          <pc:sldMk cId="67142368" sldId="404"/>
-        </pc:sldMkLst>
-      </pc:sldChg>
       <pc:sldChg chg="add">
         <pc:chgData name="Adrien Osakwe" userId="7a3e290c-eb83-484b-8e3d-d46ef2333477" providerId="ADAL" clId="{516F4981-D9C8-4339-9685-B0B88EA45B28}" dt="2026-08-11T15:56:33.735" v="3772"/>
         <pc:sldMkLst>
           <pc:docMk/>
           <pc:sldMk cId="2159578298" sldId="404"/>
-        </pc:sldMkLst>
-      </pc:sldChg>
-      <pc:sldChg chg="del">
-        <pc:chgData name="Adrien Osakwe" userId="7a3e290c-eb83-484b-8e3d-d46ef2333477" providerId="ADAL" clId="{516F4981-D9C8-4339-9685-B0B88EA45B28}" dt="2026-08-11T15:44:18.947" v="3521" actId="2696"/>
-        <pc:sldMkLst>
-          <pc:docMk/>
-          <pc:sldMk cId="3081280313" sldId="404"/>
-        </pc:sldMkLst>
-      </pc:sldChg>
-      <pc:sldChg chg="add del">
-        <pc:chgData name="Adrien Osakwe" userId="7a3e290c-eb83-484b-8e3d-d46ef2333477" providerId="ADAL" clId="{516F4981-D9C8-4339-9685-B0B88EA45B28}" dt="2026-08-11T15:56:30.309" v="3771" actId="2696"/>
-        <pc:sldMkLst>
-          <pc:docMk/>
-          <pc:sldMk cId="2374838861" sldId="405"/>
-        </pc:sldMkLst>
-      </pc:sldChg>
-      <pc:sldChg chg="del">
-        <pc:chgData name="Adrien Osakwe" userId="7a3e290c-eb83-484b-8e3d-d46ef2333477" providerId="ADAL" clId="{516F4981-D9C8-4339-9685-B0B88EA45B28}" dt="2026-08-11T15:44:18.947" v="3521" actId="2696"/>
-        <pc:sldMkLst>
-          <pc:docMk/>
-          <pc:sldMk cId="2860464347" sldId="405"/>
         </pc:sldMkLst>
       </pc:sldChg>
       <pc:sldChg chg="add">
@@ -1101,13 +729,13 @@
         </pc:sldMkLst>
       </pc:sldChg>
       <pc:sldChg chg="addSp modSp mod">
-        <pc:chgData name="Adrien Osakwe" userId="7a3e290c-eb83-484b-8e3d-d46ef2333477" providerId="ADAL" clId="{516F4981-D9C8-4339-9685-B0B88EA45B28}" dt="2026-08-11T04:06:02.891" v="1885" actId="1076"/>
+        <pc:chgData name="Adrien Osakwe" userId="7a3e290c-eb83-484b-8e3d-d46ef2333477" providerId="ADAL" clId="{516F4981-D9C8-4339-9685-B0B88EA45B28}" dt="2026-08-14T14:30:23.839" v="8452" actId="1076"/>
         <pc:sldMkLst>
           <pc:docMk/>
           <pc:sldMk cId="4107645974" sldId="406"/>
         </pc:sldMkLst>
         <pc:spChg chg="mod">
-          <ac:chgData name="Adrien Osakwe" userId="7a3e290c-eb83-484b-8e3d-d46ef2333477" providerId="ADAL" clId="{516F4981-D9C8-4339-9685-B0B88EA45B28}" dt="2026-08-11T04:05:53.130" v="1883" actId="6549"/>
+          <ac:chgData name="Adrien Osakwe" userId="7a3e290c-eb83-484b-8e3d-d46ef2333477" providerId="ADAL" clId="{516F4981-D9C8-4339-9685-B0B88EA45B28}" dt="2026-08-14T14:30:19.854" v="8451" actId="14100"/>
           <ac:spMkLst>
             <pc:docMk/>
             <pc:sldMk cId="4107645974" sldId="406"/>
@@ -1115,7 +743,7 @@
           </ac:spMkLst>
         </pc:spChg>
         <pc:picChg chg="add mod modCrop">
-          <ac:chgData name="Adrien Osakwe" userId="7a3e290c-eb83-484b-8e3d-d46ef2333477" providerId="ADAL" clId="{516F4981-D9C8-4339-9685-B0B88EA45B28}" dt="2026-08-11T04:05:56.935" v="1884" actId="1076"/>
+          <ac:chgData name="Adrien Osakwe" userId="7a3e290c-eb83-484b-8e3d-d46ef2333477" providerId="ADAL" clId="{516F4981-D9C8-4339-9685-B0B88EA45B28}" dt="2026-08-14T14:30:23.839" v="8452" actId="1076"/>
           <ac:picMkLst>
             <pc:docMk/>
             <pc:sldMk cId="4107645974" sldId="406"/>
@@ -1162,51 +790,12 @@
           </ac:picMkLst>
         </pc:picChg>
       </pc:sldChg>
-      <pc:sldChg chg="modSp del mod">
-        <pc:chgData name="Adrien Osakwe" userId="7a3e290c-eb83-484b-8e3d-d46ef2333477" providerId="ADAL" clId="{516F4981-D9C8-4339-9685-B0B88EA45B28}" dt="2026-08-11T04:08:49.584" v="2088" actId="47"/>
-        <pc:sldMkLst>
-          <pc:docMk/>
-          <pc:sldMk cId="3153814840" sldId="408"/>
-        </pc:sldMkLst>
-        <pc:spChg chg="mod">
-          <ac:chgData name="Adrien Osakwe" userId="7a3e290c-eb83-484b-8e3d-d46ef2333477" providerId="ADAL" clId="{516F4981-D9C8-4339-9685-B0B88EA45B28}" dt="2026-08-11T04:08:37.998" v="2080" actId="21"/>
-          <ac:spMkLst>
-            <pc:docMk/>
-            <pc:sldMk cId="3153814840" sldId="408"/>
-            <ac:spMk id="2" creationId="{168557DF-C670-BB63-1A98-E92279E25631}"/>
-          </ac:spMkLst>
-        </pc:spChg>
-        <pc:spChg chg="mod">
-          <ac:chgData name="Adrien Osakwe" userId="7a3e290c-eb83-484b-8e3d-d46ef2333477" providerId="ADAL" clId="{516F4981-D9C8-4339-9685-B0B88EA45B28}" dt="2026-08-11T04:08:43.837" v="2082" actId="21"/>
-          <ac:spMkLst>
-            <pc:docMk/>
-            <pc:sldMk cId="3153814840" sldId="408"/>
-            <ac:spMk id="3" creationId="{AB27973F-38C9-227B-CB7C-B3594BC15340}"/>
-          </ac:spMkLst>
-        </pc:spChg>
-      </pc:sldChg>
       <pc:sldChg chg="addSp delSp modSp mod">
-        <pc:chgData name="Adrien Osakwe" userId="7a3e290c-eb83-484b-8e3d-d46ef2333477" providerId="ADAL" clId="{516F4981-D9C8-4339-9685-B0B88EA45B28}" dt="2026-08-11T16:48:20.397" v="5281" actId="1076"/>
+        <pc:chgData name="Adrien Osakwe" userId="7a3e290c-eb83-484b-8e3d-d46ef2333477" providerId="ADAL" clId="{516F4981-D9C8-4339-9685-B0B88EA45B28}" dt="2026-08-14T14:47:24.320" v="8458" actId="1076"/>
         <pc:sldMkLst>
           <pc:docMk/>
           <pc:sldMk cId="604635962" sldId="409"/>
         </pc:sldMkLst>
-        <pc:spChg chg="del">
-          <ac:chgData name="Adrien Osakwe" userId="7a3e290c-eb83-484b-8e3d-d46ef2333477" providerId="ADAL" clId="{516F4981-D9C8-4339-9685-B0B88EA45B28}" dt="2026-08-11T03:50:44.209" v="1165" actId="478"/>
-          <ac:spMkLst>
-            <pc:docMk/>
-            <pc:sldMk cId="604635962" sldId="409"/>
-            <ac:spMk id="3" creationId="{0A2F44FD-8BC2-5366-A460-E2D717E68A8F}"/>
-          </ac:spMkLst>
-        </pc:spChg>
-        <pc:spChg chg="del">
-          <ac:chgData name="Adrien Osakwe" userId="7a3e290c-eb83-484b-8e3d-d46ef2333477" providerId="ADAL" clId="{516F4981-D9C8-4339-9685-B0B88EA45B28}" dt="2026-08-11T03:50:45.114" v="1166" actId="478"/>
-          <ac:spMkLst>
-            <pc:docMk/>
-            <pc:sldMk cId="604635962" sldId="409"/>
-            <ac:spMk id="4" creationId="{97C619F2-BF84-BD40-C738-EEC5CA56153D}"/>
-          </ac:spMkLst>
-        </pc:spChg>
         <pc:spChg chg="add mod">
           <ac:chgData name="Adrien Osakwe" userId="7a3e290c-eb83-484b-8e3d-d46ef2333477" providerId="ADAL" clId="{516F4981-D9C8-4339-9685-B0B88EA45B28}" dt="2026-08-11T16:48:17.076" v="5279" actId="1076"/>
           <ac:spMkLst>
@@ -1224,7 +813,7 @@
           </ac:picMkLst>
         </pc:picChg>
         <pc:picChg chg="add mod">
-          <ac:chgData name="Adrien Osakwe" userId="7a3e290c-eb83-484b-8e3d-d46ef2333477" providerId="ADAL" clId="{516F4981-D9C8-4339-9685-B0B88EA45B28}" dt="2026-08-11T16:48:10.458" v="5276" actId="14100"/>
+          <ac:chgData name="Adrien Osakwe" userId="7a3e290c-eb83-484b-8e3d-d46ef2333477" providerId="ADAL" clId="{516F4981-D9C8-4339-9685-B0B88EA45B28}" dt="2026-08-14T14:47:24.320" v="8458" actId="1076"/>
           <ac:picMkLst>
             <pc:docMk/>
             <pc:sldMk cId="604635962" sldId="409"/>
@@ -1252,14 +841,6 @@
             <pc:docMk/>
             <pc:sldMk cId="981103045" sldId="410"/>
             <ac:spMk id="3" creationId="{311A497D-7B3A-420F-9347-CF4D7D0528AA}"/>
-          </ac:spMkLst>
-        </pc:spChg>
-        <pc:spChg chg="del mod">
-          <ac:chgData name="Adrien Osakwe" userId="7a3e290c-eb83-484b-8e3d-d46ef2333477" providerId="ADAL" clId="{516F4981-D9C8-4339-9685-B0B88EA45B28}" dt="2026-08-11T03:55:45.111" v="1596" actId="478"/>
-          <ac:spMkLst>
-            <pc:docMk/>
-            <pc:sldMk cId="981103045" sldId="410"/>
-            <ac:spMk id="4" creationId="{1D0FF61C-E3B4-EFBC-AB33-F434CCAFF490}"/>
           </ac:spMkLst>
         </pc:spChg>
         <pc:spChg chg="add mod">
@@ -1309,44 +890,6 @@
             <ac:spMk id="3" creationId="{46798B0B-5D5D-D6AE-7CE9-0D0F9134C1AA}"/>
           </ac:spMkLst>
         </pc:spChg>
-        <pc:spChg chg="del">
-          <ac:chgData name="Adrien Osakwe" userId="7a3e290c-eb83-484b-8e3d-d46ef2333477" providerId="ADAL" clId="{516F4981-D9C8-4339-9685-B0B88EA45B28}" dt="2026-08-11T03:46:44.250" v="733" actId="478"/>
-          <ac:spMkLst>
-            <pc:docMk/>
-            <pc:sldMk cId="37029868" sldId="413"/>
-            <ac:spMk id="4" creationId="{2210F72E-F74F-F77F-BFBA-11A42F6D9677}"/>
-          </ac:spMkLst>
-        </pc:spChg>
-        <pc:picChg chg="add del mod">
-          <ac:chgData name="Adrien Osakwe" userId="7a3e290c-eb83-484b-8e3d-d46ef2333477" providerId="ADAL" clId="{516F4981-D9C8-4339-9685-B0B88EA45B28}" dt="2026-08-11T16:48:04.797" v="5273" actId="21"/>
-          <ac:picMkLst>
-            <pc:docMk/>
-            <pc:sldMk cId="37029868" sldId="413"/>
-            <ac:picMk id="5" creationId="{D6410C9F-D36D-F231-CA6D-DA25435615C2}"/>
-          </ac:picMkLst>
-        </pc:picChg>
-      </pc:sldChg>
-      <pc:sldChg chg="modSp del mod">
-        <pc:chgData name="Adrien Osakwe" userId="7a3e290c-eb83-484b-8e3d-d46ef2333477" providerId="ADAL" clId="{516F4981-D9C8-4339-9685-B0B88EA45B28}" dt="2026-08-11T03:45:02.394" v="732" actId="47"/>
-        <pc:sldMkLst>
-          <pc:docMk/>
-          <pc:sldMk cId="2087459769" sldId="414"/>
-        </pc:sldMkLst>
-        <pc:spChg chg="mod">
-          <ac:chgData name="Adrien Osakwe" userId="7a3e290c-eb83-484b-8e3d-d46ef2333477" providerId="ADAL" clId="{516F4981-D9C8-4339-9685-B0B88EA45B28}" dt="2026-08-11T03:44:59.455" v="731" actId="1076"/>
-          <ac:spMkLst>
-            <pc:docMk/>
-            <pc:sldMk cId="2087459769" sldId="414"/>
-            <ac:spMk id="3" creationId="{26143BDB-1110-0E87-4DCE-2BD98F7F5DBE}"/>
-          </ac:spMkLst>
-        </pc:spChg>
-      </pc:sldChg>
-      <pc:sldChg chg="new del ord">
-        <pc:chgData name="Adrien Osakwe" userId="7a3e290c-eb83-484b-8e3d-d46ef2333477" providerId="ADAL" clId="{516F4981-D9C8-4339-9685-B0B88EA45B28}" dt="2026-08-11T03:35:58.556" v="371" actId="47"/>
-        <pc:sldMkLst>
-          <pc:docMk/>
-          <pc:sldMk cId="1688643550" sldId="415"/>
-        </pc:sldMkLst>
       </pc:sldChg>
       <pc:sldChg chg="modSp new mod">
         <pc:chgData name="Adrien Osakwe" userId="7a3e290c-eb83-484b-8e3d-d46ef2333477" providerId="ADAL" clId="{516F4981-D9C8-4339-9685-B0B88EA45B28}" dt="2026-08-11T03:55:31.645" v="1577" actId="20577"/>
@@ -1368,110 +911,6 @@
             <pc:docMk/>
             <pc:sldMk cId="2950609981" sldId="415"/>
             <ac:spMk id="3" creationId="{7827244C-619B-07FE-BD5D-98C98E898AE4}"/>
-          </ac:spMkLst>
-        </pc:spChg>
-      </pc:sldChg>
-      <pc:sldChg chg="new del">
-        <pc:chgData name="Adrien Osakwe" userId="7a3e290c-eb83-484b-8e3d-d46ef2333477" providerId="ADAL" clId="{516F4981-D9C8-4339-9685-B0B88EA45B28}" dt="2026-08-11T03:38:37.853" v="608" actId="47"/>
-        <pc:sldMkLst>
-          <pc:docMk/>
-          <pc:sldMk cId="1388726675" sldId="416"/>
-        </pc:sldMkLst>
-      </pc:sldChg>
-      <pc:sldChg chg="modSp new del mod">
-        <pc:chgData name="Adrien Osakwe" userId="7a3e290c-eb83-484b-8e3d-d46ef2333477" providerId="ADAL" clId="{516F4981-D9C8-4339-9685-B0B88EA45B28}" dt="2026-08-11T19:55:16.910" v="5886" actId="47"/>
-        <pc:sldMkLst>
-          <pc:docMk/>
-          <pc:sldMk cId="4034011448" sldId="416"/>
-        </pc:sldMkLst>
-        <pc:spChg chg="mod">
-          <ac:chgData name="Adrien Osakwe" userId="7a3e290c-eb83-484b-8e3d-d46ef2333477" providerId="ADAL" clId="{516F4981-D9C8-4339-9685-B0B88EA45B28}" dt="2026-08-11T16:01:55.609" v="4393" actId="1076"/>
-          <ac:spMkLst>
-            <pc:docMk/>
-            <pc:sldMk cId="4034011448" sldId="416"/>
-            <ac:spMk id="2" creationId="{A49566BD-568F-BE0D-05BE-B8FED9C6F115}"/>
-          </ac:spMkLst>
-        </pc:spChg>
-      </pc:sldChg>
-      <pc:sldChg chg="modSp add del mod">
-        <pc:chgData name="Adrien Osakwe" userId="7a3e290c-eb83-484b-8e3d-d46ef2333477" providerId="ADAL" clId="{516F4981-D9C8-4339-9685-B0B88EA45B28}" dt="2026-08-11T19:57:59.823" v="6337" actId="47"/>
-        <pc:sldMkLst>
-          <pc:docMk/>
-          <pc:sldMk cId="3381146445" sldId="417"/>
-        </pc:sldMkLst>
-        <pc:spChg chg="mod">
-          <ac:chgData name="Adrien Osakwe" userId="7a3e290c-eb83-484b-8e3d-d46ef2333477" providerId="ADAL" clId="{516F4981-D9C8-4339-9685-B0B88EA45B28}" dt="2026-08-11T16:01:40.697" v="4353" actId="1076"/>
-          <ac:spMkLst>
-            <pc:docMk/>
-            <pc:sldMk cId="3381146445" sldId="417"/>
-            <ac:spMk id="2" creationId="{B627E931-4B2C-12CE-3BC3-6A5246120671}"/>
-          </ac:spMkLst>
-        </pc:spChg>
-      </pc:sldChg>
-      <pc:sldChg chg="modSp add del mod">
-        <pc:chgData name="Adrien Osakwe" userId="7a3e290c-eb83-484b-8e3d-d46ef2333477" providerId="ADAL" clId="{516F4981-D9C8-4339-9685-B0B88EA45B28}" dt="2026-08-11T19:59:34.278" v="6529" actId="47"/>
-        <pc:sldMkLst>
-          <pc:docMk/>
-          <pc:sldMk cId="2443216682" sldId="418"/>
-        </pc:sldMkLst>
-        <pc:spChg chg="mod">
-          <ac:chgData name="Adrien Osakwe" userId="7a3e290c-eb83-484b-8e3d-d46ef2333477" providerId="ADAL" clId="{516F4981-D9C8-4339-9685-B0B88EA45B28}" dt="2026-08-11T16:03:17.576" v="4536" actId="1076"/>
-          <ac:spMkLst>
-            <pc:docMk/>
-            <pc:sldMk cId="2443216682" sldId="418"/>
-            <ac:spMk id="2" creationId="{34D3CBAE-FCA6-56FF-4630-BA76ACB49392}"/>
-          </ac:spMkLst>
-        </pc:spChg>
-      </pc:sldChg>
-      <pc:sldChg chg="add del">
-        <pc:chgData name="Adrien Osakwe" userId="7a3e290c-eb83-484b-8e3d-d46ef2333477" providerId="ADAL" clId="{516F4981-D9C8-4339-9685-B0B88EA45B28}" dt="2026-08-11T16:03:27.556" v="4538" actId="47"/>
-        <pc:sldMkLst>
-          <pc:docMk/>
-          <pc:sldMk cId="2255428838" sldId="419"/>
-        </pc:sldMkLst>
-      </pc:sldChg>
-      <pc:sldChg chg="modSp add del mod">
-        <pc:chgData name="Adrien Osakwe" userId="7a3e290c-eb83-484b-8e3d-d46ef2333477" providerId="ADAL" clId="{516F4981-D9C8-4339-9685-B0B88EA45B28}" dt="2026-08-11T20:03:33.221" v="7052" actId="47"/>
-        <pc:sldMkLst>
-          <pc:docMk/>
-          <pc:sldMk cId="1724832574" sldId="420"/>
-        </pc:sldMkLst>
-        <pc:spChg chg="mod">
-          <ac:chgData name="Adrien Osakwe" userId="7a3e290c-eb83-484b-8e3d-d46ef2333477" providerId="ADAL" clId="{516F4981-D9C8-4339-9685-B0B88EA45B28}" dt="2026-08-11T16:05:08.973" v="4706" actId="14100"/>
-          <ac:spMkLst>
-            <pc:docMk/>
-            <pc:sldMk cId="1724832574" sldId="420"/>
-            <ac:spMk id="2" creationId="{1DC661F8-D6E6-38C4-D1F5-3004261B6511}"/>
-          </ac:spMkLst>
-        </pc:spChg>
-      </pc:sldChg>
-      <pc:sldChg chg="modSp add del mod">
-        <pc:chgData name="Adrien Osakwe" userId="7a3e290c-eb83-484b-8e3d-d46ef2333477" providerId="ADAL" clId="{516F4981-D9C8-4339-9685-B0B88EA45B28}" dt="2026-08-11T19:53:20.675" v="5543" actId="47"/>
-        <pc:sldMkLst>
-          <pc:docMk/>
-          <pc:sldMk cId="1414395029" sldId="421"/>
-        </pc:sldMkLst>
-        <pc:spChg chg="mod">
-          <ac:chgData name="Adrien Osakwe" userId="7a3e290c-eb83-484b-8e3d-d46ef2333477" providerId="ADAL" clId="{516F4981-D9C8-4339-9685-B0B88EA45B28}" dt="2026-08-11T16:05:32.827" v="4729" actId="1076"/>
-          <ac:spMkLst>
-            <pc:docMk/>
-            <pc:sldMk cId="1414395029" sldId="421"/>
-            <ac:spMk id="2" creationId="{D78E5005-F04A-59B4-AAE1-2B9524068593}"/>
-          </ac:spMkLst>
-        </pc:spChg>
-      </pc:sldChg>
-      <pc:sldChg chg="modSp add del mod">
-        <pc:chgData name="Adrien Osakwe" userId="7a3e290c-eb83-484b-8e3d-d46ef2333477" providerId="ADAL" clId="{516F4981-D9C8-4339-9685-B0B88EA45B28}" dt="2026-08-11T19:54:13.596" v="5808" actId="47"/>
-        <pc:sldMkLst>
-          <pc:docMk/>
-          <pc:sldMk cId="509037345" sldId="422"/>
-        </pc:sldMkLst>
-        <pc:spChg chg="mod">
-          <ac:chgData name="Adrien Osakwe" userId="7a3e290c-eb83-484b-8e3d-d46ef2333477" providerId="ADAL" clId="{516F4981-D9C8-4339-9685-B0B88EA45B28}" dt="2026-08-11T16:05:52.358" v="4774" actId="1076"/>
-          <ac:spMkLst>
-            <pc:docMk/>
-            <pc:sldMk cId="509037345" sldId="422"/>
-            <ac:spMk id="2" creationId="{3B0854C0-59B7-A945-9FA0-E6D642120E02}"/>
           </ac:spMkLst>
         </pc:spChg>
       </pc:sldChg>
@@ -1521,43 +960,6 @@
           </ac:picMkLst>
         </pc:picChg>
       </pc:sldChg>
-      <pc:sldChg chg="modSp new del mod">
-        <pc:chgData name="Adrien Osakwe" userId="7a3e290c-eb83-484b-8e3d-d46ef2333477" providerId="ADAL" clId="{516F4981-D9C8-4339-9685-B0B88EA45B28}" dt="2026-08-11T19:58:12.354" v="6340" actId="47"/>
-        <pc:sldMkLst>
-          <pc:docMk/>
-          <pc:sldMk cId="2814879043" sldId="425"/>
-        </pc:sldMkLst>
-        <pc:spChg chg="mod">
-          <ac:chgData name="Adrien Osakwe" userId="7a3e290c-eb83-484b-8e3d-d46ef2333477" providerId="ADAL" clId="{516F4981-D9C8-4339-9685-B0B88EA45B28}" dt="2026-08-11T16:00:34.285" v="4199" actId="207"/>
-          <ac:spMkLst>
-            <pc:docMk/>
-            <pc:sldMk cId="2814879043" sldId="425"/>
-            <ac:spMk id="2" creationId="{E6E06B3D-D697-AE59-116F-D558C5EC8756}"/>
-          </ac:spMkLst>
-        </pc:spChg>
-        <pc:spChg chg="mod">
-          <ac:chgData name="Adrien Osakwe" userId="7a3e290c-eb83-484b-8e3d-d46ef2333477" providerId="ADAL" clId="{516F4981-D9C8-4339-9685-B0B88EA45B28}" dt="2026-08-11T19:58:10.823" v="6339" actId="27636"/>
-          <ac:spMkLst>
-            <pc:docMk/>
-            <pc:sldMk cId="2814879043" sldId="425"/>
-            <ac:spMk id="3" creationId="{71618A3D-D3F3-3F32-8304-7A72C05319EB}"/>
-          </ac:spMkLst>
-        </pc:spChg>
-      </pc:sldChg>
-      <pc:sldChg chg="new del">
-        <pc:chgData name="Adrien Osakwe" userId="7a3e290c-eb83-484b-8e3d-d46ef2333477" providerId="ADAL" clId="{516F4981-D9C8-4339-9685-B0B88EA45B28}" dt="2026-08-11T04:07:56.684" v="2077" actId="47"/>
-        <pc:sldMkLst>
-          <pc:docMk/>
-          <pc:sldMk cId="3509885090" sldId="425"/>
-        </pc:sldMkLst>
-      </pc:sldChg>
-      <pc:sldChg chg="new del">
-        <pc:chgData name="Adrien Osakwe" userId="7a3e290c-eb83-484b-8e3d-d46ef2333477" providerId="ADAL" clId="{516F4981-D9C8-4339-9685-B0B88EA45B28}" dt="2026-08-11T04:08:21.417" v="2078" actId="47"/>
-        <pc:sldMkLst>
-          <pc:docMk/>
-          <pc:sldMk cId="921941797" sldId="426"/>
-        </pc:sldMkLst>
-      </pc:sldChg>
       <pc:sldChg chg="addSp modSp new mod ord">
         <pc:chgData name="Adrien Osakwe" userId="7a3e290c-eb83-484b-8e3d-d46ef2333477" providerId="ADAL" clId="{516F4981-D9C8-4339-9685-B0B88EA45B28}" dt="2026-08-11T04:17:04.221" v="2804" actId="20577"/>
         <pc:sldMkLst>
@@ -1597,22 +999,8 @@
           </ac:picMkLst>
         </pc:picChg>
       </pc:sldChg>
-      <pc:sldChg chg="new del">
-        <pc:chgData name="Adrien Osakwe" userId="7a3e290c-eb83-484b-8e3d-d46ef2333477" providerId="ADAL" clId="{516F4981-D9C8-4339-9685-B0B88EA45B28}" dt="2026-08-11T04:14:08.511" v="2724" actId="47"/>
-        <pc:sldMkLst>
-          <pc:docMk/>
-          <pc:sldMk cId="2916505771" sldId="427"/>
-        </pc:sldMkLst>
-      </pc:sldChg>
-      <pc:sldChg chg="new del">
-        <pc:chgData name="Adrien Osakwe" userId="7a3e290c-eb83-484b-8e3d-d46ef2333477" providerId="ADAL" clId="{516F4981-D9C8-4339-9685-B0B88EA45B28}" dt="2026-08-11T15:15:02.402" v="2807" actId="47"/>
-        <pc:sldMkLst>
-          <pc:docMk/>
-          <pc:sldMk cId="4113372773" sldId="427"/>
-        </pc:sldMkLst>
-      </pc:sldChg>
-      <pc:sldChg chg="addSp modSp new mod">
-        <pc:chgData name="Adrien Osakwe" userId="7a3e290c-eb83-484b-8e3d-d46ef2333477" providerId="ADAL" clId="{516F4981-D9C8-4339-9685-B0B88EA45B28}" dt="2026-08-11T16:48:36.807" v="5284" actId="20577"/>
+      <pc:sldChg chg="addSp modSp new mod ord">
+        <pc:chgData name="Adrien Osakwe" userId="7a3e290c-eb83-484b-8e3d-d46ef2333477" providerId="ADAL" clId="{516F4981-D9C8-4339-9685-B0B88EA45B28}" dt="2026-08-14T14:09:37.224" v="8345"/>
         <pc:sldMkLst>
           <pc:docMk/>
           <pc:sldMk cId="998501193" sldId="428"/>
@@ -1658,14 +1046,22 @@
           </ac:picMkLst>
         </pc:picChg>
       </pc:sldChg>
-      <pc:sldChg chg="modSp add mod">
-        <pc:chgData name="Adrien Osakwe" userId="7a3e290c-eb83-484b-8e3d-d46ef2333477" providerId="ADAL" clId="{516F4981-D9C8-4339-9685-B0B88EA45B28}" dt="2026-08-11T15:21:56.642" v="3357" actId="14"/>
+      <pc:sldChg chg="modSp add mod ord">
+        <pc:chgData name="Adrien Osakwe" userId="7a3e290c-eb83-484b-8e3d-d46ef2333477" providerId="ADAL" clId="{516F4981-D9C8-4339-9685-B0B88EA45B28}" dt="2026-08-14T14:24:24.956" v="8385" actId="20577"/>
         <pc:sldMkLst>
           <pc:docMk/>
           <pc:sldMk cId="452007840" sldId="429"/>
         </pc:sldMkLst>
         <pc:spChg chg="mod">
-          <ac:chgData name="Adrien Osakwe" userId="7a3e290c-eb83-484b-8e3d-d46ef2333477" providerId="ADAL" clId="{516F4981-D9C8-4339-9685-B0B88EA45B28}" dt="2026-08-11T15:21:56.642" v="3357" actId="14"/>
+          <ac:chgData name="Adrien Osakwe" userId="7a3e290c-eb83-484b-8e3d-d46ef2333477" providerId="ADAL" clId="{516F4981-D9C8-4339-9685-B0B88EA45B28}" dt="2026-08-14T14:24:24.956" v="8385" actId="20577"/>
+          <ac:spMkLst>
+            <pc:docMk/>
+            <pc:sldMk cId="452007840" sldId="429"/>
+            <ac:spMk id="2" creationId="{C84E3522-BB7F-C1AA-3AE9-C6A40BDF8ACE}"/>
+          </ac:spMkLst>
+        </pc:spChg>
+        <pc:spChg chg="mod">
+          <ac:chgData name="Adrien Osakwe" userId="7a3e290c-eb83-484b-8e3d-d46ef2333477" providerId="ADAL" clId="{516F4981-D9C8-4339-9685-B0B88EA45B28}" dt="2026-08-14T14:23:53.373" v="8382" actId="20577"/>
           <ac:spMkLst>
             <pc:docMk/>
             <pc:sldMk cId="452007840" sldId="429"/>
@@ -1673,23 +1069,8 @@
           </ac:spMkLst>
         </pc:spChg>
       </pc:sldChg>
-      <pc:sldChg chg="modSp add del mod">
-        <pc:chgData name="Adrien Osakwe" userId="7a3e290c-eb83-484b-8e3d-d46ef2333477" providerId="ADAL" clId="{516F4981-D9C8-4339-9685-B0B88EA45B28}" dt="2026-08-11T19:58:18.378" v="6343" actId="47"/>
-        <pc:sldMkLst>
-          <pc:docMk/>
-          <pc:sldMk cId="1861850653" sldId="430"/>
-        </pc:sldMkLst>
-        <pc:spChg chg="mod">
-          <ac:chgData name="Adrien Osakwe" userId="7a3e290c-eb83-484b-8e3d-d46ef2333477" providerId="ADAL" clId="{516F4981-D9C8-4339-9685-B0B88EA45B28}" dt="2026-08-11T16:02:52.572" v="4466" actId="1076"/>
-          <ac:spMkLst>
-            <pc:docMk/>
-            <pc:sldMk cId="1861850653" sldId="430"/>
-            <ac:spMk id="2" creationId="{4FBA878A-0055-6E6A-ED8B-DFB2AA8B40A0}"/>
-          </ac:spMkLst>
-        </pc:spChg>
-      </pc:sldChg>
       <pc:sldChg chg="addSp modSp new mod">
-        <pc:chgData name="Adrien Osakwe" userId="7a3e290c-eb83-484b-8e3d-d46ef2333477" providerId="ADAL" clId="{516F4981-D9C8-4339-9685-B0B88EA45B28}" dt="2026-08-11T15:58:56.329" v="4076" actId="1076"/>
+        <pc:chgData name="Adrien Osakwe" userId="7a3e290c-eb83-484b-8e3d-d46ef2333477" providerId="ADAL" clId="{516F4981-D9C8-4339-9685-B0B88EA45B28}" dt="2026-08-14T14:52:18.370" v="8502" actId="14100"/>
         <pc:sldMkLst>
           <pc:docMk/>
           <pc:sldMk cId="3455883294" sldId="431"/>
@@ -1719,28 +1100,13 @@
           </ac:spMkLst>
         </pc:spChg>
         <pc:picChg chg="add mod">
-          <ac:chgData name="Adrien Osakwe" userId="7a3e290c-eb83-484b-8e3d-d46ef2333477" providerId="ADAL" clId="{516F4981-D9C8-4339-9685-B0B88EA45B28}" dt="2026-08-11T15:58:53.356" v="4075" actId="1076"/>
+          <ac:chgData name="Adrien Osakwe" userId="7a3e290c-eb83-484b-8e3d-d46ef2333477" providerId="ADAL" clId="{516F4981-D9C8-4339-9685-B0B88EA45B28}" dt="2026-08-14T14:52:18.370" v="8502" actId="14100"/>
           <ac:picMkLst>
             <pc:docMk/>
             <pc:sldMk cId="3455883294" sldId="431"/>
             <ac:picMk id="4" creationId="{7F110F65-334D-C636-D4FD-B16599FD997B}"/>
           </ac:picMkLst>
         </pc:picChg>
-      </pc:sldChg>
-      <pc:sldChg chg="modSp add del mod">
-        <pc:chgData name="Adrien Osakwe" userId="7a3e290c-eb83-484b-8e3d-d46ef2333477" providerId="ADAL" clId="{516F4981-D9C8-4339-9685-B0B88EA45B28}" dt="2026-08-11T20:02:20.076" v="6792" actId="47"/>
-        <pc:sldMkLst>
-          <pc:docMk/>
-          <pc:sldMk cId="259435353" sldId="432"/>
-        </pc:sldMkLst>
-        <pc:spChg chg="mod">
-          <ac:chgData name="Adrien Osakwe" userId="7a3e290c-eb83-484b-8e3d-d46ef2333477" providerId="ADAL" clId="{516F4981-D9C8-4339-9685-B0B88EA45B28}" dt="2026-08-11T16:52:56.431" v="5349" actId="20577"/>
-          <ac:spMkLst>
-            <pc:docMk/>
-            <pc:sldMk cId="259435353" sldId="432"/>
-            <ac:spMk id="2" creationId="{F0809F7C-8E31-F82F-2BE8-1063529E5A6E}"/>
-          </ac:spMkLst>
-        </pc:spChg>
       </pc:sldChg>
       <pc:sldChg chg="modSp new mod">
         <pc:chgData name="Adrien Osakwe" userId="7a3e290c-eb83-484b-8e3d-d46ef2333477" providerId="ADAL" clId="{516F4981-D9C8-4339-9685-B0B88EA45B28}" dt="2026-08-11T16:06:01.328" v="4786" actId="20577"/>
@@ -1756,13 +1122,6 @@
             <ac:spMk id="2" creationId="{53D5D50F-4F28-B4DF-B643-598DE496FEDD}"/>
           </ac:spMkLst>
         </pc:spChg>
-      </pc:sldChg>
-      <pc:sldChg chg="new del">
-        <pc:chgData name="Adrien Osakwe" userId="7a3e290c-eb83-484b-8e3d-d46ef2333477" providerId="ADAL" clId="{516F4981-D9C8-4339-9685-B0B88EA45B28}" dt="2026-08-11T16:06:08.207" v="4789" actId="47"/>
-        <pc:sldMkLst>
-          <pc:docMk/>
-          <pc:sldMk cId="2430473963" sldId="434"/>
-        </pc:sldMkLst>
       </pc:sldChg>
       <pc:sldChg chg="addSp modSp new mod">
         <pc:chgData name="Adrien Osakwe" userId="7a3e290c-eb83-484b-8e3d-d46ef2333477" providerId="ADAL" clId="{516F4981-D9C8-4339-9685-B0B88EA45B28}" dt="2026-08-11T19:51:06.236" v="5400" actId="20577"/>
@@ -1835,13 +1194,13 @@
         </pc:picChg>
       </pc:sldChg>
       <pc:sldChg chg="addSp modSp new mod">
-        <pc:chgData name="Adrien Osakwe" userId="7a3e290c-eb83-484b-8e3d-d46ef2333477" providerId="ADAL" clId="{516F4981-D9C8-4339-9685-B0B88EA45B28}" dt="2026-08-11T19:55:48.364" v="6009" actId="20577"/>
+        <pc:chgData name="Adrien Osakwe" userId="7a3e290c-eb83-484b-8e3d-d46ef2333477" providerId="ADAL" clId="{516F4981-D9C8-4339-9685-B0B88EA45B28}" dt="2026-08-14T13:56:29.847" v="8343" actId="114"/>
         <pc:sldMkLst>
           <pc:docMk/>
           <pc:sldMk cId="680839714" sldId="437"/>
         </pc:sldMkLst>
         <pc:spChg chg="mod">
-          <ac:chgData name="Adrien Osakwe" userId="7a3e290c-eb83-484b-8e3d-d46ef2333477" providerId="ADAL" clId="{516F4981-D9C8-4339-9685-B0B88EA45B28}" dt="2026-08-11T19:55:48.364" v="6009" actId="20577"/>
+          <ac:chgData name="Adrien Osakwe" userId="7a3e290c-eb83-484b-8e3d-d46ef2333477" providerId="ADAL" clId="{516F4981-D9C8-4339-9685-B0B88EA45B28}" dt="2026-08-14T13:56:29.847" v="8343" actId="114"/>
           <ac:spMkLst>
             <pc:docMk/>
             <pc:sldMk cId="680839714" sldId="437"/>
@@ -1873,17 +1232,25 @@
         </pc:spChg>
       </pc:sldChg>
       <pc:sldChg chg="modSp add mod">
-        <pc:chgData name="Adrien Osakwe" userId="7a3e290c-eb83-484b-8e3d-d46ef2333477" providerId="ADAL" clId="{516F4981-D9C8-4339-9685-B0B88EA45B28}" dt="2026-08-11T19:58:40.728" v="6391" actId="20577"/>
+        <pc:chgData name="Adrien Osakwe" userId="7a3e290c-eb83-484b-8e3d-d46ef2333477" providerId="ADAL" clId="{516F4981-D9C8-4339-9685-B0B88EA45B28}" dt="2026-08-14T14:47:18.527" v="8457" actId="1076"/>
         <pc:sldMkLst>
           <pc:docMk/>
           <pc:sldMk cId="390538586" sldId="439"/>
         </pc:sldMkLst>
         <pc:spChg chg="mod">
-          <ac:chgData name="Adrien Osakwe" userId="7a3e290c-eb83-484b-8e3d-d46ef2333477" providerId="ADAL" clId="{516F4981-D9C8-4339-9685-B0B88EA45B28}" dt="2026-08-11T19:58:40.728" v="6391" actId="20577"/>
+          <ac:chgData name="Adrien Osakwe" userId="7a3e290c-eb83-484b-8e3d-d46ef2333477" providerId="ADAL" clId="{516F4981-D9C8-4339-9685-B0B88EA45B28}" dt="2026-08-14T14:47:18.527" v="8457" actId="1076"/>
           <ac:spMkLst>
             <pc:docMk/>
             <pc:sldMk cId="390538586" sldId="439"/>
             <ac:spMk id="2" creationId="{7B68F2FA-D711-4EB3-2861-17288F46576A}"/>
+          </ac:spMkLst>
+        </pc:spChg>
+        <pc:spChg chg="mod">
+          <ac:chgData name="Adrien Osakwe" userId="7a3e290c-eb83-484b-8e3d-d46ef2333477" providerId="ADAL" clId="{516F4981-D9C8-4339-9685-B0B88EA45B28}" dt="2026-08-14T14:47:16.383" v="8456" actId="1076"/>
+          <ac:spMkLst>
+            <pc:docMk/>
+            <pc:sldMk cId="390538586" sldId="439"/>
+            <ac:spMk id="3" creationId="{3735B5E2-545E-865E-6211-22F2D6D53839}"/>
           </ac:spMkLst>
         </pc:spChg>
       </pc:sldChg>
@@ -1948,13 +1315,13 @@
         </pc:spChg>
       </pc:sldChg>
       <pc:sldChg chg="modSp add mod">
-        <pc:chgData name="Adrien Osakwe" userId="7a3e290c-eb83-484b-8e3d-d46ef2333477" providerId="ADAL" clId="{516F4981-D9C8-4339-9685-B0B88EA45B28}" dt="2026-08-11T19:54:11.315" v="5807" actId="20577"/>
+        <pc:chgData name="Adrien Osakwe" userId="7a3e290c-eb83-484b-8e3d-d46ef2333477" providerId="ADAL" clId="{516F4981-D9C8-4339-9685-B0B88EA45B28}" dt="2026-08-14T15:07:57.734" v="8505" actId="313"/>
         <pc:sldMkLst>
           <pc:docMk/>
           <pc:sldMk cId="224817830" sldId="444"/>
         </pc:sldMkLst>
         <pc:spChg chg="mod">
-          <ac:chgData name="Adrien Osakwe" userId="7a3e290c-eb83-484b-8e3d-d46ef2333477" providerId="ADAL" clId="{516F4981-D9C8-4339-9685-B0B88EA45B28}" dt="2026-08-11T19:54:11.315" v="5807" actId="20577"/>
+          <ac:chgData name="Adrien Osakwe" userId="7a3e290c-eb83-484b-8e3d-d46ef2333477" providerId="ADAL" clId="{516F4981-D9C8-4339-9685-B0B88EA45B28}" dt="2026-08-14T15:07:57.734" v="8505" actId="313"/>
           <ac:spMkLst>
             <pc:docMk/>
             <pc:sldMk cId="224817830" sldId="444"/>
@@ -2000,21 +1367,6 @@
           </ac:picMkLst>
         </pc:picChg>
       </pc:sldChg>
-      <pc:sldChg chg="modSp new del mod">
-        <pc:chgData name="Adrien Osakwe" userId="7a3e290c-eb83-484b-8e3d-d46ef2333477" providerId="ADAL" clId="{516F4981-D9C8-4339-9685-B0B88EA45B28}" dt="2026-08-11T20:10:50.166" v="7519" actId="47"/>
-        <pc:sldMkLst>
-          <pc:docMk/>
-          <pc:sldMk cId="3914752990" sldId="447"/>
-        </pc:sldMkLst>
-        <pc:spChg chg="mod">
-          <ac:chgData name="Adrien Osakwe" userId="7a3e290c-eb83-484b-8e3d-d46ef2333477" providerId="ADAL" clId="{516F4981-D9C8-4339-9685-B0B88EA45B28}" dt="2026-08-11T20:10:48.118" v="7518" actId="21"/>
-          <ac:spMkLst>
-            <pc:docMk/>
-            <pc:sldMk cId="3914752990" sldId="447"/>
-            <ac:spMk id="3" creationId="{AD2328D3-67DF-83B5-804E-3E886493FCC8}"/>
-          </ac:spMkLst>
-        </pc:spChg>
-      </pc:sldChg>
       <pc:sldChg chg="modSp add mod">
         <pc:chgData name="Adrien Osakwe" userId="7a3e290c-eb83-484b-8e3d-d46ef2333477" providerId="ADAL" clId="{516F4981-D9C8-4339-9685-B0B88EA45B28}" dt="2026-08-11T20:11:58.588" v="7673" actId="20577"/>
         <pc:sldMkLst>
@@ -2038,47 +1390,8 @@
           </ac:grpSpMkLst>
         </pc:grpChg>
       </pc:sldChg>
-      <pc:sldChg chg="addSp modSp add del mod">
-        <pc:chgData name="Adrien Osakwe" userId="7a3e290c-eb83-484b-8e3d-d46ef2333477" providerId="ADAL" clId="{516F4981-D9C8-4339-9685-B0B88EA45B28}" dt="2026-08-11T20:16:22.899" v="7779" actId="47"/>
-        <pc:sldMkLst>
-          <pc:docMk/>
-          <pc:sldMk cId="3038641811" sldId="449"/>
-        </pc:sldMkLst>
-        <pc:spChg chg="mod">
-          <ac:chgData name="Adrien Osakwe" userId="7a3e290c-eb83-484b-8e3d-d46ef2333477" providerId="ADAL" clId="{516F4981-D9C8-4339-9685-B0B88EA45B28}" dt="2026-08-11T20:15:19.943" v="7714" actId="14100"/>
-          <ac:spMkLst>
-            <pc:docMk/>
-            <pc:sldMk cId="3038641811" sldId="449"/>
-            <ac:spMk id="3" creationId="{4D86081A-388F-0A32-810C-A7A5D2816ED5}"/>
-          </ac:spMkLst>
-        </pc:spChg>
-        <pc:spChg chg="mod">
-          <ac:chgData name="Adrien Osakwe" userId="7a3e290c-eb83-484b-8e3d-d46ef2333477" providerId="ADAL" clId="{516F4981-D9C8-4339-9685-B0B88EA45B28}" dt="2026-08-11T20:15:19.943" v="7714" actId="14100"/>
-          <ac:spMkLst>
-            <pc:docMk/>
-            <pc:sldMk cId="3038641811" sldId="449"/>
-            <ac:spMk id="4" creationId="{F4B55E28-0E6D-D360-CB34-664881A3F542}"/>
-          </ac:spMkLst>
-        </pc:spChg>
-        <pc:spChg chg="add mod">
-          <ac:chgData name="Adrien Osakwe" userId="7a3e290c-eb83-484b-8e3d-d46ef2333477" providerId="ADAL" clId="{516F4981-D9C8-4339-9685-B0B88EA45B28}" dt="2026-08-11T20:16:04.344" v="7747" actId="122"/>
-          <ac:spMkLst>
-            <pc:docMk/>
-            <pc:sldMk cId="3038641811" sldId="449"/>
-            <ac:spMk id="5" creationId="{D767EF7F-846D-6AA0-AEB3-5F0493576B07}"/>
-          </ac:spMkLst>
-        </pc:spChg>
-        <pc:spChg chg="add mod">
-          <ac:chgData name="Adrien Osakwe" userId="7a3e290c-eb83-484b-8e3d-d46ef2333477" providerId="ADAL" clId="{516F4981-D9C8-4339-9685-B0B88EA45B28}" dt="2026-08-11T20:15:52.012" v="7727" actId="1076"/>
-          <ac:spMkLst>
-            <pc:docMk/>
-            <pc:sldMk cId="3038641811" sldId="449"/>
-            <ac:spMk id="6" creationId="{DBFA2468-F089-2C73-D50F-8E31C66D5113}"/>
-          </ac:spMkLst>
-        </pc:spChg>
-      </pc:sldChg>
-      <pc:sldChg chg="addSp delSp modSp new mod">
-        <pc:chgData name="Adrien Osakwe" userId="7a3e290c-eb83-484b-8e3d-d46ef2333477" providerId="ADAL" clId="{516F4981-D9C8-4339-9685-B0B88EA45B28}" dt="2026-08-11T20:19:31.053" v="8251" actId="20577"/>
+      <pc:sldChg chg="addSp delSp modSp new mod modAnim">
+        <pc:chgData name="Adrien Osakwe" userId="7a3e290c-eb83-484b-8e3d-d46ef2333477" providerId="ADAL" clId="{516F4981-D9C8-4339-9685-B0B88EA45B28}" dt="2026-08-14T13:53:35.799" v="8264"/>
         <pc:sldMkLst>
           <pc:docMk/>
           <pc:sldMk cId="3567545301" sldId="450"/>
@@ -2099,14 +1412,6 @@
             <ac:spMk id="3" creationId="{F9D67DD5-AD34-86CF-5CE0-F971881A1045}"/>
           </ac:spMkLst>
         </pc:spChg>
-        <pc:graphicFrameChg chg="add del mod ord modGraphic">
-          <ac:chgData name="Adrien Osakwe" userId="7a3e290c-eb83-484b-8e3d-d46ef2333477" providerId="ADAL" clId="{516F4981-D9C8-4339-9685-B0B88EA45B28}" dt="2026-08-11T20:16:40.244" v="7791" actId="3680"/>
-          <ac:graphicFrameMkLst>
-            <pc:docMk/>
-            <pc:sldMk cId="3567545301" sldId="450"/>
-            <ac:graphicFrameMk id="4" creationId="{0EF09418-258F-6ECD-82D9-EC7C7EA86AA6}"/>
-          </ac:graphicFrameMkLst>
-        </pc:graphicFrameChg>
       </pc:sldChg>
     </pc:docChg>
   </pc:docChgLst>
@@ -2195,7 +1500,7 @@
           <a:p>
             <a:fld id="{217E5156-1B5D-054E-B5B2-E1B1BA160252}" type="datetimeFigureOut">
               <a:rPr lang="fr-FR" smtClean="0"/>
-              <a:t>11/08/2026</a:t>
+              <a:t>14/08/2026</a:t>
             </a:fld>
             <a:endParaRPr lang="fr-FR"/>
           </a:p>
@@ -2465,6 +1770,13 @@
           </p:nvPr>
         </p:nvSpPr>
         <p:spPr/>
+        <p:txBody>
+          <a:bodyPr/>
+          <a:lstStyle/>
+          <a:p>
+            <a:endParaRPr lang="en-CA"/>
+          </a:p>
+        </p:txBody>
       </p:sp>
       <p:sp>
         <p:nvSpPr>
@@ -2561,6 +1873,13 @@
           </p:nvPr>
         </p:nvSpPr>
         <p:spPr/>
+        <p:txBody>
+          <a:bodyPr/>
+          <a:lstStyle/>
+          <a:p>
+            <a:endParaRPr lang="en-CA"/>
+          </a:p>
+        </p:txBody>
       </p:sp>
       <p:sp>
         <p:nvSpPr>
@@ -2663,6 +1982,13 @@
           </p:nvPr>
         </p:nvSpPr>
         <p:spPr/>
+        <p:txBody>
+          <a:bodyPr/>
+          <a:lstStyle/>
+          <a:p>
+            <a:endParaRPr lang="en-CA"/>
+          </a:p>
+        </p:txBody>
       </p:sp>
       <p:sp>
         <p:nvSpPr>
@@ -2747,6 +2073,13 @@
           </p:nvPr>
         </p:nvSpPr>
         <p:spPr/>
+        <p:txBody>
+          <a:bodyPr/>
+          <a:lstStyle/>
+          <a:p>
+            <a:endParaRPr lang="en-CA"/>
+          </a:p>
+        </p:txBody>
       </p:sp>
       <p:sp>
         <p:nvSpPr>
@@ -2831,6 +2164,13 @@
           </p:nvPr>
         </p:nvSpPr>
         <p:spPr/>
+        <p:txBody>
+          <a:bodyPr/>
+          <a:lstStyle/>
+          <a:p>
+            <a:endParaRPr lang="en-CA"/>
+          </a:p>
+        </p:txBody>
       </p:sp>
       <p:sp>
         <p:nvSpPr>
@@ -2915,6 +2255,13 @@
           </p:nvPr>
         </p:nvSpPr>
         <p:spPr/>
+        <p:txBody>
+          <a:bodyPr/>
+          <a:lstStyle/>
+          <a:p>
+            <a:endParaRPr lang="en-CA"/>
+          </a:p>
+        </p:txBody>
       </p:sp>
       <p:sp>
         <p:nvSpPr>
@@ -2999,6 +2346,13 @@
           </p:nvPr>
         </p:nvSpPr>
         <p:spPr/>
+        <p:txBody>
+          <a:bodyPr/>
+          <a:lstStyle/>
+          <a:p>
+            <a:endParaRPr lang="en-CA"/>
+          </a:p>
+        </p:txBody>
       </p:sp>
       <p:sp>
         <p:nvSpPr>
@@ -3083,6 +2437,13 @@
           </p:nvPr>
         </p:nvSpPr>
         <p:spPr/>
+        <p:txBody>
+          <a:bodyPr/>
+          <a:lstStyle/>
+          <a:p>
+            <a:endParaRPr lang="en-CA"/>
+          </a:p>
+        </p:txBody>
       </p:sp>
       <p:sp>
         <p:nvSpPr>
@@ -3167,6 +2528,13 @@
           </p:nvPr>
         </p:nvSpPr>
         <p:spPr/>
+        <p:txBody>
+          <a:bodyPr/>
+          <a:lstStyle/>
+          <a:p>
+            <a:endParaRPr lang="en-CA"/>
+          </a:p>
+        </p:txBody>
       </p:sp>
       <p:sp>
         <p:nvSpPr>
@@ -3269,6 +2637,13 @@
           </p:nvPr>
         </p:nvSpPr>
         <p:spPr/>
+        <p:txBody>
+          <a:bodyPr/>
+          <a:lstStyle/>
+          <a:p>
+            <a:endParaRPr lang="en-CA"/>
+          </a:p>
+        </p:txBody>
       </p:sp>
       <p:sp>
         <p:nvSpPr>
@@ -3383,6 +2758,13 @@
           </p:nvPr>
         </p:nvSpPr>
         <p:spPr/>
+        <p:txBody>
+          <a:bodyPr/>
+          <a:lstStyle/>
+          <a:p>
+            <a:endParaRPr lang="en-CA"/>
+          </a:p>
+        </p:txBody>
       </p:sp>
       <p:sp>
         <p:nvSpPr>
@@ -3497,6 +2879,13 @@
           </p:nvPr>
         </p:nvSpPr>
         <p:spPr/>
+        <p:txBody>
+          <a:bodyPr/>
+          <a:lstStyle/>
+          <a:p>
+            <a:endParaRPr lang="en-CA"/>
+          </a:p>
+        </p:txBody>
       </p:sp>
       <p:sp>
         <p:nvSpPr>
@@ -4239,7 +3628,7 @@
           <a:p>
             <a:fld id="{287C9ABC-0C1C-4801-85B9-12829D42DDA4}" type="datetimeFigureOut">
               <a:rPr lang="en-AU" smtClean="0"/>
-              <a:t>11/08/2026</a:t>
+              <a:t>14/08/2026</a:t>
             </a:fld>
             <a:endParaRPr lang="en-AU"/>
           </a:p>
@@ -6398,579 +5787,6 @@
   <p:cSld>
     <p:spTree>
       <p:nvGrpSpPr>
-        <p:cNvPr id="1" name=""/>
-        <p:cNvGrpSpPr/>
-        <p:nvPr/>
-      </p:nvGrpSpPr>
-      <p:grpSpPr>
-        <a:xfrm>
-          <a:off x="0" y="0"/>
-          <a:ext cx="0" cy="0"/>
-          <a:chOff x="0" y="0"/>
-          <a:chExt cx="0" cy="0"/>
-        </a:xfrm>
-      </p:grpSpPr>
-      <p:sp>
-        <p:nvSpPr>
-          <p:cNvPr id="2" name="Text Placeholder 1">
-            <a:extLst>
-              <a:ext uri="{FF2B5EF4-FFF2-40B4-BE49-F238E27FC236}">
-                <a16:creationId xmlns:a16="http://schemas.microsoft.com/office/drawing/2014/main" id="{9B245876-087E-37FF-2A45-491803B93EF5}"/>
-              </a:ext>
-            </a:extLst>
-          </p:cNvPr>
-          <p:cNvSpPr>
-            <a:spLocks noGrp="1"/>
-          </p:cNvSpPr>
-          <p:nvPr>
-            <p:ph type="body" sz="quarter" idx="10"/>
-          </p:nvPr>
-        </p:nvSpPr>
-        <p:spPr>
-          <a:xfrm>
-            <a:off x="242372" y="2940626"/>
-            <a:ext cx="8658743" cy="3437951"/>
-          </a:xfrm>
-        </p:spPr>
-        <p:txBody>
-          <a:bodyPr/>
-          <a:lstStyle/>
-          <a:p>
-            <a:r>
-              <a:rPr lang="en-CA" dirty="0"/>
-              <a:t>Explore the 1_Simple_Scripts folder</a:t>
-            </a:r>
-          </a:p>
-          <a:p>
-            <a:endParaRPr lang="en-CA" dirty="0"/>
-          </a:p>
-          <a:p>
-            <a:r>
-              <a:rPr lang="en-CA" dirty="0"/>
-              <a:t>Try running the code</a:t>
-            </a:r>
-          </a:p>
-          <a:p>
-            <a:endParaRPr lang="en-CA" dirty="0"/>
-          </a:p>
-          <a:p>
-            <a:r>
-              <a:rPr lang="en-CA" dirty="0"/>
-              <a:t>What would happen if you wanted to run this in a different folder?</a:t>
-            </a:r>
-          </a:p>
-        </p:txBody>
-      </p:sp>
-      <p:sp>
-        <p:nvSpPr>
-          <p:cNvPr id="3" name="Title 1">
-            <a:extLst>
-              <a:ext uri="{FF2B5EF4-FFF2-40B4-BE49-F238E27FC236}">
-                <a16:creationId xmlns:a16="http://schemas.microsoft.com/office/drawing/2014/main" id="{D0AE3FC0-C652-C431-6A10-987A06B22130}"/>
-              </a:ext>
-            </a:extLst>
-          </p:cNvPr>
-          <p:cNvSpPr txBox="1">
-            <a:spLocks/>
-          </p:cNvSpPr>
-          <p:nvPr/>
-        </p:nvSpPr>
-        <p:spPr>
-          <a:xfrm>
-            <a:off x="242372" y="1558637"/>
-            <a:ext cx="8658743" cy="1007918"/>
-          </a:xfrm>
-          <a:prstGeom prst="rect">
-            <a:avLst/>
-          </a:prstGeom>
-        </p:spPr>
-        <p:txBody>
-          <a:bodyPr>
-            <a:noAutofit/>
-          </a:bodyPr>
-          <a:lstStyle>
-            <a:lvl1pPr algn="l" defTabSz="914175" rtl="0" eaLnBrk="1" latinLnBrk="0" hangingPunct="1">
-              <a:lnSpc>
-                <a:spcPct val="90000"/>
-              </a:lnSpc>
-              <a:spcBef>
-                <a:spcPct val="0"/>
-              </a:spcBef>
-              <a:buNone/>
-              <a:defRPr sz="4403" kern="1200">
-                <a:solidFill>
-                  <a:schemeClr val="tx1"/>
-                </a:solidFill>
-                <a:latin typeface="+mj-lt"/>
-                <a:ea typeface="+mj-ea"/>
-                <a:cs typeface="+mj-cs"/>
-              </a:defRPr>
-            </a:lvl1pPr>
-          </a:lstStyle>
-          <a:p>
-            <a:pPr algn="ctr"/>
-            <a:r>
-              <a:rPr lang="en-CA" sz="7200" dirty="0"/>
-              <a:t>Exercise</a:t>
-            </a:r>
-          </a:p>
-        </p:txBody>
-      </p:sp>
-    </p:spTree>
-    <p:extLst>
-      <p:ext uri="{BB962C8B-B14F-4D97-AF65-F5344CB8AC3E}">
-        <p14:creationId xmlns:p14="http://schemas.microsoft.com/office/powerpoint/2010/main" val="680839714"/>
-      </p:ext>
-    </p:extLst>
-  </p:cSld>
-  <p:clrMapOvr>
-    <a:masterClrMapping/>
-  </p:clrMapOvr>
-</p:sld>
-</file>
-
-<file path=ppt/slides/slide11.xml><?xml version="1.0" encoding="utf-8"?>
-<p:sld xmlns:a="http://schemas.openxmlformats.org/drawingml/2006/main" xmlns:r="http://schemas.openxmlformats.org/officeDocument/2006/relationships" xmlns:p="http://schemas.openxmlformats.org/presentationml/2006/main">
-  <p:cSld>
-    <p:spTree>
-      <p:nvGrpSpPr>
-        <p:cNvPr id="1" name=""/>
-        <p:cNvGrpSpPr/>
-        <p:nvPr/>
-      </p:nvGrpSpPr>
-      <p:grpSpPr>
-        <a:xfrm>
-          <a:off x="0" y="0"/>
-          <a:ext cx="0" cy="0"/>
-          <a:chOff x="0" y="0"/>
-          <a:chExt cx="0" cy="0"/>
-        </a:xfrm>
-      </p:grpSpPr>
-      <p:sp>
-        <p:nvSpPr>
-          <p:cNvPr id="2" name="Title 1">
-            <a:extLst>
-              <a:ext uri="{FF2B5EF4-FFF2-40B4-BE49-F238E27FC236}">
-                <a16:creationId xmlns:a16="http://schemas.microsoft.com/office/drawing/2014/main" id="{22643326-375A-A79A-4BC9-E08429337A85}"/>
-              </a:ext>
-            </a:extLst>
-          </p:cNvPr>
-          <p:cNvSpPr>
-            <a:spLocks noGrp="1"/>
-          </p:cNvSpPr>
-          <p:nvPr>
-            <p:ph type="title"/>
-          </p:nvPr>
-        </p:nvSpPr>
-        <p:spPr/>
-        <p:txBody>
-          <a:bodyPr/>
-          <a:lstStyle/>
-          <a:p>
-            <a:r>
-              <a:rPr lang="en-US" dirty="0"/>
-              <a:t>What is a package?</a:t>
-            </a:r>
-          </a:p>
-        </p:txBody>
-      </p:sp>
-      <p:sp>
-        <p:nvSpPr>
-          <p:cNvPr id="3" name="Content Placeholder 2">
-            <a:extLst>
-              <a:ext uri="{FF2B5EF4-FFF2-40B4-BE49-F238E27FC236}">
-                <a16:creationId xmlns:a16="http://schemas.microsoft.com/office/drawing/2014/main" id="{ACB875C8-BD73-F266-4045-06FC436A35AA}"/>
-              </a:ext>
-            </a:extLst>
-          </p:cNvPr>
-          <p:cNvSpPr>
-            <a:spLocks noGrp="1"/>
-          </p:cNvSpPr>
-          <p:nvPr>
-            <p:ph sz="half" idx="1"/>
-          </p:nvPr>
-        </p:nvSpPr>
-        <p:spPr>
-          <a:xfrm>
-            <a:off x="628649" y="1825627"/>
-            <a:ext cx="4504459" cy="4351335"/>
-          </a:xfrm>
-        </p:spPr>
-        <p:txBody>
-          <a:bodyPr>
-            <a:normAutofit/>
-          </a:bodyPr>
-          <a:lstStyle/>
-          <a:p>
-            <a:r>
-              <a:rPr lang="en-CA" dirty="0"/>
-              <a:t>Set of reusable functions</a:t>
-            </a:r>
-          </a:p>
-          <a:p>
-            <a:endParaRPr lang="en-CA" dirty="0"/>
-          </a:p>
-          <a:p>
-            <a:r>
-              <a:rPr lang="en-CA" dirty="0"/>
-              <a:t>Standardized formatting</a:t>
-            </a:r>
-          </a:p>
-          <a:p>
-            <a:r>
-              <a:rPr lang="en-CA" dirty="0"/>
-              <a:t>No file path needed</a:t>
-            </a:r>
-          </a:p>
-          <a:p>
-            <a:endParaRPr lang="en-CA" dirty="0"/>
-          </a:p>
-          <a:p>
-            <a:r>
-              <a:rPr lang="en-CA" dirty="0"/>
-              <a:t>Facilitates installation</a:t>
-            </a:r>
-          </a:p>
-          <a:p>
-            <a:r>
-              <a:rPr lang="en-CA" dirty="0"/>
-              <a:t>Automates dependencies</a:t>
-            </a:r>
-          </a:p>
-        </p:txBody>
-      </p:sp>
-      <p:pic>
-        <p:nvPicPr>
-          <p:cNvPr id="1028" name="Picture 4" descr="Top 9 R packages (that every Data Scientist must know)">
-            <a:extLst>
-              <a:ext uri="{FF2B5EF4-FFF2-40B4-BE49-F238E27FC236}">
-                <a16:creationId xmlns:a16="http://schemas.microsoft.com/office/drawing/2014/main" id="{C0119C7F-7394-3714-73BC-BFB0C9254886}"/>
-              </a:ext>
-            </a:extLst>
-          </p:cNvPr>
-          <p:cNvPicPr>
-            <a:picLocks noChangeAspect="1" noChangeArrowheads="1"/>
-          </p:cNvPicPr>
-          <p:nvPr/>
-        </p:nvPicPr>
-        <p:blipFill>
-          <a:blip r:embed="rId2">
-            <a:extLst>
-              <a:ext uri="{28A0092B-C50C-407E-A947-70E740481C1C}">
-                <a14:useLocalDpi xmlns:a14="http://schemas.microsoft.com/office/drawing/2010/main" val="0"/>
-              </a:ext>
-            </a:extLst>
-          </a:blip>
-          <a:srcRect/>
-          <a:stretch>
-            <a:fillRect/>
-          </a:stretch>
-        </p:blipFill>
-        <p:spPr bwMode="auto">
-          <a:xfrm>
-            <a:off x="4653173" y="2432497"/>
-            <a:ext cx="4355359" cy="2388643"/>
-          </a:xfrm>
-          <a:prstGeom prst="rect">
-            <a:avLst/>
-          </a:prstGeom>
-          <a:noFill/>
-          <a:extLst>
-            <a:ext uri="{909E8E84-426E-40DD-AFC4-6F175D3DCCD1}">
-              <a14:hiddenFill xmlns:a14="http://schemas.microsoft.com/office/drawing/2010/main">
-                <a:solidFill>
-                  <a:srgbClr val="FFFFFF"/>
-                </a:solidFill>
-              </a14:hiddenFill>
-            </a:ext>
-          </a:extLst>
-        </p:spPr>
-      </p:pic>
-      <p:pic>
-        <p:nvPicPr>
-          <p:cNvPr id="5" name="Picture 4">
-            <a:extLst>
-              <a:ext uri="{FF2B5EF4-FFF2-40B4-BE49-F238E27FC236}">
-                <a16:creationId xmlns:a16="http://schemas.microsoft.com/office/drawing/2014/main" id="{EA0355F1-DDBE-FD70-D0E2-5E76497DC699}"/>
-              </a:ext>
-            </a:extLst>
-          </p:cNvPr>
-          <p:cNvPicPr>
-            <a:picLocks noChangeAspect="1"/>
-          </p:cNvPicPr>
-          <p:nvPr/>
-        </p:nvPicPr>
-        <p:blipFill>
-          <a:blip r:embed="rId3"/>
-          <a:srcRect l="19390" t="43434" r="16684" b="37472"/>
-          <a:stretch>
-            <a:fillRect/>
-          </a:stretch>
-        </p:blipFill>
-        <p:spPr>
-          <a:xfrm>
-            <a:off x="628649" y="5428010"/>
-            <a:ext cx="4213514" cy="883891"/>
-          </a:xfrm>
-          <a:prstGeom prst="rect">
-            <a:avLst/>
-          </a:prstGeom>
-        </p:spPr>
-      </p:pic>
-    </p:spTree>
-    <p:extLst>
-      <p:ext uri="{BB962C8B-B14F-4D97-AF65-F5344CB8AC3E}">
-        <p14:creationId xmlns:p14="http://schemas.microsoft.com/office/powerpoint/2010/main" val="4107645974"/>
-      </p:ext>
-    </p:extLst>
-  </p:cSld>
-  <p:clrMapOvr>
-    <a:masterClrMapping/>
-  </p:clrMapOvr>
-</p:sld>
-</file>
-
-<file path=ppt/slides/slide12.xml><?xml version="1.0" encoding="utf-8"?>
-<p:sld xmlns:a="http://schemas.openxmlformats.org/drawingml/2006/main" xmlns:r="http://schemas.openxmlformats.org/officeDocument/2006/relationships" xmlns:p="http://schemas.openxmlformats.org/presentationml/2006/main">
-  <p:cSld>
-    <p:spTree>
-      <p:nvGrpSpPr>
-        <p:cNvPr id="1" name=""/>
-        <p:cNvGrpSpPr/>
-        <p:nvPr/>
-      </p:nvGrpSpPr>
-      <p:grpSpPr>
-        <a:xfrm>
-          <a:off x="0" y="0"/>
-          <a:ext cx="0" cy="0"/>
-          <a:chOff x="0" y="0"/>
-          <a:chExt cx="0" cy="0"/>
-        </a:xfrm>
-      </p:grpSpPr>
-      <p:sp>
-        <p:nvSpPr>
-          <p:cNvPr id="2" name="Title 1">
-            <a:extLst>
-              <a:ext uri="{FF2B5EF4-FFF2-40B4-BE49-F238E27FC236}">
-                <a16:creationId xmlns:a16="http://schemas.microsoft.com/office/drawing/2014/main" id="{98205D2F-58F2-9087-C234-C1A51D2DE352}"/>
-              </a:ext>
-            </a:extLst>
-          </p:cNvPr>
-          <p:cNvSpPr>
-            <a:spLocks noGrp="1"/>
-          </p:cNvSpPr>
-          <p:nvPr>
-            <p:ph type="title"/>
-          </p:nvPr>
-        </p:nvSpPr>
-        <p:spPr/>
-        <p:txBody>
-          <a:bodyPr/>
-          <a:lstStyle/>
-          <a:p>
-            <a:r>
-              <a:rPr lang="en-CA" dirty="0"/>
-              <a:t>Today’s Example: </a:t>
-            </a:r>
-            <a:r>
-              <a:rPr lang="en-CA" dirty="0" err="1"/>
-              <a:t>bioNMF</a:t>
-            </a:r>
-            <a:r>
-              <a:rPr lang="en-CA" dirty="0"/>
-              <a:t> Package</a:t>
-            </a:r>
-          </a:p>
-        </p:txBody>
-      </p:sp>
-      <p:sp>
-        <p:nvSpPr>
-          <p:cNvPr id="3" name="Content Placeholder 2">
-            <a:extLst>
-              <a:ext uri="{FF2B5EF4-FFF2-40B4-BE49-F238E27FC236}">
-                <a16:creationId xmlns:a16="http://schemas.microsoft.com/office/drawing/2014/main" id="{E5040FA8-5BD8-7184-15EB-808A3AE6A056}"/>
-              </a:ext>
-            </a:extLst>
-          </p:cNvPr>
-          <p:cNvSpPr>
-            <a:spLocks noGrp="1"/>
-          </p:cNvSpPr>
-          <p:nvPr>
-            <p:ph idx="1"/>
-          </p:nvPr>
-        </p:nvSpPr>
-        <p:spPr/>
-        <p:txBody>
-          <a:bodyPr/>
-          <a:lstStyle/>
-          <a:p>
-            <a:r>
-              <a:rPr lang="en-CA" dirty="0"/>
-              <a:t>We will be working on a </a:t>
-            </a:r>
-            <a:r>
-              <a:rPr lang="en-CA" b="1" dirty="0"/>
-              <a:t>non-negative matrix factorization (NMF)</a:t>
-            </a:r>
-            <a:r>
-              <a:rPr lang="en-CA" dirty="0"/>
-              <a:t> package</a:t>
-            </a:r>
-          </a:p>
-          <a:p>
-            <a:r>
-              <a:rPr lang="en-CA" dirty="0"/>
-              <a:t>NMF decomposes data into </a:t>
-            </a:r>
-            <a:r>
-              <a:rPr lang="en-CA" b="1" dirty="0"/>
-              <a:t>clusters </a:t>
-            </a:r>
-            <a:r>
-              <a:rPr lang="en-CA" dirty="0"/>
-              <a:t>(r dimension)</a:t>
-            </a:r>
-          </a:p>
-          <a:p>
-            <a:r>
-              <a:rPr lang="en-CA" dirty="0"/>
-              <a:t>Common for count data (gene expression)</a:t>
-            </a:r>
-          </a:p>
-          <a:p>
-            <a:endParaRPr lang="en-CA" dirty="0"/>
-          </a:p>
-          <a:p>
-            <a:r>
-              <a:rPr lang="en-CA" dirty="0"/>
-              <a:t>Samples (patients) – n</a:t>
-            </a:r>
-          </a:p>
-          <a:p>
-            <a:r>
-              <a:rPr lang="en-CA" dirty="0"/>
-              <a:t>Features (genes) – p</a:t>
-            </a:r>
-          </a:p>
-          <a:p>
-            <a:r>
-              <a:rPr lang="en-CA" dirty="0"/>
-              <a:t>Clusters (programs) – r</a:t>
-            </a:r>
-          </a:p>
-          <a:p>
-            <a:endParaRPr lang="en-CA" dirty="0"/>
-          </a:p>
-        </p:txBody>
-      </p:sp>
-      <p:grpSp>
-        <p:nvGrpSpPr>
-          <p:cNvPr id="6" name="Group 5">
-            <a:extLst>
-              <a:ext uri="{FF2B5EF4-FFF2-40B4-BE49-F238E27FC236}">
-                <a16:creationId xmlns:a16="http://schemas.microsoft.com/office/drawing/2014/main" id="{55CF7EE0-9283-0D3D-0FF8-DB1D3BE0E505}"/>
-              </a:ext>
-            </a:extLst>
-          </p:cNvPr>
-          <p:cNvGrpSpPr/>
-          <p:nvPr/>
-        </p:nvGrpSpPr>
-        <p:grpSpPr>
-          <a:xfrm>
-            <a:off x="4416137" y="3844636"/>
-            <a:ext cx="4613564" cy="3013364"/>
-            <a:chOff x="824012" y="3674928"/>
-            <a:chExt cx="3935816" cy="2214411"/>
-          </a:xfrm>
-        </p:grpSpPr>
-        <p:pic>
-          <p:nvPicPr>
-            <p:cNvPr id="4" name="Picture 3" descr="Non-negative Matrix Factorization (Part 1): Understanding Its Importance  and Applications">
-              <a:extLst>
-                <a:ext uri="{FF2B5EF4-FFF2-40B4-BE49-F238E27FC236}">
-                  <a16:creationId xmlns:a16="http://schemas.microsoft.com/office/drawing/2014/main" id="{4A89B8C9-C236-A3EB-95C8-643E9A3C5CF1}"/>
-                </a:ext>
-              </a:extLst>
-            </p:cNvPr>
-            <p:cNvPicPr>
-              <a:picLocks noChangeAspect="1"/>
-            </p:cNvPicPr>
-            <p:nvPr/>
-          </p:nvPicPr>
-          <p:blipFill>
-            <a:blip r:embed="rId2"/>
-            <a:srcRect l="4525" r="4304"/>
-            <a:stretch>
-              <a:fillRect/>
-            </a:stretch>
-          </p:blipFill>
-          <p:spPr>
-            <a:xfrm>
-              <a:off x="824012" y="3674928"/>
-              <a:ext cx="3935816" cy="1782172"/>
-            </a:xfrm>
-            <a:prstGeom prst="rect">
-              <a:avLst/>
-            </a:prstGeom>
-          </p:spPr>
-        </p:pic>
-        <p:sp>
-          <p:nvSpPr>
-            <p:cNvPr id="5" name="TextBox 4">
-              <a:extLst>
-                <a:ext uri="{FF2B5EF4-FFF2-40B4-BE49-F238E27FC236}">
-                  <a16:creationId xmlns:a16="http://schemas.microsoft.com/office/drawing/2014/main" id="{EBB307C6-CD8E-A0BE-F92E-FBFC0373D618}"/>
-                </a:ext>
-              </a:extLst>
-            </p:cNvPr>
-            <p:cNvSpPr txBox="1"/>
-            <p:nvPr/>
-          </p:nvSpPr>
-          <p:spPr>
-            <a:xfrm>
-              <a:off x="2371518" y="5519879"/>
-              <a:ext cx="831272" cy="369460"/>
-            </a:xfrm>
-            <a:prstGeom prst="rect">
-              <a:avLst/>
-            </a:prstGeom>
-            <a:noFill/>
-          </p:spPr>
-          <p:txBody>
-            <a:bodyPr wrap="square" rtlCol="0">
-              <a:spAutoFit/>
-            </a:bodyPr>
-            <a:lstStyle/>
-            <a:p>
-              <a:r>
-                <a:rPr lang="en-CA" dirty="0">
-                  <a:hlinkClick r:id="rId3"/>
-                </a:rPr>
-                <a:t>Source</a:t>
-              </a:r>
-              <a:endParaRPr lang="en-CA" dirty="0"/>
-            </a:p>
-          </p:txBody>
-        </p:sp>
-      </p:grpSp>
-    </p:spTree>
-    <p:extLst>
-      <p:ext uri="{BB962C8B-B14F-4D97-AF65-F5344CB8AC3E}">
-        <p14:creationId xmlns:p14="http://schemas.microsoft.com/office/powerpoint/2010/main" val="998501193"/>
-      </p:ext>
-    </p:extLst>
-  </p:cSld>
-  <p:clrMapOvr>
-    <a:masterClrMapping/>
-  </p:clrMapOvr>
-</p:sld>
-</file>
-
-<file path=ppt/slides/slide13.xml><?xml version="1.0" encoding="utf-8"?>
-<p:sld xmlns:a="http://schemas.openxmlformats.org/drawingml/2006/main" xmlns:r="http://schemas.openxmlformats.org/officeDocument/2006/relationships" xmlns:p="http://schemas.openxmlformats.org/presentationml/2006/main">
-  <p:cSld>
-    <p:spTree>
-      <p:nvGrpSpPr>
         <p:cNvPr id="1" name="">
           <a:extLst>
             <a:ext uri="{FF2B5EF4-FFF2-40B4-BE49-F238E27FC236}">
@@ -7012,7 +5828,15 @@
           <a:p>
             <a:r>
               <a:rPr lang="en-CA" dirty="0"/>
-              <a:t>Today’s Example: NMF Package</a:t>
+              <a:t>Today’s Example: </a:t>
+            </a:r>
+            <a:r>
+              <a:rPr lang="en-CA" dirty="0" err="1"/>
+              <a:t>bioNMF</a:t>
+            </a:r>
+            <a:r>
+              <a:rPr lang="en-CA" dirty="0"/>
+              <a:t> Package</a:t>
             </a:r>
           </a:p>
         </p:txBody>
@@ -7033,7 +5857,12 @@
             <p:ph idx="1"/>
           </p:nvPr>
         </p:nvSpPr>
-        <p:spPr/>
+        <p:spPr>
+          <a:xfrm>
+            <a:off x="477982" y="1825627"/>
+            <a:ext cx="6369627" cy="4351335"/>
+          </a:xfrm>
+        </p:spPr>
         <p:txBody>
           <a:bodyPr/>
           <a:lstStyle/>
@@ -7049,6 +5878,15 @@
           <a:p>
             <a:r>
               <a:rPr lang="en-CA" dirty="0"/>
+              <a:t>Load datasets</a:t>
+            </a:r>
+          </a:p>
+          <a:p>
+            <a:endParaRPr lang="en-CA" dirty="0"/>
+          </a:p>
+          <a:p>
+            <a:r>
+              <a:rPr lang="en-CA" dirty="0"/>
               <a:t>Train an NMF model</a:t>
             </a:r>
           </a:p>
@@ -7056,7 +5894,7 @@
             <a:pPr lvl="1"/>
             <a:r>
               <a:rPr lang="en-CA" dirty="0"/>
-              <a:t>Takes X as input, returns W and H</a:t>
+              <a:t>Takes X as input, returns			W and H</a:t>
             </a:r>
           </a:p>
           <a:p>
@@ -7183,6 +6021,735 @@
 </p:sld>
 </file>
 
+<file path=ppt/slides/slide11.xml><?xml version="1.0" encoding="utf-8"?>
+<p:sld xmlns:a="http://schemas.openxmlformats.org/drawingml/2006/main" xmlns:r="http://schemas.openxmlformats.org/officeDocument/2006/relationships" xmlns:p="http://schemas.openxmlformats.org/presentationml/2006/main">
+  <p:cSld>
+    <p:spTree>
+      <p:nvGrpSpPr>
+        <p:cNvPr id="1" name=""/>
+        <p:cNvGrpSpPr/>
+        <p:nvPr/>
+      </p:nvGrpSpPr>
+      <p:grpSpPr>
+        <a:xfrm>
+          <a:off x="0" y="0"/>
+          <a:ext cx="0" cy="0"/>
+          <a:chOff x="0" y="0"/>
+          <a:chExt cx="0" cy="0"/>
+        </a:xfrm>
+      </p:grpSpPr>
+      <p:sp>
+        <p:nvSpPr>
+          <p:cNvPr id="2" name="Title 1">
+            <a:extLst>
+              <a:ext uri="{FF2B5EF4-FFF2-40B4-BE49-F238E27FC236}">
+                <a16:creationId xmlns:a16="http://schemas.microsoft.com/office/drawing/2014/main" id="{931D2992-2D2C-03B2-20A7-FA3CFD5F72E8}"/>
+              </a:ext>
+            </a:extLst>
+          </p:cNvPr>
+          <p:cNvSpPr>
+            <a:spLocks noGrp="1"/>
+          </p:cNvSpPr>
+          <p:nvPr>
+            <p:ph type="title"/>
+          </p:nvPr>
+        </p:nvSpPr>
+        <p:spPr/>
+        <p:txBody>
+          <a:bodyPr/>
+          <a:lstStyle/>
+          <a:p>
+            <a:r>
+              <a:rPr lang="en-CA" dirty="0"/>
+              <a:t>Why bother with packages?</a:t>
+            </a:r>
+          </a:p>
+        </p:txBody>
+      </p:sp>
+      <p:sp>
+        <p:nvSpPr>
+          <p:cNvPr id="3" name="Content Placeholder 2">
+            <a:extLst>
+              <a:ext uri="{FF2B5EF4-FFF2-40B4-BE49-F238E27FC236}">
+                <a16:creationId xmlns:a16="http://schemas.microsoft.com/office/drawing/2014/main" id="{F9D67DD5-AD34-86CF-5CE0-F971881A1045}"/>
+              </a:ext>
+            </a:extLst>
+          </p:cNvPr>
+          <p:cNvSpPr>
+            <a:spLocks noGrp="1"/>
+          </p:cNvSpPr>
+          <p:nvPr>
+            <p:ph idx="1"/>
+          </p:nvPr>
+        </p:nvSpPr>
+        <p:spPr/>
+        <p:txBody>
+          <a:bodyPr>
+            <a:normAutofit lnSpcReduction="10000"/>
+          </a:bodyPr>
+          <a:lstStyle/>
+          <a:p>
+            <a:r>
+              <a:rPr lang="en-CA" dirty="0"/>
+              <a:t>“Works on my machine”</a:t>
+            </a:r>
+          </a:p>
+          <a:p>
+            <a:pPr lvl="1"/>
+            <a:r>
+              <a:rPr lang="en-CA" dirty="0"/>
+              <a:t>What about other users?</a:t>
+            </a:r>
+          </a:p>
+          <a:p>
+            <a:pPr lvl="1"/>
+            <a:endParaRPr lang="en-CA" dirty="0"/>
+          </a:p>
+          <a:p>
+            <a:r>
+              <a:rPr lang="en-CA" dirty="0"/>
+              <a:t>“Using different scripts with source() is enough”</a:t>
+            </a:r>
+          </a:p>
+          <a:p>
+            <a:pPr lvl="1"/>
+            <a:r>
+              <a:rPr lang="en-CA" dirty="0"/>
+              <a:t>How do you handle file paths in different projects?</a:t>
+            </a:r>
+          </a:p>
+          <a:p>
+            <a:pPr lvl="1"/>
+            <a:endParaRPr lang="en-CA" dirty="0"/>
+          </a:p>
+          <a:p>
+            <a:r>
+              <a:rPr lang="en-CA" dirty="0"/>
+              <a:t>“I already have all the packages installed”</a:t>
+            </a:r>
+          </a:p>
+          <a:p>
+            <a:pPr lvl="1"/>
+            <a:r>
+              <a:rPr lang="en-CA" dirty="0"/>
+              <a:t>Can you ensure reproducibility?</a:t>
+            </a:r>
+          </a:p>
+          <a:p>
+            <a:pPr lvl="1"/>
+            <a:endParaRPr lang="en-CA" dirty="0"/>
+          </a:p>
+          <a:p>
+            <a:r>
+              <a:rPr lang="en-CA" dirty="0"/>
+              <a:t>“I still have features to add”</a:t>
+            </a:r>
+          </a:p>
+          <a:p>
+            <a:pPr lvl="1"/>
+            <a:r>
+              <a:rPr lang="en-CA" dirty="0"/>
+              <a:t>What if the code breaks? Will you know if it does?</a:t>
+            </a:r>
+          </a:p>
+          <a:p>
+            <a:pPr lvl="1"/>
+            <a:endParaRPr lang="en-CA" dirty="0"/>
+          </a:p>
+        </p:txBody>
+      </p:sp>
+    </p:spTree>
+    <p:extLst>
+      <p:ext uri="{BB962C8B-B14F-4D97-AF65-F5344CB8AC3E}">
+        <p14:creationId xmlns:p14="http://schemas.microsoft.com/office/powerpoint/2010/main" val="3567545301"/>
+      </p:ext>
+    </p:extLst>
+  </p:cSld>
+  <p:clrMapOvr>
+    <a:masterClrMapping/>
+  </p:clrMapOvr>
+  <p:timing>
+    <p:tnLst>
+      <p:par>
+        <p:cTn id="1" dur="indefinite" restart="never" nodeType="tmRoot">
+          <p:childTnLst>
+            <p:seq concurrent="1" nextAc="seek">
+              <p:cTn id="2" dur="indefinite" nodeType="mainSeq">
+                <p:childTnLst>
+                  <p:par>
+                    <p:cTn id="3" fill="hold">
+                      <p:stCondLst>
+                        <p:cond delay="indefinite"/>
+                      </p:stCondLst>
+                      <p:childTnLst>
+                        <p:par>
+                          <p:cTn id="4" fill="hold">
+                            <p:stCondLst>
+                              <p:cond delay="0"/>
+                            </p:stCondLst>
+                            <p:childTnLst>
+                              <p:par>
+                                <p:cTn id="5" presetID="1" presetClass="entr" presetSubtype="0" fill="hold" nodeType="clickEffect">
+                                  <p:stCondLst>
+                                    <p:cond delay="0"/>
+                                  </p:stCondLst>
+                                  <p:childTnLst>
+                                    <p:set>
+                                      <p:cBhvr>
+                                        <p:cTn id="6" dur="1" fill="hold">
+                                          <p:stCondLst>
+                                            <p:cond delay="0"/>
+                                          </p:stCondLst>
+                                        </p:cTn>
+                                        <p:tgtEl>
+                                          <p:spTgt spid="3">
+                                            <p:txEl>
+                                              <p:pRg st="1" end="1"/>
+                                            </p:txEl>
+                                          </p:spTgt>
+                                        </p:tgtEl>
+                                        <p:attrNameLst>
+                                          <p:attrName>style.visibility</p:attrName>
+                                        </p:attrNameLst>
+                                      </p:cBhvr>
+                                      <p:to>
+                                        <p:strVal val="visible"/>
+                                      </p:to>
+                                    </p:set>
+                                  </p:childTnLst>
+                                </p:cTn>
+                              </p:par>
+                            </p:childTnLst>
+                          </p:cTn>
+                        </p:par>
+                      </p:childTnLst>
+                    </p:cTn>
+                  </p:par>
+                  <p:par>
+                    <p:cTn id="7" fill="hold">
+                      <p:stCondLst>
+                        <p:cond delay="indefinite"/>
+                      </p:stCondLst>
+                      <p:childTnLst>
+                        <p:par>
+                          <p:cTn id="8" fill="hold">
+                            <p:stCondLst>
+                              <p:cond delay="0"/>
+                            </p:stCondLst>
+                            <p:childTnLst>
+                              <p:par>
+                                <p:cTn id="9" presetID="1" presetClass="entr" presetSubtype="0" fill="hold" nodeType="clickEffect">
+                                  <p:stCondLst>
+                                    <p:cond delay="0"/>
+                                  </p:stCondLst>
+                                  <p:childTnLst>
+                                    <p:set>
+                                      <p:cBhvr>
+                                        <p:cTn id="10" dur="1" fill="hold">
+                                          <p:stCondLst>
+                                            <p:cond delay="0"/>
+                                          </p:stCondLst>
+                                        </p:cTn>
+                                        <p:tgtEl>
+                                          <p:spTgt spid="3">
+                                            <p:txEl>
+                                              <p:pRg st="4" end="4"/>
+                                            </p:txEl>
+                                          </p:spTgt>
+                                        </p:tgtEl>
+                                        <p:attrNameLst>
+                                          <p:attrName>style.visibility</p:attrName>
+                                        </p:attrNameLst>
+                                      </p:cBhvr>
+                                      <p:to>
+                                        <p:strVal val="visible"/>
+                                      </p:to>
+                                    </p:set>
+                                  </p:childTnLst>
+                                </p:cTn>
+                              </p:par>
+                            </p:childTnLst>
+                          </p:cTn>
+                        </p:par>
+                      </p:childTnLst>
+                    </p:cTn>
+                  </p:par>
+                  <p:par>
+                    <p:cTn id="11" fill="hold">
+                      <p:stCondLst>
+                        <p:cond delay="indefinite"/>
+                      </p:stCondLst>
+                      <p:childTnLst>
+                        <p:par>
+                          <p:cTn id="12" fill="hold">
+                            <p:stCondLst>
+                              <p:cond delay="0"/>
+                            </p:stCondLst>
+                            <p:childTnLst>
+                              <p:par>
+                                <p:cTn id="13" presetID="1" presetClass="entr" presetSubtype="0" fill="hold" nodeType="clickEffect">
+                                  <p:stCondLst>
+                                    <p:cond delay="0"/>
+                                  </p:stCondLst>
+                                  <p:childTnLst>
+                                    <p:set>
+                                      <p:cBhvr>
+                                        <p:cTn id="14" dur="1" fill="hold">
+                                          <p:stCondLst>
+                                            <p:cond delay="0"/>
+                                          </p:stCondLst>
+                                        </p:cTn>
+                                        <p:tgtEl>
+                                          <p:spTgt spid="3">
+                                            <p:txEl>
+                                              <p:pRg st="7" end="7"/>
+                                            </p:txEl>
+                                          </p:spTgt>
+                                        </p:tgtEl>
+                                        <p:attrNameLst>
+                                          <p:attrName>style.visibility</p:attrName>
+                                        </p:attrNameLst>
+                                      </p:cBhvr>
+                                      <p:to>
+                                        <p:strVal val="visible"/>
+                                      </p:to>
+                                    </p:set>
+                                  </p:childTnLst>
+                                </p:cTn>
+                              </p:par>
+                            </p:childTnLst>
+                          </p:cTn>
+                        </p:par>
+                      </p:childTnLst>
+                    </p:cTn>
+                  </p:par>
+                  <p:par>
+                    <p:cTn id="15" fill="hold">
+                      <p:stCondLst>
+                        <p:cond delay="indefinite"/>
+                      </p:stCondLst>
+                      <p:childTnLst>
+                        <p:par>
+                          <p:cTn id="16" fill="hold">
+                            <p:stCondLst>
+                              <p:cond delay="0"/>
+                            </p:stCondLst>
+                            <p:childTnLst>
+                              <p:par>
+                                <p:cTn id="17" presetID="1" presetClass="entr" presetSubtype="0" fill="hold" nodeType="clickEffect">
+                                  <p:stCondLst>
+                                    <p:cond delay="0"/>
+                                  </p:stCondLst>
+                                  <p:childTnLst>
+                                    <p:set>
+                                      <p:cBhvr>
+                                        <p:cTn id="18" dur="1" fill="hold">
+                                          <p:stCondLst>
+                                            <p:cond delay="0"/>
+                                          </p:stCondLst>
+                                        </p:cTn>
+                                        <p:tgtEl>
+                                          <p:spTgt spid="3">
+                                            <p:txEl>
+                                              <p:pRg st="10" end="10"/>
+                                            </p:txEl>
+                                          </p:spTgt>
+                                        </p:tgtEl>
+                                        <p:attrNameLst>
+                                          <p:attrName>style.visibility</p:attrName>
+                                        </p:attrNameLst>
+                                      </p:cBhvr>
+                                      <p:to>
+                                        <p:strVal val="visible"/>
+                                      </p:to>
+                                    </p:set>
+                                  </p:childTnLst>
+                                </p:cTn>
+                              </p:par>
+                            </p:childTnLst>
+                          </p:cTn>
+                        </p:par>
+                      </p:childTnLst>
+                    </p:cTn>
+                  </p:par>
+                </p:childTnLst>
+              </p:cTn>
+              <p:prevCondLst>
+                <p:cond evt="onPrev" delay="0">
+                  <p:tgtEl>
+                    <p:sldTgt/>
+                  </p:tgtEl>
+                </p:cond>
+              </p:prevCondLst>
+              <p:nextCondLst>
+                <p:cond evt="onNext" delay="0">
+                  <p:tgtEl>
+                    <p:sldTgt/>
+                  </p:tgtEl>
+                </p:cond>
+              </p:nextCondLst>
+            </p:seq>
+          </p:childTnLst>
+        </p:cTn>
+      </p:par>
+    </p:tnLst>
+  </p:timing>
+</p:sld>
+</file>
+
+<file path=ppt/slides/slide12.xml><?xml version="1.0" encoding="utf-8"?>
+<p:sld xmlns:a="http://schemas.openxmlformats.org/drawingml/2006/main" xmlns:r="http://schemas.openxmlformats.org/officeDocument/2006/relationships" xmlns:p="http://schemas.openxmlformats.org/presentationml/2006/main">
+  <p:cSld>
+    <p:spTree>
+      <p:nvGrpSpPr>
+        <p:cNvPr id="1" name=""/>
+        <p:cNvGrpSpPr/>
+        <p:nvPr/>
+      </p:nvGrpSpPr>
+      <p:grpSpPr>
+        <a:xfrm>
+          <a:off x="0" y="0"/>
+          <a:ext cx="0" cy="0"/>
+          <a:chOff x="0" y="0"/>
+          <a:chExt cx="0" cy="0"/>
+        </a:xfrm>
+      </p:grpSpPr>
+      <p:sp>
+        <p:nvSpPr>
+          <p:cNvPr id="2" name="Text Placeholder 1">
+            <a:extLst>
+              <a:ext uri="{FF2B5EF4-FFF2-40B4-BE49-F238E27FC236}">
+                <a16:creationId xmlns:a16="http://schemas.microsoft.com/office/drawing/2014/main" id="{9B245876-087E-37FF-2A45-491803B93EF5}"/>
+              </a:ext>
+            </a:extLst>
+          </p:cNvPr>
+          <p:cNvSpPr>
+            <a:spLocks noGrp="1"/>
+          </p:cNvSpPr>
+          <p:nvPr>
+            <p:ph type="body" sz="quarter" idx="10"/>
+          </p:nvPr>
+        </p:nvSpPr>
+        <p:spPr>
+          <a:xfrm>
+            <a:off x="242372" y="2940626"/>
+            <a:ext cx="8658743" cy="3437951"/>
+          </a:xfrm>
+        </p:spPr>
+        <p:txBody>
+          <a:bodyPr>
+            <a:normAutofit/>
+          </a:bodyPr>
+          <a:lstStyle/>
+          <a:p>
+            <a:r>
+              <a:rPr lang="en-CA" dirty="0"/>
+              <a:t>Explore the 1_Simple_Scripts folder 			     (open the project with the </a:t>
+            </a:r>
+            <a:r>
+              <a:rPr lang="en-CA" i="1" dirty="0"/>
+              <a:t>1_Simple_Scripts.Rproj</a:t>
+            </a:r>
+            <a:r>
+              <a:rPr lang="en-CA" dirty="0"/>
+              <a:t> file)</a:t>
+            </a:r>
+          </a:p>
+          <a:p>
+            <a:endParaRPr lang="en-CA" dirty="0"/>
+          </a:p>
+          <a:p>
+            <a:r>
+              <a:rPr lang="en-CA" dirty="0"/>
+              <a:t>Try running the code</a:t>
+            </a:r>
+          </a:p>
+          <a:p>
+            <a:endParaRPr lang="en-CA" dirty="0"/>
+          </a:p>
+          <a:p>
+            <a:r>
+              <a:rPr lang="en-CA" dirty="0"/>
+              <a:t>What would happen if you wanted to run this in a different folder?</a:t>
+            </a:r>
+          </a:p>
+        </p:txBody>
+      </p:sp>
+      <p:sp>
+        <p:nvSpPr>
+          <p:cNvPr id="3" name="Title 1">
+            <a:extLst>
+              <a:ext uri="{FF2B5EF4-FFF2-40B4-BE49-F238E27FC236}">
+                <a16:creationId xmlns:a16="http://schemas.microsoft.com/office/drawing/2014/main" id="{D0AE3FC0-C652-C431-6A10-987A06B22130}"/>
+              </a:ext>
+            </a:extLst>
+          </p:cNvPr>
+          <p:cNvSpPr txBox="1">
+            <a:spLocks/>
+          </p:cNvSpPr>
+          <p:nvPr/>
+        </p:nvSpPr>
+        <p:spPr>
+          <a:xfrm>
+            <a:off x="242372" y="1558637"/>
+            <a:ext cx="8658743" cy="1007918"/>
+          </a:xfrm>
+          <a:prstGeom prst="rect">
+            <a:avLst/>
+          </a:prstGeom>
+        </p:spPr>
+        <p:txBody>
+          <a:bodyPr>
+            <a:noAutofit/>
+          </a:bodyPr>
+          <a:lstStyle>
+            <a:lvl1pPr algn="l" defTabSz="914175" rtl="0" eaLnBrk="1" latinLnBrk="0" hangingPunct="1">
+              <a:lnSpc>
+                <a:spcPct val="90000"/>
+              </a:lnSpc>
+              <a:spcBef>
+                <a:spcPct val="0"/>
+              </a:spcBef>
+              <a:buNone/>
+              <a:defRPr sz="4403" kern="1200">
+                <a:solidFill>
+                  <a:schemeClr val="tx1"/>
+                </a:solidFill>
+                <a:latin typeface="+mj-lt"/>
+                <a:ea typeface="+mj-ea"/>
+                <a:cs typeface="+mj-cs"/>
+              </a:defRPr>
+            </a:lvl1pPr>
+          </a:lstStyle>
+          <a:p>
+            <a:pPr algn="ctr"/>
+            <a:r>
+              <a:rPr lang="en-CA" sz="7200" dirty="0"/>
+              <a:t>Exercise</a:t>
+            </a:r>
+          </a:p>
+        </p:txBody>
+      </p:sp>
+    </p:spTree>
+    <p:extLst>
+      <p:ext uri="{BB962C8B-B14F-4D97-AF65-F5344CB8AC3E}">
+        <p14:creationId xmlns:p14="http://schemas.microsoft.com/office/powerpoint/2010/main" val="680839714"/>
+      </p:ext>
+    </p:extLst>
+  </p:cSld>
+  <p:clrMapOvr>
+    <a:masterClrMapping/>
+  </p:clrMapOvr>
+</p:sld>
+</file>
+
+<file path=ppt/slides/slide13.xml><?xml version="1.0" encoding="utf-8"?>
+<p:sld xmlns:a="http://schemas.openxmlformats.org/drawingml/2006/main" xmlns:r="http://schemas.openxmlformats.org/officeDocument/2006/relationships" xmlns:p="http://schemas.openxmlformats.org/presentationml/2006/main">
+  <p:cSld>
+    <p:spTree>
+      <p:nvGrpSpPr>
+        <p:cNvPr id="1" name=""/>
+        <p:cNvGrpSpPr/>
+        <p:nvPr/>
+      </p:nvGrpSpPr>
+      <p:grpSpPr>
+        <a:xfrm>
+          <a:off x="0" y="0"/>
+          <a:ext cx="0" cy="0"/>
+          <a:chOff x="0" y="0"/>
+          <a:chExt cx="0" cy="0"/>
+        </a:xfrm>
+      </p:grpSpPr>
+      <p:sp>
+        <p:nvSpPr>
+          <p:cNvPr id="2" name="Title 1">
+            <a:extLst>
+              <a:ext uri="{FF2B5EF4-FFF2-40B4-BE49-F238E27FC236}">
+                <a16:creationId xmlns:a16="http://schemas.microsoft.com/office/drawing/2014/main" id="{22643326-375A-A79A-4BC9-E08429337A85}"/>
+              </a:ext>
+            </a:extLst>
+          </p:cNvPr>
+          <p:cNvSpPr>
+            <a:spLocks noGrp="1"/>
+          </p:cNvSpPr>
+          <p:nvPr>
+            <p:ph type="title"/>
+          </p:nvPr>
+        </p:nvSpPr>
+        <p:spPr/>
+        <p:txBody>
+          <a:bodyPr/>
+          <a:lstStyle/>
+          <a:p>
+            <a:r>
+              <a:rPr lang="en-US" dirty="0"/>
+              <a:t>What is a package?</a:t>
+            </a:r>
+          </a:p>
+        </p:txBody>
+      </p:sp>
+      <p:sp>
+        <p:nvSpPr>
+          <p:cNvPr id="3" name="Content Placeholder 2">
+            <a:extLst>
+              <a:ext uri="{FF2B5EF4-FFF2-40B4-BE49-F238E27FC236}">
+                <a16:creationId xmlns:a16="http://schemas.microsoft.com/office/drawing/2014/main" id="{ACB875C8-BD73-F266-4045-06FC436A35AA}"/>
+              </a:ext>
+            </a:extLst>
+          </p:cNvPr>
+          <p:cNvSpPr>
+            <a:spLocks noGrp="1"/>
+          </p:cNvSpPr>
+          <p:nvPr>
+            <p:ph sz="half" idx="1"/>
+          </p:nvPr>
+        </p:nvSpPr>
+        <p:spPr>
+          <a:xfrm>
+            <a:off x="628649" y="1825627"/>
+            <a:ext cx="4743451" cy="4907682"/>
+          </a:xfrm>
+        </p:spPr>
+        <p:txBody>
+          <a:bodyPr>
+            <a:normAutofit/>
+          </a:bodyPr>
+          <a:lstStyle/>
+          <a:p>
+            <a:r>
+              <a:rPr lang="en-CA" dirty="0"/>
+              <a:t>Set of reusable functions</a:t>
+            </a:r>
+          </a:p>
+          <a:p>
+            <a:endParaRPr lang="en-CA" dirty="0"/>
+          </a:p>
+          <a:p>
+            <a:r>
+              <a:rPr lang="en-CA" dirty="0"/>
+              <a:t>Standardized formatting</a:t>
+            </a:r>
+          </a:p>
+          <a:p>
+            <a:r>
+              <a:rPr lang="en-CA" dirty="0"/>
+              <a:t>No file path needed</a:t>
+            </a:r>
+          </a:p>
+          <a:p>
+            <a:endParaRPr lang="en-CA" dirty="0"/>
+          </a:p>
+          <a:p>
+            <a:r>
+              <a:rPr lang="en-CA" dirty="0"/>
+              <a:t>Facilitates installation</a:t>
+            </a:r>
+          </a:p>
+          <a:p>
+            <a:r>
+              <a:rPr lang="en-CA" dirty="0"/>
+              <a:t>Automates dependencies</a:t>
+            </a:r>
+          </a:p>
+          <a:p>
+            <a:r>
+              <a:rPr lang="en-CA" dirty="0"/>
+              <a:t>Easy documentation interface</a:t>
+            </a:r>
+          </a:p>
+        </p:txBody>
+      </p:sp>
+      <p:pic>
+        <p:nvPicPr>
+          <p:cNvPr id="1028" name="Picture 4" descr="Top 9 R packages (that every Data Scientist must know)">
+            <a:extLst>
+              <a:ext uri="{FF2B5EF4-FFF2-40B4-BE49-F238E27FC236}">
+                <a16:creationId xmlns:a16="http://schemas.microsoft.com/office/drawing/2014/main" id="{C0119C7F-7394-3714-73BC-BFB0C9254886}"/>
+              </a:ext>
+            </a:extLst>
+          </p:cNvPr>
+          <p:cNvPicPr>
+            <a:picLocks noChangeAspect="1" noChangeArrowheads="1"/>
+          </p:cNvPicPr>
+          <p:nvPr/>
+        </p:nvPicPr>
+        <p:blipFill>
+          <a:blip r:embed="rId2">
+            <a:extLst>
+              <a:ext uri="{28A0092B-C50C-407E-A947-70E740481C1C}">
+                <a14:useLocalDpi xmlns:a14="http://schemas.microsoft.com/office/drawing/2010/main" val="0"/>
+              </a:ext>
+            </a:extLst>
+          </a:blip>
+          <a:srcRect/>
+          <a:stretch>
+            <a:fillRect/>
+          </a:stretch>
+        </p:blipFill>
+        <p:spPr bwMode="auto">
+          <a:xfrm>
+            <a:off x="4653173" y="2432497"/>
+            <a:ext cx="4355359" cy="2388643"/>
+          </a:xfrm>
+          <a:prstGeom prst="rect">
+            <a:avLst/>
+          </a:prstGeom>
+          <a:noFill/>
+          <a:extLst>
+            <a:ext uri="{909E8E84-426E-40DD-AFC4-6F175D3DCCD1}">
+              <a14:hiddenFill xmlns:a14="http://schemas.microsoft.com/office/drawing/2010/main">
+                <a:solidFill>
+                  <a:srgbClr val="FFFFFF"/>
+                </a:solidFill>
+              </a14:hiddenFill>
+            </a:ext>
+          </a:extLst>
+        </p:spPr>
+      </p:pic>
+      <p:pic>
+        <p:nvPicPr>
+          <p:cNvPr id="5" name="Picture 4">
+            <a:extLst>
+              <a:ext uri="{FF2B5EF4-FFF2-40B4-BE49-F238E27FC236}">
+                <a16:creationId xmlns:a16="http://schemas.microsoft.com/office/drawing/2014/main" id="{EA0355F1-DDBE-FD70-D0E2-5E76497DC699}"/>
+              </a:ext>
+            </a:extLst>
+          </p:cNvPr>
+          <p:cNvPicPr>
+            <a:picLocks noChangeAspect="1"/>
+          </p:cNvPicPr>
+          <p:nvPr/>
+        </p:nvPicPr>
+        <p:blipFill>
+          <a:blip r:embed="rId3"/>
+          <a:srcRect l="19390" t="43434" r="16684" b="37472"/>
+          <a:stretch>
+            <a:fillRect/>
+          </a:stretch>
+        </p:blipFill>
+        <p:spPr>
+          <a:xfrm>
+            <a:off x="893617" y="5849418"/>
+            <a:ext cx="4213514" cy="883891"/>
+          </a:xfrm>
+          <a:prstGeom prst="rect">
+            <a:avLst/>
+          </a:prstGeom>
+        </p:spPr>
+      </p:pic>
+    </p:spTree>
+    <p:extLst>
+      <p:ext uri="{BB962C8B-B14F-4D97-AF65-F5344CB8AC3E}">
+        <p14:creationId xmlns:p14="http://schemas.microsoft.com/office/powerpoint/2010/main" val="4107645974"/>
+      </p:ext>
+    </p:extLst>
+  </p:cSld>
+  <p:clrMapOvr>
+    <a:masterClrMapping/>
+  </p:clrMapOvr>
+</p:sld>
+</file>
+
 <file path=ppt/slides/slide14.xml><?xml version="1.0" encoding="utf-8"?>
 <p:sld xmlns:a="http://schemas.openxmlformats.org/drawingml/2006/main" xmlns:r="http://schemas.openxmlformats.org/officeDocument/2006/relationships" xmlns:p="http://schemas.openxmlformats.org/presentationml/2006/main">
   <p:cSld>
@@ -7947,13 +7514,13 @@
         </p:nvSpPr>
         <p:spPr>
           <a:xfrm>
-            <a:off x="242372" y="2639291"/>
+            <a:off x="242372" y="2389909"/>
             <a:ext cx="8658743" cy="4031673"/>
           </a:xfrm>
         </p:spPr>
         <p:txBody>
           <a:bodyPr>
-            <a:normAutofit fontScale="85000" lnSpcReduction="20000"/>
+            <a:normAutofit fontScale="92500" lnSpcReduction="20000"/>
           </a:bodyPr>
           <a:lstStyle/>
           <a:p>
@@ -7964,13 +7531,6 @@
             <a:r>
               <a:rPr lang="en-US" dirty="0"/>
               <a:t>Create a new R project a select the package template</a:t>
-            </a:r>
-          </a:p>
-          <a:p>
-            <a:pPr lvl="1"/>
-            <a:r>
-              <a:rPr lang="en-US" dirty="0"/>
-              <a:t>Include roxygen2 option</a:t>
             </a:r>
           </a:p>
           <a:p>
@@ -8074,7 +7634,7 @@
         </p:nvSpPr>
         <p:spPr>
           <a:xfrm>
-            <a:off x="242372" y="1558637"/>
+            <a:off x="242372" y="1444337"/>
             <a:ext cx="8658743" cy="1007918"/>
           </a:xfrm>
           <a:prstGeom prst="rect">
@@ -8288,7 +7848,7 @@
         </p:blipFill>
         <p:spPr>
           <a:xfrm>
-            <a:off x="7562229" y="0"/>
+            <a:off x="7338828" y="160616"/>
             <a:ext cx="1581771" cy="1825627"/>
           </a:xfrm>
           <a:prstGeom prst="rect">
@@ -10504,13 +10064,8 @@
             <a:pPr lvl="1"/>
             <a:r>
               <a:rPr lang="en-US" dirty="0"/>
-              <a:t>Helps ensure sufficiently correct </a:t>
-            </a:r>
-            <a:r>
-              <a:rPr lang="en-US" dirty="0" err="1"/>
-              <a:t>behaviour</a:t>
-            </a:r>
-            <a:endParaRPr lang="en-US" dirty="0"/>
+              <a:t>Helps ensure sufficiently correct behaviour</a:t>
+            </a:r>
           </a:p>
           <a:p>
             <a:pPr lvl="1"/>
@@ -10562,7 +10117,7 @@
         </p:blipFill>
         <p:spPr>
           <a:xfrm>
-            <a:off x="7211291" y="4465493"/>
+            <a:off x="7338580" y="4605771"/>
             <a:ext cx="1805420" cy="1805420"/>
           </a:xfrm>
           <a:prstGeom prst="rect">
@@ -10634,7 +10189,7 @@
           <a:p>
             <a:r>
               <a:rPr lang="en-US" dirty="0"/>
-              <a:t>2. Git Refresher</a:t>
+              <a:t>0. Git Refresher</a:t>
             </a:r>
           </a:p>
         </p:txBody>
@@ -10976,8 +10531,8 @@
         </p:blipFill>
         <p:spPr>
           <a:xfrm>
-            <a:off x="3135303" y="4707082"/>
-            <a:ext cx="2652432" cy="2049607"/>
+            <a:off x="3283221" y="4821382"/>
+            <a:ext cx="2504514" cy="1935307"/>
           </a:xfrm>
           <a:prstGeom prst="rect">
             <a:avLst/>
@@ -19799,7 +19354,7 @@
           <a:p>
             <a:r>
               <a:rPr lang="en-US" dirty="0"/>
-              <a:t>3. GitHub Actions</a:t>
+              <a:t>2. GitHub Actions</a:t>
             </a:r>
           </a:p>
         </p:txBody>
@@ -20892,15 +20447,7 @@
           <a:p>
             <a:r>
               <a:rPr lang="en-CA" dirty="0"/>
-              <a:t>In your own fork of the </a:t>
-            </a:r>
-            <a:r>
-              <a:rPr lang="en-CA" dirty="0" err="1"/>
-              <a:t>github</a:t>
-            </a:r>
-            <a:r>
-              <a:rPr lang="en-CA" dirty="0"/>
-              <a:t> repository, make a change to files in the 3_Actions_Package folder</a:t>
+              <a:t>In your own fork of the GitHub repository, make a change to files in the 3_Actions_Package folder</a:t>
             </a:r>
           </a:p>
           <a:p>
@@ -21913,14 +21460,14 @@
             <a:pPr lvl="1"/>
             <a:r>
               <a:rPr lang="en-US" dirty="0"/>
+              <a:t>Handling Issues &amp; Pull requests</a:t>
+            </a:r>
+          </a:p>
+          <a:p>
+            <a:pPr lvl="1"/>
+            <a:r>
+              <a:rPr lang="en-US" dirty="0"/>
               <a:t>Installation &amp; Testing workflow</a:t>
-            </a:r>
-          </a:p>
-          <a:p>
-            <a:pPr lvl="1"/>
-            <a:r>
-              <a:rPr lang="en-US" dirty="0"/>
-              <a:t>Handling Issues &amp; Pull requests</a:t>
             </a:r>
           </a:p>
         </p:txBody>
@@ -22404,7 +21951,7 @@
           <p:cNvPr id="2" name="Title 1">
             <a:extLst>
               <a:ext uri="{FF2B5EF4-FFF2-40B4-BE49-F238E27FC236}">
-                <a16:creationId xmlns:a16="http://schemas.microsoft.com/office/drawing/2014/main" id="{931D2992-2D2C-03B2-20A7-FA3CFD5F72E8}"/>
+                <a16:creationId xmlns:a16="http://schemas.microsoft.com/office/drawing/2014/main" id="{98205D2F-58F2-9087-C234-C1A51D2DE352}"/>
               </a:ext>
             </a:extLst>
           </p:cNvPr>
@@ -22422,7 +21969,15 @@
           <a:p>
             <a:r>
               <a:rPr lang="en-CA" dirty="0"/>
-              <a:t>Why bother with packages?</a:t>
+              <a:t>Today’s Example: </a:t>
+            </a:r>
+            <a:r>
+              <a:rPr lang="en-CA" dirty="0" err="1"/>
+              <a:t>bioNMF</a:t>
+            </a:r>
+            <a:r>
+              <a:rPr lang="en-CA" dirty="0"/>
+              <a:t> Package</a:t>
             </a:r>
           </a:p>
         </p:txBody>
@@ -22432,7 +21987,7 @@
           <p:cNvPr id="3" name="Content Placeholder 2">
             <a:extLst>
               <a:ext uri="{FF2B5EF4-FFF2-40B4-BE49-F238E27FC236}">
-                <a16:creationId xmlns:a16="http://schemas.microsoft.com/office/drawing/2014/main" id="{F9D67DD5-AD34-86CF-5CE0-F971881A1045}"/>
+                <a16:creationId xmlns:a16="http://schemas.microsoft.com/office/drawing/2014/main" id="{E5040FA8-5BD8-7184-15EB-808A3AE6A056}"/>
               </a:ext>
             </a:extLst>
           </p:cNvPr>
@@ -22445,84 +22000,162 @@
         </p:nvSpPr>
         <p:spPr/>
         <p:txBody>
-          <a:bodyPr>
-            <a:normAutofit lnSpcReduction="10000"/>
-          </a:bodyPr>
+          <a:bodyPr/>
           <a:lstStyle/>
           <a:p>
             <a:r>
               <a:rPr lang="en-CA" dirty="0"/>
-              <a:t>“Works on my machine”</a:t>
-            </a:r>
-          </a:p>
-          <a:p>
-            <a:pPr lvl="1"/>
+              <a:t>We will be working on a </a:t>
+            </a:r>
+            <a:r>
+              <a:rPr lang="en-CA" b="1" dirty="0"/>
+              <a:t>non-negative matrix factorization (NMF)</a:t>
+            </a:r>
             <a:r>
               <a:rPr lang="en-CA" dirty="0"/>
-              <a:t>What about other users?</a:t>
-            </a:r>
-          </a:p>
-          <a:p>
-            <a:pPr lvl="1"/>
+              <a:t> package</a:t>
+            </a:r>
+          </a:p>
+          <a:p>
+            <a:r>
+              <a:rPr lang="en-CA" dirty="0"/>
+              <a:t>NMF decomposes data into </a:t>
+            </a:r>
+            <a:r>
+              <a:rPr lang="en-CA" b="1" dirty="0"/>
+              <a:t>clusters </a:t>
+            </a:r>
+            <a:r>
+              <a:rPr lang="en-CA" dirty="0"/>
+              <a:t>(r dimension)</a:t>
+            </a:r>
+          </a:p>
+          <a:p>
+            <a:r>
+              <a:rPr lang="en-CA" dirty="0"/>
+              <a:t>Common for count data (gene expression)</a:t>
+            </a:r>
+          </a:p>
+          <a:p>
             <a:endParaRPr lang="en-CA" dirty="0"/>
           </a:p>
           <a:p>
             <a:r>
               <a:rPr lang="en-CA" dirty="0"/>
-              <a:t>“Using different scripts with source() is enough”</a:t>
-            </a:r>
-          </a:p>
-          <a:p>
-            <a:pPr lvl="1"/>
+              <a:t>Samples (patients) – n</a:t>
+            </a:r>
+          </a:p>
+          <a:p>
             <a:r>
               <a:rPr lang="en-CA" dirty="0"/>
-              <a:t>How do you handle file paths in different projects?</a:t>
-            </a:r>
-          </a:p>
-          <a:p>
-            <a:pPr lvl="1"/>
+              <a:t>Features (genes) – p</a:t>
+            </a:r>
+          </a:p>
+          <a:p>
+            <a:r>
+              <a:rPr lang="en-CA" dirty="0"/>
+              <a:t>Clusters (programs) – r</a:t>
+            </a:r>
+          </a:p>
+          <a:p>
             <a:endParaRPr lang="en-CA" dirty="0"/>
           </a:p>
-          <a:p>
-            <a:r>
-              <a:rPr lang="en-CA" dirty="0"/>
-              <a:t>“I already have all the packages installed”</a:t>
-            </a:r>
-          </a:p>
-          <a:p>
-            <a:pPr lvl="1"/>
-            <a:r>
-              <a:rPr lang="en-CA" dirty="0"/>
-              <a:t>Can you ensure reproducibility?</a:t>
-            </a:r>
-          </a:p>
-          <a:p>
-            <a:pPr lvl="1"/>
-            <a:endParaRPr lang="en-CA" dirty="0"/>
-          </a:p>
-          <a:p>
-            <a:r>
-              <a:rPr lang="en-CA" dirty="0"/>
-              <a:t>“I still have features to add”</a:t>
-            </a:r>
-          </a:p>
-          <a:p>
-            <a:pPr lvl="1"/>
-            <a:r>
-              <a:rPr lang="en-CA" dirty="0"/>
-              <a:t>What if the code breaks? Will you know if it does?</a:t>
-            </a:r>
-          </a:p>
-          <a:p>
-            <a:pPr lvl="1"/>
-            <a:endParaRPr lang="en-CA" dirty="0"/>
-          </a:p>
-        </p:txBody>
-      </p:sp>
+        </p:txBody>
+      </p:sp>
+      <p:grpSp>
+        <p:nvGrpSpPr>
+          <p:cNvPr id="6" name="Group 5">
+            <a:extLst>
+              <a:ext uri="{FF2B5EF4-FFF2-40B4-BE49-F238E27FC236}">
+                <a16:creationId xmlns:a16="http://schemas.microsoft.com/office/drawing/2014/main" id="{55CF7EE0-9283-0D3D-0FF8-DB1D3BE0E505}"/>
+              </a:ext>
+            </a:extLst>
+          </p:cNvPr>
+          <p:cNvGrpSpPr/>
+          <p:nvPr/>
+        </p:nvGrpSpPr>
+        <p:grpSpPr>
+          <a:xfrm>
+            <a:off x="4416137" y="3844636"/>
+            <a:ext cx="4613564" cy="3013364"/>
+            <a:chOff x="824012" y="3674928"/>
+            <a:chExt cx="3935816" cy="2214411"/>
+          </a:xfrm>
+        </p:grpSpPr>
+        <p:pic>
+          <p:nvPicPr>
+            <p:cNvPr id="4" name="Picture 3" descr="Non-negative Matrix Factorization (Part 1): Understanding Its Importance  and Applications">
+              <a:extLst>
+                <a:ext uri="{FF2B5EF4-FFF2-40B4-BE49-F238E27FC236}">
+                  <a16:creationId xmlns:a16="http://schemas.microsoft.com/office/drawing/2014/main" id="{4A89B8C9-C236-A3EB-95C8-643E9A3C5CF1}"/>
+                </a:ext>
+              </a:extLst>
+            </p:cNvPr>
+            <p:cNvPicPr>
+              <a:picLocks noChangeAspect="1"/>
+            </p:cNvPicPr>
+            <p:nvPr/>
+          </p:nvPicPr>
+          <p:blipFill>
+            <a:blip r:embed="rId2"/>
+            <a:srcRect l="4525" r="4304"/>
+            <a:stretch>
+              <a:fillRect/>
+            </a:stretch>
+          </p:blipFill>
+          <p:spPr>
+            <a:xfrm>
+              <a:off x="824012" y="3674928"/>
+              <a:ext cx="3935816" cy="1782172"/>
+            </a:xfrm>
+            <a:prstGeom prst="rect">
+              <a:avLst/>
+            </a:prstGeom>
+          </p:spPr>
+        </p:pic>
+        <p:sp>
+          <p:nvSpPr>
+            <p:cNvPr id="5" name="TextBox 4">
+              <a:extLst>
+                <a:ext uri="{FF2B5EF4-FFF2-40B4-BE49-F238E27FC236}">
+                  <a16:creationId xmlns:a16="http://schemas.microsoft.com/office/drawing/2014/main" id="{EBB307C6-CD8E-A0BE-F92E-FBFC0373D618}"/>
+                </a:ext>
+              </a:extLst>
+            </p:cNvPr>
+            <p:cNvSpPr txBox="1"/>
+            <p:nvPr/>
+          </p:nvSpPr>
+          <p:spPr>
+            <a:xfrm>
+              <a:off x="2371518" y="5519879"/>
+              <a:ext cx="831272" cy="369460"/>
+            </a:xfrm>
+            <a:prstGeom prst="rect">
+              <a:avLst/>
+            </a:prstGeom>
+            <a:noFill/>
+          </p:spPr>
+          <p:txBody>
+            <a:bodyPr wrap="square" rtlCol="0">
+              <a:spAutoFit/>
+            </a:bodyPr>
+            <a:lstStyle/>
+            <a:p>
+              <a:r>
+                <a:rPr lang="en-CA" dirty="0">
+                  <a:hlinkClick r:id="rId3"/>
+                </a:rPr>
+                <a:t>Source</a:t>
+              </a:r>
+              <a:endParaRPr lang="en-CA" dirty="0"/>
+            </a:p>
+          </p:txBody>
+        </p:sp>
+      </p:grpSp>
     </p:spTree>
     <p:extLst>
       <p:ext uri="{BB962C8B-B14F-4D97-AF65-F5344CB8AC3E}">
-        <p14:creationId xmlns:p14="http://schemas.microsoft.com/office/powerpoint/2010/main" val="3567545301"/>
+        <p14:creationId xmlns:p14="http://schemas.microsoft.com/office/powerpoint/2010/main" val="998501193"/>
       </p:ext>
     </p:extLst>
   </p:cSld>

--- a/Slides/RPackageDevelopment_Slides.pptx
+++ b/Slides/RPackageDevelopment_Slides.pptx
@@ -5,7 +5,7 @@
     <p:sldMasterId id="2147483660" r:id="rId1"/>
   </p:sldMasterIdLst>
   <p:notesMasterIdLst>
-    <p:notesMasterId r:id="rId52"/>
+    <p:notesMasterId r:id="rId53"/>
   </p:notesMasterIdLst>
   <p:sldIdLst>
     <p:sldId id="256" r:id="rId2"/>
@@ -18,8 +18,8 @@
     <p:sldId id="323" r:id="rId9"/>
     <p:sldId id="428" r:id="rId10"/>
     <p:sldId id="429" r:id="rId11"/>
-    <p:sldId id="450" r:id="rId12"/>
-    <p:sldId id="437" r:id="rId13"/>
+    <p:sldId id="437" r:id="rId12"/>
+    <p:sldId id="450" r:id="rId13"/>
     <p:sldId id="406" r:id="rId14"/>
     <p:sldId id="407" r:id="rId15"/>
     <p:sldId id="445" r:id="rId16"/>
@@ -54,10 +54,11 @@
     <p:sldId id="443" r:id="rId45"/>
     <p:sldId id="331" r:id="rId46"/>
     <p:sldId id="444" r:id="rId47"/>
-    <p:sldId id="433" r:id="rId48"/>
-    <p:sldId id="435" r:id="rId49"/>
-    <p:sldId id="411" r:id="rId50"/>
-    <p:sldId id="260" r:id="rId51"/>
+    <p:sldId id="451" r:id="rId48"/>
+    <p:sldId id="433" r:id="rId49"/>
+    <p:sldId id="435" r:id="rId50"/>
+    <p:sldId id="411" r:id="rId51"/>
+    <p:sldId id="260" r:id="rId52"/>
   </p:sldIdLst>
   <p:sldSz cx="9144000" cy="6858000" type="screen4x3"/>
   <p:notesSz cx="6858000" cy="9144000"/>
@@ -167,7 +168,7 @@
 <file path=ppt/revisionInfo.xml><?xml version="1.0" encoding="utf-8"?>
 <p1510:revInfo xmlns:a="http://schemas.openxmlformats.org/drawingml/2006/main" xmlns:r="http://schemas.openxmlformats.org/officeDocument/2006/relationships" xmlns:p1510="http://schemas.microsoft.com/office/powerpoint/2015/10/main">
   <p1510:revLst>
-    <p1510:client id="{7B91186F-AFD7-4556-9E93-756AA89B05D5}" v="65" dt="2026-08-14T14:52:08.480"/>
+    <p1510:client id="{7B91186F-AFD7-4556-9E93-756AA89B05D5}" v="2" dt="2026-08-18T13:19:47.145"/>
   </p1510:revLst>
 </p1510:revInfo>
 </file>
@@ -181,313 +182,61 @@
       <pc:docMkLst>
         <pc:docMk/>
       </pc:docMkLst>
-      <pc:sldChg chg="modSp add mod ord">
-        <pc:chgData name="Adrien Osakwe" userId="7a3e290c-eb83-484b-8e3d-d46ef2333477" providerId="ADAL" clId="{09ABE13D-32B9-4646-8B10-CB7999C84D02}" dt="2026-07-15T15:43:00.354" v="3307" actId="20577"/>
+    </pc:docChg>
+  </pc:docChgLst>
+  <pc:docChgLst>
+    <pc:chgData name="Adrien Osakwe" userId="7a3e290c-eb83-484b-8e3d-d46ef2333477" providerId="ADAL" clId="{516F4981-D9C8-4339-9685-B0B88EA45B28}"/>
+    <pc:docChg chg="undo custSel addSld delSld modSld sldOrd">
+      <pc:chgData name="Adrien Osakwe" userId="7a3e290c-eb83-484b-8e3d-d46ef2333477" providerId="ADAL" clId="{516F4981-D9C8-4339-9685-B0B88EA45B28}" dt="2026-08-18T14:44:11.560" v="9030"/>
+      <pc:docMkLst>
+        <pc:docMk/>
+      </pc:docMkLst>
+      <pc:sldChg chg="addSp delSp modSp mod">
+        <pc:chgData name="Adrien Osakwe" userId="7a3e290c-eb83-484b-8e3d-d46ef2333477" providerId="ADAL" clId="{516F4981-D9C8-4339-9685-B0B88EA45B28}" dt="2026-08-18T13:19:47.896" v="8513"/>
+        <pc:sldMkLst>
+          <pc:docMk/>
+          <pc:sldMk cId="3959237559" sldId="256"/>
+        </pc:sldMkLst>
+        <pc:spChg chg="add del mod">
+          <ac:chgData name="Adrien Osakwe" userId="7a3e290c-eb83-484b-8e3d-d46ef2333477" providerId="ADAL" clId="{516F4981-D9C8-4339-9685-B0B88EA45B28}" dt="2026-08-18T13:19:46.175" v="8510"/>
+          <ac:spMkLst>
+            <pc:docMk/>
+            <pc:sldMk cId="3959237559" sldId="256"/>
+            <ac:spMk id="5" creationId="{557AB8B0-BF59-1ADD-6AD2-DF60E60E1806}"/>
+          </ac:spMkLst>
+        </pc:spChg>
+        <pc:spChg chg="add del mod">
+          <ac:chgData name="Adrien Osakwe" userId="7a3e290c-eb83-484b-8e3d-d46ef2333477" providerId="ADAL" clId="{516F4981-D9C8-4339-9685-B0B88EA45B28}" dt="2026-08-18T13:19:47.896" v="8513"/>
+          <ac:spMkLst>
+            <pc:docMk/>
+            <pc:sldMk cId="3959237559" sldId="256"/>
+            <ac:spMk id="6" creationId="{27DB3380-7E41-3317-83D2-EBBB17A46FCA}"/>
+          </ac:spMkLst>
+        </pc:spChg>
+      </pc:sldChg>
+      <pc:sldChg chg="modSp mod">
+        <pc:chgData name="Adrien Osakwe" userId="7a3e290c-eb83-484b-8e3d-d46ef2333477" providerId="ADAL" clId="{516F4981-D9C8-4339-9685-B0B88EA45B28}" dt="2026-08-18T13:19:32.236" v="8507" actId="1076"/>
         <pc:sldMkLst>
           <pc:docMk/>
           <pc:sldMk cId="597855376" sldId="259"/>
         </pc:sldMkLst>
         <pc:spChg chg="mod">
-          <ac:chgData name="Adrien Osakwe" userId="7a3e290c-eb83-484b-8e3d-d46ef2333477" providerId="ADAL" clId="{09ABE13D-32B9-4646-8B10-CB7999C84D02}" dt="2026-07-15T15:43:00.354" v="3307" actId="20577"/>
+          <ac:chgData name="Adrien Osakwe" userId="7a3e290c-eb83-484b-8e3d-d46ef2333477" providerId="ADAL" clId="{516F4981-D9C8-4339-9685-B0B88EA45B28}" dt="2026-08-18T13:19:32.236" v="8507" actId="1076"/>
           <ac:spMkLst>
             <pc:docMk/>
             <pc:sldMk cId="597855376" sldId="259"/>
             <ac:spMk id="2" creationId="{10C0557F-5508-20BC-7CF6-DF79F9930C8B}"/>
           </ac:spMkLst>
         </pc:spChg>
-      </pc:sldChg>
-      <pc:sldChg chg="modSp add mod ord">
-        <pc:chgData name="Adrien Osakwe" userId="7a3e290c-eb83-484b-8e3d-d46ef2333477" providerId="ADAL" clId="{09ABE13D-32B9-4646-8B10-CB7999C84D02}" dt="2026-07-15T18:05:22.921" v="3312" actId="20577"/>
-        <pc:sldMkLst>
-          <pc:docMk/>
-          <pc:sldMk cId="4072911522" sldId="318"/>
-        </pc:sldMkLst>
         <pc:spChg chg="mod">
-          <ac:chgData name="Adrien Osakwe" userId="7a3e290c-eb83-484b-8e3d-d46ef2333477" providerId="ADAL" clId="{09ABE13D-32B9-4646-8B10-CB7999C84D02}" dt="2026-07-15T18:05:22.921" v="3312" actId="20577"/>
+          <ac:chgData name="Adrien Osakwe" userId="7a3e290c-eb83-484b-8e3d-d46ef2333477" providerId="ADAL" clId="{516F4981-D9C8-4339-9685-B0B88EA45B28}" dt="2026-08-18T13:19:22.640" v="8506" actId="6549"/>
           <ac:spMkLst>
             <pc:docMk/>
-            <pc:sldMk cId="4072911522" sldId="318"/>
-            <ac:spMk id="2" creationId="{2B830F0B-3D18-9732-3108-323F8DEEBA14}"/>
+            <pc:sldMk cId="597855376" sldId="259"/>
+            <ac:spMk id="3" creationId="{0FB63238-044F-8105-921A-4FF9DAABC623}"/>
           </ac:spMkLst>
         </pc:spChg>
       </pc:sldChg>
-      <pc:sldChg chg="addSp delSp modSp new mod">
-        <pc:chgData name="Adrien Osakwe" userId="7a3e290c-eb83-484b-8e3d-d46ef2333477" providerId="ADAL" clId="{09ABE13D-32B9-4646-8B10-CB7999C84D02}" dt="2026-07-15T15:46:41.284" v="3310" actId="14100"/>
-        <pc:sldMkLst>
-          <pc:docMk/>
-          <pc:sldMk cId="3587535936" sldId="320"/>
-        </pc:sldMkLst>
-        <pc:picChg chg="add mod">
-          <ac:chgData name="Adrien Osakwe" userId="7a3e290c-eb83-484b-8e3d-d46ef2333477" providerId="ADAL" clId="{09ABE13D-32B9-4646-8B10-CB7999C84D02}" dt="2026-07-15T15:46:41.284" v="3310" actId="14100"/>
-          <ac:picMkLst>
-            <pc:docMk/>
-            <pc:sldMk cId="3587535936" sldId="320"/>
-            <ac:picMk id="2" creationId="{2B557A83-72AC-9342-6D18-444AE41A1DB0}"/>
-          </ac:picMkLst>
-        </pc:picChg>
-      </pc:sldChg>
-      <pc:sldChg chg="modSp new mod">
-        <pc:chgData name="Adrien Osakwe" userId="7a3e290c-eb83-484b-8e3d-d46ef2333477" providerId="ADAL" clId="{09ABE13D-32B9-4646-8B10-CB7999C84D02}" dt="2026-07-15T14:51:10.692" v="1997" actId="20577"/>
-        <pc:sldMkLst>
-          <pc:docMk/>
-          <pc:sldMk cId="775350422" sldId="327"/>
-        </pc:sldMkLst>
-        <pc:spChg chg="mod">
-          <ac:chgData name="Adrien Osakwe" userId="7a3e290c-eb83-484b-8e3d-d46ef2333477" providerId="ADAL" clId="{09ABE13D-32B9-4646-8B10-CB7999C84D02}" dt="2026-07-15T14:51:10.692" v="1997" actId="20577"/>
-          <ac:spMkLst>
-            <pc:docMk/>
-            <pc:sldMk cId="775350422" sldId="327"/>
-            <ac:spMk id="3" creationId="{84AF7830-BAE2-3180-F8C1-9C534AA700C8}"/>
-          </ac:spMkLst>
-        </pc:spChg>
-      </pc:sldChg>
-      <pc:sldChg chg="addSp modSp new mod">
-        <pc:chgData name="Adrien Osakwe" userId="7a3e290c-eb83-484b-8e3d-d46ef2333477" providerId="ADAL" clId="{09ABE13D-32B9-4646-8B10-CB7999C84D02}" dt="2026-07-15T15:30:10.952" v="2730" actId="1037"/>
-        <pc:sldMkLst>
-          <pc:docMk/>
-          <pc:sldMk cId="393444062" sldId="329"/>
-        </pc:sldMkLst>
-        <pc:spChg chg="mod">
-          <ac:chgData name="Adrien Osakwe" userId="7a3e290c-eb83-484b-8e3d-d46ef2333477" providerId="ADAL" clId="{09ABE13D-32B9-4646-8B10-CB7999C84D02}" dt="2026-07-15T15:29:43.647" v="2719" actId="14100"/>
-          <ac:spMkLst>
-            <pc:docMk/>
-            <pc:sldMk cId="393444062" sldId="329"/>
-            <ac:spMk id="3" creationId="{7A8B01C4-F07D-5AFC-E80E-CFFC6E8449AA}"/>
-          </ac:spMkLst>
-        </pc:spChg>
-        <pc:picChg chg="add mod">
-          <ac:chgData name="Adrien Osakwe" userId="7a3e290c-eb83-484b-8e3d-d46ef2333477" providerId="ADAL" clId="{09ABE13D-32B9-4646-8B10-CB7999C84D02}" dt="2026-07-15T15:30:10.952" v="2730" actId="1037"/>
-          <ac:picMkLst>
-            <pc:docMk/>
-            <pc:sldMk cId="393444062" sldId="329"/>
-            <ac:picMk id="3074" creationId="{1BF0D96D-2C04-31BD-E443-6DBBF624B2A9}"/>
-          </ac:picMkLst>
-        </pc:picChg>
-      </pc:sldChg>
-      <pc:sldChg chg="modSp new mod">
-        <pc:chgData name="Adrien Osakwe" userId="7a3e290c-eb83-484b-8e3d-d46ef2333477" providerId="ADAL" clId="{09ABE13D-32B9-4646-8B10-CB7999C84D02}" dt="2026-07-15T15:34:33.295" v="3154" actId="5793"/>
-        <pc:sldMkLst>
-          <pc:docMk/>
-          <pc:sldMk cId="3227588993" sldId="330"/>
-        </pc:sldMkLst>
-        <pc:spChg chg="mod">
-          <ac:chgData name="Adrien Osakwe" userId="7a3e290c-eb83-484b-8e3d-d46ef2333477" providerId="ADAL" clId="{09ABE13D-32B9-4646-8B10-CB7999C84D02}" dt="2026-07-15T15:34:33.295" v="3154" actId="5793"/>
-          <ac:spMkLst>
-            <pc:docMk/>
-            <pc:sldMk cId="3227588993" sldId="330"/>
-            <ac:spMk id="3" creationId="{7DCCE7DF-BA51-40A0-87CD-24710734241B}"/>
-          </ac:spMkLst>
-        </pc:spChg>
-      </pc:sldChg>
-      <pc:sldChg chg="modSp new mod">
-        <pc:chgData name="Adrien Osakwe" userId="7a3e290c-eb83-484b-8e3d-d46ef2333477" providerId="ADAL" clId="{09ABE13D-32B9-4646-8B10-CB7999C84D02}" dt="2026-07-15T15:31:46.805" v="3059" actId="20577"/>
-        <pc:sldMkLst>
-          <pc:docMk/>
-          <pc:sldMk cId="3482164999" sldId="331"/>
-        </pc:sldMkLst>
-        <pc:spChg chg="mod">
-          <ac:chgData name="Adrien Osakwe" userId="7a3e290c-eb83-484b-8e3d-d46ef2333477" providerId="ADAL" clId="{09ABE13D-32B9-4646-8B10-CB7999C84D02}" dt="2026-07-15T15:31:46.805" v="3059" actId="20577"/>
-          <ac:spMkLst>
-            <pc:docMk/>
-            <pc:sldMk cId="3482164999" sldId="331"/>
-            <ac:spMk id="3" creationId="{EDBEC63F-928F-16B3-F9AA-1A86345569A5}"/>
-          </ac:spMkLst>
-        </pc:spChg>
-      </pc:sldChg>
-      <pc:sldChg chg="addSp delSp modSp new mod modClrScheme chgLayout">
-        <pc:chgData name="Adrien Osakwe" userId="7a3e290c-eb83-484b-8e3d-d46ef2333477" providerId="ADAL" clId="{09ABE13D-32B9-4646-8B10-CB7999C84D02}" dt="2026-07-15T15:39:56.190" v="3285" actId="1037"/>
-        <pc:sldMkLst>
-          <pc:docMk/>
-          <pc:sldMk cId="4107645974" sldId="406"/>
-        </pc:sldMkLst>
-        <pc:spChg chg="mod">
-          <ac:chgData name="Adrien Osakwe" userId="7a3e290c-eb83-484b-8e3d-d46ef2333477" providerId="ADAL" clId="{09ABE13D-32B9-4646-8B10-CB7999C84D02}" dt="2026-07-15T15:26:03.463" v="2536" actId="26606"/>
-          <ac:spMkLst>
-            <pc:docMk/>
-            <pc:sldMk cId="4107645974" sldId="406"/>
-            <ac:spMk id="2" creationId="{22643326-375A-A79A-4BC9-E08429337A85}"/>
-          </ac:spMkLst>
-        </pc:spChg>
-        <pc:spChg chg="add del">
-          <ac:chgData name="Adrien Osakwe" userId="7a3e290c-eb83-484b-8e3d-d46ef2333477" providerId="ADAL" clId="{09ABE13D-32B9-4646-8B10-CB7999C84D02}" dt="2026-07-15T15:26:03.463" v="2536" actId="26606"/>
-          <ac:spMkLst>
-            <pc:docMk/>
-            <pc:sldMk cId="4107645974" sldId="406"/>
-            <ac:spMk id="3" creationId="{ACB875C8-BD73-F266-4045-06FC436A35AA}"/>
-          </ac:spMkLst>
-        </pc:spChg>
-        <pc:picChg chg="add mod">
-          <ac:chgData name="Adrien Osakwe" userId="7a3e290c-eb83-484b-8e3d-d46ef2333477" providerId="ADAL" clId="{09ABE13D-32B9-4646-8B10-CB7999C84D02}" dt="2026-07-15T15:39:56.190" v="3285" actId="1037"/>
-          <ac:picMkLst>
-            <pc:docMk/>
-            <pc:sldMk cId="4107645974" sldId="406"/>
-            <ac:picMk id="1028" creationId="{C0119C7F-7394-3714-73BC-BFB0C9254886}"/>
-          </ac:picMkLst>
-        </pc:picChg>
-      </pc:sldChg>
-      <pc:sldChg chg="addSp delSp modSp new mod">
-        <pc:chgData name="Adrien Osakwe" userId="7a3e290c-eb83-484b-8e3d-d46ef2333477" providerId="ADAL" clId="{09ABE13D-32B9-4646-8B10-CB7999C84D02}" dt="2026-07-15T15:27:34.088" v="2550" actId="1076"/>
-        <pc:sldMkLst>
-          <pc:docMk/>
-          <pc:sldMk cId="159122328" sldId="407"/>
-        </pc:sldMkLst>
-        <pc:spChg chg="mod">
-          <ac:chgData name="Adrien Osakwe" userId="7a3e290c-eb83-484b-8e3d-d46ef2333477" providerId="ADAL" clId="{09ABE13D-32B9-4646-8B10-CB7999C84D02}" dt="2026-07-15T14:44:40.199" v="1647" actId="20577"/>
-          <ac:spMkLst>
-            <pc:docMk/>
-            <pc:sldMk cId="159122328" sldId="407"/>
-            <ac:spMk id="2" creationId="{FB0A71D6-6839-5BF1-8658-F5434E944637}"/>
-          </ac:spMkLst>
-        </pc:spChg>
-        <pc:picChg chg="add mod">
-          <ac:chgData name="Adrien Osakwe" userId="7a3e290c-eb83-484b-8e3d-d46ef2333477" providerId="ADAL" clId="{09ABE13D-32B9-4646-8B10-CB7999C84D02}" dt="2026-07-15T15:27:34.088" v="2550" actId="1076"/>
-          <ac:picMkLst>
-            <pc:docMk/>
-            <pc:sldMk cId="159122328" sldId="407"/>
-            <ac:picMk id="2050" creationId="{9CF5CCEC-6197-2DAD-9421-BAA0EB1C11E7}"/>
-          </ac:picMkLst>
-        </pc:picChg>
-      </pc:sldChg>
-      <pc:sldChg chg="modSp new mod">
-        <pc:chgData name="Adrien Osakwe" userId="7a3e290c-eb83-484b-8e3d-d46ef2333477" providerId="ADAL" clId="{09ABE13D-32B9-4646-8B10-CB7999C84D02}" dt="2026-07-15T14:45:04.695" v="1693" actId="20577"/>
-        <pc:sldMkLst>
-          <pc:docMk/>
-          <pc:sldMk cId="604635962" sldId="409"/>
-        </pc:sldMkLst>
-        <pc:spChg chg="mod">
-          <ac:chgData name="Adrien Osakwe" userId="7a3e290c-eb83-484b-8e3d-d46ef2333477" providerId="ADAL" clId="{09ABE13D-32B9-4646-8B10-CB7999C84D02}" dt="2026-07-15T14:45:04.695" v="1693" actId="20577"/>
-          <ac:spMkLst>
-            <pc:docMk/>
-            <pc:sldMk cId="604635962" sldId="409"/>
-            <ac:spMk id="2" creationId="{87B2031C-7CAB-319D-E348-1DE323D36DC9}"/>
-          </ac:spMkLst>
-        </pc:spChg>
-      </pc:sldChg>
-      <pc:sldChg chg="modSp new mod">
-        <pc:chgData name="Adrien Osakwe" userId="7a3e290c-eb83-484b-8e3d-d46ef2333477" providerId="ADAL" clId="{09ABE13D-32B9-4646-8B10-CB7999C84D02}" dt="2026-07-15T15:03:59.144" v="2526" actId="20577"/>
-        <pc:sldMkLst>
-          <pc:docMk/>
-          <pc:sldMk cId="981103045" sldId="410"/>
-        </pc:sldMkLst>
-        <pc:spChg chg="mod">
-          <ac:chgData name="Adrien Osakwe" userId="7a3e290c-eb83-484b-8e3d-d46ef2333477" providerId="ADAL" clId="{09ABE13D-32B9-4646-8B10-CB7999C84D02}" dt="2026-07-15T14:45:09.510" v="1707" actId="20577"/>
-          <ac:spMkLst>
-            <pc:docMk/>
-            <pc:sldMk cId="981103045" sldId="410"/>
-            <ac:spMk id="2" creationId="{0E3F8D0A-0BEA-604C-3AAC-1AB4A8B4EBF5}"/>
-          </ac:spMkLst>
-        </pc:spChg>
-        <pc:spChg chg="mod">
-          <ac:chgData name="Adrien Osakwe" userId="7a3e290c-eb83-484b-8e3d-d46ef2333477" providerId="ADAL" clId="{09ABE13D-32B9-4646-8B10-CB7999C84D02}" dt="2026-07-15T15:03:59.144" v="2526" actId="20577"/>
-          <ac:spMkLst>
-            <pc:docMk/>
-            <pc:sldMk cId="981103045" sldId="410"/>
-            <ac:spMk id="3" creationId="{311A497D-7B3A-420F-9347-CF4D7D0528AA}"/>
-          </ac:spMkLst>
-        </pc:spChg>
-      </pc:sldChg>
-      <pc:sldChg chg="addSp modSp new mod">
-        <pc:chgData name="Adrien Osakwe" userId="7a3e290c-eb83-484b-8e3d-d46ef2333477" providerId="ADAL" clId="{09ABE13D-32B9-4646-8B10-CB7999C84D02}" dt="2026-07-15T15:34:01.976" v="3152" actId="1076"/>
-        <pc:sldMkLst>
-          <pc:docMk/>
-          <pc:sldMk cId="2803926213" sldId="411"/>
-        </pc:sldMkLst>
-        <pc:spChg chg="mod">
-          <ac:chgData name="Adrien Osakwe" userId="7a3e290c-eb83-484b-8e3d-d46ef2333477" providerId="ADAL" clId="{09ABE13D-32B9-4646-8B10-CB7999C84D02}" dt="2026-07-15T14:58:35.748" v="2017" actId="1076"/>
-          <ac:spMkLst>
-            <pc:docMk/>
-            <pc:sldMk cId="2803926213" sldId="411"/>
-            <ac:spMk id="2" creationId="{AD828D01-6295-9CD0-A2A8-D520CA4A343F}"/>
-          </ac:spMkLst>
-        </pc:spChg>
-        <pc:spChg chg="add mod">
-          <ac:chgData name="Adrien Osakwe" userId="7a3e290c-eb83-484b-8e3d-d46ef2333477" providerId="ADAL" clId="{09ABE13D-32B9-4646-8B10-CB7999C84D02}" dt="2026-07-15T15:33:13.462" v="3127" actId="1076"/>
-          <ac:spMkLst>
-            <pc:docMk/>
-            <pc:sldMk cId="2803926213" sldId="411"/>
-            <ac:spMk id="5" creationId="{1186AD2E-30E2-4066-0067-9E12E0C232DB}"/>
-          </ac:spMkLst>
-        </pc:spChg>
-        <pc:spChg chg="add mod">
-          <ac:chgData name="Adrien Osakwe" userId="7a3e290c-eb83-484b-8e3d-d46ef2333477" providerId="ADAL" clId="{09ABE13D-32B9-4646-8B10-CB7999C84D02}" dt="2026-07-15T15:34:01.976" v="3152" actId="1076"/>
-          <ac:spMkLst>
-            <pc:docMk/>
-            <pc:sldMk cId="2803926213" sldId="411"/>
-            <ac:spMk id="7" creationId="{D2045168-AFC9-111D-EFD6-E702AAED7BC9}"/>
-          </ac:spMkLst>
-        </pc:spChg>
-        <pc:picChg chg="add mod">
-          <ac:chgData name="Adrien Osakwe" userId="7a3e290c-eb83-484b-8e3d-d46ef2333477" providerId="ADAL" clId="{09ABE13D-32B9-4646-8B10-CB7999C84D02}" dt="2026-07-15T14:58:38.410" v="2018" actId="1076"/>
-          <ac:picMkLst>
-            <pc:docMk/>
-            <pc:sldMk cId="2803926213" sldId="411"/>
-            <ac:picMk id="3" creationId="{D2BAEF11-DF57-F87B-0DE1-C7BE3199774C}"/>
-          </ac:picMkLst>
-        </pc:picChg>
-        <pc:picChg chg="add mod">
-          <ac:chgData name="Adrien Osakwe" userId="7a3e290c-eb83-484b-8e3d-d46ef2333477" providerId="ADAL" clId="{09ABE13D-32B9-4646-8B10-CB7999C84D02}" dt="2026-07-15T15:32:30.157" v="3064" actId="1076"/>
-          <ac:picMkLst>
-            <pc:docMk/>
-            <pc:sldMk cId="2803926213" sldId="411"/>
-            <ac:picMk id="4" creationId="{0A32D887-B248-C56F-D4CD-C76954C2A5EA}"/>
-          </ac:picMkLst>
-        </pc:picChg>
-        <pc:picChg chg="add mod">
-          <ac:chgData name="Adrien Osakwe" userId="7a3e290c-eb83-484b-8e3d-d46ef2333477" providerId="ADAL" clId="{09ABE13D-32B9-4646-8B10-CB7999C84D02}" dt="2026-07-15T15:33:41.462" v="3131" actId="1076"/>
-          <ac:picMkLst>
-            <pc:docMk/>
-            <pc:sldMk cId="2803926213" sldId="411"/>
-            <ac:picMk id="6" creationId="{2CF9868A-40A2-5F1C-8D2F-7B17D97E4850}"/>
-          </ac:picMkLst>
-        </pc:picChg>
-      </pc:sldChg>
-      <pc:sldChg chg="modSp new mod">
-        <pc:chgData name="Adrien Osakwe" userId="7a3e290c-eb83-484b-8e3d-d46ef2333477" providerId="ADAL" clId="{09ABE13D-32B9-4646-8B10-CB7999C84D02}" dt="2026-07-15T15:03:43.966" v="2516" actId="14100"/>
-        <pc:sldMkLst>
-          <pc:docMk/>
-          <pc:sldMk cId="3344907461" sldId="412"/>
-        </pc:sldMkLst>
-        <pc:spChg chg="mod">
-          <ac:chgData name="Adrien Osakwe" userId="7a3e290c-eb83-484b-8e3d-d46ef2333477" providerId="ADAL" clId="{09ABE13D-32B9-4646-8B10-CB7999C84D02}" dt="2026-07-15T15:03:43.966" v="2516" actId="14100"/>
-          <ac:spMkLst>
-            <pc:docMk/>
-            <pc:sldMk cId="3344907461" sldId="412"/>
-            <ac:spMk id="2" creationId="{4B34AF01-8823-1607-7201-0F853B265FB2}"/>
-          </ac:spMkLst>
-        </pc:spChg>
-        <pc:spChg chg="mod">
-          <ac:chgData name="Adrien Osakwe" userId="7a3e290c-eb83-484b-8e3d-d46ef2333477" providerId="ADAL" clId="{09ABE13D-32B9-4646-8B10-CB7999C84D02}" dt="2026-07-15T15:03:09.550" v="2477" actId="27636"/>
-          <ac:spMkLst>
-            <pc:docMk/>
-            <pc:sldMk cId="3344907461" sldId="412"/>
-            <ac:spMk id="3" creationId="{BE993682-CC01-929C-3DB9-F1AD75588C23}"/>
-          </ac:spMkLst>
-        </pc:spChg>
-      </pc:sldChg>
-      <pc:sldChg chg="modSp new mod">
-        <pc:chgData name="Adrien Osakwe" userId="7a3e290c-eb83-484b-8e3d-d46ef2333477" providerId="ADAL" clId="{09ABE13D-32B9-4646-8B10-CB7999C84D02}" dt="2026-07-15T15:00:00.348" v="2137" actId="20577"/>
-        <pc:sldMkLst>
-          <pc:docMk/>
-          <pc:sldMk cId="37029868" sldId="413"/>
-        </pc:sldMkLst>
-        <pc:spChg chg="mod">
-          <ac:chgData name="Adrien Osakwe" userId="7a3e290c-eb83-484b-8e3d-d46ef2333477" providerId="ADAL" clId="{09ABE13D-32B9-4646-8B10-CB7999C84D02}" dt="2026-07-15T15:00:00.348" v="2137" actId="20577"/>
-          <ac:spMkLst>
-            <pc:docMk/>
-            <pc:sldMk cId="37029868" sldId="413"/>
-            <ac:spMk id="2" creationId="{95DD492F-F80E-B379-EDEF-4B91DA7FE6C1}"/>
-          </ac:spMkLst>
-        </pc:spChg>
-      </pc:sldChg>
-    </pc:docChg>
-  </pc:docChgLst>
-  <pc:docChgLst>
-    <pc:chgData name="Adrien Osakwe" userId="7a3e290c-eb83-484b-8e3d-d46ef2333477" providerId="ADAL" clId="{516F4981-D9C8-4339-9685-B0B88EA45B28}"/>
-    <pc:docChg chg="undo custSel addSld delSld modSld sldOrd">
-      <pc:chgData name="Adrien Osakwe" userId="7a3e290c-eb83-484b-8e3d-d46ef2333477" providerId="ADAL" clId="{516F4981-D9C8-4339-9685-B0B88EA45B28}" dt="2026-08-14T15:07:57.734" v="8505" actId="313"/>
-      <pc:docMkLst>
-        <pc:docMk/>
-      </pc:docMkLst>
       <pc:sldChg chg="addSp delSp modSp mod">
         <pc:chgData name="Adrien Osakwe" userId="7a3e290c-eb83-484b-8e3d-d46ef2333477" providerId="ADAL" clId="{516F4981-D9C8-4339-9685-B0B88EA45B28}" dt="2026-08-11T03:41:06.934" v="695" actId="6549"/>
         <pc:sldMkLst>
@@ -729,13 +478,13 @@
         </pc:sldMkLst>
       </pc:sldChg>
       <pc:sldChg chg="addSp modSp mod">
-        <pc:chgData name="Adrien Osakwe" userId="7a3e290c-eb83-484b-8e3d-d46ef2333477" providerId="ADAL" clId="{516F4981-D9C8-4339-9685-B0B88EA45B28}" dt="2026-08-14T14:30:23.839" v="8452" actId="1076"/>
+        <pc:chgData name="Adrien Osakwe" userId="7a3e290c-eb83-484b-8e3d-d46ef2333477" providerId="ADAL" clId="{516F4981-D9C8-4339-9685-B0B88EA45B28}" dt="2026-08-18T13:31:09.856" v="8519" actId="113"/>
         <pc:sldMkLst>
           <pc:docMk/>
           <pc:sldMk cId="4107645974" sldId="406"/>
         </pc:sldMkLst>
         <pc:spChg chg="mod">
-          <ac:chgData name="Adrien Osakwe" userId="7a3e290c-eb83-484b-8e3d-d46ef2333477" providerId="ADAL" clId="{516F4981-D9C8-4339-9685-B0B88EA45B28}" dt="2026-08-14T14:30:19.854" v="8451" actId="14100"/>
+          <ac:chgData name="Adrien Osakwe" userId="7a3e290c-eb83-484b-8e3d-d46ef2333477" providerId="ADAL" clId="{516F4981-D9C8-4339-9685-B0B88EA45B28}" dt="2026-08-18T13:31:09.856" v="8519" actId="113"/>
           <ac:spMkLst>
             <pc:docMk/>
             <pc:sldMk cId="4107645974" sldId="406"/>
@@ -1193,8 +942,8 @@
           </ac:picMkLst>
         </pc:picChg>
       </pc:sldChg>
-      <pc:sldChg chg="addSp modSp new mod">
-        <pc:chgData name="Adrien Osakwe" userId="7a3e290c-eb83-484b-8e3d-d46ef2333477" providerId="ADAL" clId="{516F4981-D9C8-4339-9685-B0B88EA45B28}" dt="2026-08-14T13:56:29.847" v="8343" actId="114"/>
+      <pc:sldChg chg="addSp modSp new mod ord">
+        <pc:chgData name="Adrien Osakwe" userId="7a3e290c-eb83-484b-8e3d-d46ef2333477" providerId="ADAL" clId="{516F4981-D9C8-4339-9685-B0B88EA45B28}" dt="2026-08-18T13:24:21.082" v="8515"/>
         <pc:sldMkLst>
           <pc:docMk/>
           <pc:sldMk cId="680839714" sldId="437"/>
@@ -1285,13 +1034,13 @@
         </pc:spChg>
       </pc:sldChg>
       <pc:sldChg chg="modSp add mod">
-        <pc:chgData name="Adrien Osakwe" userId="7a3e290c-eb83-484b-8e3d-d46ef2333477" providerId="ADAL" clId="{516F4981-D9C8-4339-9685-B0B88EA45B28}" dt="2026-08-11T20:03:30.234" v="7051" actId="20577"/>
+        <pc:chgData name="Adrien Osakwe" userId="7a3e290c-eb83-484b-8e3d-d46ef2333477" providerId="ADAL" clId="{516F4981-D9C8-4339-9685-B0B88EA45B28}" dt="2026-08-18T14:27:41.175" v="8608" actId="20577"/>
         <pc:sldMkLst>
           <pc:docMk/>
           <pc:sldMk cId="2482499284" sldId="442"/>
         </pc:sldMkLst>
         <pc:spChg chg="mod">
-          <ac:chgData name="Adrien Osakwe" userId="7a3e290c-eb83-484b-8e3d-d46ef2333477" providerId="ADAL" clId="{516F4981-D9C8-4339-9685-B0B88EA45B28}" dt="2026-08-11T20:03:30.234" v="7051" actId="20577"/>
+          <ac:chgData name="Adrien Osakwe" userId="7a3e290c-eb83-484b-8e3d-d46ef2333477" providerId="ADAL" clId="{516F4981-D9C8-4339-9685-B0B88EA45B28}" dt="2026-08-18T14:27:41.175" v="8608" actId="20577"/>
           <ac:spMkLst>
             <pc:docMk/>
             <pc:sldMk cId="2482499284" sldId="442"/>
@@ -1413,6 +1162,29 @@
           </ac:spMkLst>
         </pc:spChg>
       </pc:sldChg>
+      <pc:sldChg chg="modSp new mod ord">
+        <pc:chgData name="Adrien Osakwe" userId="7a3e290c-eb83-484b-8e3d-d46ef2333477" providerId="ADAL" clId="{516F4981-D9C8-4339-9685-B0B88EA45B28}" dt="2026-08-18T14:44:11.560" v="9030"/>
+        <pc:sldMkLst>
+          <pc:docMk/>
+          <pc:sldMk cId="1171437104" sldId="451"/>
+        </pc:sldMkLst>
+        <pc:spChg chg="mod">
+          <ac:chgData name="Adrien Osakwe" userId="7a3e290c-eb83-484b-8e3d-d46ef2333477" providerId="ADAL" clId="{516F4981-D9C8-4339-9685-B0B88EA45B28}" dt="2026-08-18T14:42:23.330" v="8616" actId="20577"/>
+          <ac:spMkLst>
+            <pc:docMk/>
+            <pc:sldMk cId="1171437104" sldId="451"/>
+            <ac:spMk id="2" creationId="{02C00D68-F1C3-212D-8170-BA5F24E37452}"/>
+          </ac:spMkLst>
+        </pc:spChg>
+        <pc:spChg chg="mod">
+          <ac:chgData name="Adrien Osakwe" userId="7a3e290c-eb83-484b-8e3d-d46ef2333477" providerId="ADAL" clId="{516F4981-D9C8-4339-9685-B0B88EA45B28}" dt="2026-08-18T14:44:01.266" v="9028" actId="27636"/>
+          <ac:spMkLst>
+            <pc:docMk/>
+            <pc:sldMk cId="1171437104" sldId="451"/>
+            <ac:spMk id="3" creationId="{DF96A6F8-7B65-2672-7BE0-132DDF0CB76C}"/>
+          </ac:spMkLst>
+        </pc:spChg>
+      </pc:sldChg>
     </pc:docChg>
   </pc:docChgLst>
 </pc:chgInfo>
@@ -1500,7 +1272,7 @@
           <a:p>
             <a:fld id="{217E5156-1B5D-054E-B5B2-E1B1BA160252}" type="datetimeFigureOut">
               <a:rPr lang="fr-FR" smtClean="0"/>
-              <a:t>14/08/2026</a:t>
+              <a:t>18/08/2026</a:t>
             </a:fld>
             <a:endParaRPr lang="fr-FR"/>
           </a:p>
@@ -3628,7 +3400,7 @@
           <a:p>
             <a:fld id="{287C9ABC-0C1C-4801-85B9-12829D42DDA4}" type="datetimeFigureOut">
               <a:rPr lang="en-AU" smtClean="0"/>
-              <a:t>14/08/2026</a:t>
+              <a:t>18/08/2026</a:t>
             </a:fld>
             <a:endParaRPr lang="en-AU"/>
           </a:p>
@@ -6040,6 +5812,152 @@
       </p:grpSpPr>
       <p:sp>
         <p:nvSpPr>
+          <p:cNvPr id="2" name="Text Placeholder 1">
+            <a:extLst>
+              <a:ext uri="{FF2B5EF4-FFF2-40B4-BE49-F238E27FC236}">
+                <a16:creationId xmlns:a16="http://schemas.microsoft.com/office/drawing/2014/main" id="{9B245876-087E-37FF-2A45-491803B93EF5}"/>
+              </a:ext>
+            </a:extLst>
+          </p:cNvPr>
+          <p:cNvSpPr>
+            <a:spLocks noGrp="1"/>
+          </p:cNvSpPr>
+          <p:nvPr>
+            <p:ph type="body" sz="quarter" idx="10"/>
+          </p:nvPr>
+        </p:nvSpPr>
+        <p:spPr>
+          <a:xfrm>
+            <a:off x="242372" y="2940626"/>
+            <a:ext cx="8658743" cy="3437951"/>
+          </a:xfrm>
+        </p:spPr>
+        <p:txBody>
+          <a:bodyPr>
+            <a:normAutofit/>
+          </a:bodyPr>
+          <a:lstStyle/>
+          <a:p>
+            <a:r>
+              <a:rPr lang="en-CA" dirty="0"/>
+              <a:t>Explore the 1_Simple_Scripts folder 			     (open the project with the </a:t>
+            </a:r>
+            <a:r>
+              <a:rPr lang="en-CA" i="1" dirty="0"/>
+              <a:t>1_Simple_Scripts.Rproj</a:t>
+            </a:r>
+            <a:r>
+              <a:rPr lang="en-CA" dirty="0"/>
+              <a:t> file)</a:t>
+            </a:r>
+          </a:p>
+          <a:p>
+            <a:endParaRPr lang="en-CA" dirty="0"/>
+          </a:p>
+          <a:p>
+            <a:r>
+              <a:rPr lang="en-CA" dirty="0"/>
+              <a:t>Try running the code</a:t>
+            </a:r>
+          </a:p>
+          <a:p>
+            <a:endParaRPr lang="en-CA" dirty="0"/>
+          </a:p>
+          <a:p>
+            <a:r>
+              <a:rPr lang="en-CA" dirty="0"/>
+              <a:t>What would happen if you wanted to run this in a different folder?</a:t>
+            </a:r>
+          </a:p>
+        </p:txBody>
+      </p:sp>
+      <p:sp>
+        <p:nvSpPr>
+          <p:cNvPr id="3" name="Title 1">
+            <a:extLst>
+              <a:ext uri="{FF2B5EF4-FFF2-40B4-BE49-F238E27FC236}">
+                <a16:creationId xmlns:a16="http://schemas.microsoft.com/office/drawing/2014/main" id="{D0AE3FC0-C652-C431-6A10-987A06B22130}"/>
+              </a:ext>
+            </a:extLst>
+          </p:cNvPr>
+          <p:cNvSpPr txBox="1">
+            <a:spLocks/>
+          </p:cNvSpPr>
+          <p:nvPr/>
+        </p:nvSpPr>
+        <p:spPr>
+          <a:xfrm>
+            <a:off x="242372" y="1558637"/>
+            <a:ext cx="8658743" cy="1007918"/>
+          </a:xfrm>
+          <a:prstGeom prst="rect">
+            <a:avLst/>
+          </a:prstGeom>
+        </p:spPr>
+        <p:txBody>
+          <a:bodyPr>
+            <a:noAutofit/>
+          </a:bodyPr>
+          <a:lstStyle>
+            <a:lvl1pPr algn="l" defTabSz="914175" rtl="0" eaLnBrk="1" latinLnBrk="0" hangingPunct="1">
+              <a:lnSpc>
+                <a:spcPct val="90000"/>
+              </a:lnSpc>
+              <a:spcBef>
+                <a:spcPct val="0"/>
+              </a:spcBef>
+              <a:buNone/>
+              <a:defRPr sz="4403" kern="1200">
+                <a:solidFill>
+                  <a:schemeClr val="tx1"/>
+                </a:solidFill>
+                <a:latin typeface="+mj-lt"/>
+                <a:ea typeface="+mj-ea"/>
+                <a:cs typeface="+mj-cs"/>
+              </a:defRPr>
+            </a:lvl1pPr>
+          </a:lstStyle>
+          <a:p>
+            <a:pPr algn="ctr"/>
+            <a:r>
+              <a:rPr lang="en-CA" sz="7200" dirty="0"/>
+              <a:t>Exercise</a:t>
+            </a:r>
+          </a:p>
+        </p:txBody>
+      </p:sp>
+    </p:spTree>
+    <p:extLst>
+      <p:ext uri="{BB962C8B-B14F-4D97-AF65-F5344CB8AC3E}">
+        <p14:creationId xmlns:p14="http://schemas.microsoft.com/office/powerpoint/2010/main" val="680839714"/>
+      </p:ext>
+    </p:extLst>
+  </p:cSld>
+  <p:clrMapOvr>
+    <a:masterClrMapping/>
+  </p:clrMapOvr>
+</p:sld>
+</file>
+
+<file path=ppt/slides/slide12.xml><?xml version="1.0" encoding="utf-8"?>
+<p:sld xmlns:a="http://schemas.openxmlformats.org/drawingml/2006/main" xmlns:r="http://schemas.openxmlformats.org/officeDocument/2006/relationships" xmlns:p="http://schemas.openxmlformats.org/presentationml/2006/main">
+  <p:cSld>
+    <p:spTree>
+      <p:nvGrpSpPr>
+        <p:cNvPr id="1" name=""/>
+        <p:cNvGrpSpPr/>
+        <p:nvPr/>
+      </p:nvGrpSpPr>
+      <p:grpSpPr>
+        <a:xfrm>
+          <a:off x="0" y="0"/>
+          <a:ext cx="0" cy="0"/>
+          <a:chOff x="0" y="0"/>
+          <a:chExt cx="0" cy="0"/>
+        </a:xfrm>
+      </p:grpSpPr>
+      <p:sp>
+        <p:nvSpPr>
           <p:cNvPr id="2" name="Title 1">
             <a:extLst>
               <a:ext uri="{FF2B5EF4-FFF2-40B4-BE49-F238E27FC236}">
@@ -6397,152 +6315,6 @@
 </p:sld>
 </file>
 
-<file path=ppt/slides/slide12.xml><?xml version="1.0" encoding="utf-8"?>
-<p:sld xmlns:a="http://schemas.openxmlformats.org/drawingml/2006/main" xmlns:r="http://schemas.openxmlformats.org/officeDocument/2006/relationships" xmlns:p="http://schemas.openxmlformats.org/presentationml/2006/main">
-  <p:cSld>
-    <p:spTree>
-      <p:nvGrpSpPr>
-        <p:cNvPr id="1" name=""/>
-        <p:cNvGrpSpPr/>
-        <p:nvPr/>
-      </p:nvGrpSpPr>
-      <p:grpSpPr>
-        <a:xfrm>
-          <a:off x="0" y="0"/>
-          <a:ext cx="0" cy="0"/>
-          <a:chOff x="0" y="0"/>
-          <a:chExt cx="0" cy="0"/>
-        </a:xfrm>
-      </p:grpSpPr>
-      <p:sp>
-        <p:nvSpPr>
-          <p:cNvPr id="2" name="Text Placeholder 1">
-            <a:extLst>
-              <a:ext uri="{FF2B5EF4-FFF2-40B4-BE49-F238E27FC236}">
-                <a16:creationId xmlns:a16="http://schemas.microsoft.com/office/drawing/2014/main" id="{9B245876-087E-37FF-2A45-491803B93EF5}"/>
-              </a:ext>
-            </a:extLst>
-          </p:cNvPr>
-          <p:cNvSpPr>
-            <a:spLocks noGrp="1"/>
-          </p:cNvSpPr>
-          <p:nvPr>
-            <p:ph type="body" sz="quarter" idx="10"/>
-          </p:nvPr>
-        </p:nvSpPr>
-        <p:spPr>
-          <a:xfrm>
-            <a:off x="242372" y="2940626"/>
-            <a:ext cx="8658743" cy="3437951"/>
-          </a:xfrm>
-        </p:spPr>
-        <p:txBody>
-          <a:bodyPr>
-            <a:normAutofit/>
-          </a:bodyPr>
-          <a:lstStyle/>
-          <a:p>
-            <a:r>
-              <a:rPr lang="en-CA" dirty="0"/>
-              <a:t>Explore the 1_Simple_Scripts folder 			     (open the project with the </a:t>
-            </a:r>
-            <a:r>
-              <a:rPr lang="en-CA" i="1" dirty="0"/>
-              <a:t>1_Simple_Scripts.Rproj</a:t>
-            </a:r>
-            <a:r>
-              <a:rPr lang="en-CA" dirty="0"/>
-              <a:t> file)</a:t>
-            </a:r>
-          </a:p>
-          <a:p>
-            <a:endParaRPr lang="en-CA" dirty="0"/>
-          </a:p>
-          <a:p>
-            <a:r>
-              <a:rPr lang="en-CA" dirty="0"/>
-              <a:t>Try running the code</a:t>
-            </a:r>
-          </a:p>
-          <a:p>
-            <a:endParaRPr lang="en-CA" dirty="0"/>
-          </a:p>
-          <a:p>
-            <a:r>
-              <a:rPr lang="en-CA" dirty="0"/>
-              <a:t>What would happen if you wanted to run this in a different folder?</a:t>
-            </a:r>
-          </a:p>
-        </p:txBody>
-      </p:sp>
-      <p:sp>
-        <p:nvSpPr>
-          <p:cNvPr id="3" name="Title 1">
-            <a:extLst>
-              <a:ext uri="{FF2B5EF4-FFF2-40B4-BE49-F238E27FC236}">
-                <a16:creationId xmlns:a16="http://schemas.microsoft.com/office/drawing/2014/main" id="{D0AE3FC0-C652-C431-6A10-987A06B22130}"/>
-              </a:ext>
-            </a:extLst>
-          </p:cNvPr>
-          <p:cNvSpPr txBox="1">
-            <a:spLocks/>
-          </p:cNvSpPr>
-          <p:nvPr/>
-        </p:nvSpPr>
-        <p:spPr>
-          <a:xfrm>
-            <a:off x="242372" y="1558637"/>
-            <a:ext cx="8658743" cy="1007918"/>
-          </a:xfrm>
-          <a:prstGeom prst="rect">
-            <a:avLst/>
-          </a:prstGeom>
-        </p:spPr>
-        <p:txBody>
-          <a:bodyPr>
-            <a:noAutofit/>
-          </a:bodyPr>
-          <a:lstStyle>
-            <a:lvl1pPr algn="l" defTabSz="914175" rtl="0" eaLnBrk="1" latinLnBrk="0" hangingPunct="1">
-              <a:lnSpc>
-                <a:spcPct val="90000"/>
-              </a:lnSpc>
-              <a:spcBef>
-                <a:spcPct val="0"/>
-              </a:spcBef>
-              <a:buNone/>
-              <a:defRPr sz="4403" kern="1200">
-                <a:solidFill>
-                  <a:schemeClr val="tx1"/>
-                </a:solidFill>
-                <a:latin typeface="+mj-lt"/>
-                <a:ea typeface="+mj-ea"/>
-                <a:cs typeface="+mj-cs"/>
-              </a:defRPr>
-            </a:lvl1pPr>
-          </a:lstStyle>
-          <a:p>
-            <a:pPr algn="ctr"/>
-            <a:r>
-              <a:rPr lang="en-CA" sz="7200" dirty="0"/>
-              <a:t>Exercise</a:t>
-            </a:r>
-          </a:p>
-        </p:txBody>
-      </p:sp>
-    </p:spTree>
-    <p:extLst>
-      <p:ext uri="{BB962C8B-B14F-4D97-AF65-F5344CB8AC3E}">
-        <p14:creationId xmlns:p14="http://schemas.microsoft.com/office/powerpoint/2010/main" val="680839714"/>
-      </p:ext>
-    </p:extLst>
-  </p:cSld>
-  <p:clrMapOvr>
-    <a:masterClrMapping/>
-  </p:clrMapOvr>
-</p:sld>
-</file>
-
 <file path=ppt/slides/slide13.xml><?xml version="1.0" encoding="utf-8"?>
 <p:sld xmlns:a="http://schemas.openxmlformats.org/drawingml/2006/main" xmlns:r="http://schemas.openxmlformats.org/officeDocument/2006/relationships" xmlns:p="http://schemas.openxmlformats.org/presentationml/2006/main">
   <p:cSld>
@@ -6607,7 +6379,7 @@
         <p:spPr>
           <a:xfrm>
             <a:off x="628649" y="1825627"/>
-            <a:ext cx="4743451" cy="4907682"/>
+            <a:ext cx="5447298" cy="4907682"/>
           </a:xfrm>
         </p:spPr>
         <p:txBody>
@@ -6632,7 +6404,7 @@
           </a:p>
           <a:p>
             <a:r>
-              <a:rPr lang="en-CA" dirty="0"/>
+              <a:rPr lang="en-CA" b="1" dirty="0"/>
               <a:t>No file path needed</a:t>
             </a:r>
           </a:p>
@@ -6641,7 +6413,7 @@
           </a:p>
           <a:p>
             <a:r>
-              <a:rPr lang="en-CA" dirty="0"/>
+              <a:rPr lang="en-CA" b="1" dirty="0"/>
               <a:t>Facilitates installation</a:t>
             </a:r>
           </a:p>
@@ -6653,7 +6425,7 @@
           </a:p>
           <a:p>
             <a:r>
-              <a:rPr lang="en-CA" dirty="0"/>
+              <a:rPr lang="en-CA" b="1" dirty="0"/>
               <a:t>Easy documentation interface</a:t>
             </a:r>
           </a:p>
@@ -7934,7 +7706,7 @@
         </p:nvSpPr>
         <p:spPr>
           <a:xfrm>
-            <a:off x="195574" y="1394848"/>
+            <a:off x="195574" y="2383978"/>
             <a:ext cx="8499764" cy="1241822"/>
           </a:xfrm>
         </p:spPr>
@@ -7981,12 +7753,9 @@
           </a:bodyPr>
           <a:lstStyle/>
           <a:p>
-            <a:r>
-              <a:rPr lang="en-AU" sz="2700" dirty="0">
-                <a:latin typeface="Montserrat SemiBold" panose="00000700000000000000" pitchFamily="50" charset="0"/>
-              </a:rPr>
-              <a:t>Session #: Session Name</a:t>
-            </a:r>
+            <a:endParaRPr lang="en-AU" sz="2700" dirty="0">
+              <a:latin typeface="Montserrat SemiBold" panose="00000700000000000000" pitchFamily="50" charset="0"/>
+            </a:endParaRPr>
           </a:p>
         </p:txBody>
       </p:sp>
@@ -9789,6 +9558,29 @@
             <a:r>
               <a:rPr lang="en-CA" dirty="0"/>
               <a:t>() to update the function manual</a:t>
+            </a:r>
+          </a:p>
+          <a:p>
+            <a:pPr lvl="1"/>
+            <a:r>
+              <a:rPr lang="en-CA" dirty="0"/>
+              <a:t>Run </a:t>
+            </a:r>
+            <a:r>
+              <a:rPr lang="en-CA" dirty="0" err="1"/>
+              <a:t>devtools</a:t>
+            </a:r>
+            <a:r>
+              <a:rPr lang="en-CA" dirty="0"/>
+              <a:t>::</a:t>
+            </a:r>
+            <a:r>
+              <a:rPr lang="en-CA" dirty="0" err="1"/>
+              <a:t>build_manual</a:t>
+            </a:r>
+            <a:r>
+              <a:rPr lang="en-CA" dirty="0"/>
+              <a:t>() to render the pdf</a:t>
             </a:r>
           </a:p>
           <a:p>
@@ -20560,6 +20352,156 @@
           <p:cNvPr id="2" name="Title 1">
             <a:extLst>
               <a:ext uri="{FF2B5EF4-FFF2-40B4-BE49-F238E27FC236}">
+                <a16:creationId xmlns:a16="http://schemas.microsoft.com/office/drawing/2014/main" id="{02C00D68-F1C3-212D-8170-BA5F24E37452}"/>
+              </a:ext>
+            </a:extLst>
+          </p:cNvPr>
+          <p:cNvSpPr>
+            <a:spLocks noGrp="1"/>
+          </p:cNvSpPr>
+          <p:nvPr>
+            <p:ph type="title"/>
+          </p:nvPr>
+        </p:nvSpPr>
+        <p:spPr/>
+        <p:txBody>
+          <a:bodyPr/>
+          <a:lstStyle/>
+          <a:p>
+            <a:r>
+              <a:rPr lang="en-CA" dirty="0"/>
+              <a:t>Summary</a:t>
+            </a:r>
+          </a:p>
+        </p:txBody>
+      </p:sp>
+      <p:sp>
+        <p:nvSpPr>
+          <p:cNvPr id="3" name="Content Placeholder 2">
+            <a:extLst>
+              <a:ext uri="{FF2B5EF4-FFF2-40B4-BE49-F238E27FC236}">
+                <a16:creationId xmlns:a16="http://schemas.microsoft.com/office/drawing/2014/main" id="{DF96A6F8-7B65-2672-7BE0-132DDF0CB76C}"/>
+              </a:ext>
+            </a:extLst>
+          </p:cNvPr>
+          <p:cNvSpPr>
+            <a:spLocks noGrp="1"/>
+          </p:cNvSpPr>
+          <p:nvPr>
+            <p:ph idx="1"/>
+          </p:nvPr>
+        </p:nvSpPr>
+        <p:spPr/>
+        <p:txBody>
+          <a:bodyPr>
+            <a:normAutofit lnSpcReduction="10000"/>
+          </a:bodyPr>
+          <a:lstStyle/>
+          <a:p>
+            <a:r>
+              <a:rPr lang="en-CA" dirty="0"/>
+              <a:t>Packages facilitate tool access for users</a:t>
+            </a:r>
+          </a:p>
+          <a:p>
+            <a:pPr lvl="1"/>
+            <a:r>
+              <a:rPr lang="en-CA" dirty="0"/>
+              <a:t>Easier installation</a:t>
+            </a:r>
+          </a:p>
+          <a:p>
+            <a:pPr lvl="1"/>
+            <a:r>
+              <a:rPr lang="en-CA" dirty="0"/>
+              <a:t>Intuitive documentation interface</a:t>
+            </a:r>
+          </a:p>
+          <a:p>
+            <a:pPr lvl="1"/>
+            <a:endParaRPr lang="en-CA" dirty="0"/>
+          </a:p>
+          <a:p>
+            <a:r>
+              <a:rPr lang="en-CA" dirty="0"/>
+              <a:t>Packages facilitate tool development</a:t>
+            </a:r>
+          </a:p>
+          <a:p>
+            <a:pPr lvl="1"/>
+            <a:r>
+              <a:rPr lang="en-CA" dirty="0"/>
+              <a:t>Testing and documentation check pipeline</a:t>
+            </a:r>
+          </a:p>
+          <a:p>
+            <a:pPr lvl="1"/>
+            <a:r>
+              <a:rPr lang="en-CA" dirty="0"/>
+              <a:t>Automated documentation tools</a:t>
+            </a:r>
+          </a:p>
+          <a:p>
+            <a:pPr lvl="1"/>
+            <a:r>
+              <a:rPr lang="en-CA" dirty="0"/>
+              <a:t>Structured formatting</a:t>
+            </a:r>
+          </a:p>
+          <a:p>
+            <a:pPr lvl="1"/>
+            <a:endParaRPr lang="en-CA" dirty="0"/>
+          </a:p>
+          <a:p>
+            <a:r>
+              <a:rPr lang="en-CA" dirty="0"/>
+              <a:t>GitHub Actions can facilitate maintenance</a:t>
+            </a:r>
+          </a:p>
+          <a:p>
+            <a:pPr lvl="1"/>
+            <a:r>
+              <a:rPr lang="en-CA" dirty="0"/>
+              <a:t>Scenario-specific automation</a:t>
+            </a:r>
+          </a:p>
+        </p:txBody>
+      </p:sp>
+    </p:spTree>
+    <p:extLst>
+      <p:ext uri="{BB962C8B-B14F-4D97-AF65-F5344CB8AC3E}">
+        <p14:creationId xmlns:p14="http://schemas.microsoft.com/office/powerpoint/2010/main" val="1171437104"/>
+      </p:ext>
+    </p:extLst>
+  </p:cSld>
+  <p:clrMapOvr>
+    <a:masterClrMapping/>
+  </p:clrMapOvr>
+</p:sld>
+</file>
+
+<file path=ppt/slides/slide48.xml><?xml version="1.0" encoding="utf-8"?>
+<p:sld xmlns:a="http://schemas.openxmlformats.org/drawingml/2006/main" xmlns:r="http://schemas.openxmlformats.org/officeDocument/2006/relationships" xmlns:p="http://schemas.openxmlformats.org/presentationml/2006/main">
+  <p:cSld>
+    <p:spTree>
+      <p:nvGrpSpPr>
+        <p:cNvPr id="1" name=""/>
+        <p:cNvGrpSpPr/>
+        <p:nvPr/>
+      </p:nvGrpSpPr>
+      <p:grpSpPr>
+        <a:xfrm>
+          <a:off x="0" y="0"/>
+          <a:ext cx="0" cy="0"/>
+          <a:chOff x="0" y="0"/>
+          <a:chExt cx="0" cy="0"/>
+        </a:xfrm>
+      </p:grpSpPr>
+      <p:sp>
+        <p:nvSpPr>
+          <p:cNvPr id="2" name="Title 1">
+            <a:extLst>
+              <a:ext uri="{FF2B5EF4-FFF2-40B4-BE49-F238E27FC236}">
                 <a16:creationId xmlns:a16="http://schemas.microsoft.com/office/drawing/2014/main" id="{53D5D50F-4F28-B4DF-B643-598DE496FEDD}"/>
               </a:ext>
             </a:extLst>
@@ -20596,7 +20538,7 @@
 </p:sld>
 </file>
 
-<file path=ppt/slides/slide48.xml><?xml version="1.0" encoding="utf-8"?>
+<file path=ppt/slides/slide49.xml><?xml version="1.0" encoding="utf-8"?>
 <p:sld xmlns:a="http://schemas.openxmlformats.org/drawingml/2006/main" xmlns:r="http://schemas.openxmlformats.org/officeDocument/2006/relationships" xmlns:p="http://schemas.openxmlformats.org/presentationml/2006/main">
   <p:cSld>
     <p:spTree>
@@ -20755,239 +20697,6 @@
 </p:sld>
 </file>
 
-<file path=ppt/slides/slide49.xml><?xml version="1.0" encoding="utf-8"?>
-<p:sld xmlns:a="http://schemas.openxmlformats.org/drawingml/2006/main" xmlns:r="http://schemas.openxmlformats.org/officeDocument/2006/relationships" xmlns:p="http://schemas.openxmlformats.org/presentationml/2006/main">
-  <p:cSld>
-    <p:spTree>
-      <p:nvGrpSpPr>
-        <p:cNvPr id="1" name=""/>
-        <p:cNvGrpSpPr/>
-        <p:nvPr/>
-      </p:nvGrpSpPr>
-      <p:grpSpPr>
-        <a:xfrm>
-          <a:off x="0" y="0"/>
-          <a:ext cx="0" cy="0"/>
-          <a:chOff x="0" y="0"/>
-          <a:chExt cx="0" cy="0"/>
-        </a:xfrm>
-      </p:grpSpPr>
-      <p:sp>
-        <p:nvSpPr>
-          <p:cNvPr id="2" name="Title 1">
-            <a:extLst>
-              <a:ext uri="{FF2B5EF4-FFF2-40B4-BE49-F238E27FC236}">
-                <a16:creationId xmlns:a16="http://schemas.microsoft.com/office/drawing/2014/main" id="{AD828D01-6295-9CD0-A2A8-D520CA4A343F}"/>
-              </a:ext>
-            </a:extLst>
-          </p:cNvPr>
-          <p:cNvSpPr>
-            <a:spLocks noGrp="1"/>
-          </p:cNvSpPr>
-          <p:nvPr>
-            <p:ph type="title"/>
-          </p:nvPr>
-        </p:nvSpPr>
-        <p:spPr>
-          <a:xfrm>
-            <a:off x="2750344" y="1603021"/>
-            <a:ext cx="3643312" cy="1006479"/>
-          </a:xfrm>
-        </p:spPr>
-        <p:txBody>
-          <a:bodyPr/>
-          <a:lstStyle/>
-          <a:p>
-            <a:r>
-              <a:rPr lang="en-US" dirty="0"/>
-              <a:t>Thank you!</a:t>
-            </a:r>
-          </a:p>
-        </p:txBody>
-      </p:sp>
-      <p:pic>
-        <p:nvPicPr>
-          <p:cNvPr id="3" name="Content Placeholder 4">
-            <a:extLst>
-              <a:ext uri="{FF2B5EF4-FFF2-40B4-BE49-F238E27FC236}">
-                <a16:creationId xmlns:a16="http://schemas.microsoft.com/office/drawing/2014/main" id="{D2BAEF11-DF57-F87B-0DE1-C7BE3199774C}"/>
-              </a:ext>
-            </a:extLst>
-          </p:cNvPr>
-          <p:cNvPicPr>
-            <a:picLocks noChangeAspect="1"/>
-          </p:cNvPicPr>
-          <p:nvPr/>
-        </p:nvPicPr>
-        <p:blipFill>
-          <a:blip r:embed="rId2">
-            <a:extLst>
-              <a:ext uri="{28A0092B-C50C-407E-A947-70E740481C1C}">
-                <a14:useLocalDpi xmlns:a14="http://schemas.microsoft.com/office/drawing/2010/main" val="0"/>
-              </a:ext>
-            </a:extLst>
-          </a:blip>
-          <a:stretch>
-            <a:fillRect/>
-          </a:stretch>
-        </p:blipFill>
-        <p:spPr>
-          <a:xfrm>
-            <a:off x="90311" y="5938598"/>
-            <a:ext cx="2878667" cy="741794"/>
-          </a:xfrm>
-          <a:prstGeom prst="rect">
-            <a:avLst/>
-          </a:prstGeom>
-        </p:spPr>
-      </p:pic>
-      <p:pic>
-        <p:nvPicPr>
-          <p:cNvPr id="4" name="Picture 3">
-            <a:extLst>
-              <a:ext uri="{FF2B5EF4-FFF2-40B4-BE49-F238E27FC236}">
-                <a16:creationId xmlns:a16="http://schemas.microsoft.com/office/drawing/2014/main" id="{0A32D887-B248-C56F-D4CD-C76954C2A5EA}"/>
-              </a:ext>
-            </a:extLst>
-          </p:cNvPr>
-          <p:cNvPicPr>
-            <a:picLocks noChangeAspect="1"/>
-          </p:cNvPicPr>
-          <p:nvPr/>
-        </p:nvPicPr>
-        <p:blipFill>
-          <a:blip r:embed="rId3"/>
-          <a:stretch>
-            <a:fillRect/>
-          </a:stretch>
-        </p:blipFill>
-        <p:spPr>
-          <a:xfrm>
-            <a:off x="5635977" y="3004898"/>
-            <a:ext cx="2933700" cy="2933700"/>
-          </a:xfrm>
-          <a:prstGeom prst="rect">
-            <a:avLst/>
-          </a:prstGeom>
-        </p:spPr>
-      </p:pic>
-      <p:sp>
-        <p:nvSpPr>
-          <p:cNvPr id="5" name="TextBox 4">
-            <a:extLst>
-              <a:ext uri="{FF2B5EF4-FFF2-40B4-BE49-F238E27FC236}">
-                <a16:creationId xmlns:a16="http://schemas.microsoft.com/office/drawing/2014/main" id="{1186AD2E-30E2-4066-0067-9E12E0C232DB}"/>
-              </a:ext>
-            </a:extLst>
-          </p:cNvPr>
-          <p:cNvSpPr txBox="1"/>
-          <p:nvPr/>
-        </p:nvSpPr>
-        <p:spPr>
-          <a:xfrm>
-            <a:off x="5814836" y="2820168"/>
-            <a:ext cx="2575982" cy="369460"/>
-          </a:xfrm>
-          <a:prstGeom prst="rect">
-            <a:avLst/>
-          </a:prstGeom>
-          <a:noFill/>
-        </p:spPr>
-        <p:txBody>
-          <a:bodyPr wrap="square" rtlCol="0">
-            <a:spAutoFit/>
-          </a:bodyPr>
-          <a:lstStyle/>
-          <a:p>
-            <a:r>
-              <a:rPr lang="en-US" dirty="0"/>
-              <a:t>Biostatistics Section – SSC</a:t>
-            </a:r>
-          </a:p>
-        </p:txBody>
-      </p:sp>
-      <p:pic>
-        <p:nvPicPr>
-          <p:cNvPr id="6" name="Picture 5">
-            <a:extLst>
-              <a:ext uri="{FF2B5EF4-FFF2-40B4-BE49-F238E27FC236}">
-                <a16:creationId xmlns:a16="http://schemas.microsoft.com/office/drawing/2014/main" id="{2CF9868A-40A2-5F1C-8D2F-7B17D97E4850}"/>
-              </a:ext>
-            </a:extLst>
-          </p:cNvPr>
-          <p:cNvPicPr>
-            <a:picLocks noChangeAspect="1"/>
-          </p:cNvPicPr>
-          <p:nvPr/>
-        </p:nvPicPr>
-        <p:blipFill>
-          <a:blip r:embed="rId4"/>
-          <a:stretch>
-            <a:fillRect/>
-          </a:stretch>
-        </p:blipFill>
-        <p:spPr>
-          <a:xfrm>
-            <a:off x="574324" y="3004898"/>
-            <a:ext cx="2933700" cy="2933700"/>
-          </a:xfrm>
-          <a:prstGeom prst="rect">
-            <a:avLst/>
-          </a:prstGeom>
-        </p:spPr>
-      </p:pic>
-      <p:sp>
-        <p:nvSpPr>
-          <p:cNvPr id="7" name="TextBox 6">
-            <a:extLst>
-              <a:ext uri="{FF2B5EF4-FFF2-40B4-BE49-F238E27FC236}">
-                <a16:creationId xmlns:a16="http://schemas.microsoft.com/office/drawing/2014/main" id="{D2045168-AFC9-111D-EFD6-E702AAED7BC9}"/>
-              </a:ext>
-            </a:extLst>
-          </p:cNvPr>
-          <p:cNvSpPr txBox="1"/>
-          <p:nvPr/>
-        </p:nvSpPr>
-        <p:spPr>
-          <a:xfrm>
-            <a:off x="1102610" y="2829403"/>
-            <a:ext cx="1877128" cy="369460"/>
-          </a:xfrm>
-          <a:prstGeom prst="rect">
-            <a:avLst/>
-          </a:prstGeom>
-          <a:noFill/>
-        </p:spPr>
-        <p:txBody>
-          <a:bodyPr wrap="square" rtlCol="0">
-            <a:spAutoFit/>
-          </a:bodyPr>
-          <a:lstStyle/>
-          <a:p>
-            <a:r>
-              <a:rPr lang="en-US" dirty="0" err="1"/>
-              <a:t>MiCM</a:t>
-            </a:r>
-            <a:r>
-              <a:rPr lang="en-US" dirty="0"/>
-              <a:t> Mailing List</a:t>
-            </a:r>
-          </a:p>
-        </p:txBody>
-      </p:sp>
-    </p:spTree>
-    <p:extLst>
-      <p:ext uri="{BB962C8B-B14F-4D97-AF65-F5344CB8AC3E}">
-        <p14:creationId xmlns:p14="http://schemas.microsoft.com/office/powerpoint/2010/main" val="2803926213"/>
-      </p:ext>
-    </p:extLst>
-  </p:cSld>
-  <p:clrMapOvr>
-    <a:masterClrMapping/>
-  </p:clrMapOvr>
-</p:sld>
-</file>
-
 <file path=ppt/slides/slide5.xml><?xml version="1.0" encoding="utf-8"?>
 <p:sld xmlns:a="http://schemas.openxmlformats.org/drawingml/2006/main" xmlns:r="http://schemas.openxmlformats.org/officeDocument/2006/relationships" xmlns:p="http://schemas.openxmlformats.org/presentationml/2006/main">
   <p:cSld>
@@ -21230,6 +20939,239 @@
 </file>
 
 <file path=ppt/slides/slide50.xml><?xml version="1.0" encoding="utf-8"?>
+<p:sld xmlns:a="http://schemas.openxmlformats.org/drawingml/2006/main" xmlns:r="http://schemas.openxmlformats.org/officeDocument/2006/relationships" xmlns:p="http://schemas.openxmlformats.org/presentationml/2006/main">
+  <p:cSld>
+    <p:spTree>
+      <p:nvGrpSpPr>
+        <p:cNvPr id="1" name=""/>
+        <p:cNvGrpSpPr/>
+        <p:nvPr/>
+      </p:nvGrpSpPr>
+      <p:grpSpPr>
+        <a:xfrm>
+          <a:off x="0" y="0"/>
+          <a:ext cx="0" cy="0"/>
+          <a:chOff x="0" y="0"/>
+          <a:chExt cx="0" cy="0"/>
+        </a:xfrm>
+      </p:grpSpPr>
+      <p:sp>
+        <p:nvSpPr>
+          <p:cNvPr id="2" name="Title 1">
+            <a:extLst>
+              <a:ext uri="{FF2B5EF4-FFF2-40B4-BE49-F238E27FC236}">
+                <a16:creationId xmlns:a16="http://schemas.microsoft.com/office/drawing/2014/main" id="{AD828D01-6295-9CD0-A2A8-D520CA4A343F}"/>
+              </a:ext>
+            </a:extLst>
+          </p:cNvPr>
+          <p:cNvSpPr>
+            <a:spLocks noGrp="1"/>
+          </p:cNvSpPr>
+          <p:nvPr>
+            <p:ph type="title"/>
+          </p:nvPr>
+        </p:nvSpPr>
+        <p:spPr>
+          <a:xfrm>
+            <a:off x="2750344" y="1603021"/>
+            <a:ext cx="3643312" cy="1006479"/>
+          </a:xfrm>
+        </p:spPr>
+        <p:txBody>
+          <a:bodyPr/>
+          <a:lstStyle/>
+          <a:p>
+            <a:r>
+              <a:rPr lang="en-US" dirty="0"/>
+              <a:t>Thank you!</a:t>
+            </a:r>
+          </a:p>
+        </p:txBody>
+      </p:sp>
+      <p:pic>
+        <p:nvPicPr>
+          <p:cNvPr id="3" name="Content Placeholder 4">
+            <a:extLst>
+              <a:ext uri="{FF2B5EF4-FFF2-40B4-BE49-F238E27FC236}">
+                <a16:creationId xmlns:a16="http://schemas.microsoft.com/office/drawing/2014/main" id="{D2BAEF11-DF57-F87B-0DE1-C7BE3199774C}"/>
+              </a:ext>
+            </a:extLst>
+          </p:cNvPr>
+          <p:cNvPicPr>
+            <a:picLocks noChangeAspect="1"/>
+          </p:cNvPicPr>
+          <p:nvPr/>
+        </p:nvPicPr>
+        <p:blipFill>
+          <a:blip r:embed="rId2">
+            <a:extLst>
+              <a:ext uri="{28A0092B-C50C-407E-A947-70E740481C1C}">
+                <a14:useLocalDpi xmlns:a14="http://schemas.microsoft.com/office/drawing/2010/main" val="0"/>
+              </a:ext>
+            </a:extLst>
+          </a:blip>
+          <a:stretch>
+            <a:fillRect/>
+          </a:stretch>
+        </p:blipFill>
+        <p:spPr>
+          <a:xfrm>
+            <a:off x="90311" y="5938598"/>
+            <a:ext cx="2878667" cy="741794"/>
+          </a:xfrm>
+          <a:prstGeom prst="rect">
+            <a:avLst/>
+          </a:prstGeom>
+        </p:spPr>
+      </p:pic>
+      <p:pic>
+        <p:nvPicPr>
+          <p:cNvPr id="4" name="Picture 3">
+            <a:extLst>
+              <a:ext uri="{FF2B5EF4-FFF2-40B4-BE49-F238E27FC236}">
+                <a16:creationId xmlns:a16="http://schemas.microsoft.com/office/drawing/2014/main" id="{0A32D887-B248-C56F-D4CD-C76954C2A5EA}"/>
+              </a:ext>
+            </a:extLst>
+          </p:cNvPr>
+          <p:cNvPicPr>
+            <a:picLocks noChangeAspect="1"/>
+          </p:cNvPicPr>
+          <p:nvPr/>
+        </p:nvPicPr>
+        <p:blipFill>
+          <a:blip r:embed="rId3"/>
+          <a:stretch>
+            <a:fillRect/>
+          </a:stretch>
+        </p:blipFill>
+        <p:spPr>
+          <a:xfrm>
+            <a:off x="5635977" y="3004898"/>
+            <a:ext cx="2933700" cy="2933700"/>
+          </a:xfrm>
+          <a:prstGeom prst="rect">
+            <a:avLst/>
+          </a:prstGeom>
+        </p:spPr>
+      </p:pic>
+      <p:sp>
+        <p:nvSpPr>
+          <p:cNvPr id="5" name="TextBox 4">
+            <a:extLst>
+              <a:ext uri="{FF2B5EF4-FFF2-40B4-BE49-F238E27FC236}">
+                <a16:creationId xmlns:a16="http://schemas.microsoft.com/office/drawing/2014/main" id="{1186AD2E-30E2-4066-0067-9E12E0C232DB}"/>
+              </a:ext>
+            </a:extLst>
+          </p:cNvPr>
+          <p:cNvSpPr txBox="1"/>
+          <p:nvPr/>
+        </p:nvSpPr>
+        <p:spPr>
+          <a:xfrm>
+            <a:off x="5814836" y="2820168"/>
+            <a:ext cx="2575982" cy="369460"/>
+          </a:xfrm>
+          <a:prstGeom prst="rect">
+            <a:avLst/>
+          </a:prstGeom>
+          <a:noFill/>
+        </p:spPr>
+        <p:txBody>
+          <a:bodyPr wrap="square" rtlCol="0">
+            <a:spAutoFit/>
+          </a:bodyPr>
+          <a:lstStyle/>
+          <a:p>
+            <a:r>
+              <a:rPr lang="en-US" dirty="0"/>
+              <a:t>Biostatistics Section – SSC</a:t>
+            </a:r>
+          </a:p>
+        </p:txBody>
+      </p:sp>
+      <p:pic>
+        <p:nvPicPr>
+          <p:cNvPr id="6" name="Picture 5">
+            <a:extLst>
+              <a:ext uri="{FF2B5EF4-FFF2-40B4-BE49-F238E27FC236}">
+                <a16:creationId xmlns:a16="http://schemas.microsoft.com/office/drawing/2014/main" id="{2CF9868A-40A2-5F1C-8D2F-7B17D97E4850}"/>
+              </a:ext>
+            </a:extLst>
+          </p:cNvPr>
+          <p:cNvPicPr>
+            <a:picLocks noChangeAspect="1"/>
+          </p:cNvPicPr>
+          <p:nvPr/>
+        </p:nvPicPr>
+        <p:blipFill>
+          <a:blip r:embed="rId4"/>
+          <a:stretch>
+            <a:fillRect/>
+          </a:stretch>
+        </p:blipFill>
+        <p:spPr>
+          <a:xfrm>
+            <a:off x="574324" y="3004898"/>
+            <a:ext cx="2933700" cy="2933700"/>
+          </a:xfrm>
+          <a:prstGeom prst="rect">
+            <a:avLst/>
+          </a:prstGeom>
+        </p:spPr>
+      </p:pic>
+      <p:sp>
+        <p:nvSpPr>
+          <p:cNvPr id="7" name="TextBox 6">
+            <a:extLst>
+              <a:ext uri="{FF2B5EF4-FFF2-40B4-BE49-F238E27FC236}">
+                <a16:creationId xmlns:a16="http://schemas.microsoft.com/office/drawing/2014/main" id="{D2045168-AFC9-111D-EFD6-E702AAED7BC9}"/>
+              </a:ext>
+            </a:extLst>
+          </p:cNvPr>
+          <p:cNvSpPr txBox="1"/>
+          <p:nvPr/>
+        </p:nvSpPr>
+        <p:spPr>
+          <a:xfrm>
+            <a:off x="1102610" y="2829403"/>
+            <a:ext cx="1877128" cy="369460"/>
+          </a:xfrm>
+          <a:prstGeom prst="rect">
+            <a:avLst/>
+          </a:prstGeom>
+          <a:noFill/>
+        </p:spPr>
+        <p:txBody>
+          <a:bodyPr wrap="square" rtlCol="0">
+            <a:spAutoFit/>
+          </a:bodyPr>
+          <a:lstStyle/>
+          <a:p>
+            <a:r>
+              <a:rPr lang="en-US" dirty="0" err="1"/>
+              <a:t>MiCM</a:t>
+            </a:r>
+            <a:r>
+              <a:rPr lang="en-US" dirty="0"/>
+              <a:t> Mailing List</a:t>
+            </a:r>
+          </a:p>
+        </p:txBody>
+      </p:sp>
+    </p:spTree>
+    <p:extLst>
+      <p:ext uri="{BB962C8B-B14F-4D97-AF65-F5344CB8AC3E}">
+        <p14:creationId xmlns:p14="http://schemas.microsoft.com/office/powerpoint/2010/main" val="2803926213"/>
+      </p:ext>
+    </p:extLst>
+  </p:cSld>
+  <p:clrMapOvr>
+    <a:masterClrMapping/>
+  </p:clrMapOvr>
+</p:sld>
+</file>
+
+<file path=ppt/slides/slide51.xml><?xml version="1.0" encoding="utf-8"?>
 <p:sld xmlns:a="http://schemas.openxmlformats.org/drawingml/2006/main" xmlns:r="http://schemas.openxmlformats.org/officeDocument/2006/relationships" xmlns:p="http://schemas.openxmlformats.org/presentationml/2006/main">
   <p:cSld>
     <p:spTree>
